--- a/Presentations/May Motif Gallery.pptx
+++ b/Presentations/May Motif Gallery.pptx
@@ -4,13 +4,20 @@
   <p:sldMasterIdLst>
     <p:sldMasterId id="2147483648" r:id="rId1"/>
   </p:sldMasterIdLst>
+  <p:notesMasterIdLst>
+    <p:notesMasterId r:id="rId12"/>
+  </p:notesMasterIdLst>
   <p:sldIdLst>
     <p:sldId id="256" r:id="rId2"/>
     <p:sldId id="257" r:id="rId3"/>
     <p:sldId id="258" r:id="rId4"/>
     <p:sldId id="259" r:id="rId5"/>
     <p:sldId id="261" r:id="rId6"/>
-    <p:sldId id="260" r:id="rId7"/>
+    <p:sldId id="265" r:id="rId7"/>
+    <p:sldId id="260" r:id="rId8"/>
+    <p:sldId id="262" r:id="rId9"/>
+    <p:sldId id="263" r:id="rId10"/>
+    <p:sldId id="264" r:id="rId11"/>
   </p:sldIdLst>
   <p:sldSz cx="12192000" cy="6858000"/>
   <p:notesSz cx="6858000" cy="9144000"/>
@@ -110,6 +117,449 @@
     </a:lvl9pPr>
   </p:defaultTextStyle>
 </p:presentation>
+</file>
+
+<file path=ppt/notesMasters/notesMaster1.xml><?xml version="1.0" encoding="utf-8"?>
+<p:notesMaster xmlns:a="http://schemas.openxmlformats.org/drawingml/2006/main" xmlns:r="http://schemas.openxmlformats.org/officeDocument/2006/relationships" xmlns:p="http://schemas.openxmlformats.org/presentationml/2006/main">
+  <p:cSld>
+    <p:bg>
+      <p:bgRef idx="1001">
+        <a:schemeClr val="bg1"/>
+      </p:bgRef>
+    </p:bg>
+    <p:spTree>
+      <p:nvGrpSpPr>
+        <p:cNvPr id="1" name=""/>
+        <p:cNvGrpSpPr/>
+        <p:nvPr/>
+      </p:nvGrpSpPr>
+      <p:grpSpPr>
+        <a:xfrm>
+          <a:off x="0" y="0"/>
+          <a:ext cx="0" cy="0"/>
+          <a:chOff x="0" y="0"/>
+          <a:chExt cx="0" cy="0"/>
+        </a:xfrm>
+      </p:grpSpPr>
+      <p:sp>
+        <p:nvSpPr>
+          <p:cNvPr id="2" name="Header Placeholder 1"/>
+          <p:cNvSpPr>
+            <a:spLocks noGrp="1"/>
+          </p:cNvSpPr>
+          <p:nvPr>
+            <p:ph type="hdr" sz="quarter"/>
+          </p:nvPr>
+        </p:nvSpPr>
+        <p:spPr>
+          <a:xfrm>
+            <a:off x="0" y="0"/>
+            <a:ext cx="2971800" cy="458788"/>
+          </a:xfrm>
+          <a:prstGeom prst="rect">
+            <a:avLst/>
+          </a:prstGeom>
+        </p:spPr>
+        <p:txBody>
+          <a:bodyPr vert="horz" lIns="91440" tIns="45720" rIns="91440" bIns="45720" rtlCol="0"/>
+          <a:lstStyle>
+            <a:lvl1pPr algn="l">
+              <a:defRPr sz="1200"/>
+            </a:lvl1pPr>
+          </a:lstStyle>
+          <a:p>
+            <a:endParaRPr lang="en-US"/>
+          </a:p>
+        </p:txBody>
+      </p:sp>
+      <p:sp>
+        <p:nvSpPr>
+          <p:cNvPr id="3" name="Date Placeholder 2"/>
+          <p:cNvSpPr>
+            <a:spLocks noGrp="1"/>
+          </p:cNvSpPr>
+          <p:nvPr>
+            <p:ph type="dt" idx="1"/>
+          </p:nvPr>
+        </p:nvSpPr>
+        <p:spPr>
+          <a:xfrm>
+            <a:off x="3884613" y="0"/>
+            <a:ext cx="2971800" cy="458788"/>
+          </a:xfrm>
+          <a:prstGeom prst="rect">
+            <a:avLst/>
+          </a:prstGeom>
+        </p:spPr>
+        <p:txBody>
+          <a:bodyPr vert="horz" lIns="91440" tIns="45720" rIns="91440" bIns="45720" rtlCol="0"/>
+          <a:lstStyle>
+            <a:lvl1pPr algn="r">
+              <a:defRPr sz="1200"/>
+            </a:lvl1pPr>
+          </a:lstStyle>
+          <a:p>
+            <a:fld id="{215846FF-D9D8-F644-971D-9D9A7741D920}" type="datetimeFigureOut">
+              <a:rPr lang="en-US" smtClean="0"/>
+              <a:t>5/5/26</a:t>
+            </a:fld>
+            <a:endParaRPr lang="en-US"/>
+          </a:p>
+        </p:txBody>
+      </p:sp>
+      <p:sp>
+        <p:nvSpPr>
+          <p:cNvPr id="4" name="Slide Image Placeholder 3"/>
+          <p:cNvSpPr>
+            <a:spLocks noGrp="1" noRot="1" noChangeAspect="1"/>
+          </p:cNvSpPr>
+          <p:nvPr>
+            <p:ph type="sldImg" idx="2"/>
+          </p:nvPr>
+        </p:nvSpPr>
+        <p:spPr>
+          <a:xfrm>
+            <a:off x="685800" y="1143000"/>
+            <a:ext cx="5486400" cy="3086100"/>
+          </a:xfrm>
+          <a:prstGeom prst="rect">
+            <a:avLst/>
+          </a:prstGeom>
+          <a:noFill/>
+          <a:ln w="12700">
+            <a:solidFill>
+              <a:prstClr val="black"/>
+            </a:solidFill>
+          </a:ln>
+        </p:spPr>
+        <p:txBody>
+          <a:bodyPr vert="horz" lIns="91440" tIns="45720" rIns="91440" bIns="45720" rtlCol="0" anchor="ctr"/>
+          <a:lstStyle/>
+          <a:p>
+            <a:endParaRPr lang="en-US"/>
+          </a:p>
+        </p:txBody>
+      </p:sp>
+      <p:sp>
+        <p:nvSpPr>
+          <p:cNvPr id="5" name="Notes Placeholder 4"/>
+          <p:cNvSpPr>
+            <a:spLocks noGrp="1"/>
+          </p:cNvSpPr>
+          <p:nvPr>
+            <p:ph type="body" sz="quarter" idx="3"/>
+          </p:nvPr>
+        </p:nvSpPr>
+        <p:spPr>
+          <a:xfrm>
+            <a:off x="685800" y="4400550"/>
+            <a:ext cx="5486400" cy="3600450"/>
+          </a:xfrm>
+          <a:prstGeom prst="rect">
+            <a:avLst/>
+          </a:prstGeom>
+        </p:spPr>
+        <p:txBody>
+          <a:bodyPr vert="horz" lIns="91440" tIns="45720" rIns="91440" bIns="45720" rtlCol="0"/>
+          <a:lstStyle/>
+          <a:p>
+            <a:pPr lvl="0"/>
+            <a:r>
+              <a:rPr lang="en-US"/>
+              <a:t>Click to edit Master text styles</a:t>
+            </a:r>
+          </a:p>
+          <a:p>
+            <a:pPr lvl="1"/>
+            <a:r>
+              <a:rPr lang="en-US"/>
+              <a:t>Second level</a:t>
+            </a:r>
+          </a:p>
+          <a:p>
+            <a:pPr lvl="2"/>
+            <a:r>
+              <a:rPr lang="en-US"/>
+              <a:t>Third level</a:t>
+            </a:r>
+          </a:p>
+          <a:p>
+            <a:pPr lvl="3"/>
+            <a:r>
+              <a:rPr lang="en-US"/>
+              <a:t>Fourth level</a:t>
+            </a:r>
+          </a:p>
+          <a:p>
+            <a:pPr lvl="4"/>
+            <a:r>
+              <a:rPr lang="en-US"/>
+              <a:t>Fifth level</a:t>
+            </a:r>
+          </a:p>
+        </p:txBody>
+      </p:sp>
+      <p:sp>
+        <p:nvSpPr>
+          <p:cNvPr id="6" name="Footer Placeholder 5"/>
+          <p:cNvSpPr>
+            <a:spLocks noGrp="1"/>
+          </p:cNvSpPr>
+          <p:nvPr>
+            <p:ph type="ftr" sz="quarter" idx="4"/>
+          </p:nvPr>
+        </p:nvSpPr>
+        <p:spPr>
+          <a:xfrm>
+            <a:off x="0" y="8685213"/>
+            <a:ext cx="2971800" cy="458787"/>
+          </a:xfrm>
+          <a:prstGeom prst="rect">
+            <a:avLst/>
+          </a:prstGeom>
+        </p:spPr>
+        <p:txBody>
+          <a:bodyPr vert="horz" lIns="91440" tIns="45720" rIns="91440" bIns="45720" rtlCol="0" anchor="b"/>
+          <a:lstStyle>
+            <a:lvl1pPr algn="l">
+              <a:defRPr sz="1200"/>
+            </a:lvl1pPr>
+          </a:lstStyle>
+          <a:p>
+            <a:endParaRPr lang="en-US"/>
+          </a:p>
+        </p:txBody>
+      </p:sp>
+      <p:sp>
+        <p:nvSpPr>
+          <p:cNvPr id="7" name="Slide Number Placeholder 6"/>
+          <p:cNvSpPr>
+            <a:spLocks noGrp="1"/>
+          </p:cNvSpPr>
+          <p:nvPr>
+            <p:ph type="sldNum" sz="quarter" idx="5"/>
+          </p:nvPr>
+        </p:nvSpPr>
+        <p:spPr>
+          <a:xfrm>
+            <a:off x="3884613" y="8685213"/>
+            <a:ext cx="2971800" cy="458787"/>
+          </a:xfrm>
+          <a:prstGeom prst="rect">
+            <a:avLst/>
+          </a:prstGeom>
+        </p:spPr>
+        <p:txBody>
+          <a:bodyPr vert="horz" lIns="91440" tIns="45720" rIns="91440" bIns="45720" rtlCol="0" anchor="b"/>
+          <a:lstStyle>
+            <a:lvl1pPr algn="r">
+              <a:defRPr sz="1200"/>
+            </a:lvl1pPr>
+          </a:lstStyle>
+          <a:p>
+            <a:fld id="{141815C7-3430-1D47-896C-791E6467C6CE}" type="slidenum">
+              <a:rPr lang="en-US" smtClean="0"/>
+              <a:t>‹#›</a:t>
+            </a:fld>
+            <a:endParaRPr lang="en-US"/>
+          </a:p>
+        </p:txBody>
+      </p:sp>
+    </p:spTree>
+    <p:extLst>
+      <p:ext uri="{BB962C8B-B14F-4D97-AF65-F5344CB8AC3E}">
+        <p14:creationId xmlns:p14="http://schemas.microsoft.com/office/powerpoint/2010/main" val="939548414"/>
+      </p:ext>
+    </p:extLst>
+  </p:cSld>
+  <p:clrMap bg1="lt1" tx1="dk1" bg2="lt2" tx2="dk2" accent1="accent1" accent2="accent2" accent3="accent3" accent4="accent4" accent5="accent5" accent6="accent6" hlink="hlink" folHlink="folHlink"/>
+  <p:notesStyle>
+    <a:lvl1pPr marL="0" algn="l" defTabSz="914400" rtl="0" eaLnBrk="1" latinLnBrk="0" hangingPunct="1">
+      <a:defRPr sz="1200" kern="1200">
+        <a:solidFill>
+          <a:schemeClr val="tx1"/>
+        </a:solidFill>
+        <a:latin typeface="+mn-lt"/>
+        <a:ea typeface="+mn-ea"/>
+        <a:cs typeface="+mn-cs"/>
+      </a:defRPr>
+    </a:lvl1pPr>
+    <a:lvl2pPr marL="457200" algn="l" defTabSz="914400" rtl="0" eaLnBrk="1" latinLnBrk="0" hangingPunct="1">
+      <a:defRPr sz="1200" kern="1200">
+        <a:solidFill>
+          <a:schemeClr val="tx1"/>
+        </a:solidFill>
+        <a:latin typeface="+mn-lt"/>
+        <a:ea typeface="+mn-ea"/>
+        <a:cs typeface="+mn-cs"/>
+      </a:defRPr>
+    </a:lvl2pPr>
+    <a:lvl3pPr marL="914400" algn="l" defTabSz="914400" rtl="0" eaLnBrk="1" latinLnBrk="0" hangingPunct="1">
+      <a:defRPr sz="1200" kern="1200">
+        <a:solidFill>
+          <a:schemeClr val="tx1"/>
+        </a:solidFill>
+        <a:latin typeface="+mn-lt"/>
+        <a:ea typeface="+mn-ea"/>
+        <a:cs typeface="+mn-cs"/>
+      </a:defRPr>
+    </a:lvl3pPr>
+    <a:lvl4pPr marL="1371600" algn="l" defTabSz="914400" rtl="0" eaLnBrk="1" latinLnBrk="0" hangingPunct="1">
+      <a:defRPr sz="1200" kern="1200">
+        <a:solidFill>
+          <a:schemeClr val="tx1"/>
+        </a:solidFill>
+        <a:latin typeface="+mn-lt"/>
+        <a:ea typeface="+mn-ea"/>
+        <a:cs typeface="+mn-cs"/>
+      </a:defRPr>
+    </a:lvl4pPr>
+    <a:lvl5pPr marL="1828800" algn="l" defTabSz="914400" rtl="0" eaLnBrk="1" latinLnBrk="0" hangingPunct="1">
+      <a:defRPr sz="1200" kern="1200">
+        <a:solidFill>
+          <a:schemeClr val="tx1"/>
+        </a:solidFill>
+        <a:latin typeface="+mn-lt"/>
+        <a:ea typeface="+mn-ea"/>
+        <a:cs typeface="+mn-cs"/>
+      </a:defRPr>
+    </a:lvl5pPr>
+    <a:lvl6pPr marL="2286000" algn="l" defTabSz="914400" rtl="0" eaLnBrk="1" latinLnBrk="0" hangingPunct="1">
+      <a:defRPr sz="1200" kern="1200">
+        <a:solidFill>
+          <a:schemeClr val="tx1"/>
+        </a:solidFill>
+        <a:latin typeface="+mn-lt"/>
+        <a:ea typeface="+mn-ea"/>
+        <a:cs typeface="+mn-cs"/>
+      </a:defRPr>
+    </a:lvl6pPr>
+    <a:lvl7pPr marL="2743200" algn="l" defTabSz="914400" rtl="0" eaLnBrk="1" latinLnBrk="0" hangingPunct="1">
+      <a:defRPr sz="1200" kern="1200">
+        <a:solidFill>
+          <a:schemeClr val="tx1"/>
+        </a:solidFill>
+        <a:latin typeface="+mn-lt"/>
+        <a:ea typeface="+mn-ea"/>
+        <a:cs typeface="+mn-cs"/>
+      </a:defRPr>
+    </a:lvl7pPr>
+    <a:lvl8pPr marL="3200400" algn="l" defTabSz="914400" rtl="0" eaLnBrk="1" latinLnBrk="0" hangingPunct="1">
+      <a:defRPr sz="1200" kern="1200">
+        <a:solidFill>
+          <a:schemeClr val="tx1"/>
+        </a:solidFill>
+        <a:latin typeface="+mn-lt"/>
+        <a:ea typeface="+mn-ea"/>
+        <a:cs typeface="+mn-cs"/>
+      </a:defRPr>
+    </a:lvl8pPr>
+    <a:lvl9pPr marL="3657600" algn="l" defTabSz="914400" rtl="0" eaLnBrk="1" latinLnBrk="0" hangingPunct="1">
+      <a:defRPr sz="1200" kern="1200">
+        <a:solidFill>
+          <a:schemeClr val="tx1"/>
+        </a:solidFill>
+        <a:latin typeface="+mn-lt"/>
+        <a:ea typeface="+mn-ea"/>
+        <a:cs typeface="+mn-cs"/>
+      </a:defRPr>
+    </a:lvl9pPr>
+  </p:notesStyle>
+</p:notesMaster>
+</file>
+
+<file path=ppt/notesSlides/notesSlide1.xml><?xml version="1.0" encoding="utf-8"?>
+<p:notes xmlns:a="http://schemas.openxmlformats.org/drawingml/2006/main" xmlns:r="http://schemas.openxmlformats.org/officeDocument/2006/relationships" xmlns:p="http://schemas.openxmlformats.org/presentationml/2006/main">
+  <p:cSld>
+    <p:spTree>
+      <p:nvGrpSpPr>
+        <p:cNvPr id="1" name=""/>
+        <p:cNvGrpSpPr/>
+        <p:nvPr/>
+      </p:nvGrpSpPr>
+      <p:grpSpPr>
+        <a:xfrm>
+          <a:off x="0" y="0"/>
+          <a:ext cx="0" cy="0"/>
+          <a:chOff x="0" y="0"/>
+          <a:chExt cx="0" cy="0"/>
+        </a:xfrm>
+      </p:grpSpPr>
+      <p:sp>
+        <p:nvSpPr>
+          <p:cNvPr id="2" name="Slide Image Placeholder 1"/>
+          <p:cNvSpPr>
+            <a:spLocks noGrp="1" noRot="1" noChangeAspect="1"/>
+          </p:cNvSpPr>
+          <p:nvPr>
+            <p:ph type="sldImg"/>
+          </p:nvPr>
+        </p:nvSpPr>
+        <p:spPr/>
+      </p:sp>
+      <p:sp>
+        <p:nvSpPr>
+          <p:cNvPr id="3" name="Notes Placeholder 2"/>
+          <p:cNvSpPr>
+            <a:spLocks noGrp="1"/>
+          </p:cNvSpPr>
+          <p:nvPr>
+            <p:ph type="body" idx="1"/>
+          </p:nvPr>
+        </p:nvSpPr>
+        <p:spPr/>
+        <p:txBody>
+          <a:bodyPr/>
+          <a:lstStyle/>
+          <a:p>
+            <a:r>
+              <a:rPr lang="en-US" dirty="0"/>
+              <a:t>17,8  -- 16, 9 – 15, 10</a:t>
+            </a:r>
+            <a:br>
+              <a:rPr lang="en-US" dirty="0"/>
+            </a:br>
+            <a:r>
+              <a:rPr lang="en-US" dirty="0"/>
+              <a:t> </a:t>
+            </a:r>
+          </a:p>
+        </p:txBody>
+      </p:sp>
+      <p:sp>
+        <p:nvSpPr>
+          <p:cNvPr id="4" name="Slide Number Placeholder 3"/>
+          <p:cNvSpPr>
+            <a:spLocks noGrp="1"/>
+          </p:cNvSpPr>
+          <p:nvPr>
+            <p:ph type="sldNum" sz="quarter" idx="5"/>
+          </p:nvPr>
+        </p:nvSpPr>
+        <p:spPr/>
+        <p:txBody>
+          <a:bodyPr/>
+          <a:lstStyle/>
+          <a:p>
+            <a:fld id="{141815C7-3430-1D47-896C-791E6467C6CE}" type="slidenum">
+              <a:rPr lang="en-US" smtClean="0"/>
+              <a:t>9</a:t>
+            </a:fld>
+            <a:endParaRPr lang="en-US"/>
+          </a:p>
+        </p:txBody>
+      </p:sp>
+    </p:spTree>
+    <p:extLst>
+      <p:ext uri="{BB962C8B-B14F-4D97-AF65-F5344CB8AC3E}">
+        <p14:creationId xmlns:p14="http://schemas.microsoft.com/office/powerpoint/2010/main" val="2844998471"/>
+      </p:ext>
+    </p:extLst>
+  </p:cSld>
+  <p:clrMapOvr>
+    <a:masterClrMapping/>
+  </p:clrMapOvr>
+</p:notes>
 </file>
 
 <file path=ppt/slideLayouts/slideLayout1.xml><?xml version="1.0" encoding="utf-8"?>
@@ -3395,6 +3845,1536 @@
 </p:sld>
 </file>
 
+<file path=ppt/slides/slide10.xml><?xml version="1.0" encoding="utf-8"?>
+<p:sld xmlns:a="http://schemas.openxmlformats.org/drawingml/2006/main" xmlns:r="http://schemas.openxmlformats.org/officeDocument/2006/relationships" xmlns:p="http://schemas.openxmlformats.org/presentationml/2006/main">
+  <p:cSld>
+    <p:bg>
+      <p:bgPr>
+        <a:solidFill>
+          <a:schemeClr val="accent4">
+            <a:lumMod val="20000"/>
+            <a:lumOff val="80000"/>
+          </a:schemeClr>
+        </a:solidFill>
+        <a:effectLst/>
+      </p:bgPr>
+    </p:bg>
+    <p:spTree>
+      <p:nvGrpSpPr>
+        <p:cNvPr id="1" name="">
+          <a:extLst>
+            <a:ext uri="{FF2B5EF4-FFF2-40B4-BE49-F238E27FC236}">
+              <a16:creationId xmlns:a16="http://schemas.microsoft.com/office/drawing/2014/main" id="{3C29DEC7-FB21-014C-B4CC-8651C38538F0}"/>
+            </a:ext>
+          </a:extLst>
+        </p:cNvPr>
+        <p:cNvGrpSpPr/>
+        <p:nvPr/>
+      </p:nvGrpSpPr>
+      <p:grpSpPr>
+        <a:xfrm>
+          <a:off x="0" y="0"/>
+          <a:ext cx="0" cy="0"/>
+          <a:chOff x="0" y="0"/>
+          <a:chExt cx="0" cy="0"/>
+        </a:xfrm>
+      </p:grpSpPr>
+      <p:sp>
+        <p:nvSpPr>
+          <p:cNvPr id="2" name="Title 1">
+            <a:extLst>
+              <a:ext uri="{FF2B5EF4-FFF2-40B4-BE49-F238E27FC236}">
+                <a16:creationId xmlns:a16="http://schemas.microsoft.com/office/drawing/2014/main" id="{A01B96DE-85CE-A966-EF16-35CA833FC422}"/>
+              </a:ext>
+            </a:extLst>
+          </p:cNvPr>
+          <p:cNvSpPr>
+            <a:spLocks noGrp="1"/>
+          </p:cNvSpPr>
+          <p:nvPr>
+            <p:ph type="title"/>
+          </p:nvPr>
+        </p:nvSpPr>
+        <p:spPr>
+          <a:xfrm>
+            <a:off x="116114" y="103630"/>
+            <a:ext cx="10515600" cy="1325563"/>
+          </a:xfrm>
+        </p:spPr>
+        <p:txBody>
+          <a:bodyPr/>
+          <a:lstStyle/>
+          <a:p>
+            <a:r>
+              <a:rPr lang="en-US" dirty="0"/>
+              <a:t>Ex1 Mo1 Output</a:t>
+            </a:r>
+          </a:p>
+        </p:txBody>
+      </p:sp>
+      <p:pic>
+        <p:nvPicPr>
+          <p:cNvPr id="5" name="Content Placeholder 4" descr="A colorful text on a black background&#10;&#10;AI-generated content may be incorrect.">
+            <a:extLst>
+              <a:ext uri="{FF2B5EF4-FFF2-40B4-BE49-F238E27FC236}">
+                <a16:creationId xmlns:a16="http://schemas.microsoft.com/office/drawing/2014/main" id="{0F2762BE-E800-D8F0-D73C-725FF753F03D}"/>
+              </a:ext>
+            </a:extLst>
+          </p:cNvPr>
+          <p:cNvPicPr>
+            <a:picLocks noGrp="1" noChangeAspect="1"/>
+          </p:cNvPicPr>
+          <p:nvPr>
+            <p:ph idx="1"/>
+          </p:nvPr>
+        </p:nvPicPr>
+        <p:blipFill>
+          <a:blip r:embed="rId2"/>
+          <a:stretch>
+            <a:fillRect/>
+          </a:stretch>
+        </p:blipFill>
+        <p:spPr>
+          <a:xfrm>
+            <a:off x="6257755" y="-40777"/>
+            <a:ext cx="5517614" cy="1469970"/>
+          </a:xfrm>
+        </p:spPr>
+      </p:pic>
+      <p:pic>
+        <p:nvPicPr>
+          <p:cNvPr id="6" name="Picture 5">
+            <a:extLst>
+              <a:ext uri="{FF2B5EF4-FFF2-40B4-BE49-F238E27FC236}">
+                <a16:creationId xmlns:a16="http://schemas.microsoft.com/office/drawing/2014/main" id="{36FE1903-28A5-B8A1-A084-874365B48197}"/>
+              </a:ext>
+            </a:extLst>
+          </p:cNvPr>
+          <p:cNvPicPr>
+            <a:picLocks noChangeAspect="1"/>
+          </p:cNvPicPr>
+          <p:nvPr/>
+        </p:nvPicPr>
+        <p:blipFill>
+          <a:blip r:embed="rId3"/>
+          <a:stretch>
+            <a:fillRect/>
+          </a:stretch>
+        </p:blipFill>
+        <p:spPr>
+          <a:xfrm>
+            <a:off x="5595680" y="1576648"/>
+            <a:ext cx="6596320" cy="4657344"/>
+          </a:xfrm>
+          <a:prstGeom prst="rect">
+            <a:avLst/>
+          </a:prstGeom>
+        </p:spPr>
+      </p:pic>
+      <p:graphicFrame>
+        <p:nvGraphicFramePr>
+          <p:cNvPr id="7" name="Table 6">
+            <a:extLst>
+              <a:ext uri="{FF2B5EF4-FFF2-40B4-BE49-F238E27FC236}">
+                <a16:creationId xmlns:a16="http://schemas.microsoft.com/office/drawing/2014/main" id="{16EC69C4-D738-32CC-4E00-BAFDB7672255}"/>
+              </a:ext>
+            </a:extLst>
+          </p:cNvPr>
+          <p:cNvGraphicFramePr>
+            <a:graphicFrameLocks noGrp="1"/>
+          </p:cNvGraphicFramePr>
+          <p:nvPr>
+            <p:extLst>
+              <p:ext uri="{D42A27DB-BD31-4B8C-83A1-F6EECF244321}">
+                <p14:modId xmlns:p14="http://schemas.microsoft.com/office/powerpoint/2010/main" val="2003269083"/>
+              </p:ext>
+            </p:extLst>
+          </p:nvPr>
+        </p:nvGraphicFramePr>
+        <p:xfrm>
+          <a:off x="206564" y="1832324"/>
+          <a:ext cx="5291580" cy="3193351"/>
+        </p:xfrm>
+        <a:graphic>
+          <a:graphicData uri="http://schemas.openxmlformats.org/drawingml/2006/table">
+            <a:tbl>
+              <a:tblPr>
+                <a:tableStyleId>{5C22544A-7EE6-4342-B048-85BDC9FD1C3A}</a:tableStyleId>
+              </a:tblPr>
+              <a:tblGrid>
+                <a:gridCol w="1058316">
+                  <a:extLst>
+                    <a:ext uri="{9D8B030D-6E8A-4147-A177-3AD203B41FA5}">
+                      <a16:colId xmlns:a16="http://schemas.microsoft.com/office/drawing/2014/main" val="99855957"/>
+                    </a:ext>
+                  </a:extLst>
+                </a:gridCol>
+                <a:gridCol w="1058316">
+                  <a:extLst>
+                    <a:ext uri="{9D8B030D-6E8A-4147-A177-3AD203B41FA5}">
+                      <a16:colId xmlns:a16="http://schemas.microsoft.com/office/drawing/2014/main" val="3845515663"/>
+                    </a:ext>
+                  </a:extLst>
+                </a:gridCol>
+                <a:gridCol w="1058316">
+                  <a:extLst>
+                    <a:ext uri="{9D8B030D-6E8A-4147-A177-3AD203B41FA5}">
+                      <a16:colId xmlns:a16="http://schemas.microsoft.com/office/drawing/2014/main" val="2214412405"/>
+                    </a:ext>
+                  </a:extLst>
+                </a:gridCol>
+                <a:gridCol w="1058316">
+                  <a:extLst>
+                    <a:ext uri="{9D8B030D-6E8A-4147-A177-3AD203B41FA5}">
+                      <a16:colId xmlns:a16="http://schemas.microsoft.com/office/drawing/2014/main" val="1736718770"/>
+                    </a:ext>
+                  </a:extLst>
+                </a:gridCol>
+                <a:gridCol w="1058316">
+                  <a:extLst>
+                    <a:ext uri="{9D8B030D-6E8A-4147-A177-3AD203B41FA5}">
+                      <a16:colId xmlns:a16="http://schemas.microsoft.com/office/drawing/2014/main" val="3524787438"/>
+                    </a:ext>
+                  </a:extLst>
+                </a:gridCol>
+              </a:tblGrid>
+              <a:tr h="190500">
+                <a:tc>
+                  <a:txBody>
+                    <a:bodyPr/>
+                    <a:lstStyle/>
+                    <a:p>
+                      <a:pPr algn="ctr" fontAlgn="t">
+                        <a:buNone/>
+                      </a:pPr>
+                      <a:r>
+                        <a:rPr lang="en-US" sz="1100" u="none" strike="noStrike">
+                          <a:effectLst/>
+                        </a:rPr>
+                        <a:t>coords</a:t>
+                      </a:r>
+                      <a:endParaRPr lang="en-US" sz="1100" b="1" i="0" u="none" strike="noStrike">
+                        <a:solidFill>
+                          <a:srgbClr val="000000"/>
+                        </a:solidFill>
+                        <a:effectLst/>
+                        <a:latin typeface="Calibri" panose="020F0502020204030204" pitchFamily="34" charset="0"/>
+                      </a:endParaRPr>
+                    </a:p>
+                  </a:txBody>
+                  <a:tcPr marL="9525" marR="9525" marT="9525" marB="0"/>
+                </a:tc>
+                <a:tc>
+                  <a:txBody>
+                    <a:bodyPr/>
+                    <a:lstStyle/>
+                    <a:p>
+                      <a:pPr algn="ctr" fontAlgn="t">
+                        <a:buNone/>
+                      </a:pPr>
+                      <a:r>
+                        <a:rPr lang="en-US" sz="1100" u="none" strike="noStrike">
+                          <a:effectLst/>
+                        </a:rPr>
+                        <a:t>length</a:t>
+                      </a:r>
+                      <a:endParaRPr lang="en-US" sz="1100" b="1" i="0" u="none" strike="noStrike">
+                        <a:solidFill>
+                          <a:srgbClr val="000000"/>
+                        </a:solidFill>
+                        <a:effectLst/>
+                        <a:latin typeface="Calibri" panose="020F0502020204030204" pitchFamily="34" charset="0"/>
+                      </a:endParaRPr>
+                    </a:p>
+                  </a:txBody>
+                  <a:tcPr marL="9525" marR="9525" marT="9525" marB="0"/>
+                </a:tc>
+                <a:tc>
+                  <a:txBody>
+                    <a:bodyPr/>
+                    <a:lstStyle/>
+                    <a:p>
+                      <a:pPr algn="ctr" fontAlgn="t">
+                        <a:buNone/>
+                      </a:pPr>
+                      <a:r>
+                        <a:rPr lang="en-US" sz="1100" u="none" strike="noStrike">
+                          <a:effectLst/>
+                        </a:rPr>
+                        <a:t>score</a:t>
+                      </a:r>
+                      <a:endParaRPr lang="en-US" sz="1100" b="1" i="0" u="none" strike="noStrike">
+                        <a:solidFill>
+                          <a:srgbClr val="000000"/>
+                        </a:solidFill>
+                        <a:effectLst/>
+                        <a:latin typeface="Calibri" panose="020F0502020204030204" pitchFamily="34" charset="0"/>
+                      </a:endParaRPr>
+                    </a:p>
+                  </a:txBody>
+                  <a:tcPr marL="9525" marR="9525" marT="9525" marB="0"/>
+                </a:tc>
+                <a:tc>
+                  <a:txBody>
+                    <a:bodyPr/>
+                    <a:lstStyle/>
+                    <a:p>
+                      <a:pPr algn="ctr" fontAlgn="t">
+                        <a:buNone/>
+                      </a:pPr>
+                      <a:r>
+                        <a:rPr lang="en-US" sz="1100" u="none" strike="noStrike">
+                          <a:effectLst/>
+                        </a:rPr>
+                        <a:t>group1</a:t>
+                      </a:r>
+                      <a:endParaRPr lang="en-US" sz="1100" b="1" i="0" u="none" strike="noStrike">
+                        <a:solidFill>
+                          <a:srgbClr val="000000"/>
+                        </a:solidFill>
+                        <a:effectLst/>
+                        <a:latin typeface="Calibri" panose="020F0502020204030204" pitchFamily="34" charset="0"/>
+                      </a:endParaRPr>
+                    </a:p>
+                  </a:txBody>
+                  <a:tcPr marL="9525" marR="9525" marT="9525" marB="0"/>
+                </a:tc>
+                <a:tc>
+                  <a:txBody>
+                    <a:bodyPr/>
+                    <a:lstStyle/>
+                    <a:p>
+                      <a:pPr algn="ctr" fontAlgn="t">
+                        <a:buNone/>
+                      </a:pPr>
+                      <a:r>
+                        <a:rPr lang="en-US" sz="1100" u="none" strike="noStrike">
+                          <a:effectLst/>
+                        </a:rPr>
+                        <a:t>group2</a:t>
+                      </a:r>
+                      <a:endParaRPr lang="en-US" sz="1100" b="1" i="0" u="none" strike="noStrike">
+                        <a:solidFill>
+                          <a:srgbClr val="000000"/>
+                        </a:solidFill>
+                        <a:effectLst/>
+                        <a:latin typeface="Calibri" panose="020F0502020204030204" pitchFamily="34" charset="0"/>
+                      </a:endParaRPr>
+                    </a:p>
+                  </a:txBody>
+                  <a:tcPr marL="9525" marR="9525" marT="9525" marB="0"/>
+                </a:tc>
+                <a:extLst>
+                  <a:ext uri="{0D108BD9-81ED-4DB2-BD59-A6C34878D82A}">
+                    <a16:rowId xmlns:a16="http://schemas.microsoft.com/office/drawing/2014/main" val="1270927603"/>
+                  </a:ext>
+                </a:extLst>
+              </a:tr>
+              <a:tr h="190500">
+                <a:tc>
+                  <a:txBody>
+                    <a:bodyPr/>
+                    <a:lstStyle/>
+                    <a:p>
+                      <a:pPr algn="l" fontAlgn="b">
+                        <a:buNone/>
+                      </a:pPr>
+                      <a:r>
+                        <a:rPr lang="en-US" sz="1100" u="none" strike="noStrike">
+                          <a:effectLst/>
+                        </a:rPr>
+                        <a:t>[(14, 9), (15, 8), (16, 7)]</a:t>
+                      </a:r>
+                      <a:endParaRPr lang="en-US" sz="1100" b="0" i="0" u="none" strike="noStrike">
+                        <a:solidFill>
+                          <a:srgbClr val="000000"/>
+                        </a:solidFill>
+                        <a:effectLst/>
+                        <a:latin typeface="Calibri" panose="020F0502020204030204" pitchFamily="34" charset="0"/>
+                      </a:endParaRPr>
+                    </a:p>
+                  </a:txBody>
+                  <a:tcPr marL="9525" marR="9525" marT="9525" marB="0" anchor="b"/>
+                </a:tc>
+                <a:tc>
+                  <a:txBody>
+                    <a:bodyPr/>
+                    <a:lstStyle/>
+                    <a:p>
+                      <a:pPr algn="r" fontAlgn="b">
+                        <a:buNone/>
+                      </a:pPr>
+                      <a:r>
+                        <a:rPr lang="en-US" sz="1100" u="none" strike="noStrike">
+                          <a:effectLst/>
+                        </a:rPr>
+                        <a:t>3</a:t>
+                      </a:r>
+                      <a:endParaRPr lang="en-US" sz="1100" b="0" i="0" u="none" strike="noStrike">
+                        <a:solidFill>
+                          <a:srgbClr val="000000"/>
+                        </a:solidFill>
+                        <a:effectLst/>
+                        <a:latin typeface="Calibri" panose="020F0502020204030204" pitchFamily="34" charset="0"/>
+                      </a:endParaRPr>
+                    </a:p>
+                  </a:txBody>
+                  <a:tcPr marL="9525" marR="9525" marT="9525" marB="0" anchor="b"/>
+                </a:tc>
+                <a:tc>
+                  <a:txBody>
+                    <a:bodyPr/>
+                    <a:lstStyle/>
+                    <a:p>
+                      <a:pPr algn="r" fontAlgn="b">
+                        <a:buNone/>
+                      </a:pPr>
+                      <a:r>
+                        <a:rPr lang="en-US" sz="1100" u="none" strike="noStrike">
+                          <a:effectLst/>
+                        </a:rPr>
+                        <a:t>4.206712</a:t>
+                      </a:r>
+                      <a:endParaRPr lang="en-US" sz="1100" b="0" i="0" u="none" strike="noStrike">
+                        <a:solidFill>
+                          <a:srgbClr val="000000"/>
+                        </a:solidFill>
+                        <a:effectLst/>
+                        <a:latin typeface="Calibri" panose="020F0502020204030204" pitchFamily="34" charset="0"/>
+                      </a:endParaRPr>
+                    </a:p>
+                  </a:txBody>
+                  <a:tcPr marL="9525" marR="9525" marT="9525" marB="0" anchor="b"/>
+                </a:tc>
+                <a:tc>
+                  <a:txBody>
+                    <a:bodyPr/>
+                    <a:lstStyle/>
+                    <a:p>
+                      <a:pPr algn="l" fontAlgn="b">
+                        <a:buNone/>
+                      </a:pPr>
+                      <a:r>
+                        <a:rPr lang="en-US" sz="1100" u="none" strike="noStrike">
+                          <a:effectLst/>
+                        </a:rPr>
+                        <a:t>GTG</a:t>
+                      </a:r>
+                      <a:endParaRPr lang="en-US" sz="1100" b="0" i="0" u="none" strike="noStrike">
+                        <a:solidFill>
+                          <a:srgbClr val="000000"/>
+                        </a:solidFill>
+                        <a:effectLst/>
+                        <a:latin typeface="Calibri" panose="020F0502020204030204" pitchFamily="34" charset="0"/>
+                      </a:endParaRPr>
+                    </a:p>
+                  </a:txBody>
+                  <a:tcPr marL="9525" marR="9525" marT="9525" marB="0" anchor="b"/>
+                </a:tc>
+                <a:tc>
+                  <a:txBody>
+                    <a:bodyPr/>
+                    <a:lstStyle/>
+                    <a:p>
+                      <a:pPr algn="l" fontAlgn="b">
+                        <a:buNone/>
+                      </a:pPr>
+                      <a:r>
+                        <a:rPr lang="en-US" sz="1100" u="none" strike="noStrike">
+                          <a:effectLst/>
+                        </a:rPr>
+                        <a:t>CAC</a:t>
+                      </a:r>
+                      <a:endParaRPr lang="en-US" sz="1100" b="0" i="0" u="none" strike="noStrike">
+                        <a:solidFill>
+                          <a:srgbClr val="000000"/>
+                        </a:solidFill>
+                        <a:effectLst/>
+                        <a:latin typeface="Calibri" panose="020F0502020204030204" pitchFamily="34" charset="0"/>
+                      </a:endParaRPr>
+                    </a:p>
+                  </a:txBody>
+                  <a:tcPr marL="9525" marR="9525" marT="9525" marB="0" anchor="b"/>
+                </a:tc>
+                <a:extLst>
+                  <a:ext uri="{0D108BD9-81ED-4DB2-BD59-A6C34878D82A}">
+                    <a16:rowId xmlns:a16="http://schemas.microsoft.com/office/drawing/2014/main" val="1658524530"/>
+                  </a:ext>
+                </a:extLst>
+              </a:tr>
+              <a:tr h="190500">
+                <a:tc>
+                  <a:txBody>
+                    <a:bodyPr/>
+                    <a:lstStyle/>
+                    <a:p>
+                      <a:pPr algn="l" fontAlgn="b">
+                        <a:buNone/>
+                      </a:pPr>
+                      <a:r>
+                        <a:rPr lang="en-US" sz="1100" u="none" strike="noStrike">
+                          <a:effectLst/>
+                        </a:rPr>
+                        <a:t>[(15, 10), (16, 9), (17, 8)]</a:t>
+                      </a:r>
+                      <a:endParaRPr lang="en-US" sz="1100" b="0" i="0" u="none" strike="noStrike">
+                        <a:solidFill>
+                          <a:srgbClr val="000000"/>
+                        </a:solidFill>
+                        <a:effectLst/>
+                        <a:latin typeface="Calibri" panose="020F0502020204030204" pitchFamily="34" charset="0"/>
+                      </a:endParaRPr>
+                    </a:p>
+                  </a:txBody>
+                  <a:tcPr marL="9525" marR="9525" marT="9525" marB="0" anchor="b"/>
+                </a:tc>
+                <a:tc>
+                  <a:txBody>
+                    <a:bodyPr/>
+                    <a:lstStyle/>
+                    <a:p>
+                      <a:pPr algn="r" fontAlgn="b">
+                        <a:buNone/>
+                      </a:pPr>
+                      <a:r>
+                        <a:rPr lang="en-US" sz="1100" u="none" strike="noStrike">
+                          <a:effectLst/>
+                        </a:rPr>
+                        <a:t>3</a:t>
+                      </a:r>
+                      <a:endParaRPr lang="en-US" sz="1100" b="0" i="0" u="none" strike="noStrike">
+                        <a:solidFill>
+                          <a:srgbClr val="000000"/>
+                        </a:solidFill>
+                        <a:effectLst/>
+                        <a:latin typeface="Calibri" panose="020F0502020204030204" pitchFamily="34" charset="0"/>
+                      </a:endParaRPr>
+                    </a:p>
+                  </a:txBody>
+                  <a:tcPr marL="9525" marR="9525" marT="9525" marB="0" anchor="b"/>
+                </a:tc>
+                <a:tc>
+                  <a:txBody>
+                    <a:bodyPr/>
+                    <a:lstStyle/>
+                    <a:p>
+                      <a:pPr algn="r" fontAlgn="b">
+                        <a:buNone/>
+                      </a:pPr>
+                      <a:r>
+                        <a:rPr lang="en-US" sz="1100" u="none" strike="noStrike">
+                          <a:effectLst/>
+                        </a:rPr>
+                        <a:t>4.993712</a:t>
+                      </a:r>
+                      <a:endParaRPr lang="en-US" sz="1100" b="0" i="0" u="none" strike="noStrike">
+                        <a:solidFill>
+                          <a:srgbClr val="000000"/>
+                        </a:solidFill>
+                        <a:effectLst/>
+                        <a:latin typeface="Calibri" panose="020F0502020204030204" pitchFamily="34" charset="0"/>
+                      </a:endParaRPr>
+                    </a:p>
+                  </a:txBody>
+                  <a:tcPr marL="9525" marR="9525" marT="9525" marB="0" anchor="b"/>
+                </a:tc>
+                <a:tc>
+                  <a:txBody>
+                    <a:bodyPr/>
+                    <a:lstStyle/>
+                    <a:p>
+                      <a:pPr algn="l" fontAlgn="b">
+                        <a:buNone/>
+                      </a:pPr>
+                      <a:r>
+                        <a:rPr lang="en-US" sz="1100" u="none" strike="noStrike">
+                          <a:effectLst/>
+                        </a:rPr>
+                        <a:t>TGT</a:t>
+                      </a:r>
+                      <a:endParaRPr lang="en-US" sz="1100" b="0" i="0" u="none" strike="noStrike">
+                        <a:solidFill>
+                          <a:srgbClr val="000000"/>
+                        </a:solidFill>
+                        <a:effectLst/>
+                        <a:latin typeface="Calibri" panose="020F0502020204030204" pitchFamily="34" charset="0"/>
+                      </a:endParaRPr>
+                    </a:p>
+                  </a:txBody>
+                  <a:tcPr marL="9525" marR="9525" marT="9525" marB="0" anchor="b"/>
+                </a:tc>
+                <a:tc>
+                  <a:txBody>
+                    <a:bodyPr/>
+                    <a:lstStyle/>
+                    <a:p>
+                      <a:pPr algn="l" fontAlgn="b">
+                        <a:buNone/>
+                      </a:pPr>
+                      <a:r>
+                        <a:rPr lang="en-US" sz="1100" u="none" strike="noStrike">
+                          <a:effectLst/>
+                        </a:rPr>
+                        <a:t>ACA</a:t>
+                      </a:r>
+                      <a:endParaRPr lang="en-US" sz="1100" b="0" i="0" u="none" strike="noStrike">
+                        <a:solidFill>
+                          <a:srgbClr val="000000"/>
+                        </a:solidFill>
+                        <a:effectLst/>
+                        <a:latin typeface="Calibri" panose="020F0502020204030204" pitchFamily="34" charset="0"/>
+                      </a:endParaRPr>
+                    </a:p>
+                  </a:txBody>
+                  <a:tcPr marL="9525" marR="9525" marT="9525" marB="0" anchor="b"/>
+                </a:tc>
+                <a:extLst>
+                  <a:ext uri="{0D108BD9-81ED-4DB2-BD59-A6C34878D82A}">
+                    <a16:rowId xmlns:a16="http://schemas.microsoft.com/office/drawing/2014/main" val="1494730060"/>
+                  </a:ext>
+                </a:extLst>
+              </a:tr>
+              <a:tr h="190500">
+                <a:tc>
+                  <a:txBody>
+                    <a:bodyPr/>
+                    <a:lstStyle/>
+                    <a:p>
+                      <a:pPr algn="l" fontAlgn="b">
+                        <a:buNone/>
+                      </a:pPr>
+                      <a:r>
+                        <a:rPr lang="en-US" sz="1100" u="none" strike="noStrike">
+                          <a:effectLst/>
+                        </a:rPr>
+                        <a:t>[(8, 6), (9, 5)]</a:t>
+                      </a:r>
+                      <a:endParaRPr lang="en-US" sz="1100" b="0" i="0" u="none" strike="noStrike">
+                        <a:solidFill>
+                          <a:srgbClr val="000000"/>
+                        </a:solidFill>
+                        <a:effectLst/>
+                        <a:latin typeface="Calibri" panose="020F0502020204030204" pitchFamily="34" charset="0"/>
+                      </a:endParaRPr>
+                    </a:p>
+                  </a:txBody>
+                  <a:tcPr marL="9525" marR="9525" marT="9525" marB="0" anchor="b"/>
+                </a:tc>
+                <a:tc>
+                  <a:txBody>
+                    <a:bodyPr/>
+                    <a:lstStyle/>
+                    <a:p>
+                      <a:pPr algn="r" fontAlgn="b">
+                        <a:buNone/>
+                      </a:pPr>
+                      <a:r>
+                        <a:rPr lang="en-US" sz="1100" u="none" strike="noStrike">
+                          <a:effectLst/>
+                        </a:rPr>
+                        <a:t>2</a:t>
+                      </a:r>
+                      <a:endParaRPr lang="en-US" sz="1100" b="0" i="0" u="none" strike="noStrike">
+                        <a:solidFill>
+                          <a:srgbClr val="000000"/>
+                        </a:solidFill>
+                        <a:effectLst/>
+                        <a:latin typeface="Calibri" panose="020F0502020204030204" pitchFamily="34" charset="0"/>
+                      </a:endParaRPr>
+                    </a:p>
+                  </a:txBody>
+                  <a:tcPr marL="9525" marR="9525" marT="9525" marB="0" anchor="b"/>
+                </a:tc>
+                <a:tc>
+                  <a:txBody>
+                    <a:bodyPr/>
+                    <a:lstStyle/>
+                    <a:p>
+                      <a:pPr algn="r" fontAlgn="b">
+                        <a:buNone/>
+                      </a:pPr>
+                      <a:r>
+                        <a:rPr lang="en-US" sz="1100" u="none" strike="noStrike">
+                          <a:effectLst/>
+                        </a:rPr>
+                        <a:t>2.783439</a:t>
+                      </a:r>
+                      <a:endParaRPr lang="en-US" sz="1100" b="0" i="0" u="none" strike="noStrike">
+                        <a:solidFill>
+                          <a:srgbClr val="000000"/>
+                        </a:solidFill>
+                        <a:effectLst/>
+                        <a:latin typeface="Calibri" panose="020F0502020204030204" pitchFamily="34" charset="0"/>
+                      </a:endParaRPr>
+                    </a:p>
+                  </a:txBody>
+                  <a:tcPr marL="9525" marR="9525" marT="9525" marB="0" anchor="b"/>
+                </a:tc>
+                <a:tc>
+                  <a:txBody>
+                    <a:bodyPr/>
+                    <a:lstStyle/>
+                    <a:p>
+                      <a:pPr algn="l" fontAlgn="b">
+                        <a:buNone/>
+                      </a:pPr>
+                      <a:r>
+                        <a:rPr lang="en-US" sz="1100" u="none" strike="noStrike">
+                          <a:effectLst/>
+                        </a:rPr>
+                        <a:t>AC</a:t>
+                      </a:r>
+                      <a:endParaRPr lang="en-US" sz="1100" b="0" i="0" u="none" strike="noStrike">
+                        <a:solidFill>
+                          <a:srgbClr val="000000"/>
+                        </a:solidFill>
+                        <a:effectLst/>
+                        <a:latin typeface="Calibri" panose="020F0502020204030204" pitchFamily="34" charset="0"/>
+                      </a:endParaRPr>
+                    </a:p>
+                  </a:txBody>
+                  <a:tcPr marL="9525" marR="9525" marT="9525" marB="0" anchor="b"/>
+                </a:tc>
+                <a:tc>
+                  <a:txBody>
+                    <a:bodyPr/>
+                    <a:lstStyle/>
+                    <a:p>
+                      <a:pPr algn="l" fontAlgn="b">
+                        <a:buNone/>
+                      </a:pPr>
+                      <a:r>
+                        <a:rPr lang="en-US" sz="1100" u="none" strike="noStrike">
+                          <a:effectLst/>
+                        </a:rPr>
+                        <a:t>TG</a:t>
+                      </a:r>
+                      <a:endParaRPr lang="en-US" sz="1100" b="0" i="0" u="none" strike="noStrike">
+                        <a:solidFill>
+                          <a:srgbClr val="000000"/>
+                        </a:solidFill>
+                        <a:effectLst/>
+                        <a:latin typeface="Calibri" panose="020F0502020204030204" pitchFamily="34" charset="0"/>
+                      </a:endParaRPr>
+                    </a:p>
+                  </a:txBody>
+                  <a:tcPr marL="9525" marR="9525" marT="9525" marB="0" anchor="b"/>
+                </a:tc>
+                <a:extLst>
+                  <a:ext uri="{0D108BD9-81ED-4DB2-BD59-A6C34878D82A}">
+                    <a16:rowId xmlns:a16="http://schemas.microsoft.com/office/drawing/2014/main" val="1854123964"/>
+                  </a:ext>
+                </a:extLst>
+              </a:tr>
+              <a:tr h="190500">
+                <a:tc>
+                  <a:txBody>
+                    <a:bodyPr/>
+                    <a:lstStyle/>
+                    <a:p>
+                      <a:pPr algn="l" fontAlgn="b">
+                        <a:buNone/>
+                      </a:pPr>
+                      <a:r>
+                        <a:rPr lang="en-US" sz="1100" u="none" strike="noStrike">
+                          <a:effectLst/>
+                        </a:rPr>
+                        <a:t>[(18, 16), (19, 15)]</a:t>
+                      </a:r>
+                      <a:endParaRPr lang="en-US" sz="1100" b="0" i="0" u="none" strike="noStrike">
+                        <a:solidFill>
+                          <a:srgbClr val="000000"/>
+                        </a:solidFill>
+                        <a:effectLst/>
+                        <a:latin typeface="Calibri" panose="020F0502020204030204" pitchFamily="34" charset="0"/>
+                      </a:endParaRPr>
+                    </a:p>
+                  </a:txBody>
+                  <a:tcPr marL="9525" marR="9525" marT="9525" marB="0" anchor="b"/>
+                </a:tc>
+                <a:tc>
+                  <a:txBody>
+                    <a:bodyPr/>
+                    <a:lstStyle/>
+                    <a:p>
+                      <a:pPr algn="r" fontAlgn="b">
+                        <a:buNone/>
+                      </a:pPr>
+                      <a:r>
+                        <a:rPr lang="en-US" sz="1100" u="none" strike="noStrike">
+                          <a:effectLst/>
+                        </a:rPr>
+                        <a:t>2</a:t>
+                      </a:r>
+                      <a:endParaRPr lang="en-US" sz="1100" b="0" i="0" u="none" strike="noStrike">
+                        <a:solidFill>
+                          <a:srgbClr val="000000"/>
+                        </a:solidFill>
+                        <a:effectLst/>
+                        <a:latin typeface="Calibri" panose="020F0502020204030204" pitchFamily="34" charset="0"/>
+                      </a:endParaRPr>
+                    </a:p>
+                  </a:txBody>
+                  <a:tcPr marL="9525" marR="9525" marT="9525" marB="0" anchor="b"/>
+                </a:tc>
+                <a:tc>
+                  <a:txBody>
+                    <a:bodyPr/>
+                    <a:lstStyle/>
+                    <a:p>
+                      <a:pPr algn="r" fontAlgn="b">
+                        <a:buNone/>
+                      </a:pPr>
+                      <a:r>
+                        <a:rPr lang="en-US" sz="1100" u="none" strike="noStrike">
+                          <a:effectLst/>
+                        </a:rPr>
+                        <a:t>3.340354</a:t>
+                      </a:r>
+                      <a:endParaRPr lang="en-US" sz="1100" b="0" i="0" u="none" strike="noStrike">
+                        <a:solidFill>
+                          <a:srgbClr val="000000"/>
+                        </a:solidFill>
+                        <a:effectLst/>
+                        <a:latin typeface="Calibri" panose="020F0502020204030204" pitchFamily="34" charset="0"/>
+                      </a:endParaRPr>
+                    </a:p>
+                  </a:txBody>
+                  <a:tcPr marL="9525" marR="9525" marT="9525" marB="0" anchor="b"/>
+                </a:tc>
+                <a:tc>
+                  <a:txBody>
+                    <a:bodyPr/>
+                    <a:lstStyle/>
+                    <a:p>
+                      <a:pPr algn="l" fontAlgn="b">
+                        <a:buNone/>
+                      </a:pPr>
+                      <a:r>
+                        <a:rPr lang="en-US" sz="1100" u="none" strike="noStrike">
+                          <a:effectLst/>
+                        </a:rPr>
+                        <a:t>CA</a:t>
+                      </a:r>
+                      <a:endParaRPr lang="en-US" sz="1100" b="0" i="0" u="none" strike="noStrike">
+                        <a:solidFill>
+                          <a:srgbClr val="000000"/>
+                        </a:solidFill>
+                        <a:effectLst/>
+                        <a:latin typeface="Calibri" panose="020F0502020204030204" pitchFamily="34" charset="0"/>
+                      </a:endParaRPr>
+                    </a:p>
+                  </a:txBody>
+                  <a:tcPr marL="9525" marR="9525" marT="9525" marB="0" anchor="b"/>
+                </a:tc>
+                <a:tc>
+                  <a:txBody>
+                    <a:bodyPr/>
+                    <a:lstStyle/>
+                    <a:p>
+                      <a:pPr algn="l" fontAlgn="b">
+                        <a:buNone/>
+                      </a:pPr>
+                      <a:r>
+                        <a:rPr lang="en-US" sz="1100" u="none" strike="noStrike">
+                          <a:effectLst/>
+                        </a:rPr>
+                        <a:t>GT</a:t>
+                      </a:r>
+                      <a:endParaRPr lang="en-US" sz="1100" b="0" i="0" u="none" strike="noStrike">
+                        <a:solidFill>
+                          <a:srgbClr val="000000"/>
+                        </a:solidFill>
+                        <a:effectLst/>
+                        <a:latin typeface="Calibri" panose="020F0502020204030204" pitchFamily="34" charset="0"/>
+                      </a:endParaRPr>
+                    </a:p>
+                  </a:txBody>
+                  <a:tcPr marL="9525" marR="9525" marT="9525" marB="0" anchor="b"/>
+                </a:tc>
+                <a:extLst>
+                  <a:ext uri="{0D108BD9-81ED-4DB2-BD59-A6C34878D82A}">
+                    <a16:rowId xmlns:a16="http://schemas.microsoft.com/office/drawing/2014/main" val="2657544129"/>
+                  </a:ext>
+                </a:extLst>
+              </a:tr>
+              <a:tr h="190500">
+                <a:tc>
+                  <a:txBody>
+                    <a:bodyPr/>
+                    <a:lstStyle/>
+                    <a:p>
+                      <a:pPr algn="l" fontAlgn="b">
+                        <a:buNone/>
+                      </a:pPr>
+                      <a:r>
+                        <a:rPr lang="en-US" sz="1100" u="none" strike="noStrike">
+                          <a:effectLst/>
+                        </a:rPr>
+                        <a:t>[(22, 20), (23, 19)]</a:t>
+                      </a:r>
+                      <a:endParaRPr lang="en-US" sz="1100" b="0" i="0" u="none" strike="noStrike">
+                        <a:solidFill>
+                          <a:srgbClr val="000000"/>
+                        </a:solidFill>
+                        <a:effectLst/>
+                        <a:latin typeface="Calibri" panose="020F0502020204030204" pitchFamily="34" charset="0"/>
+                      </a:endParaRPr>
+                    </a:p>
+                  </a:txBody>
+                  <a:tcPr marL="9525" marR="9525" marT="9525" marB="0" anchor="b"/>
+                </a:tc>
+                <a:tc>
+                  <a:txBody>
+                    <a:bodyPr/>
+                    <a:lstStyle/>
+                    <a:p>
+                      <a:pPr algn="r" fontAlgn="b">
+                        <a:buNone/>
+                      </a:pPr>
+                      <a:r>
+                        <a:rPr lang="en-US" sz="1100" u="none" strike="noStrike">
+                          <a:effectLst/>
+                        </a:rPr>
+                        <a:t>2</a:t>
+                      </a:r>
+                      <a:endParaRPr lang="en-US" sz="1100" b="0" i="0" u="none" strike="noStrike">
+                        <a:solidFill>
+                          <a:srgbClr val="000000"/>
+                        </a:solidFill>
+                        <a:effectLst/>
+                        <a:latin typeface="Calibri" panose="020F0502020204030204" pitchFamily="34" charset="0"/>
+                      </a:endParaRPr>
+                    </a:p>
+                  </a:txBody>
+                  <a:tcPr marL="9525" marR="9525" marT="9525" marB="0" anchor="b"/>
+                </a:tc>
+                <a:tc>
+                  <a:txBody>
+                    <a:bodyPr/>
+                    <a:lstStyle/>
+                    <a:p>
+                      <a:pPr algn="r" fontAlgn="b">
+                        <a:buNone/>
+                      </a:pPr>
+                      <a:r>
+                        <a:rPr lang="en-US" sz="1100" u="none" strike="noStrike">
+                          <a:effectLst/>
+                        </a:rPr>
+                        <a:t>2.154894</a:t>
+                      </a:r>
+                      <a:endParaRPr lang="en-US" sz="1100" b="0" i="0" u="none" strike="noStrike">
+                        <a:solidFill>
+                          <a:srgbClr val="000000"/>
+                        </a:solidFill>
+                        <a:effectLst/>
+                        <a:latin typeface="Calibri" panose="020F0502020204030204" pitchFamily="34" charset="0"/>
+                      </a:endParaRPr>
+                    </a:p>
+                  </a:txBody>
+                  <a:tcPr marL="9525" marR="9525" marT="9525" marB="0" anchor="b"/>
+                </a:tc>
+                <a:tc>
+                  <a:txBody>
+                    <a:bodyPr/>
+                    <a:lstStyle/>
+                    <a:p>
+                      <a:pPr algn="l" fontAlgn="b">
+                        <a:buNone/>
+                      </a:pPr>
+                      <a:r>
+                        <a:rPr lang="en-US" sz="1100" u="none" strike="noStrike">
+                          <a:effectLst/>
+                        </a:rPr>
+                        <a:t>AT</a:t>
+                      </a:r>
+                      <a:endParaRPr lang="en-US" sz="1100" b="0" i="0" u="none" strike="noStrike">
+                        <a:solidFill>
+                          <a:srgbClr val="000000"/>
+                        </a:solidFill>
+                        <a:effectLst/>
+                        <a:latin typeface="Calibri" panose="020F0502020204030204" pitchFamily="34" charset="0"/>
+                      </a:endParaRPr>
+                    </a:p>
+                  </a:txBody>
+                  <a:tcPr marL="9525" marR="9525" marT="9525" marB="0" anchor="b"/>
+                </a:tc>
+                <a:tc>
+                  <a:txBody>
+                    <a:bodyPr/>
+                    <a:lstStyle/>
+                    <a:p>
+                      <a:pPr algn="l" fontAlgn="b">
+                        <a:buNone/>
+                      </a:pPr>
+                      <a:r>
+                        <a:rPr lang="en-US" sz="1100" u="none" strike="noStrike">
+                          <a:effectLst/>
+                        </a:rPr>
+                        <a:t>TA</a:t>
+                      </a:r>
+                      <a:endParaRPr lang="en-US" sz="1100" b="0" i="0" u="none" strike="noStrike">
+                        <a:solidFill>
+                          <a:srgbClr val="000000"/>
+                        </a:solidFill>
+                        <a:effectLst/>
+                        <a:latin typeface="Calibri" panose="020F0502020204030204" pitchFamily="34" charset="0"/>
+                      </a:endParaRPr>
+                    </a:p>
+                  </a:txBody>
+                  <a:tcPr marL="9525" marR="9525" marT="9525" marB="0" anchor="b"/>
+                </a:tc>
+                <a:extLst>
+                  <a:ext uri="{0D108BD9-81ED-4DB2-BD59-A6C34878D82A}">
+                    <a16:rowId xmlns:a16="http://schemas.microsoft.com/office/drawing/2014/main" val="567544078"/>
+                  </a:ext>
+                </a:extLst>
+              </a:tr>
+              <a:tr h="190500">
+                <a:tc>
+                  <a:txBody>
+                    <a:bodyPr/>
+                    <a:lstStyle/>
+                    <a:p>
+                      <a:pPr algn="l" fontAlgn="b">
+                        <a:buNone/>
+                      </a:pPr>
+                      <a:r>
+                        <a:rPr lang="en-US" sz="1100" u="none" strike="noStrike">
+                          <a:effectLst/>
+                        </a:rPr>
+                        <a:t>[(23, 11), (24, 10)]</a:t>
+                      </a:r>
+                      <a:endParaRPr lang="en-US" sz="1100" b="0" i="0" u="none" strike="noStrike">
+                        <a:solidFill>
+                          <a:srgbClr val="000000"/>
+                        </a:solidFill>
+                        <a:effectLst/>
+                        <a:latin typeface="Calibri" panose="020F0502020204030204" pitchFamily="34" charset="0"/>
+                      </a:endParaRPr>
+                    </a:p>
+                  </a:txBody>
+                  <a:tcPr marL="9525" marR="9525" marT="9525" marB="0" anchor="b"/>
+                </a:tc>
+                <a:tc>
+                  <a:txBody>
+                    <a:bodyPr/>
+                    <a:lstStyle/>
+                    <a:p>
+                      <a:pPr algn="r" fontAlgn="b">
+                        <a:buNone/>
+                      </a:pPr>
+                      <a:r>
+                        <a:rPr lang="en-US" sz="1100" u="none" strike="noStrike">
+                          <a:effectLst/>
+                        </a:rPr>
+                        <a:t>2</a:t>
+                      </a:r>
+                      <a:endParaRPr lang="en-US" sz="1100" b="0" i="0" u="none" strike="noStrike">
+                        <a:solidFill>
+                          <a:srgbClr val="000000"/>
+                        </a:solidFill>
+                        <a:effectLst/>
+                        <a:latin typeface="Calibri" panose="020F0502020204030204" pitchFamily="34" charset="0"/>
+                      </a:endParaRPr>
+                    </a:p>
+                  </a:txBody>
+                  <a:tcPr marL="9525" marR="9525" marT="9525" marB="0" anchor="b"/>
+                </a:tc>
+                <a:tc>
+                  <a:txBody>
+                    <a:bodyPr/>
+                    <a:lstStyle/>
+                    <a:p>
+                      <a:pPr algn="r" fontAlgn="b">
+                        <a:buNone/>
+                      </a:pPr>
+                      <a:r>
+                        <a:rPr lang="en-US" sz="1100" u="none" strike="noStrike" dirty="0">
+                          <a:effectLst/>
+                        </a:rPr>
+                        <a:t>2.186579</a:t>
+                      </a:r>
+                      <a:endParaRPr lang="en-US" sz="1100" b="0" i="0" u="none" strike="noStrike" dirty="0">
+                        <a:solidFill>
+                          <a:srgbClr val="000000"/>
+                        </a:solidFill>
+                        <a:effectLst/>
+                        <a:latin typeface="Calibri" panose="020F0502020204030204" pitchFamily="34" charset="0"/>
+                      </a:endParaRPr>
+                    </a:p>
+                  </a:txBody>
+                  <a:tcPr marL="9525" marR="9525" marT="9525" marB="0" anchor="b"/>
+                </a:tc>
+                <a:tc>
+                  <a:txBody>
+                    <a:bodyPr/>
+                    <a:lstStyle/>
+                    <a:p>
+                      <a:pPr algn="l" fontAlgn="b">
+                        <a:buNone/>
+                      </a:pPr>
+                      <a:r>
+                        <a:rPr lang="en-US" sz="1100" u="none" strike="noStrike">
+                          <a:effectLst/>
+                        </a:rPr>
+                        <a:t>TT</a:t>
+                      </a:r>
+                      <a:endParaRPr lang="en-US" sz="1100" b="0" i="0" u="none" strike="noStrike">
+                        <a:solidFill>
+                          <a:srgbClr val="000000"/>
+                        </a:solidFill>
+                        <a:effectLst/>
+                        <a:latin typeface="Calibri" panose="020F0502020204030204" pitchFamily="34" charset="0"/>
+                      </a:endParaRPr>
+                    </a:p>
+                  </a:txBody>
+                  <a:tcPr marL="9525" marR="9525" marT="9525" marB="0" anchor="b"/>
+                </a:tc>
+                <a:tc>
+                  <a:txBody>
+                    <a:bodyPr/>
+                    <a:lstStyle/>
+                    <a:p>
+                      <a:pPr algn="l" fontAlgn="b">
+                        <a:buNone/>
+                      </a:pPr>
+                      <a:r>
+                        <a:rPr lang="en-US" sz="1100" u="none" strike="noStrike">
+                          <a:effectLst/>
+                        </a:rPr>
+                        <a:t>AA</a:t>
+                      </a:r>
+                      <a:endParaRPr lang="en-US" sz="1100" b="0" i="0" u="none" strike="noStrike">
+                        <a:solidFill>
+                          <a:srgbClr val="000000"/>
+                        </a:solidFill>
+                        <a:effectLst/>
+                        <a:latin typeface="Calibri" panose="020F0502020204030204" pitchFamily="34" charset="0"/>
+                      </a:endParaRPr>
+                    </a:p>
+                  </a:txBody>
+                  <a:tcPr marL="9525" marR="9525" marT="9525" marB="0" anchor="b"/>
+                </a:tc>
+                <a:extLst>
+                  <a:ext uri="{0D108BD9-81ED-4DB2-BD59-A6C34878D82A}">
+                    <a16:rowId xmlns:a16="http://schemas.microsoft.com/office/drawing/2014/main" val="130301246"/>
+                  </a:ext>
+                </a:extLst>
+              </a:tr>
+              <a:tr h="190500">
+                <a:tc>
+                  <a:txBody>
+                    <a:bodyPr/>
+                    <a:lstStyle/>
+                    <a:p>
+                      <a:pPr algn="l" fontAlgn="b">
+                        <a:buNone/>
+                      </a:pPr>
+                      <a:r>
+                        <a:rPr lang="en-US" sz="1100" u="none" strike="noStrike">
+                          <a:effectLst/>
+                        </a:rPr>
+                        <a:t>[(23, 12), (24, 11)]</a:t>
+                      </a:r>
+                      <a:endParaRPr lang="en-US" sz="1100" b="0" i="0" u="none" strike="noStrike">
+                        <a:solidFill>
+                          <a:srgbClr val="000000"/>
+                        </a:solidFill>
+                        <a:effectLst/>
+                        <a:latin typeface="Calibri" panose="020F0502020204030204" pitchFamily="34" charset="0"/>
+                      </a:endParaRPr>
+                    </a:p>
+                  </a:txBody>
+                  <a:tcPr marL="9525" marR="9525" marT="9525" marB="0" anchor="b"/>
+                </a:tc>
+                <a:tc>
+                  <a:txBody>
+                    <a:bodyPr/>
+                    <a:lstStyle/>
+                    <a:p>
+                      <a:pPr algn="r" fontAlgn="b">
+                        <a:buNone/>
+                      </a:pPr>
+                      <a:r>
+                        <a:rPr lang="en-US" sz="1100" u="none" strike="noStrike">
+                          <a:effectLst/>
+                        </a:rPr>
+                        <a:t>2</a:t>
+                      </a:r>
+                      <a:endParaRPr lang="en-US" sz="1100" b="0" i="0" u="none" strike="noStrike">
+                        <a:solidFill>
+                          <a:srgbClr val="000000"/>
+                        </a:solidFill>
+                        <a:effectLst/>
+                        <a:latin typeface="Calibri" panose="020F0502020204030204" pitchFamily="34" charset="0"/>
+                      </a:endParaRPr>
+                    </a:p>
+                  </a:txBody>
+                  <a:tcPr marL="9525" marR="9525" marT="9525" marB="0" anchor="b"/>
+                </a:tc>
+                <a:tc>
+                  <a:txBody>
+                    <a:bodyPr/>
+                    <a:lstStyle/>
+                    <a:p>
+                      <a:pPr algn="r" fontAlgn="b">
+                        <a:buNone/>
+                      </a:pPr>
+                      <a:r>
+                        <a:rPr lang="en-US" sz="1100" u="none" strike="noStrike">
+                          <a:effectLst/>
+                        </a:rPr>
+                        <a:t>2.196703</a:t>
+                      </a:r>
+                      <a:endParaRPr lang="en-US" sz="1100" b="0" i="0" u="none" strike="noStrike">
+                        <a:solidFill>
+                          <a:srgbClr val="000000"/>
+                        </a:solidFill>
+                        <a:effectLst/>
+                        <a:latin typeface="Calibri" panose="020F0502020204030204" pitchFamily="34" charset="0"/>
+                      </a:endParaRPr>
+                    </a:p>
+                  </a:txBody>
+                  <a:tcPr marL="9525" marR="9525" marT="9525" marB="0" anchor="b"/>
+                </a:tc>
+                <a:tc>
+                  <a:txBody>
+                    <a:bodyPr/>
+                    <a:lstStyle/>
+                    <a:p>
+                      <a:pPr algn="l" fontAlgn="b">
+                        <a:buNone/>
+                      </a:pPr>
+                      <a:r>
+                        <a:rPr lang="en-US" sz="1100" u="none" strike="noStrike">
+                          <a:effectLst/>
+                        </a:rPr>
+                        <a:t>TT</a:t>
+                      </a:r>
+                      <a:endParaRPr lang="en-US" sz="1100" b="0" i="0" u="none" strike="noStrike">
+                        <a:solidFill>
+                          <a:srgbClr val="000000"/>
+                        </a:solidFill>
+                        <a:effectLst/>
+                        <a:latin typeface="Calibri" panose="020F0502020204030204" pitchFamily="34" charset="0"/>
+                      </a:endParaRPr>
+                    </a:p>
+                  </a:txBody>
+                  <a:tcPr marL="9525" marR="9525" marT="9525" marB="0" anchor="b"/>
+                </a:tc>
+                <a:tc>
+                  <a:txBody>
+                    <a:bodyPr/>
+                    <a:lstStyle/>
+                    <a:p>
+                      <a:pPr algn="l" fontAlgn="b">
+                        <a:buNone/>
+                      </a:pPr>
+                      <a:r>
+                        <a:rPr lang="en-US" sz="1100" u="none" strike="noStrike">
+                          <a:effectLst/>
+                        </a:rPr>
+                        <a:t>AA</a:t>
+                      </a:r>
+                      <a:endParaRPr lang="en-US" sz="1100" b="0" i="0" u="none" strike="noStrike">
+                        <a:solidFill>
+                          <a:srgbClr val="000000"/>
+                        </a:solidFill>
+                        <a:effectLst/>
+                        <a:latin typeface="Calibri" panose="020F0502020204030204" pitchFamily="34" charset="0"/>
+                      </a:endParaRPr>
+                    </a:p>
+                  </a:txBody>
+                  <a:tcPr marL="9525" marR="9525" marT="9525" marB="0" anchor="b"/>
+                </a:tc>
+                <a:extLst>
+                  <a:ext uri="{0D108BD9-81ED-4DB2-BD59-A6C34878D82A}">
+                    <a16:rowId xmlns:a16="http://schemas.microsoft.com/office/drawing/2014/main" val="1819473526"/>
+                  </a:ext>
+                </a:extLst>
+              </a:tr>
+              <a:tr h="190500">
+                <a:tc>
+                  <a:txBody>
+                    <a:bodyPr/>
+                    <a:lstStyle/>
+                    <a:p>
+                      <a:pPr algn="l" fontAlgn="b">
+                        <a:buNone/>
+                      </a:pPr>
+                      <a:r>
+                        <a:rPr lang="en-US" sz="1100" u="none" strike="noStrike">
+                          <a:effectLst/>
+                        </a:rPr>
+                        <a:t>[(23, 13), (24, 12)]</a:t>
+                      </a:r>
+                      <a:endParaRPr lang="en-US" sz="1100" b="0" i="0" u="none" strike="noStrike">
+                        <a:solidFill>
+                          <a:srgbClr val="000000"/>
+                        </a:solidFill>
+                        <a:effectLst/>
+                        <a:latin typeface="Calibri" panose="020F0502020204030204" pitchFamily="34" charset="0"/>
+                      </a:endParaRPr>
+                    </a:p>
+                  </a:txBody>
+                  <a:tcPr marL="9525" marR="9525" marT="9525" marB="0" anchor="b"/>
+                </a:tc>
+                <a:tc>
+                  <a:txBody>
+                    <a:bodyPr/>
+                    <a:lstStyle/>
+                    <a:p>
+                      <a:pPr algn="r" fontAlgn="b">
+                        <a:buNone/>
+                      </a:pPr>
+                      <a:r>
+                        <a:rPr lang="en-US" sz="1100" u="none" strike="noStrike">
+                          <a:effectLst/>
+                        </a:rPr>
+                        <a:t>2</a:t>
+                      </a:r>
+                      <a:endParaRPr lang="en-US" sz="1100" b="0" i="0" u="none" strike="noStrike">
+                        <a:solidFill>
+                          <a:srgbClr val="000000"/>
+                        </a:solidFill>
+                        <a:effectLst/>
+                        <a:latin typeface="Calibri" panose="020F0502020204030204" pitchFamily="34" charset="0"/>
+                      </a:endParaRPr>
+                    </a:p>
+                  </a:txBody>
+                  <a:tcPr marL="9525" marR="9525" marT="9525" marB="0" anchor="b"/>
+                </a:tc>
+                <a:tc>
+                  <a:txBody>
+                    <a:bodyPr/>
+                    <a:lstStyle/>
+                    <a:p>
+                      <a:pPr algn="r" fontAlgn="b">
+                        <a:buNone/>
+                      </a:pPr>
+                      <a:r>
+                        <a:rPr lang="en-US" sz="1100" u="none" strike="noStrike">
+                          <a:effectLst/>
+                        </a:rPr>
+                        <a:t>2.10655</a:t>
+                      </a:r>
+                      <a:endParaRPr lang="en-US" sz="1100" b="0" i="0" u="none" strike="noStrike">
+                        <a:solidFill>
+                          <a:srgbClr val="000000"/>
+                        </a:solidFill>
+                        <a:effectLst/>
+                        <a:latin typeface="Calibri" panose="020F0502020204030204" pitchFamily="34" charset="0"/>
+                      </a:endParaRPr>
+                    </a:p>
+                  </a:txBody>
+                  <a:tcPr marL="9525" marR="9525" marT="9525" marB="0" anchor="b"/>
+                </a:tc>
+                <a:tc>
+                  <a:txBody>
+                    <a:bodyPr/>
+                    <a:lstStyle/>
+                    <a:p>
+                      <a:pPr algn="l" fontAlgn="b">
+                        <a:buNone/>
+                      </a:pPr>
+                      <a:r>
+                        <a:rPr lang="en-US" sz="1100" u="none" strike="noStrike">
+                          <a:effectLst/>
+                        </a:rPr>
+                        <a:t>TT</a:t>
+                      </a:r>
+                      <a:endParaRPr lang="en-US" sz="1100" b="0" i="0" u="none" strike="noStrike">
+                        <a:solidFill>
+                          <a:srgbClr val="000000"/>
+                        </a:solidFill>
+                        <a:effectLst/>
+                        <a:latin typeface="Calibri" panose="020F0502020204030204" pitchFamily="34" charset="0"/>
+                      </a:endParaRPr>
+                    </a:p>
+                  </a:txBody>
+                  <a:tcPr marL="9525" marR="9525" marT="9525" marB="0" anchor="b"/>
+                </a:tc>
+                <a:tc>
+                  <a:txBody>
+                    <a:bodyPr/>
+                    <a:lstStyle/>
+                    <a:p>
+                      <a:pPr algn="l" fontAlgn="b">
+                        <a:buNone/>
+                      </a:pPr>
+                      <a:r>
+                        <a:rPr lang="en-US" sz="1100" u="none" strike="noStrike">
+                          <a:effectLst/>
+                        </a:rPr>
+                        <a:t>AA</a:t>
+                      </a:r>
+                      <a:endParaRPr lang="en-US" sz="1100" b="0" i="0" u="none" strike="noStrike">
+                        <a:solidFill>
+                          <a:srgbClr val="000000"/>
+                        </a:solidFill>
+                        <a:effectLst/>
+                        <a:latin typeface="Calibri" panose="020F0502020204030204" pitchFamily="34" charset="0"/>
+                      </a:endParaRPr>
+                    </a:p>
+                  </a:txBody>
+                  <a:tcPr marL="9525" marR="9525" marT="9525" marB="0" anchor="b"/>
+                </a:tc>
+                <a:extLst>
+                  <a:ext uri="{0D108BD9-81ED-4DB2-BD59-A6C34878D82A}">
+                    <a16:rowId xmlns:a16="http://schemas.microsoft.com/office/drawing/2014/main" val="2131575644"/>
+                  </a:ext>
+                </a:extLst>
+              </a:tr>
+              <a:tr h="398716">
+                <a:tc>
+                  <a:txBody>
+                    <a:bodyPr/>
+                    <a:lstStyle/>
+                    <a:p>
+                      <a:pPr algn="l" fontAlgn="b">
+                        <a:buNone/>
+                      </a:pPr>
+                      <a:r>
+                        <a:rPr lang="en-US" sz="1100" u="none" strike="noStrike">
+                          <a:effectLst/>
+                        </a:rPr>
+                        <a:t>[(23, 22), (24, 21)]</a:t>
+                      </a:r>
+                      <a:endParaRPr lang="en-US" sz="1100" b="0" i="0" u="none" strike="noStrike">
+                        <a:solidFill>
+                          <a:srgbClr val="000000"/>
+                        </a:solidFill>
+                        <a:effectLst/>
+                        <a:latin typeface="Calibri" panose="020F0502020204030204" pitchFamily="34" charset="0"/>
+                      </a:endParaRPr>
+                    </a:p>
+                  </a:txBody>
+                  <a:tcPr marL="9525" marR="9525" marT="9525" marB="0" anchor="b"/>
+                </a:tc>
+                <a:tc>
+                  <a:txBody>
+                    <a:bodyPr/>
+                    <a:lstStyle/>
+                    <a:p>
+                      <a:pPr algn="r" fontAlgn="b">
+                        <a:buNone/>
+                      </a:pPr>
+                      <a:r>
+                        <a:rPr lang="en-US" sz="1100" u="none" strike="noStrike">
+                          <a:effectLst/>
+                        </a:rPr>
+                        <a:t>2</a:t>
+                      </a:r>
+                      <a:endParaRPr lang="en-US" sz="1100" b="0" i="0" u="none" strike="noStrike">
+                        <a:solidFill>
+                          <a:srgbClr val="000000"/>
+                        </a:solidFill>
+                        <a:effectLst/>
+                        <a:latin typeface="Calibri" panose="020F0502020204030204" pitchFamily="34" charset="0"/>
+                      </a:endParaRPr>
+                    </a:p>
+                  </a:txBody>
+                  <a:tcPr marL="9525" marR="9525" marT="9525" marB="0" anchor="b"/>
+                </a:tc>
+                <a:tc>
+                  <a:txBody>
+                    <a:bodyPr/>
+                    <a:lstStyle/>
+                    <a:p>
+                      <a:pPr algn="r" fontAlgn="b">
+                        <a:buNone/>
+                      </a:pPr>
+                      <a:r>
+                        <a:rPr lang="en-US" sz="1100" u="none" strike="noStrike">
+                          <a:effectLst/>
+                        </a:rPr>
+                        <a:t>1.991468</a:t>
+                      </a:r>
+                      <a:endParaRPr lang="en-US" sz="1100" b="0" i="0" u="none" strike="noStrike">
+                        <a:solidFill>
+                          <a:srgbClr val="000000"/>
+                        </a:solidFill>
+                        <a:effectLst/>
+                        <a:latin typeface="Calibri" panose="020F0502020204030204" pitchFamily="34" charset="0"/>
+                      </a:endParaRPr>
+                    </a:p>
+                  </a:txBody>
+                  <a:tcPr marL="9525" marR="9525" marT="9525" marB="0" anchor="b"/>
+                </a:tc>
+                <a:tc>
+                  <a:txBody>
+                    <a:bodyPr/>
+                    <a:lstStyle/>
+                    <a:p>
+                      <a:pPr algn="l" fontAlgn="b">
+                        <a:buNone/>
+                      </a:pPr>
+                      <a:r>
+                        <a:rPr lang="en-US" sz="1100" u="none" strike="noStrike">
+                          <a:effectLst/>
+                        </a:rPr>
+                        <a:t>TT</a:t>
+                      </a:r>
+                      <a:endParaRPr lang="en-US" sz="1100" b="0" i="0" u="none" strike="noStrike">
+                        <a:solidFill>
+                          <a:srgbClr val="000000"/>
+                        </a:solidFill>
+                        <a:effectLst/>
+                        <a:latin typeface="Calibri" panose="020F0502020204030204" pitchFamily="34" charset="0"/>
+                      </a:endParaRPr>
+                    </a:p>
+                  </a:txBody>
+                  <a:tcPr marL="9525" marR="9525" marT="9525" marB="0" anchor="b"/>
+                </a:tc>
+                <a:tc>
+                  <a:txBody>
+                    <a:bodyPr/>
+                    <a:lstStyle/>
+                    <a:p>
+                      <a:pPr algn="l" fontAlgn="b">
+                        <a:buNone/>
+                      </a:pPr>
+                      <a:r>
+                        <a:rPr lang="en-US" sz="1100" u="none" strike="noStrike" dirty="0">
+                          <a:effectLst/>
+                        </a:rPr>
+                        <a:t>AA</a:t>
+                      </a:r>
+                      <a:endParaRPr lang="en-US" sz="1100" b="0" i="0" u="none" strike="noStrike" dirty="0">
+                        <a:solidFill>
+                          <a:srgbClr val="000000"/>
+                        </a:solidFill>
+                        <a:effectLst/>
+                        <a:latin typeface="Calibri" panose="020F0502020204030204" pitchFamily="34" charset="0"/>
+                      </a:endParaRPr>
+                    </a:p>
+                  </a:txBody>
+                  <a:tcPr marL="9525" marR="9525" marT="9525" marB="0" anchor="b"/>
+                </a:tc>
+                <a:extLst>
+                  <a:ext uri="{0D108BD9-81ED-4DB2-BD59-A6C34878D82A}">
+                    <a16:rowId xmlns:a16="http://schemas.microsoft.com/office/drawing/2014/main" val="659174989"/>
+                  </a:ext>
+                </a:extLst>
+              </a:tr>
+            </a:tbl>
+          </a:graphicData>
+        </a:graphic>
+      </p:graphicFrame>
+    </p:spTree>
+    <p:extLst>
+      <p:ext uri="{BB962C8B-B14F-4D97-AF65-F5344CB8AC3E}">
+        <p14:creationId xmlns:p14="http://schemas.microsoft.com/office/powerpoint/2010/main" val="3449857364"/>
+      </p:ext>
+    </p:extLst>
+  </p:cSld>
+  <p:clrMapOvr>
+    <a:masterClrMapping/>
+  </p:clrMapOvr>
+</p:sld>
+</file>
+
 <file path=ppt/slides/slide2.xml><?xml version="1.0" encoding="utf-8"?>
 <p:sld xmlns:a="http://schemas.openxmlformats.org/drawingml/2006/main" xmlns:r="http://schemas.openxmlformats.org/officeDocument/2006/relationships" xmlns:p="http://schemas.openxmlformats.org/presentationml/2006/main">
   <p:cSld>
@@ -3852,6 +5832,12 @@
             <a:endParaRPr lang="en-US" dirty="0"/>
           </a:p>
           <a:p>
+            <a:r>
+              <a:rPr lang="en-US" dirty="0"/>
+              <a:t>Use this to filter out poly-N patterns</a:t>
+            </a:r>
+          </a:p>
+          <a:p>
             <a:pPr lvl="1"/>
             <a:endParaRPr lang="en-US" dirty="0"/>
           </a:p>
@@ -3883,7 +5869,7 @@
         </p:blipFill>
         <p:spPr>
           <a:xfrm>
-            <a:off x="121185" y="2737576"/>
+            <a:off x="121185" y="2974698"/>
             <a:ext cx="6423752" cy="3755299"/>
           </a:xfrm>
           <a:prstGeom prst="rect">
@@ -3906,7 +5892,7 @@
           <p:nvPr>
             <p:extLst>
               <p:ext uri="{D42A27DB-BD31-4B8C-83A1-F6EECF244321}">
-                <p14:modId xmlns:p14="http://schemas.microsoft.com/office/powerpoint/2010/main" val="428764631"/>
+                <p14:modId xmlns:p14="http://schemas.microsoft.com/office/powerpoint/2010/main" val="545062159"/>
               </p:ext>
             </p:extLst>
           </p:nvPr>
@@ -7383,14 +9369,19 @@
             <p:ph type="title"/>
           </p:nvPr>
         </p:nvSpPr>
-        <p:spPr/>
+        <p:spPr>
+          <a:xfrm>
+            <a:off x="0" y="-4841"/>
+            <a:ext cx="10515600" cy="1325563"/>
+          </a:xfrm>
+        </p:spPr>
         <p:txBody>
           <a:bodyPr/>
           <a:lstStyle/>
           <a:p>
             <a:r>
               <a:rPr lang="en-US" dirty="0"/>
-              <a:t>Bootstrapping Parameters </a:t>
+              <a:t>Bootstrapping Notes </a:t>
             </a:r>
           </a:p>
         </p:txBody>
@@ -7411,10 +9402,21 @@
             <p:ph idx="1"/>
           </p:nvPr>
         </p:nvSpPr>
-        <p:spPr/>
+        <p:spPr>
+          <a:xfrm>
+            <a:off x="606845" y="1042720"/>
+            <a:ext cx="10515600" cy="4351338"/>
+          </a:xfrm>
+        </p:spPr>
         <p:txBody>
           <a:bodyPr/>
           <a:lstStyle/>
+          <a:p>
+            <a:r>
+              <a:rPr lang="en-US" dirty="0"/>
+              <a:t>Concept – is our set of diagonal candidates nonrandom, conditional on the observed score distribution </a:t>
+            </a:r>
+          </a:p>
           <a:p>
             <a:r>
               <a:rPr lang="en-US" dirty="0"/>
@@ -7424,8 +9426,23 @@
           <a:p>
             <a:r>
               <a:rPr lang="en-US" dirty="0"/>
-              <a:t>Initial errors – some iterations might have no output if no threshold met </a:t>
+              <a:t>Initial missteps</a:t>
             </a:r>
+          </a:p>
+          <a:p>
+            <a:pPr lvl="1"/>
+            <a:r>
+              <a:rPr lang="en-US" dirty="0"/>
+              <a:t>Some iterations might have no output if threshold met – fix with default to zero</a:t>
+            </a:r>
+          </a:p>
+          <a:p>
+            <a:pPr lvl="1"/>
+            <a:r>
+              <a:rPr lang="en-US" i="1" dirty="0"/>
+              <a:t>Carrying down same threshold from original metrics</a:t>
+            </a:r>
+            <a:endParaRPr lang="en-US" dirty="0"/>
           </a:p>
           <a:p>
             <a:endParaRPr lang="en-US" dirty="0"/>
@@ -7454,8 +9471,39 @@
         </p:blipFill>
         <p:spPr>
           <a:xfrm>
-            <a:off x="1689023" y="4001294"/>
+            <a:off x="444500" y="4893064"/>
             <a:ext cx="7734300" cy="1282700"/>
+          </a:xfrm>
+          <a:prstGeom prst="rect">
+            <a:avLst/>
+          </a:prstGeom>
+        </p:spPr>
+      </p:pic>
+      <p:pic>
+        <p:nvPicPr>
+          <p:cNvPr id="5" name="Picture 4">
+            <a:extLst>
+              <a:ext uri="{FF2B5EF4-FFF2-40B4-BE49-F238E27FC236}">
+                <a16:creationId xmlns:a16="http://schemas.microsoft.com/office/drawing/2014/main" id="{2CDAF189-A650-BF6B-ED9F-E59E2DD99F77}"/>
+              </a:ext>
+            </a:extLst>
+          </p:cNvPr>
+          <p:cNvPicPr>
+            <a:picLocks noChangeAspect="1"/>
+          </p:cNvPicPr>
+          <p:nvPr/>
+        </p:nvPicPr>
+        <p:blipFill>
+          <a:blip r:embed="rId3"/>
+          <a:srcRect l="8457" t="13806" r="4937"/>
+          <a:stretch>
+            <a:fillRect/>
+          </a:stretch>
+        </p:blipFill>
+        <p:spPr>
+          <a:xfrm>
+            <a:off x="6488935" y="5674769"/>
+            <a:ext cx="5563518" cy="1271218"/>
           </a:xfrm>
           <a:prstGeom prst="rect">
             <a:avLst/>
@@ -7476,6 +9524,205 @@
 </file>
 
 <file path=ppt/slides/slide6.xml><?xml version="1.0" encoding="utf-8"?>
+<p:sld xmlns:a="http://schemas.openxmlformats.org/drawingml/2006/main" xmlns:r="http://schemas.openxmlformats.org/officeDocument/2006/relationships" xmlns:p="http://schemas.openxmlformats.org/presentationml/2006/main">
+  <p:cSld>
+    <p:spTree>
+      <p:nvGrpSpPr>
+        <p:cNvPr id="1" name="">
+          <a:extLst>
+            <a:ext uri="{FF2B5EF4-FFF2-40B4-BE49-F238E27FC236}">
+              <a16:creationId xmlns:a16="http://schemas.microsoft.com/office/drawing/2014/main" id="{DB85E851-A635-B5C3-D346-4CBE13617E14}"/>
+            </a:ext>
+          </a:extLst>
+        </p:cNvPr>
+        <p:cNvGrpSpPr/>
+        <p:nvPr/>
+      </p:nvGrpSpPr>
+      <p:grpSpPr>
+        <a:xfrm>
+          <a:off x="0" y="0"/>
+          <a:ext cx="0" cy="0"/>
+          <a:chOff x="0" y="0"/>
+          <a:chExt cx="0" cy="0"/>
+        </a:xfrm>
+      </p:grpSpPr>
+      <p:sp>
+        <p:nvSpPr>
+          <p:cNvPr id="2" name="Title 1">
+            <a:extLst>
+              <a:ext uri="{FF2B5EF4-FFF2-40B4-BE49-F238E27FC236}">
+                <a16:creationId xmlns:a16="http://schemas.microsoft.com/office/drawing/2014/main" id="{048C1608-E5B8-C870-0948-8E0738EF4381}"/>
+              </a:ext>
+            </a:extLst>
+          </p:cNvPr>
+          <p:cNvSpPr>
+            <a:spLocks noGrp="1"/>
+          </p:cNvSpPr>
+          <p:nvPr>
+            <p:ph type="title"/>
+          </p:nvPr>
+        </p:nvSpPr>
+        <p:spPr>
+          <a:xfrm>
+            <a:off x="0" y="-4841"/>
+            <a:ext cx="10515600" cy="1325563"/>
+          </a:xfrm>
+        </p:spPr>
+        <p:txBody>
+          <a:bodyPr/>
+          <a:lstStyle/>
+          <a:p>
+            <a:r>
+              <a:rPr lang="en-US" dirty="0"/>
+              <a:t>Function Library Directory</a:t>
+            </a:r>
+          </a:p>
+        </p:txBody>
+      </p:sp>
+      <p:sp>
+        <p:nvSpPr>
+          <p:cNvPr id="7" name="Content Placeholder 6">
+            <a:extLst>
+              <a:ext uri="{FF2B5EF4-FFF2-40B4-BE49-F238E27FC236}">
+                <a16:creationId xmlns:a16="http://schemas.microsoft.com/office/drawing/2014/main" id="{7641B11F-37BD-4C1C-0FF4-A2D7B5E9C191}"/>
+              </a:ext>
+            </a:extLst>
+          </p:cNvPr>
+          <p:cNvSpPr>
+            <a:spLocks noGrp="1"/>
+          </p:cNvSpPr>
+          <p:nvPr>
+            <p:ph idx="1"/>
+          </p:nvPr>
+        </p:nvSpPr>
+        <p:spPr>
+          <a:xfrm>
+            <a:off x="422564" y="1035915"/>
+            <a:ext cx="10515600" cy="4351338"/>
+          </a:xfrm>
+        </p:spPr>
+        <p:txBody>
+          <a:bodyPr>
+            <a:normAutofit fontScale="85000" lnSpcReduction="20000"/>
+          </a:bodyPr>
+          <a:lstStyle/>
+          <a:p>
+            <a:r>
+              <a:rPr lang="en-US" dirty="0" err="1"/>
+              <a:t>make_ppm</a:t>
+            </a:r>
+            <a:r>
+              <a:rPr lang="en-US" dirty="0"/>
+              <a:t>  - compute base proportions in aligned sequences</a:t>
+            </a:r>
+          </a:p>
+          <a:p>
+            <a:r>
+              <a:rPr lang="en-US" dirty="0" err="1"/>
+              <a:t>complement_ppm</a:t>
+            </a:r>
+            <a:r>
+              <a:rPr lang="en-US" dirty="0"/>
+              <a:t> – simply rearrange bases ATCG </a:t>
+            </a:r>
+            <a:r>
+              <a:rPr lang="en-US" dirty="0">
+                <a:sym typeface="Wingdings" pitchFamily="2" charset="2"/>
+              </a:rPr>
+              <a:t> GCTA</a:t>
+            </a:r>
+          </a:p>
+          <a:p>
+            <a:r>
+              <a:rPr lang="en-US" dirty="0" err="1"/>
+              <a:t>compute_metrics</a:t>
+            </a:r>
+            <a:r>
+              <a:rPr lang="en-US" dirty="0"/>
+              <a:t> – PIC-JSD, PIC, JSD, Pearson</a:t>
+            </a:r>
+          </a:p>
+          <a:p>
+            <a:pPr lvl="1"/>
+            <a:r>
+              <a:rPr lang="en-US" dirty="0" err="1"/>
+              <a:t>positional_information_content</a:t>
+            </a:r>
+            <a:endParaRPr lang="en-US" dirty="0"/>
+          </a:p>
+          <a:p>
+            <a:pPr lvl="1"/>
+            <a:r>
+              <a:rPr lang="en-US" dirty="0" err="1"/>
+              <a:t>jensen_shannon</a:t>
+            </a:r>
+            <a:endParaRPr lang="en-US" dirty="0"/>
+          </a:p>
+          <a:p>
+            <a:pPr lvl="1"/>
+            <a:r>
+              <a:rPr lang="en-US" dirty="0"/>
+              <a:t>Pearson</a:t>
+            </a:r>
+          </a:p>
+          <a:p>
+            <a:r>
+              <a:rPr lang="en-US" dirty="0" err="1"/>
+              <a:t>score_diagonals</a:t>
+            </a:r>
+            <a:endParaRPr lang="en-US" dirty="0"/>
+          </a:p>
+          <a:p>
+            <a:r>
+              <a:rPr lang="en-US" dirty="0" err="1"/>
+              <a:t>shuffle_metrics</a:t>
+            </a:r>
+            <a:endParaRPr lang="en-US" dirty="0"/>
+          </a:p>
+          <a:p>
+            <a:r>
+              <a:rPr lang="en-US" dirty="0" err="1"/>
+              <a:t>scoring_bootstrap</a:t>
+            </a:r>
+            <a:endParaRPr lang="en-US" dirty="0"/>
+          </a:p>
+          <a:p>
+            <a:r>
+              <a:rPr lang="en-US" dirty="0" err="1"/>
+              <a:t>visualize_matrix</a:t>
+            </a:r>
+            <a:endParaRPr lang="en-US" dirty="0"/>
+          </a:p>
+          <a:p>
+            <a:r>
+              <a:rPr lang="en-US" dirty="0" err="1"/>
+              <a:t>histogram_scores</a:t>
+            </a:r>
+            <a:endParaRPr lang="en-US" dirty="0"/>
+          </a:p>
+          <a:p>
+            <a:r>
+              <a:rPr lang="en-US" dirty="0" err="1"/>
+              <a:t>map_back</a:t>
+            </a:r>
+            <a:endParaRPr lang="en-US" dirty="0"/>
+          </a:p>
+        </p:txBody>
+      </p:sp>
+    </p:spTree>
+    <p:extLst>
+      <p:ext uri="{BB962C8B-B14F-4D97-AF65-F5344CB8AC3E}">
+        <p14:creationId xmlns:p14="http://schemas.microsoft.com/office/powerpoint/2010/main" val="1574456862"/>
+      </p:ext>
+    </p:extLst>
+  </p:cSld>
+  <p:clrMapOvr>
+    <a:masterClrMapping/>
+  </p:clrMapOvr>
+</p:sld>
+</file>
+
+<file path=ppt/slides/slide7.xml><?xml version="1.0" encoding="utf-8"?>
 <p:sld xmlns:a="http://schemas.openxmlformats.org/drawingml/2006/main" xmlns:r="http://schemas.openxmlformats.org/officeDocument/2006/relationships" xmlns:p="http://schemas.openxmlformats.org/presentationml/2006/main">
   <p:cSld>
     <p:spTree>
@@ -7508,14 +9755,19 @@
             <p:ph type="title"/>
           </p:nvPr>
         </p:nvSpPr>
-        <p:spPr/>
+        <p:spPr>
+          <a:xfrm>
+            <a:off x="116114" y="103630"/>
+            <a:ext cx="10515600" cy="1325563"/>
+          </a:xfrm>
+        </p:spPr>
         <p:txBody>
           <a:bodyPr/>
           <a:lstStyle/>
           <a:p>
             <a:r>
               <a:rPr lang="en-US" dirty="0"/>
-              <a:t>M1 E1</a:t>
+              <a:t>Ex1 Mo1 80pct threshold</a:t>
             </a:r>
           </a:p>
         </p:txBody>
@@ -7544,15 +9796,3818 @@
         </p:blipFill>
         <p:spPr>
           <a:xfrm>
-            <a:off x="4748270" y="220718"/>
+            <a:off x="6257755" y="-40777"/>
             <a:ext cx="5517614" cy="1469970"/>
           </a:xfrm>
+        </p:spPr>
+      </p:pic>
+      <p:pic>
+        <p:nvPicPr>
+          <p:cNvPr id="8" name="Picture 7">
+            <a:extLst>
+              <a:ext uri="{FF2B5EF4-FFF2-40B4-BE49-F238E27FC236}">
+                <a16:creationId xmlns:a16="http://schemas.microsoft.com/office/drawing/2014/main" id="{C637EE45-EB45-F46D-546E-DB7E35F29DD2}"/>
+              </a:ext>
+            </a:extLst>
+          </p:cNvPr>
+          <p:cNvPicPr>
+            <a:picLocks noChangeAspect="1"/>
+          </p:cNvPicPr>
+          <p:nvPr/>
+        </p:nvPicPr>
+        <p:blipFill>
+          <a:blip r:embed="rId3"/>
+          <a:stretch>
+            <a:fillRect/>
+          </a:stretch>
+        </p:blipFill>
+        <p:spPr>
+          <a:xfrm>
+            <a:off x="6257755" y="1429193"/>
+            <a:ext cx="6172200" cy="5455227"/>
+          </a:xfrm>
+          <a:prstGeom prst="rect">
+            <a:avLst/>
+          </a:prstGeom>
+        </p:spPr>
+      </p:pic>
+      <p:pic>
+        <p:nvPicPr>
+          <p:cNvPr id="12" name="Picture 11">
+            <a:extLst>
+              <a:ext uri="{FF2B5EF4-FFF2-40B4-BE49-F238E27FC236}">
+                <a16:creationId xmlns:a16="http://schemas.microsoft.com/office/drawing/2014/main" id="{02D793EC-E7A1-B323-D639-2CE3E906B4E9}"/>
+              </a:ext>
+            </a:extLst>
+          </p:cNvPr>
+          <p:cNvPicPr>
+            <a:picLocks noChangeAspect="1"/>
+          </p:cNvPicPr>
+          <p:nvPr/>
+        </p:nvPicPr>
+        <p:blipFill>
+          <a:blip r:embed="rId4"/>
+          <a:stretch>
+            <a:fillRect/>
+          </a:stretch>
+        </p:blipFill>
+        <p:spPr>
+          <a:xfrm>
+            <a:off x="124282" y="1573600"/>
+            <a:ext cx="6336077" cy="4341044"/>
+          </a:xfrm>
+          <a:prstGeom prst="rect">
+            <a:avLst/>
+          </a:prstGeom>
         </p:spPr>
       </p:pic>
     </p:spTree>
     <p:extLst>
       <p:ext uri="{BB962C8B-B14F-4D97-AF65-F5344CB8AC3E}">
         <p14:creationId xmlns:p14="http://schemas.microsoft.com/office/powerpoint/2010/main" val="1537526273"/>
+      </p:ext>
+    </p:extLst>
+  </p:cSld>
+  <p:clrMapOvr>
+    <a:masterClrMapping/>
+  </p:clrMapOvr>
+</p:sld>
+</file>
+
+<file path=ppt/slides/slide8.xml><?xml version="1.0" encoding="utf-8"?>
+<p:sld xmlns:a="http://schemas.openxmlformats.org/drawingml/2006/main" xmlns:r="http://schemas.openxmlformats.org/officeDocument/2006/relationships" xmlns:p="http://schemas.openxmlformats.org/presentationml/2006/main">
+  <p:cSld>
+    <p:spTree>
+      <p:nvGrpSpPr>
+        <p:cNvPr id="1" name="">
+          <a:extLst>
+            <a:ext uri="{FF2B5EF4-FFF2-40B4-BE49-F238E27FC236}">
+              <a16:creationId xmlns:a16="http://schemas.microsoft.com/office/drawing/2014/main" id="{435E534E-5428-97F9-158B-213466378998}"/>
+            </a:ext>
+          </a:extLst>
+        </p:cNvPr>
+        <p:cNvGrpSpPr/>
+        <p:nvPr/>
+      </p:nvGrpSpPr>
+      <p:grpSpPr>
+        <a:xfrm>
+          <a:off x="0" y="0"/>
+          <a:ext cx="0" cy="0"/>
+          <a:chOff x="0" y="0"/>
+          <a:chExt cx="0" cy="0"/>
+        </a:xfrm>
+      </p:grpSpPr>
+      <p:sp>
+        <p:nvSpPr>
+          <p:cNvPr id="2" name="Title 1">
+            <a:extLst>
+              <a:ext uri="{FF2B5EF4-FFF2-40B4-BE49-F238E27FC236}">
+                <a16:creationId xmlns:a16="http://schemas.microsoft.com/office/drawing/2014/main" id="{38F6D5DE-1B81-9F08-D3EF-DD68CCE93315}"/>
+              </a:ext>
+            </a:extLst>
+          </p:cNvPr>
+          <p:cNvSpPr>
+            <a:spLocks noGrp="1"/>
+          </p:cNvSpPr>
+          <p:nvPr>
+            <p:ph type="title"/>
+          </p:nvPr>
+        </p:nvSpPr>
+        <p:spPr>
+          <a:xfrm>
+            <a:off x="116114" y="103630"/>
+            <a:ext cx="10515600" cy="1325563"/>
+          </a:xfrm>
+        </p:spPr>
+        <p:txBody>
+          <a:bodyPr/>
+          <a:lstStyle/>
+          <a:p>
+            <a:r>
+              <a:rPr lang="en-US" dirty="0"/>
+              <a:t>Ex1 Mo1 Output</a:t>
+            </a:r>
+          </a:p>
+        </p:txBody>
+      </p:sp>
+      <p:pic>
+        <p:nvPicPr>
+          <p:cNvPr id="5" name="Content Placeholder 4" descr="A colorful text on a black background&#10;&#10;AI-generated content may be incorrect.">
+            <a:extLst>
+              <a:ext uri="{FF2B5EF4-FFF2-40B4-BE49-F238E27FC236}">
+                <a16:creationId xmlns:a16="http://schemas.microsoft.com/office/drawing/2014/main" id="{CBF17B16-A857-5A22-A46B-60FC6CEC4FAB}"/>
+              </a:ext>
+            </a:extLst>
+          </p:cNvPr>
+          <p:cNvPicPr>
+            <a:picLocks noGrp="1" noChangeAspect="1"/>
+          </p:cNvPicPr>
+          <p:nvPr>
+            <p:ph idx="1"/>
+          </p:nvPr>
+        </p:nvPicPr>
+        <p:blipFill>
+          <a:blip r:embed="rId2"/>
+          <a:stretch>
+            <a:fillRect/>
+          </a:stretch>
+        </p:blipFill>
+        <p:spPr>
+          <a:xfrm>
+            <a:off x="6257755" y="-40777"/>
+            <a:ext cx="5517614" cy="1469970"/>
+          </a:xfrm>
+        </p:spPr>
+      </p:pic>
+      <p:graphicFrame>
+        <p:nvGraphicFramePr>
+          <p:cNvPr id="3" name="Table 2">
+            <a:extLst>
+              <a:ext uri="{FF2B5EF4-FFF2-40B4-BE49-F238E27FC236}">
+                <a16:creationId xmlns:a16="http://schemas.microsoft.com/office/drawing/2014/main" id="{45574BC4-7BE7-5965-5C4C-3DF114571897}"/>
+              </a:ext>
+            </a:extLst>
+          </p:cNvPr>
+          <p:cNvGraphicFramePr>
+            <a:graphicFrameLocks noGrp="1"/>
+          </p:cNvGraphicFramePr>
+          <p:nvPr>
+            <p:extLst>
+              <p:ext uri="{D42A27DB-BD31-4B8C-83A1-F6EECF244321}">
+                <p14:modId xmlns:p14="http://schemas.microsoft.com/office/powerpoint/2010/main" val="4043190523"/>
+              </p:ext>
+            </p:extLst>
+          </p:nvPr>
+        </p:nvGraphicFramePr>
+        <p:xfrm>
+          <a:off x="456544" y="1867138"/>
+          <a:ext cx="4917370" cy="2664309"/>
+        </p:xfrm>
+        <a:graphic>
+          <a:graphicData uri="http://schemas.openxmlformats.org/drawingml/2006/table">
+            <a:tbl>
+              <a:tblPr/>
+              <a:tblGrid>
+                <a:gridCol w="1708502">
+                  <a:extLst>
+                    <a:ext uri="{9D8B030D-6E8A-4147-A177-3AD203B41FA5}">
+                      <a16:colId xmlns:a16="http://schemas.microsoft.com/office/drawing/2014/main" val="3691229965"/>
+                    </a:ext>
+                  </a:extLst>
+                </a:gridCol>
+                <a:gridCol w="443428">
+                  <a:extLst>
+                    <a:ext uri="{9D8B030D-6E8A-4147-A177-3AD203B41FA5}">
+                      <a16:colId xmlns:a16="http://schemas.microsoft.com/office/drawing/2014/main" val="1150817240"/>
+                    </a:ext>
+                  </a:extLst>
+                </a:gridCol>
+                <a:gridCol w="971333">
+                  <a:extLst>
+                    <a:ext uri="{9D8B030D-6E8A-4147-A177-3AD203B41FA5}">
+                      <a16:colId xmlns:a16="http://schemas.microsoft.com/office/drawing/2014/main" val="2630234833"/>
+                    </a:ext>
+                  </a:extLst>
+                </a:gridCol>
+                <a:gridCol w="982759">
+                  <a:extLst>
+                    <a:ext uri="{9D8B030D-6E8A-4147-A177-3AD203B41FA5}">
+                      <a16:colId xmlns:a16="http://schemas.microsoft.com/office/drawing/2014/main" val="1519388509"/>
+                    </a:ext>
+                  </a:extLst>
+                </a:gridCol>
+                <a:gridCol w="811348">
+                  <a:extLst>
+                    <a:ext uri="{9D8B030D-6E8A-4147-A177-3AD203B41FA5}">
+                      <a16:colId xmlns:a16="http://schemas.microsoft.com/office/drawing/2014/main" val="2584995775"/>
+                    </a:ext>
+                  </a:extLst>
+                </a:gridCol>
+              </a:tblGrid>
+              <a:tr h="217899">
+                <a:tc>
+                  <a:txBody>
+                    <a:bodyPr/>
+                    <a:lstStyle/>
+                    <a:p>
+                      <a:pPr algn="l" fontAlgn="b">
+                        <a:buNone/>
+                      </a:pPr>
+                      <a:r>
+                        <a:rPr lang="en-US" sz="1200" b="0" i="0" u="none" strike="noStrike">
+                          <a:solidFill>
+                            <a:srgbClr val="000000"/>
+                          </a:solidFill>
+                          <a:effectLst/>
+                          <a:latin typeface="Aptos Narrow" panose="020B0004020202020204" pitchFamily="34" charset="0"/>
+                        </a:rPr>
+                        <a:t>coords</a:t>
+                      </a:r>
+                    </a:p>
+                  </a:txBody>
+                  <a:tcPr marL="9525" marR="9525" marT="9525" marB="0" anchor="b">
+                    <a:lnL w="12700" cap="flat" cmpd="sng" algn="ctr">
+                      <a:solidFill>
+                        <a:schemeClr val="tx1"/>
+                      </a:solidFill>
+                      <a:prstDash val="solid"/>
+                      <a:round/>
+                      <a:headEnd type="none" w="med" len="med"/>
+                      <a:tailEnd type="none" w="med" len="med"/>
+                    </a:lnL>
+                    <a:lnR w="12700" cap="flat" cmpd="sng" algn="ctr">
+                      <a:solidFill>
+                        <a:schemeClr val="tx1"/>
+                      </a:solidFill>
+                      <a:prstDash val="solid"/>
+                      <a:round/>
+                      <a:headEnd type="none" w="med" len="med"/>
+                      <a:tailEnd type="none" w="med" len="med"/>
+                    </a:lnR>
+                    <a:lnT w="12700" cap="flat" cmpd="sng" algn="ctr">
+                      <a:solidFill>
+                        <a:schemeClr val="tx1"/>
+                      </a:solidFill>
+                      <a:prstDash val="solid"/>
+                      <a:round/>
+                      <a:headEnd type="none" w="med" len="med"/>
+                      <a:tailEnd type="none" w="med" len="med"/>
+                    </a:lnT>
+                    <a:lnB w="12700" cap="flat" cmpd="sng" algn="ctr">
+                      <a:solidFill>
+                        <a:schemeClr val="tx1"/>
+                      </a:solidFill>
+                      <a:prstDash val="solid"/>
+                      <a:round/>
+                      <a:headEnd type="none" w="med" len="med"/>
+                      <a:tailEnd type="none" w="med" len="med"/>
+                    </a:lnB>
+                    <a:noFill/>
+                  </a:tcPr>
+                </a:tc>
+                <a:tc>
+                  <a:txBody>
+                    <a:bodyPr/>
+                    <a:lstStyle/>
+                    <a:p>
+                      <a:pPr algn="l" fontAlgn="b">
+                        <a:buNone/>
+                      </a:pPr>
+                      <a:r>
+                        <a:rPr lang="en-US" sz="1200" b="0" i="0" u="none" strike="noStrike">
+                          <a:solidFill>
+                            <a:srgbClr val="000000"/>
+                          </a:solidFill>
+                          <a:effectLst/>
+                          <a:latin typeface="Aptos Narrow" panose="020B0004020202020204" pitchFamily="34" charset="0"/>
+                        </a:rPr>
+                        <a:t>length</a:t>
+                      </a:r>
+                    </a:p>
+                  </a:txBody>
+                  <a:tcPr marL="9525" marR="9525" marT="9525" marB="0" anchor="b">
+                    <a:lnL w="12700" cap="flat" cmpd="sng" algn="ctr">
+                      <a:solidFill>
+                        <a:schemeClr val="tx1"/>
+                      </a:solidFill>
+                      <a:prstDash val="solid"/>
+                      <a:round/>
+                      <a:headEnd type="none" w="med" len="med"/>
+                      <a:tailEnd type="none" w="med" len="med"/>
+                    </a:lnL>
+                    <a:lnR w="12700" cap="flat" cmpd="sng" algn="ctr">
+                      <a:solidFill>
+                        <a:schemeClr val="tx1"/>
+                      </a:solidFill>
+                      <a:prstDash val="solid"/>
+                      <a:round/>
+                      <a:headEnd type="none" w="med" len="med"/>
+                      <a:tailEnd type="none" w="med" len="med"/>
+                    </a:lnR>
+                    <a:lnT w="12700" cap="flat" cmpd="sng" algn="ctr">
+                      <a:solidFill>
+                        <a:schemeClr val="tx1"/>
+                      </a:solidFill>
+                      <a:prstDash val="solid"/>
+                      <a:round/>
+                      <a:headEnd type="none" w="med" len="med"/>
+                      <a:tailEnd type="none" w="med" len="med"/>
+                    </a:lnT>
+                    <a:lnB w="12700" cap="flat" cmpd="sng" algn="ctr">
+                      <a:solidFill>
+                        <a:schemeClr val="tx1"/>
+                      </a:solidFill>
+                      <a:prstDash val="solid"/>
+                      <a:round/>
+                      <a:headEnd type="none" w="med" len="med"/>
+                      <a:tailEnd type="none" w="med" len="med"/>
+                    </a:lnB>
+                    <a:noFill/>
+                  </a:tcPr>
+                </a:tc>
+                <a:tc>
+                  <a:txBody>
+                    <a:bodyPr/>
+                    <a:lstStyle/>
+                    <a:p>
+                      <a:pPr algn="l" fontAlgn="b">
+                        <a:buNone/>
+                      </a:pPr>
+                      <a:r>
+                        <a:rPr lang="en-US" sz="1200" b="0" i="0" u="none" strike="noStrike">
+                          <a:solidFill>
+                            <a:srgbClr val="000000"/>
+                          </a:solidFill>
+                          <a:effectLst/>
+                          <a:latin typeface="Aptos Narrow" panose="020B0004020202020204" pitchFamily="34" charset="0"/>
+                        </a:rPr>
+                        <a:t>score</a:t>
+                      </a:r>
+                    </a:p>
+                  </a:txBody>
+                  <a:tcPr marL="9525" marR="9525" marT="9525" marB="0" anchor="b">
+                    <a:lnL w="12700" cap="flat" cmpd="sng" algn="ctr">
+                      <a:solidFill>
+                        <a:schemeClr val="tx1"/>
+                      </a:solidFill>
+                      <a:prstDash val="solid"/>
+                      <a:round/>
+                      <a:headEnd type="none" w="med" len="med"/>
+                      <a:tailEnd type="none" w="med" len="med"/>
+                    </a:lnL>
+                    <a:lnR w="12700" cap="flat" cmpd="sng" algn="ctr">
+                      <a:solidFill>
+                        <a:schemeClr val="tx1"/>
+                      </a:solidFill>
+                      <a:prstDash val="solid"/>
+                      <a:round/>
+                      <a:headEnd type="none" w="med" len="med"/>
+                      <a:tailEnd type="none" w="med" len="med"/>
+                    </a:lnR>
+                    <a:lnT w="12700" cap="flat" cmpd="sng" algn="ctr">
+                      <a:solidFill>
+                        <a:schemeClr val="tx1"/>
+                      </a:solidFill>
+                      <a:prstDash val="solid"/>
+                      <a:round/>
+                      <a:headEnd type="none" w="med" len="med"/>
+                      <a:tailEnd type="none" w="med" len="med"/>
+                    </a:lnT>
+                    <a:lnB w="12700" cap="flat" cmpd="sng" algn="ctr">
+                      <a:solidFill>
+                        <a:schemeClr val="tx1"/>
+                      </a:solidFill>
+                      <a:prstDash val="solid"/>
+                      <a:round/>
+                      <a:headEnd type="none" w="med" len="med"/>
+                      <a:tailEnd type="none" w="med" len="med"/>
+                    </a:lnB>
+                    <a:noFill/>
+                  </a:tcPr>
+                </a:tc>
+                <a:tc>
+                  <a:txBody>
+                    <a:bodyPr/>
+                    <a:lstStyle/>
+                    <a:p>
+                      <a:pPr algn="ctr" fontAlgn="b">
+                        <a:buNone/>
+                      </a:pPr>
+                      <a:r>
+                        <a:rPr lang="en-US" sz="1200" b="0" i="0" u="none" strike="noStrike" dirty="0">
+                          <a:solidFill>
+                            <a:srgbClr val="000000"/>
+                          </a:solidFill>
+                          <a:effectLst/>
+                          <a:latin typeface="Aptos Narrow" panose="020B0004020202020204" pitchFamily="34" charset="0"/>
+                        </a:rPr>
+                        <a:t>group1</a:t>
+                      </a:r>
+                    </a:p>
+                  </a:txBody>
+                  <a:tcPr marL="9525" marR="9525" marT="9525" marB="0" anchor="b">
+                    <a:lnL w="12700" cap="flat" cmpd="sng" algn="ctr">
+                      <a:solidFill>
+                        <a:schemeClr val="tx1"/>
+                      </a:solidFill>
+                      <a:prstDash val="solid"/>
+                      <a:round/>
+                      <a:headEnd type="none" w="med" len="med"/>
+                      <a:tailEnd type="none" w="med" len="med"/>
+                    </a:lnL>
+                    <a:lnR w="12700" cap="flat" cmpd="sng" algn="ctr">
+                      <a:solidFill>
+                        <a:schemeClr val="tx1"/>
+                      </a:solidFill>
+                      <a:prstDash val="solid"/>
+                      <a:round/>
+                      <a:headEnd type="none" w="med" len="med"/>
+                      <a:tailEnd type="none" w="med" len="med"/>
+                    </a:lnR>
+                    <a:lnT w="12700" cap="flat" cmpd="sng" algn="ctr">
+                      <a:solidFill>
+                        <a:schemeClr val="tx1"/>
+                      </a:solidFill>
+                      <a:prstDash val="solid"/>
+                      <a:round/>
+                      <a:headEnd type="none" w="med" len="med"/>
+                      <a:tailEnd type="none" w="med" len="med"/>
+                    </a:lnT>
+                    <a:lnB w="12700" cap="flat" cmpd="sng" algn="ctr">
+                      <a:solidFill>
+                        <a:schemeClr val="tx1"/>
+                      </a:solidFill>
+                      <a:prstDash val="solid"/>
+                      <a:round/>
+                      <a:headEnd type="none" w="med" len="med"/>
+                      <a:tailEnd type="none" w="med" len="med"/>
+                    </a:lnB>
+                    <a:noFill/>
+                  </a:tcPr>
+                </a:tc>
+                <a:tc>
+                  <a:txBody>
+                    <a:bodyPr/>
+                    <a:lstStyle/>
+                    <a:p>
+                      <a:pPr algn="ctr" fontAlgn="b">
+                        <a:buNone/>
+                      </a:pPr>
+                      <a:r>
+                        <a:rPr lang="en-US" sz="1200" b="0" i="0" u="none" strike="noStrike">
+                          <a:solidFill>
+                            <a:srgbClr val="000000"/>
+                          </a:solidFill>
+                          <a:effectLst/>
+                          <a:latin typeface="Aptos Narrow" panose="020B0004020202020204" pitchFamily="34" charset="0"/>
+                        </a:rPr>
+                        <a:t>group2</a:t>
+                      </a:r>
+                    </a:p>
+                  </a:txBody>
+                  <a:tcPr marL="9525" marR="9525" marT="9525" marB="0" anchor="b">
+                    <a:lnL w="12700" cap="flat" cmpd="sng" algn="ctr">
+                      <a:solidFill>
+                        <a:schemeClr val="tx1"/>
+                      </a:solidFill>
+                      <a:prstDash val="solid"/>
+                      <a:round/>
+                      <a:headEnd type="none" w="med" len="med"/>
+                      <a:tailEnd type="none" w="med" len="med"/>
+                    </a:lnL>
+                    <a:lnR w="12700" cap="flat" cmpd="sng" algn="ctr">
+                      <a:solidFill>
+                        <a:schemeClr val="tx1"/>
+                      </a:solidFill>
+                      <a:prstDash val="solid"/>
+                      <a:round/>
+                      <a:headEnd type="none" w="med" len="med"/>
+                      <a:tailEnd type="none" w="med" len="med"/>
+                    </a:lnR>
+                    <a:lnT w="12700" cap="flat" cmpd="sng" algn="ctr">
+                      <a:solidFill>
+                        <a:schemeClr val="tx1"/>
+                      </a:solidFill>
+                      <a:prstDash val="solid"/>
+                      <a:round/>
+                      <a:headEnd type="none" w="med" len="med"/>
+                      <a:tailEnd type="none" w="med" len="med"/>
+                    </a:lnT>
+                    <a:lnB w="12700" cap="flat" cmpd="sng" algn="ctr">
+                      <a:solidFill>
+                        <a:schemeClr val="tx1"/>
+                      </a:solidFill>
+                      <a:prstDash val="solid"/>
+                      <a:round/>
+                      <a:headEnd type="none" w="med" len="med"/>
+                      <a:tailEnd type="none" w="med" len="med"/>
+                    </a:lnB>
+                    <a:noFill/>
+                  </a:tcPr>
+                </a:tc>
+                <a:extLst>
+                  <a:ext uri="{0D108BD9-81ED-4DB2-BD59-A6C34878D82A}">
+                    <a16:rowId xmlns:a16="http://schemas.microsoft.com/office/drawing/2014/main" val="3668527904"/>
+                  </a:ext>
+                </a:extLst>
+              </a:tr>
+              <a:tr h="299603">
+                <a:tc>
+                  <a:txBody>
+                    <a:bodyPr/>
+                    <a:lstStyle/>
+                    <a:p>
+                      <a:pPr algn="l" fontAlgn="b">
+                        <a:buNone/>
+                      </a:pPr>
+                      <a:r>
+                        <a:rPr lang="en-US" sz="1200" b="0" i="0" u="none" strike="noStrike">
+                          <a:solidFill>
+                            <a:srgbClr val="000000"/>
+                          </a:solidFill>
+                          <a:effectLst/>
+                          <a:latin typeface="Aptos Narrow" panose="020B0004020202020204" pitchFamily="34" charset="0"/>
+                        </a:rPr>
+                        <a:t>[(16, 5), (17, 6), (18, 7), (19, 8)]</a:t>
+                      </a:r>
+                    </a:p>
+                  </a:txBody>
+                  <a:tcPr marL="9525" marR="9525" marT="9525" marB="0" anchor="b">
+                    <a:lnL w="12700" cap="flat" cmpd="sng" algn="ctr">
+                      <a:solidFill>
+                        <a:schemeClr val="tx1"/>
+                      </a:solidFill>
+                      <a:prstDash val="solid"/>
+                      <a:round/>
+                      <a:headEnd type="none" w="med" len="med"/>
+                      <a:tailEnd type="none" w="med" len="med"/>
+                    </a:lnL>
+                    <a:lnR w="12700" cap="flat" cmpd="sng" algn="ctr">
+                      <a:solidFill>
+                        <a:schemeClr val="tx1"/>
+                      </a:solidFill>
+                      <a:prstDash val="solid"/>
+                      <a:round/>
+                      <a:headEnd type="none" w="med" len="med"/>
+                      <a:tailEnd type="none" w="med" len="med"/>
+                    </a:lnR>
+                    <a:lnT w="12700" cap="flat" cmpd="sng" algn="ctr">
+                      <a:solidFill>
+                        <a:schemeClr val="tx1"/>
+                      </a:solidFill>
+                      <a:prstDash val="solid"/>
+                      <a:round/>
+                      <a:headEnd type="none" w="med" len="med"/>
+                      <a:tailEnd type="none" w="med" len="med"/>
+                    </a:lnT>
+                    <a:lnB w="12700" cap="flat" cmpd="sng" algn="ctr">
+                      <a:solidFill>
+                        <a:schemeClr val="tx1"/>
+                      </a:solidFill>
+                      <a:prstDash val="solid"/>
+                      <a:round/>
+                      <a:headEnd type="none" w="med" len="med"/>
+                      <a:tailEnd type="none" w="med" len="med"/>
+                    </a:lnB>
+                    <a:noFill/>
+                  </a:tcPr>
+                </a:tc>
+                <a:tc>
+                  <a:txBody>
+                    <a:bodyPr/>
+                    <a:lstStyle/>
+                    <a:p>
+                      <a:pPr algn="r" fontAlgn="b">
+                        <a:buNone/>
+                      </a:pPr>
+                      <a:r>
+                        <a:rPr lang="en-US" sz="1200" b="0" i="0" u="none" strike="noStrike">
+                          <a:solidFill>
+                            <a:srgbClr val="000000"/>
+                          </a:solidFill>
+                          <a:effectLst/>
+                          <a:latin typeface="Aptos Narrow" panose="020B0004020202020204" pitchFamily="34" charset="0"/>
+                        </a:rPr>
+                        <a:t>4</a:t>
+                      </a:r>
+                    </a:p>
+                  </a:txBody>
+                  <a:tcPr marL="9525" marR="9525" marT="9525" marB="0" anchor="b">
+                    <a:lnL w="12700" cap="flat" cmpd="sng" algn="ctr">
+                      <a:solidFill>
+                        <a:schemeClr val="tx1"/>
+                      </a:solidFill>
+                      <a:prstDash val="solid"/>
+                      <a:round/>
+                      <a:headEnd type="none" w="med" len="med"/>
+                      <a:tailEnd type="none" w="med" len="med"/>
+                    </a:lnL>
+                    <a:lnR w="12700" cap="flat" cmpd="sng" algn="ctr">
+                      <a:solidFill>
+                        <a:schemeClr val="tx1"/>
+                      </a:solidFill>
+                      <a:prstDash val="solid"/>
+                      <a:round/>
+                      <a:headEnd type="none" w="med" len="med"/>
+                      <a:tailEnd type="none" w="med" len="med"/>
+                    </a:lnR>
+                    <a:lnT w="12700" cap="flat" cmpd="sng" algn="ctr">
+                      <a:solidFill>
+                        <a:schemeClr val="tx1"/>
+                      </a:solidFill>
+                      <a:prstDash val="solid"/>
+                      <a:round/>
+                      <a:headEnd type="none" w="med" len="med"/>
+                      <a:tailEnd type="none" w="med" len="med"/>
+                    </a:lnT>
+                    <a:lnB w="12700" cap="flat" cmpd="sng" algn="ctr">
+                      <a:solidFill>
+                        <a:schemeClr val="tx1"/>
+                      </a:solidFill>
+                      <a:prstDash val="solid"/>
+                      <a:round/>
+                      <a:headEnd type="none" w="med" len="med"/>
+                      <a:tailEnd type="none" w="med" len="med"/>
+                    </a:lnB>
+                    <a:noFill/>
+                  </a:tcPr>
+                </a:tc>
+                <a:tc>
+                  <a:txBody>
+                    <a:bodyPr/>
+                    <a:lstStyle/>
+                    <a:p>
+                      <a:pPr algn="r" fontAlgn="b">
+                        <a:buNone/>
+                      </a:pPr>
+                      <a:r>
+                        <a:rPr lang="en-US" sz="1200" b="0" i="0" u="none" strike="noStrike">
+                          <a:solidFill>
+                            <a:srgbClr val="000000"/>
+                          </a:solidFill>
+                          <a:effectLst/>
+                          <a:latin typeface="Aptos Narrow" panose="020B0004020202020204" pitchFamily="34" charset="0"/>
+                        </a:rPr>
+                        <a:t>6.814348186</a:t>
+                      </a:r>
+                    </a:p>
+                  </a:txBody>
+                  <a:tcPr marL="9525" marR="9525" marT="9525" marB="0" anchor="b">
+                    <a:lnL w="12700" cap="flat" cmpd="sng" algn="ctr">
+                      <a:solidFill>
+                        <a:schemeClr val="tx1"/>
+                      </a:solidFill>
+                      <a:prstDash val="solid"/>
+                      <a:round/>
+                      <a:headEnd type="none" w="med" len="med"/>
+                      <a:tailEnd type="none" w="med" len="med"/>
+                    </a:lnL>
+                    <a:lnR w="12700" cap="flat" cmpd="sng" algn="ctr">
+                      <a:solidFill>
+                        <a:schemeClr val="tx1"/>
+                      </a:solidFill>
+                      <a:prstDash val="solid"/>
+                      <a:round/>
+                      <a:headEnd type="none" w="med" len="med"/>
+                      <a:tailEnd type="none" w="med" len="med"/>
+                    </a:lnR>
+                    <a:lnT w="12700" cap="flat" cmpd="sng" algn="ctr">
+                      <a:solidFill>
+                        <a:schemeClr val="tx1"/>
+                      </a:solidFill>
+                      <a:prstDash val="solid"/>
+                      <a:round/>
+                      <a:headEnd type="none" w="med" len="med"/>
+                      <a:tailEnd type="none" w="med" len="med"/>
+                    </a:lnT>
+                    <a:lnB w="12700" cap="flat" cmpd="sng" algn="ctr">
+                      <a:solidFill>
+                        <a:schemeClr val="tx1"/>
+                      </a:solidFill>
+                      <a:prstDash val="solid"/>
+                      <a:round/>
+                      <a:headEnd type="none" w="med" len="med"/>
+                      <a:tailEnd type="none" w="med" len="med"/>
+                    </a:lnB>
+                    <a:noFill/>
+                  </a:tcPr>
+                </a:tc>
+                <a:tc>
+                  <a:txBody>
+                    <a:bodyPr/>
+                    <a:lstStyle/>
+                    <a:p>
+                      <a:pPr algn="ctr" fontAlgn="b">
+                        <a:buNone/>
+                      </a:pPr>
+                      <a:r>
+                        <a:rPr lang="en-US" sz="1200" b="0" i="0" u="none" strike="noStrike" dirty="0">
+                          <a:solidFill>
+                            <a:srgbClr val="000000"/>
+                          </a:solidFill>
+                          <a:effectLst/>
+                          <a:latin typeface="Aptos Narrow" panose="020B0004020202020204" pitchFamily="34" charset="0"/>
+                        </a:rPr>
+                        <a:t>GTCA</a:t>
+                      </a:r>
+                    </a:p>
+                  </a:txBody>
+                  <a:tcPr marL="9525" marR="9525" marT="9525" marB="0" anchor="b">
+                    <a:lnL w="12700" cap="flat" cmpd="sng" algn="ctr">
+                      <a:solidFill>
+                        <a:schemeClr val="tx1"/>
+                      </a:solidFill>
+                      <a:prstDash val="solid"/>
+                      <a:round/>
+                      <a:headEnd type="none" w="med" len="med"/>
+                      <a:tailEnd type="none" w="med" len="med"/>
+                    </a:lnL>
+                    <a:lnR w="12700" cap="flat" cmpd="sng" algn="ctr">
+                      <a:solidFill>
+                        <a:schemeClr val="tx1"/>
+                      </a:solidFill>
+                      <a:prstDash val="solid"/>
+                      <a:round/>
+                      <a:headEnd type="none" w="med" len="med"/>
+                      <a:tailEnd type="none" w="med" len="med"/>
+                    </a:lnR>
+                    <a:lnT w="12700" cap="flat" cmpd="sng" algn="ctr">
+                      <a:solidFill>
+                        <a:schemeClr val="tx1"/>
+                      </a:solidFill>
+                      <a:prstDash val="solid"/>
+                      <a:round/>
+                      <a:headEnd type="none" w="med" len="med"/>
+                      <a:tailEnd type="none" w="med" len="med"/>
+                    </a:lnT>
+                    <a:lnB w="12700" cap="flat" cmpd="sng" algn="ctr">
+                      <a:solidFill>
+                        <a:schemeClr val="tx1"/>
+                      </a:solidFill>
+                      <a:prstDash val="solid"/>
+                      <a:round/>
+                      <a:headEnd type="none" w="med" len="med"/>
+                      <a:tailEnd type="none" w="med" len="med"/>
+                    </a:lnB>
+                    <a:noFill/>
+                  </a:tcPr>
+                </a:tc>
+                <a:tc>
+                  <a:txBody>
+                    <a:bodyPr/>
+                    <a:lstStyle/>
+                    <a:p>
+                      <a:pPr algn="ctr" fontAlgn="b">
+                        <a:buNone/>
+                      </a:pPr>
+                      <a:r>
+                        <a:rPr lang="en-US" sz="1200" b="0" i="0" u="none" strike="noStrike" dirty="0">
+                          <a:solidFill>
+                            <a:srgbClr val="000000"/>
+                          </a:solidFill>
+                          <a:effectLst/>
+                          <a:latin typeface="Aptos Narrow" panose="020B0004020202020204" pitchFamily="34" charset="0"/>
+                        </a:rPr>
+                        <a:t>GTCA</a:t>
+                      </a:r>
+                    </a:p>
+                  </a:txBody>
+                  <a:tcPr marL="9525" marR="9525" marT="9525" marB="0" anchor="b">
+                    <a:lnL w="12700" cap="flat" cmpd="sng" algn="ctr">
+                      <a:solidFill>
+                        <a:schemeClr val="tx1"/>
+                      </a:solidFill>
+                      <a:prstDash val="solid"/>
+                      <a:round/>
+                      <a:headEnd type="none" w="med" len="med"/>
+                      <a:tailEnd type="none" w="med" len="med"/>
+                    </a:lnL>
+                    <a:lnR w="12700" cap="flat" cmpd="sng" algn="ctr">
+                      <a:solidFill>
+                        <a:schemeClr val="tx1"/>
+                      </a:solidFill>
+                      <a:prstDash val="solid"/>
+                      <a:round/>
+                      <a:headEnd type="none" w="med" len="med"/>
+                      <a:tailEnd type="none" w="med" len="med"/>
+                    </a:lnR>
+                    <a:lnT w="12700" cap="flat" cmpd="sng" algn="ctr">
+                      <a:solidFill>
+                        <a:schemeClr val="tx1"/>
+                      </a:solidFill>
+                      <a:prstDash val="solid"/>
+                      <a:round/>
+                      <a:headEnd type="none" w="med" len="med"/>
+                      <a:tailEnd type="none" w="med" len="med"/>
+                    </a:lnT>
+                    <a:lnB w="12700" cap="flat" cmpd="sng" algn="ctr">
+                      <a:solidFill>
+                        <a:schemeClr val="tx1"/>
+                      </a:solidFill>
+                      <a:prstDash val="solid"/>
+                      <a:round/>
+                      <a:headEnd type="none" w="med" len="med"/>
+                      <a:tailEnd type="none" w="med" len="med"/>
+                    </a:lnB>
+                    <a:noFill/>
+                  </a:tcPr>
+                </a:tc>
+                <a:extLst>
+                  <a:ext uri="{0D108BD9-81ED-4DB2-BD59-A6C34878D82A}">
+                    <a16:rowId xmlns:a16="http://schemas.microsoft.com/office/drawing/2014/main" val="3199749146"/>
+                  </a:ext>
+                </a:extLst>
+              </a:tr>
+              <a:tr h="230125">
+                <a:tc>
+                  <a:txBody>
+                    <a:bodyPr/>
+                    <a:lstStyle/>
+                    <a:p>
+                      <a:pPr algn="l" fontAlgn="b">
+                        <a:buNone/>
+                      </a:pPr>
+                      <a:r>
+                        <a:rPr lang="en-US" sz="1200" b="0" i="0" u="none" strike="noStrike">
+                          <a:solidFill>
+                            <a:srgbClr val="000000"/>
+                          </a:solidFill>
+                          <a:effectLst/>
+                          <a:latin typeface="Aptos Narrow" panose="020B0004020202020204" pitchFamily="34" charset="0"/>
+                        </a:rPr>
+                        <a:t>[(11, 10), (12, 11), (13, 12)]</a:t>
+                      </a:r>
+                    </a:p>
+                  </a:txBody>
+                  <a:tcPr marL="9525" marR="9525" marT="9525" marB="0" anchor="b">
+                    <a:lnL w="12700" cap="flat" cmpd="sng" algn="ctr">
+                      <a:solidFill>
+                        <a:schemeClr val="tx1"/>
+                      </a:solidFill>
+                      <a:prstDash val="solid"/>
+                      <a:round/>
+                      <a:headEnd type="none" w="med" len="med"/>
+                      <a:tailEnd type="none" w="med" len="med"/>
+                    </a:lnL>
+                    <a:lnR w="12700" cap="flat" cmpd="sng" algn="ctr">
+                      <a:solidFill>
+                        <a:schemeClr val="tx1"/>
+                      </a:solidFill>
+                      <a:prstDash val="solid"/>
+                      <a:round/>
+                      <a:headEnd type="none" w="med" len="med"/>
+                      <a:tailEnd type="none" w="med" len="med"/>
+                    </a:lnR>
+                    <a:lnT w="12700" cap="flat" cmpd="sng" algn="ctr">
+                      <a:solidFill>
+                        <a:schemeClr val="tx1"/>
+                      </a:solidFill>
+                      <a:prstDash val="solid"/>
+                      <a:round/>
+                      <a:headEnd type="none" w="med" len="med"/>
+                      <a:tailEnd type="none" w="med" len="med"/>
+                    </a:lnT>
+                    <a:lnB w="12700" cap="flat" cmpd="sng" algn="ctr">
+                      <a:solidFill>
+                        <a:schemeClr val="tx1"/>
+                      </a:solidFill>
+                      <a:prstDash val="solid"/>
+                      <a:round/>
+                      <a:headEnd type="none" w="med" len="med"/>
+                      <a:tailEnd type="none" w="med" len="med"/>
+                    </a:lnB>
+                    <a:noFill/>
+                  </a:tcPr>
+                </a:tc>
+                <a:tc>
+                  <a:txBody>
+                    <a:bodyPr/>
+                    <a:lstStyle/>
+                    <a:p>
+                      <a:pPr algn="r" fontAlgn="b">
+                        <a:buNone/>
+                      </a:pPr>
+                      <a:r>
+                        <a:rPr lang="en-US" sz="1200" b="0" i="0" u="none" strike="noStrike">
+                          <a:solidFill>
+                            <a:srgbClr val="000000"/>
+                          </a:solidFill>
+                          <a:effectLst/>
+                          <a:latin typeface="Aptos Narrow" panose="020B0004020202020204" pitchFamily="34" charset="0"/>
+                        </a:rPr>
+                        <a:t>3</a:t>
+                      </a:r>
+                    </a:p>
+                  </a:txBody>
+                  <a:tcPr marL="9525" marR="9525" marT="9525" marB="0" anchor="b">
+                    <a:lnL w="12700" cap="flat" cmpd="sng" algn="ctr">
+                      <a:solidFill>
+                        <a:schemeClr val="tx1"/>
+                      </a:solidFill>
+                      <a:prstDash val="solid"/>
+                      <a:round/>
+                      <a:headEnd type="none" w="med" len="med"/>
+                      <a:tailEnd type="none" w="med" len="med"/>
+                    </a:lnL>
+                    <a:lnR w="12700" cap="flat" cmpd="sng" algn="ctr">
+                      <a:solidFill>
+                        <a:schemeClr val="tx1"/>
+                      </a:solidFill>
+                      <a:prstDash val="solid"/>
+                      <a:round/>
+                      <a:headEnd type="none" w="med" len="med"/>
+                      <a:tailEnd type="none" w="med" len="med"/>
+                    </a:lnR>
+                    <a:lnT w="12700" cap="flat" cmpd="sng" algn="ctr">
+                      <a:solidFill>
+                        <a:schemeClr val="tx1"/>
+                      </a:solidFill>
+                      <a:prstDash val="solid"/>
+                      <a:round/>
+                      <a:headEnd type="none" w="med" len="med"/>
+                      <a:tailEnd type="none" w="med" len="med"/>
+                    </a:lnT>
+                    <a:lnB w="12700" cap="flat" cmpd="sng" algn="ctr">
+                      <a:solidFill>
+                        <a:schemeClr val="tx1"/>
+                      </a:solidFill>
+                      <a:prstDash val="solid"/>
+                      <a:round/>
+                      <a:headEnd type="none" w="med" len="med"/>
+                      <a:tailEnd type="none" w="med" len="med"/>
+                    </a:lnB>
+                    <a:noFill/>
+                  </a:tcPr>
+                </a:tc>
+                <a:tc>
+                  <a:txBody>
+                    <a:bodyPr/>
+                    <a:lstStyle/>
+                    <a:p>
+                      <a:pPr algn="r" fontAlgn="b">
+                        <a:buNone/>
+                      </a:pPr>
+                      <a:r>
+                        <a:rPr lang="en-US" sz="1200" b="0" i="0" u="none" strike="noStrike">
+                          <a:solidFill>
+                            <a:srgbClr val="000000"/>
+                          </a:solidFill>
+                          <a:effectLst/>
+                          <a:latin typeface="Aptos Narrow" panose="020B0004020202020204" pitchFamily="34" charset="0"/>
+                        </a:rPr>
+                        <a:t>5.671366478</a:t>
+                      </a:r>
+                    </a:p>
+                  </a:txBody>
+                  <a:tcPr marL="9525" marR="9525" marT="9525" marB="0" anchor="b">
+                    <a:lnL w="12700" cap="flat" cmpd="sng" algn="ctr">
+                      <a:solidFill>
+                        <a:schemeClr val="tx1"/>
+                      </a:solidFill>
+                      <a:prstDash val="solid"/>
+                      <a:round/>
+                      <a:headEnd type="none" w="med" len="med"/>
+                      <a:tailEnd type="none" w="med" len="med"/>
+                    </a:lnL>
+                    <a:lnR w="12700" cap="flat" cmpd="sng" algn="ctr">
+                      <a:solidFill>
+                        <a:schemeClr val="tx1"/>
+                      </a:solidFill>
+                      <a:prstDash val="solid"/>
+                      <a:round/>
+                      <a:headEnd type="none" w="med" len="med"/>
+                      <a:tailEnd type="none" w="med" len="med"/>
+                    </a:lnR>
+                    <a:lnT w="12700" cap="flat" cmpd="sng" algn="ctr">
+                      <a:solidFill>
+                        <a:schemeClr val="tx1"/>
+                      </a:solidFill>
+                      <a:prstDash val="solid"/>
+                      <a:round/>
+                      <a:headEnd type="none" w="med" len="med"/>
+                      <a:tailEnd type="none" w="med" len="med"/>
+                    </a:lnT>
+                    <a:lnB w="12700" cap="flat" cmpd="sng" algn="ctr">
+                      <a:solidFill>
+                        <a:schemeClr val="tx1"/>
+                      </a:solidFill>
+                      <a:prstDash val="solid"/>
+                      <a:round/>
+                      <a:headEnd type="none" w="med" len="med"/>
+                      <a:tailEnd type="none" w="med" len="med"/>
+                    </a:lnB>
+                    <a:noFill/>
+                  </a:tcPr>
+                </a:tc>
+                <a:tc>
+                  <a:txBody>
+                    <a:bodyPr/>
+                    <a:lstStyle/>
+                    <a:p>
+                      <a:pPr algn="ctr" fontAlgn="b">
+                        <a:buNone/>
+                      </a:pPr>
+                      <a:r>
+                        <a:rPr lang="en-US" sz="1200" b="0" i="0" u="none" strike="noStrike">
+                          <a:solidFill>
+                            <a:srgbClr val="000000"/>
+                          </a:solidFill>
+                          <a:effectLst/>
+                          <a:latin typeface="Aptos Narrow" panose="020B0004020202020204" pitchFamily="34" charset="0"/>
+                        </a:rPr>
+                        <a:t>AAA</a:t>
+                      </a:r>
+                    </a:p>
+                  </a:txBody>
+                  <a:tcPr marL="9525" marR="9525" marT="9525" marB="0" anchor="b">
+                    <a:lnL w="12700" cap="flat" cmpd="sng" algn="ctr">
+                      <a:solidFill>
+                        <a:schemeClr val="tx1"/>
+                      </a:solidFill>
+                      <a:prstDash val="solid"/>
+                      <a:round/>
+                      <a:headEnd type="none" w="med" len="med"/>
+                      <a:tailEnd type="none" w="med" len="med"/>
+                    </a:lnL>
+                    <a:lnR w="12700" cap="flat" cmpd="sng" algn="ctr">
+                      <a:solidFill>
+                        <a:schemeClr val="tx1"/>
+                      </a:solidFill>
+                      <a:prstDash val="solid"/>
+                      <a:round/>
+                      <a:headEnd type="none" w="med" len="med"/>
+                      <a:tailEnd type="none" w="med" len="med"/>
+                    </a:lnR>
+                    <a:lnT w="12700" cap="flat" cmpd="sng" algn="ctr">
+                      <a:solidFill>
+                        <a:schemeClr val="tx1"/>
+                      </a:solidFill>
+                      <a:prstDash val="solid"/>
+                      <a:round/>
+                      <a:headEnd type="none" w="med" len="med"/>
+                      <a:tailEnd type="none" w="med" len="med"/>
+                    </a:lnT>
+                    <a:lnB w="12700" cap="flat" cmpd="sng" algn="ctr">
+                      <a:solidFill>
+                        <a:schemeClr val="tx1"/>
+                      </a:solidFill>
+                      <a:prstDash val="solid"/>
+                      <a:round/>
+                      <a:headEnd type="none" w="med" len="med"/>
+                      <a:tailEnd type="none" w="med" len="med"/>
+                    </a:lnB>
+                    <a:noFill/>
+                  </a:tcPr>
+                </a:tc>
+                <a:tc>
+                  <a:txBody>
+                    <a:bodyPr/>
+                    <a:lstStyle/>
+                    <a:p>
+                      <a:pPr algn="ctr" fontAlgn="b">
+                        <a:buNone/>
+                      </a:pPr>
+                      <a:r>
+                        <a:rPr lang="en-US" sz="1200" b="0" i="0" u="none" strike="noStrike">
+                          <a:solidFill>
+                            <a:srgbClr val="000000"/>
+                          </a:solidFill>
+                          <a:effectLst/>
+                          <a:latin typeface="Aptos Narrow" panose="020B0004020202020204" pitchFamily="34" charset="0"/>
+                        </a:rPr>
+                        <a:t>AAA</a:t>
+                      </a:r>
+                    </a:p>
+                  </a:txBody>
+                  <a:tcPr marL="9525" marR="9525" marT="9525" marB="0" anchor="b">
+                    <a:lnL w="12700" cap="flat" cmpd="sng" algn="ctr">
+                      <a:solidFill>
+                        <a:schemeClr val="tx1"/>
+                      </a:solidFill>
+                      <a:prstDash val="solid"/>
+                      <a:round/>
+                      <a:headEnd type="none" w="med" len="med"/>
+                      <a:tailEnd type="none" w="med" len="med"/>
+                    </a:lnL>
+                    <a:lnR w="12700" cap="flat" cmpd="sng" algn="ctr">
+                      <a:solidFill>
+                        <a:schemeClr val="tx1"/>
+                      </a:solidFill>
+                      <a:prstDash val="solid"/>
+                      <a:round/>
+                      <a:headEnd type="none" w="med" len="med"/>
+                      <a:tailEnd type="none" w="med" len="med"/>
+                    </a:lnR>
+                    <a:lnT w="12700" cap="flat" cmpd="sng" algn="ctr">
+                      <a:solidFill>
+                        <a:schemeClr val="tx1"/>
+                      </a:solidFill>
+                      <a:prstDash val="solid"/>
+                      <a:round/>
+                      <a:headEnd type="none" w="med" len="med"/>
+                      <a:tailEnd type="none" w="med" len="med"/>
+                    </a:lnT>
+                    <a:lnB w="12700" cap="flat" cmpd="sng" algn="ctr">
+                      <a:solidFill>
+                        <a:schemeClr val="tx1"/>
+                      </a:solidFill>
+                      <a:prstDash val="solid"/>
+                      <a:round/>
+                      <a:headEnd type="none" w="med" len="med"/>
+                      <a:tailEnd type="none" w="med" len="med"/>
+                    </a:lnB>
+                    <a:noFill/>
+                  </a:tcPr>
+                </a:tc>
+                <a:extLst>
+                  <a:ext uri="{0D108BD9-81ED-4DB2-BD59-A6C34878D82A}">
+                    <a16:rowId xmlns:a16="http://schemas.microsoft.com/office/drawing/2014/main" val="2884965673"/>
+                  </a:ext>
+                </a:extLst>
+              </a:tr>
+              <a:tr h="230125">
+                <a:tc>
+                  <a:txBody>
+                    <a:bodyPr/>
+                    <a:lstStyle/>
+                    <a:p>
+                      <a:pPr algn="l" fontAlgn="b">
+                        <a:buNone/>
+                      </a:pPr>
+                      <a:r>
+                        <a:rPr lang="en-US" sz="1200" b="0" i="0" u="none" strike="noStrike">
+                          <a:solidFill>
+                            <a:srgbClr val="000000"/>
+                          </a:solidFill>
+                          <a:effectLst/>
+                          <a:latin typeface="Aptos Narrow" panose="020B0004020202020204" pitchFamily="34" charset="0"/>
+                        </a:rPr>
+                        <a:t>[(9, 7), (10, 8)]</a:t>
+                      </a:r>
+                    </a:p>
+                  </a:txBody>
+                  <a:tcPr marL="9525" marR="9525" marT="9525" marB="0" anchor="b">
+                    <a:lnL w="12700" cap="flat" cmpd="sng" algn="ctr">
+                      <a:solidFill>
+                        <a:schemeClr val="tx1"/>
+                      </a:solidFill>
+                      <a:prstDash val="solid"/>
+                      <a:round/>
+                      <a:headEnd type="none" w="med" len="med"/>
+                      <a:tailEnd type="none" w="med" len="med"/>
+                    </a:lnL>
+                    <a:lnR w="12700" cap="flat" cmpd="sng" algn="ctr">
+                      <a:solidFill>
+                        <a:schemeClr val="tx1"/>
+                      </a:solidFill>
+                      <a:prstDash val="solid"/>
+                      <a:round/>
+                      <a:headEnd type="none" w="med" len="med"/>
+                      <a:tailEnd type="none" w="med" len="med"/>
+                    </a:lnR>
+                    <a:lnT w="12700" cap="flat" cmpd="sng" algn="ctr">
+                      <a:solidFill>
+                        <a:schemeClr val="tx1"/>
+                      </a:solidFill>
+                      <a:prstDash val="solid"/>
+                      <a:round/>
+                      <a:headEnd type="none" w="med" len="med"/>
+                      <a:tailEnd type="none" w="med" len="med"/>
+                    </a:lnT>
+                    <a:lnB w="12700" cap="flat" cmpd="sng" algn="ctr">
+                      <a:solidFill>
+                        <a:schemeClr val="tx1"/>
+                      </a:solidFill>
+                      <a:prstDash val="solid"/>
+                      <a:round/>
+                      <a:headEnd type="none" w="med" len="med"/>
+                      <a:tailEnd type="none" w="med" len="med"/>
+                    </a:lnB>
+                    <a:noFill/>
+                  </a:tcPr>
+                </a:tc>
+                <a:tc>
+                  <a:txBody>
+                    <a:bodyPr/>
+                    <a:lstStyle/>
+                    <a:p>
+                      <a:pPr algn="r" fontAlgn="b">
+                        <a:buNone/>
+                      </a:pPr>
+                      <a:r>
+                        <a:rPr lang="en-US" sz="1200" b="0" i="0" u="none" strike="noStrike">
+                          <a:solidFill>
+                            <a:srgbClr val="000000"/>
+                          </a:solidFill>
+                          <a:effectLst/>
+                          <a:latin typeface="Aptos Narrow" panose="020B0004020202020204" pitchFamily="34" charset="0"/>
+                        </a:rPr>
+                        <a:t>2</a:t>
+                      </a:r>
+                    </a:p>
+                  </a:txBody>
+                  <a:tcPr marL="9525" marR="9525" marT="9525" marB="0" anchor="b">
+                    <a:lnL w="12700" cap="flat" cmpd="sng" algn="ctr">
+                      <a:solidFill>
+                        <a:schemeClr val="tx1"/>
+                      </a:solidFill>
+                      <a:prstDash val="solid"/>
+                      <a:round/>
+                      <a:headEnd type="none" w="med" len="med"/>
+                      <a:tailEnd type="none" w="med" len="med"/>
+                    </a:lnL>
+                    <a:lnR w="12700" cap="flat" cmpd="sng" algn="ctr">
+                      <a:solidFill>
+                        <a:schemeClr val="tx1"/>
+                      </a:solidFill>
+                      <a:prstDash val="solid"/>
+                      <a:round/>
+                      <a:headEnd type="none" w="med" len="med"/>
+                      <a:tailEnd type="none" w="med" len="med"/>
+                    </a:lnR>
+                    <a:lnT w="12700" cap="flat" cmpd="sng" algn="ctr">
+                      <a:solidFill>
+                        <a:schemeClr val="tx1"/>
+                      </a:solidFill>
+                      <a:prstDash val="solid"/>
+                      <a:round/>
+                      <a:headEnd type="none" w="med" len="med"/>
+                      <a:tailEnd type="none" w="med" len="med"/>
+                    </a:lnT>
+                    <a:lnB w="12700" cap="flat" cmpd="sng" algn="ctr">
+                      <a:solidFill>
+                        <a:schemeClr val="tx1"/>
+                      </a:solidFill>
+                      <a:prstDash val="solid"/>
+                      <a:round/>
+                      <a:headEnd type="none" w="med" len="med"/>
+                      <a:tailEnd type="none" w="med" len="med"/>
+                    </a:lnB>
+                    <a:noFill/>
+                  </a:tcPr>
+                </a:tc>
+                <a:tc>
+                  <a:txBody>
+                    <a:bodyPr/>
+                    <a:lstStyle/>
+                    <a:p>
+                      <a:pPr algn="r" fontAlgn="b">
+                        <a:buNone/>
+                      </a:pPr>
+                      <a:r>
+                        <a:rPr lang="en-US" sz="1200" b="0" i="0" u="none" strike="noStrike">
+                          <a:solidFill>
+                            <a:srgbClr val="000000"/>
+                          </a:solidFill>
+                          <a:effectLst/>
+                          <a:latin typeface="Aptos Narrow" panose="020B0004020202020204" pitchFamily="34" charset="0"/>
+                        </a:rPr>
+                        <a:t>3.531634204</a:t>
+                      </a:r>
+                    </a:p>
+                  </a:txBody>
+                  <a:tcPr marL="9525" marR="9525" marT="9525" marB="0" anchor="b">
+                    <a:lnL w="12700" cap="flat" cmpd="sng" algn="ctr">
+                      <a:solidFill>
+                        <a:schemeClr val="tx1"/>
+                      </a:solidFill>
+                      <a:prstDash val="solid"/>
+                      <a:round/>
+                      <a:headEnd type="none" w="med" len="med"/>
+                      <a:tailEnd type="none" w="med" len="med"/>
+                    </a:lnL>
+                    <a:lnR w="12700" cap="flat" cmpd="sng" algn="ctr">
+                      <a:solidFill>
+                        <a:schemeClr val="tx1"/>
+                      </a:solidFill>
+                      <a:prstDash val="solid"/>
+                      <a:round/>
+                      <a:headEnd type="none" w="med" len="med"/>
+                      <a:tailEnd type="none" w="med" len="med"/>
+                    </a:lnR>
+                    <a:lnT w="12700" cap="flat" cmpd="sng" algn="ctr">
+                      <a:solidFill>
+                        <a:schemeClr val="tx1"/>
+                      </a:solidFill>
+                      <a:prstDash val="solid"/>
+                      <a:round/>
+                      <a:headEnd type="none" w="med" len="med"/>
+                      <a:tailEnd type="none" w="med" len="med"/>
+                    </a:lnT>
+                    <a:lnB w="12700" cap="flat" cmpd="sng" algn="ctr">
+                      <a:solidFill>
+                        <a:schemeClr val="tx1"/>
+                      </a:solidFill>
+                      <a:prstDash val="solid"/>
+                      <a:round/>
+                      <a:headEnd type="none" w="med" len="med"/>
+                      <a:tailEnd type="none" w="med" len="med"/>
+                    </a:lnB>
+                    <a:noFill/>
+                  </a:tcPr>
+                </a:tc>
+                <a:tc>
+                  <a:txBody>
+                    <a:bodyPr/>
+                    <a:lstStyle/>
+                    <a:p>
+                      <a:pPr algn="ctr" fontAlgn="b">
+                        <a:buNone/>
+                      </a:pPr>
+                      <a:r>
+                        <a:rPr lang="en-US" sz="1200" b="0" i="0" u="none" strike="noStrike">
+                          <a:solidFill>
+                            <a:srgbClr val="000000"/>
+                          </a:solidFill>
+                          <a:effectLst/>
+                          <a:latin typeface="Aptos Narrow" panose="020B0004020202020204" pitchFamily="34" charset="0"/>
+                        </a:rPr>
+                        <a:t>CA</a:t>
+                      </a:r>
+                    </a:p>
+                  </a:txBody>
+                  <a:tcPr marL="9525" marR="9525" marT="9525" marB="0" anchor="b">
+                    <a:lnL w="12700" cap="flat" cmpd="sng" algn="ctr">
+                      <a:solidFill>
+                        <a:schemeClr val="tx1"/>
+                      </a:solidFill>
+                      <a:prstDash val="solid"/>
+                      <a:round/>
+                      <a:headEnd type="none" w="med" len="med"/>
+                      <a:tailEnd type="none" w="med" len="med"/>
+                    </a:lnL>
+                    <a:lnR w="12700" cap="flat" cmpd="sng" algn="ctr">
+                      <a:solidFill>
+                        <a:schemeClr val="tx1"/>
+                      </a:solidFill>
+                      <a:prstDash val="solid"/>
+                      <a:round/>
+                      <a:headEnd type="none" w="med" len="med"/>
+                      <a:tailEnd type="none" w="med" len="med"/>
+                    </a:lnR>
+                    <a:lnT w="12700" cap="flat" cmpd="sng" algn="ctr">
+                      <a:solidFill>
+                        <a:schemeClr val="tx1"/>
+                      </a:solidFill>
+                      <a:prstDash val="solid"/>
+                      <a:round/>
+                      <a:headEnd type="none" w="med" len="med"/>
+                      <a:tailEnd type="none" w="med" len="med"/>
+                    </a:lnT>
+                    <a:lnB w="12700" cap="flat" cmpd="sng" algn="ctr">
+                      <a:solidFill>
+                        <a:schemeClr val="tx1"/>
+                      </a:solidFill>
+                      <a:prstDash val="solid"/>
+                      <a:round/>
+                      <a:headEnd type="none" w="med" len="med"/>
+                      <a:tailEnd type="none" w="med" len="med"/>
+                    </a:lnB>
+                    <a:noFill/>
+                  </a:tcPr>
+                </a:tc>
+                <a:tc>
+                  <a:txBody>
+                    <a:bodyPr/>
+                    <a:lstStyle/>
+                    <a:p>
+                      <a:pPr algn="ctr" fontAlgn="b">
+                        <a:buNone/>
+                      </a:pPr>
+                      <a:r>
+                        <a:rPr lang="en-US" sz="1200" b="0" i="0" u="none" strike="noStrike" dirty="0">
+                          <a:solidFill>
+                            <a:srgbClr val="000000"/>
+                          </a:solidFill>
+                          <a:effectLst/>
+                          <a:latin typeface="Aptos Narrow" panose="020B0004020202020204" pitchFamily="34" charset="0"/>
+                        </a:rPr>
+                        <a:t>CA</a:t>
+                      </a:r>
+                    </a:p>
+                  </a:txBody>
+                  <a:tcPr marL="9525" marR="9525" marT="9525" marB="0" anchor="b">
+                    <a:lnL w="12700" cap="flat" cmpd="sng" algn="ctr">
+                      <a:solidFill>
+                        <a:schemeClr val="tx1"/>
+                      </a:solidFill>
+                      <a:prstDash val="solid"/>
+                      <a:round/>
+                      <a:headEnd type="none" w="med" len="med"/>
+                      <a:tailEnd type="none" w="med" len="med"/>
+                    </a:lnL>
+                    <a:lnR w="12700" cap="flat" cmpd="sng" algn="ctr">
+                      <a:solidFill>
+                        <a:schemeClr val="tx1"/>
+                      </a:solidFill>
+                      <a:prstDash val="solid"/>
+                      <a:round/>
+                      <a:headEnd type="none" w="med" len="med"/>
+                      <a:tailEnd type="none" w="med" len="med"/>
+                    </a:lnR>
+                    <a:lnT w="12700" cap="flat" cmpd="sng" algn="ctr">
+                      <a:solidFill>
+                        <a:schemeClr val="tx1"/>
+                      </a:solidFill>
+                      <a:prstDash val="solid"/>
+                      <a:round/>
+                      <a:headEnd type="none" w="med" len="med"/>
+                      <a:tailEnd type="none" w="med" len="med"/>
+                    </a:lnT>
+                    <a:lnB w="12700" cap="flat" cmpd="sng" algn="ctr">
+                      <a:solidFill>
+                        <a:schemeClr val="tx1"/>
+                      </a:solidFill>
+                      <a:prstDash val="solid"/>
+                      <a:round/>
+                      <a:headEnd type="none" w="med" len="med"/>
+                      <a:tailEnd type="none" w="med" len="med"/>
+                    </a:lnB>
+                    <a:noFill/>
+                  </a:tcPr>
+                </a:tc>
+                <a:extLst>
+                  <a:ext uri="{0D108BD9-81ED-4DB2-BD59-A6C34878D82A}">
+                    <a16:rowId xmlns:a16="http://schemas.microsoft.com/office/drawing/2014/main" val="4183633278"/>
+                  </a:ext>
+                </a:extLst>
+              </a:tr>
+              <a:tr h="230125">
+                <a:tc>
+                  <a:txBody>
+                    <a:bodyPr/>
+                    <a:lstStyle/>
+                    <a:p>
+                      <a:pPr algn="l" fontAlgn="b">
+                        <a:buNone/>
+                      </a:pPr>
+                      <a:r>
+                        <a:rPr lang="en-US" sz="1200" b="0" i="0" u="none" strike="noStrike">
+                          <a:solidFill>
+                            <a:srgbClr val="000000"/>
+                          </a:solidFill>
+                          <a:effectLst/>
+                          <a:latin typeface="Aptos Narrow" panose="020B0004020202020204" pitchFamily="34" charset="0"/>
+                        </a:rPr>
+                        <a:t>[(10, 1), (11, 2)]</a:t>
+                      </a:r>
+                    </a:p>
+                  </a:txBody>
+                  <a:tcPr marL="9525" marR="9525" marT="9525" marB="0" anchor="b">
+                    <a:lnL w="12700" cap="flat" cmpd="sng" algn="ctr">
+                      <a:solidFill>
+                        <a:schemeClr val="tx1"/>
+                      </a:solidFill>
+                      <a:prstDash val="solid"/>
+                      <a:round/>
+                      <a:headEnd type="none" w="med" len="med"/>
+                      <a:tailEnd type="none" w="med" len="med"/>
+                    </a:lnL>
+                    <a:lnR w="12700" cap="flat" cmpd="sng" algn="ctr">
+                      <a:solidFill>
+                        <a:schemeClr val="tx1"/>
+                      </a:solidFill>
+                      <a:prstDash val="solid"/>
+                      <a:round/>
+                      <a:headEnd type="none" w="med" len="med"/>
+                      <a:tailEnd type="none" w="med" len="med"/>
+                    </a:lnR>
+                    <a:lnT w="12700" cap="flat" cmpd="sng" algn="ctr">
+                      <a:solidFill>
+                        <a:schemeClr val="tx1"/>
+                      </a:solidFill>
+                      <a:prstDash val="solid"/>
+                      <a:round/>
+                      <a:headEnd type="none" w="med" len="med"/>
+                      <a:tailEnd type="none" w="med" len="med"/>
+                    </a:lnT>
+                    <a:lnB w="12700" cap="flat" cmpd="sng" algn="ctr">
+                      <a:solidFill>
+                        <a:schemeClr val="tx1"/>
+                      </a:solidFill>
+                      <a:prstDash val="solid"/>
+                      <a:round/>
+                      <a:headEnd type="none" w="med" len="med"/>
+                      <a:tailEnd type="none" w="med" len="med"/>
+                    </a:lnB>
+                    <a:noFill/>
+                  </a:tcPr>
+                </a:tc>
+                <a:tc>
+                  <a:txBody>
+                    <a:bodyPr/>
+                    <a:lstStyle/>
+                    <a:p>
+                      <a:pPr algn="r" fontAlgn="b">
+                        <a:buNone/>
+                      </a:pPr>
+                      <a:r>
+                        <a:rPr lang="en-US" sz="1200" b="0" i="0" u="none" strike="noStrike">
+                          <a:solidFill>
+                            <a:srgbClr val="000000"/>
+                          </a:solidFill>
+                          <a:effectLst/>
+                          <a:latin typeface="Aptos Narrow" panose="020B0004020202020204" pitchFamily="34" charset="0"/>
+                        </a:rPr>
+                        <a:t>2</a:t>
+                      </a:r>
+                    </a:p>
+                  </a:txBody>
+                  <a:tcPr marL="9525" marR="9525" marT="9525" marB="0" anchor="b">
+                    <a:lnL w="12700" cap="flat" cmpd="sng" algn="ctr">
+                      <a:solidFill>
+                        <a:schemeClr val="tx1"/>
+                      </a:solidFill>
+                      <a:prstDash val="solid"/>
+                      <a:round/>
+                      <a:headEnd type="none" w="med" len="med"/>
+                      <a:tailEnd type="none" w="med" len="med"/>
+                    </a:lnL>
+                    <a:lnR w="12700" cap="flat" cmpd="sng" algn="ctr">
+                      <a:solidFill>
+                        <a:schemeClr val="tx1"/>
+                      </a:solidFill>
+                      <a:prstDash val="solid"/>
+                      <a:round/>
+                      <a:headEnd type="none" w="med" len="med"/>
+                      <a:tailEnd type="none" w="med" len="med"/>
+                    </a:lnR>
+                    <a:lnT w="12700" cap="flat" cmpd="sng" algn="ctr">
+                      <a:solidFill>
+                        <a:schemeClr val="tx1"/>
+                      </a:solidFill>
+                      <a:prstDash val="solid"/>
+                      <a:round/>
+                      <a:headEnd type="none" w="med" len="med"/>
+                      <a:tailEnd type="none" w="med" len="med"/>
+                    </a:lnT>
+                    <a:lnB w="12700" cap="flat" cmpd="sng" algn="ctr">
+                      <a:solidFill>
+                        <a:schemeClr val="tx1"/>
+                      </a:solidFill>
+                      <a:prstDash val="solid"/>
+                      <a:round/>
+                      <a:headEnd type="none" w="med" len="med"/>
+                      <a:tailEnd type="none" w="med" len="med"/>
+                    </a:lnB>
+                    <a:noFill/>
+                  </a:tcPr>
+                </a:tc>
+                <a:tc>
+                  <a:txBody>
+                    <a:bodyPr/>
+                    <a:lstStyle/>
+                    <a:p>
+                      <a:pPr algn="r" fontAlgn="b">
+                        <a:buNone/>
+                      </a:pPr>
+                      <a:r>
+                        <a:rPr lang="en-US" sz="1200" b="0" i="0" u="none" strike="noStrike">
+                          <a:solidFill>
+                            <a:srgbClr val="000000"/>
+                          </a:solidFill>
+                          <a:effectLst/>
+                          <a:latin typeface="Aptos Narrow" panose="020B0004020202020204" pitchFamily="34" charset="0"/>
+                        </a:rPr>
+                        <a:t>2.515811795</a:t>
+                      </a:r>
+                    </a:p>
+                  </a:txBody>
+                  <a:tcPr marL="9525" marR="9525" marT="9525" marB="0" anchor="b">
+                    <a:lnL w="12700" cap="flat" cmpd="sng" algn="ctr">
+                      <a:solidFill>
+                        <a:schemeClr val="tx1"/>
+                      </a:solidFill>
+                      <a:prstDash val="solid"/>
+                      <a:round/>
+                      <a:headEnd type="none" w="med" len="med"/>
+                      <a:tailEnd type="none" w="med" len="med"/>
+                    </a:lnL>
+                    <a:lnR w="12700" cap="flat" cmpd="sng" algn="ctr">
+                      <a:solidFill>
+                        <a:schemeClr val="tx1"/>
+                      </a:solidFill>
+                      <a:prstDash val="solid"/>
+                      <a:round/>
+                      <a:headEnd type="none" w="med" len="med"/>
+                      <a:tailEnd type="none" w="med" len="med"/>
+                    </a:lnR>
+                    <a:lnT w="12700" cap="flat" cmpd="sng" algn="ctr">
+                      <a:solidFill>
+                        <a:schemeClr val="tx1"/>
+                      </a:solidFill>
+                      <a:prstDash val="solid"/>
+                      <a:round/>
+                      <a:headEnd type="none" w="med" len="med"/>
+                      <a:tailEnd type="none" w="med" len="med"/>
+                    </a:lnT>
+                    <a:lnB w="12700" cap="flat" cmpd="sng" algn="ctr">
+                      <a:solidFill>
+                        <a:schemeClr val="tx1"/>
+                      </a:solidFill>
+                      <a:prstDash val="solid"/>
+                      <a:round/>
+                      <a:headEnd type="none" w="med" len="med"/>
+                      <a:tailEnd type="none" w="med" len="med"/>
+                    </a:lnB>
+                    <a:noFill/>
+                  </a:tcPr>
+                </a:tc>
+                <a:tc>
+                  <a:txBody>
+                    <a:bodyPr/>
+                    <a:lstStyle/>
+                    <a:p>
+                      <a:pPr algn="ctr" fontAlgn="b">
+                        <a:buNone/>
+                      </a:pPr>
+                      <a:r>
+                        <a:rPr lang="en-US" sz="1200" b="0" i="0" u="none" strike="noStrike">
+                          <a:solidFill>
+                            <a:srgbClr val="000000"/>
+                          </a:solidFill>
+                          <a:effectLst/>
+                          <a:latin typeface="Aptos Narrow" panose="020B0004020202020204" pitchFamily="34" charset="0"/>
+                        </a:rPr>
+                        <a:t>AA</a:t>
+                      </a:r>
+                    </a:p>
+                  </a:txBody>
+                  <a:tcPr marL="9525" marR="9525" marT="9525" marB="0" anchor="b">
+                    <a:lnL w="12700" cap="flat" cmpd="sng" algn="ctr">
+                      <a:solidFill>
+                        <a:schemeClr val="tx1"/>
+                      </a:solidFill>
+                      <a:prstDash val="solid"/>
+                      <a:round/>
+                      <a:headEnd type="none" w="med" len="med"/>
+                      <a:tailEnd type="none" w="med" len="med"/>
+                    </a:lnL>
+                    <a:lnR w="12700" cap="flat" cmpd="sng" algn="ctr">
+                      <a:solidFill>
+                        <a:schemeClr val="tx1"/>
+                      </a:solidFill>
+                      <a:prstDash val="solid"/>
+                      <a:round/>
+                      <a:headEnd type="none" w="med" len="med"/>
+                      <a:tailEnd type="none" w="med" len="med"/>
+                    </a:lnR>
+                    <a:lnT w="12700" cap="flat" cmpd="sng" algn="ctr">
+                      <a:solidFill>
+                        <a:schemeClr val="tx1"/>
+                      </a:solidFill>
+                      <a:prstDash val="solid"/>
+                      <a:round/>
+                      <a:headEnd type="none" w="med" len="med"/>
+                      <a:tailEnd type="none" w="med" len="med"/>
+                    </a:lnT>
+                    <a:lnB w="12700" cap="flat" cmpd="sng" algn="ctr">
+                      <a:solidFill>
+                        <a:schemeClr val="tx1"/>
+                      </a:solidFill>
+                      <a:prstDash val="solid"/>
+                      <a:round/>
+                      <a:headEnd type="none" w="med" len="med"/>
+                      <a:tailEnd type="none" w="med" len="med"/>
+                    </a:lnB>
+                    <a:noFill/>
+                  </a:tcPr>
+                </a:tc>
+                <a:tc>
+                  <a:txBody>
+                    <a:bodyPr/>
+                    <a:lstStyle/>
+                    <a:p>
+                      <a:pPr algn="ctr" fontAlgn="b">
+                        <a:buNone/>
+                      </a:pPr>
+                      <a:r>
+                        <a:rPr lang="en-US" sz="1200" b="0" i="0" u="none" strike="noStrike" dirty="0">
+                          <a:solidFill>
+                            <a:srgbClr val="000000"/>
+                          </a:solidFill>
+                          <a:effectLst/>
+                          <a:latin typeface="Aptos Narrow" panose="020B0004020202020204" pitchFamily="34" charset="0"/>
+                        </a:rPr>
+                        <a:t>AA</a:t>
+                      </a:r>
+                    </a:p>
+                  </a:txBody>
+                  <a:tcPr marL="9525" marR="9525" marT="9525" marB="0" anchor="b">
+                    <a:lnL w="12700" cap="flat" cmpd="sng" algn="ctr">
+                      <a:solidFill>
+                        <a:schemeClr val="tx1"/>
+                      </a:solidFill>
+                      <a:prstDash val="solid"/>
+                      <a:round/>
+                      <a:headEnd type="none" w="med" len="med"/>
+                      <a:tailEnd type="none" w="med" len="med"/>
+                    </a:lnL>
+                    <a:lnR w="12700" cap="flat" cmpd="sng" algn="ctr">
+                      <a:solidFill>
+                        <a:schemeClr val="tx1"/>
+                      </a:solidFill>
+                      <a:prstDash val="solid"/>
+                      <a:round/>
+                      <a:headEnd type="none" w="med" len="med"/>
+                      <a:tailEnd type="none" w="med" len="med"/>
+                    </a:lnR>
+                    <a:lnT w="12700" cap="flat" cmpd="sng" algn="ctr">
+                      <a:solidFill>
+                        <a:schemeClr val="tx1"/>
+                      </a:solidFill>
+                      <a:prstDash val="solid"/>
+                      <a:round/>
+                      <a:headEnd type="none" w="med" len="med"/>
+                      <a:tailEnd type="none" w="med" len="med"/>
+                    </a:lnT>
+                    <a:lnB w="12700" cap="flat" cmpd="sng" algn="ctr">
+                      <a:solidFill>
+                        <a:schemeClr val="tx1"/>
+                      </a:solidFill>
+                      <a:prstDash val="solid"/>
+                      <a:round/>
+                      <a:headEnd type="none" w="med" len="med"/>
+                      <a:tailEnd type="none" w="med" len="med"/>
+                    </a:lnB>
+                    <a:noFill/>
+                  </a:tcPr>
+                </a:tc>
+                <a:extLst>
+                  <a:ext uri="{0D108BD9-81ED-4DB2-BD59-A6C34878D82A}">
+                    <a16:rowId xmlns:a16="http://schemas.microsoft.com/office/drawing/2014/main" val="1061062359"/>
+                  </a:ext>
+                </a:extLst>
+              </a:tr>
+              <a:tr h="230125">
+                <a:tc>
+                  <a:txBody>
+                    <a:bodyPr/>
+                    <a:lstStyle/>
+                    <a:p>
+                      <a:pPr algn="l" fontAlgn="b">
+                        <a:buNone/>
+                      </a:pPr>
+                      <a:r>
+                        <a:rPr lang="en-US" sz="1200" b="0" i="0" u="none" strike="noStrike">
+                          <a:solidFill>
+                            <a:srgbClr val="000000"/>
+                          </a:solidFill>
+                          <a:effectLst/>
+                          <a:latin typeface="Aptos Narrow" panose="020B0004020202020204" pitchFamily="34" charset="0"/>
+                        </a:rPr>
+                        <a:t>[(11, 1), (12, 2)]</a:t>
+                      </a:r>
+                    </a:p>
+                  </a:txBody>
+                  <a:tcPr marL="9525" marR="9525" marT="9525" marB="0" anchor="b">
+                    <a:lnL w="12700" cap="flat" cmpd="sng" algn="ctr">
+                      <a:solidFill>
+                        <a:schemeClr val="tx1"/>
+                      </a:solidFill>
+                      <a:prstDash val="solid"/>
+                      <a:round/>
+                      <a:headEnd type="none" w="med" len="med"/>
+                      <a:tailEnd type="none" w="med" len="med"/>
+                    </a:lnL>
+                    <a:lnR w="12700" cap="flat" cmpd="sng" algn="ctr">
+                      <a:solidFill>
+                        <a:schemeClr val="tx1"/>
+                      </a:solidFill>
+                      <a:prstDash val="solid"/>
+                      <a:round/>
+                      <a:headEnd type="none" w="med" len="med"/>
+                      <a:tailEnd type="none" w="med" len="med"/>
+                    </a:lnR>
+                    <a:lnT w="12700" cap="flat" cmpd="sng" algn="ctr">
+                      <a:solidFill>
+                        <a:schemeClr val="tx1"/>
+                      </a:solidFill>
+                      <a:prstDash val="solid"/>
+                      <a:round/>
+                      <a:headEnd type="none" w="med" len="med"/>
+                      <a:tailEnd type="none" w="med" len="med"/>
+                    </a:lnT>
+                    <a:lnB w="12700" cap="flat" cmpd="sng" algn="ctr">
+                      <a:solidFill>
+                        <a:schemeClr val="tx1"/>
+                      </a:solidFill>
+                      <a:prstDash val="solid"/>
+                      <a:round/>
+                      <a:headEnd type="none" w="med" len="med"/>
+                      <a:tailEnd type="none" w="med" len="med"/>
+                    </a:lnB>
+                    <a:noFill/>
+                  </a:tcPr>
+                </a:tc>
+                <a:tc>
+                  <a:txBody>
+                    <a:bodyPr/>
+                    <a:lstStyle/>
+                    <a:p>
+                      <a:pPr algn="r" fontAlgn="b">
+                        <a:buNone/>
+                      </a:pPr>
+                      <a:r>
+                        <a:rPr lang="en-US" sz="1200" b="0" i="0" u="none" strike="noStrike">
+                          <a:solidFill>
+                            <a:srgbClr val="000000"/>
+                          </a:solidFill>
+                          <a:effectLst/>
+                          <a:latin typeface="Aptos Narrow" panose="020B0004020202020204" pitchFamily="34" charset="0"/>
+                        </a:rPr>
+                        <a:t>2</a:t>
+                      </a:r>
+                    </a:p>
+                  </a:txBody>
+                  <a:tcPr marL="9525" marR="9525" marT="9525" marB="0" anchor="b">
+                    <a:lnL w="12700" cap="flat" cmpd="sng" algn="ctr">
+                      <a:solidFill>
+                        <a:schemeClr val="tx1"/>
+                      </a:solidFill>
+                      <a:prstDash val="solid"/>
+                      <a:round/>
+                      <a:headEnd type="none" w="med" len="med"/>
+                      <a:tailEnd type="none" w="med" len="med"/>
+                    </a:lnL>
+                    <a:lnR w="12700" cap="flat" cmpd="sng" algn="ctr">
+                      <a:solidFill>
+                        <a:schemeClr val="tx1"/>
+                      </a:solidFill>
+                      <a:prstDash val="solid"/>
+                      <a:round/>
+                      <a:headEnd type="none" w="med" len="med"/>
+                      <a:tailEnd type="none" w="med" len="med"/>
+                    </a:lnR>
+                    <a:lnT w="12700" cap="flat" cmpd="sng" algn="ctr">
+                      <a:solidFill>
+                        <a:schemeClr val="tx1"/>
+                      </a:solidFill>
+                      <a:prstDash val="solid"/>
+                      <a:round/>
+                      <a:headEnd type="none" w="med" len="med"/>
+                      <a:tailEnd type="none" w="med" len="med"/>
+                    </a:lnT>
+                    <a:lnB w="12700" cap="flat" cmpd="sng" algn="ctr">
+                      <a:solidFill>
+                        <a:schemeClr val="tx1"/>
+                      </a:solidFill>
+                      <a:prstDash val="solid"/>
+                      <a:round/>
+                      <a:headEnd type="none" w="med" len="med"/>
+                      <a:tailEnd type="none" w="med" len="med"/>
+                    </a:lnB>
+                    <a:noFill/>
+                  </a:tcPr>
+                </a:tc>
+                <a:tc>
+                  <a:txBody>
+                    <a:bodyPr/>
+                    <a:lstStyle/>
+                    <a:p>
+                      <a:pPr algn="r" fontAlgn="b">
+                        <a:buNone/>
+                      </a:pPr>
+                      <a:r>
+                        <a:rPr lang="en-US" sz="1200" b="0" i="0" u="none" strike="noStrike">
+                          <a:solidFill>
+                            <a:srgbClr val="000000"/>
+                          </a:solidFill>
+                          <a:effectLst/>
+                          <a:latin typeface="Aptos Narrow" panose="020B0004020202020204" pitchFamily="34" charset="0"/>
+                        </a:rPr>
+                        <a:t>2.483481881</a:t>
+                      </a:r>
+                    </a:p>
+                  </a:txBody>
+                  <a:tcPr marL="9525" marR="9525" marT="9525" marB="0" anchor="b">
+                    <a:lnL w="12700" cap="flat" cmpd="sng" algn="ctr">
+                      <a:solidFill>
+                        <a:schemeClr val="tx1"/>
+                      </a:solidFill>
+                      <a:prstDash val="solid"/>
+                      <a:round/>
+                      <a:headEnd type="none" w="med" len="med"/>
+                      <a:tailEnd type="none" w="med" len="med"/>
+                    </a:lnL>
+                    <a:lnR w="12700" cap="flat" cmpd="sng" algn="ctr">
+                      <a:solidFill>
+                        <a:schemeClr val="tx1"/>
+                      </a:solidFill>
+                      <a:prstDash val="solid"/>
+                      <a:round/>
+                      <a:headEnd type="none" w="med" len="med"/>
+                      <a:tailEnd type="none" w="med" len="med"/>
+                    </a:lnR>
+                    <a:lnT w="12700" cap="flat" cmpd="sng" algn="ctr">
+                      <a:solidFill>
+                        <a:schemeClr val="tx1"/>
+                      </a:solidFill>
+                      <a:prstDash val="solid"/>
+                      <a:round/>
+                      <a:headEnd type="none" w="med" len="med"/>
+                      <a:tailEnd type="none" w="med" len="med"/>
+                    </a:lnT>
+                    <a:lnB w="12700" cap="flat" cmpd="sng" algn="ctr">
+                      <a:solidFill>
+                        <a:schemeClr val="tx1"/>
+                      </a:solidFill>
+                      <a:prstDash val="solid"/>
+                      <a:round/>
+                      <a:headEnd type="none" w="med" len="med"/>
+                      <a:tailEnd type="none" w="med" len="med"/>
+                    </a:lnB>
+                    <a:noFill/>
+                  </a:tcPr>
+                </a:tc>
+                <a:tc>
+                  <a:txBody>
+                    <a:bodyPr/>
+                    <a:lstStyle/>
+                    <a:p>
+                      <a:pPr algn="ctr" fontAlgn="b">
+                        <a:buNone/>
+                      </a:pPr>
+                      <a:r>
+                        <a:rPr lang="en-US" sz="1200" b="0" i="0" u="none" strike="noStrike">
+                          <a:solidFill>
+                            <a:srgbClr val="000000"/>
+                          </a:solidFill>
+                          <a:effectLst/>
+                          <a:latin typeface="Aptos Narrow" panose="020B0004020202020204" pitchFamily="34" charset="0"/>
+                        </a:rPr>
+                        <a:t>AA</a:t>
+                      </a:r>
+                    </a:p>
+                  </a:txBody>
+                  <a:tcPr marL="9525" marR="9525" marT="9525" marB="0" anchor="b">
+                    <a:lnL w="12700" cap="flat" cmpd="sng" algn="ctr">
+                      <a:solidFill>
+                        <a:schemeClr val="tx1"/>
+                      </a:solidFill>
+                      <a:prstDash val="solid"/>
+                      <a:round/>
+                      <a:headEnd type="none" w="med" len="med"/>
+                      <a:tailEnd type="none" w="med" len="med"/>
+                    </a:lnL>
+                    <a:lnR w="12700" cap="flat" cmpd="sng" algn="ctr">
+                      <a:solidFill>
+                        <a:schemeClr val="tx1"/>
+                      </a:solidFill>
+                      <a:prstDash val="solid"/>
+                      <a:round/>
+                      <a:headEnd type="none" w="med" len="med"/>
+                      <a:tailEnd type="none" w="med" len="med"/>
+                    </a:lnR>
+                    <a:lnT w="12700" cap="flat" cmpd="sng" algn="ctr">
+                      <a:solidFill>
+                        <a:schemeClr val="tx1"/>
+                      </a:solidFill>
+                      <a:prstDash val="solid"/>
+                      <a:round/>
+                      <a:headEnd type="none" w="med" len="med"/>
+                      <a:tailEnd type="none" w="med" len="med"/>
+                    </a:lnT>
+                    <a:lnB w="12700" cap="flat" cmpd="sng" algn="ctr">
+                      <a:solidFill>
+                        <a:schemeClr val="tx1"/>
+                      </a:solidFill>
+                      <a:prstDash val="solid"/>
+                      <a:round/>
+                      <a:headEnd type="none" w="med" len="med"/>
+                      <a:tailEnd type="none" w="med" len="med"/>
+                    </a:lnB>
+                    <a:noFill/>
+                  </a:tcPr>
+                </a:tc>
+                <a:tc>
+                  <a:txBody>
+                    <a:bodyPr/>
+                    <a:lstStyle/>
+                    <a:p>
+                      <a:pPr algn="ctr" fontAlgn="b">
+                        <a:buNone/>
+                      </a:pPr>
+                      <a:r>
+                        <a:rPr lang="en-US" sz="1200" b="0" i="0" u="none" strike="noStrike" dirty="0">
+                          <a:solidFill>
+                            <a:srgbClr val="000000"/>
+                          </a:solidFill>
+                          <a:effectLst/>
+                          <a:latin typeface="Aptos Narrow" panose="020B0004020202020204" pitchFamily="34" charset="0"/>
+                        </a:rPr>
+                        <a:t>AA</a:t>
+                      </a:r>
+                    </a:p>
+                  </a:txBody>
+                  <a:tcPr marL="9525" marR="9525" marT="9525" marB="0" anchor="b">
+                    <a:lnL w="12700" cap="flat" cmpd="sng" algn="ctr">
+                      <a:solidFill>
+                        <a:schemeClr val="tx1"/>
+                      </a:solidFill>
+                      <a:prstDash val="solid"/>
+                      <a:round/>
+                      <a:headEnd type="none" w="med" len="med"/>
+                      <a:tailEnd type="none" w="med" len="med"/>
+                    </a:lnL>
+                    <a:lnR w="12700" cap="flat" cmpd="sng" algn="ctr">
+                      <a:solidFill>
+                        <a:schemeClr val="tx1"/>
+                      </a:solidFill>
+                      <a:prstDash val="solid"/>
+                      <a:round/>
+                      <a:headEnd type="none" w="med" len="med"/>
+                      <a:tailEnd type="none" w="med" len="med"/>
+                    </a:lnR>
+                    <a:lnT w="12700" cap="flat" cmpd="sng" algn="ctr">
+                      <a:solidFill>
+                        <a:schemeClr val="tx1"/>
+                      </a:solidFill>
+                      <a:prstDash val="solid"/>
+                      <a:round/>
+                      <a:headEnd type="none" w="med" len="med"/>
+                      <a:tailEnd type="none" w="med" len="med"/>
+                    </a:lnT>
+                    <a:lnB w="12700" cap="flat" cmpd="sng" algn="ctr">
+                      <a:solidFill>
+                        <a:schemeClr val="tx1"/>
+                      </a:solidFill>
+                      <a:prstDash val="solid"/>
+                      <a:round/>
+                      <a:headEnd type="none" w="med" len="med"/>
+                      <a:tailEnd type="none" w="med" len="med"/>
+                    </a:lnB>
+                    <a:noFill/>
+                  </a:tcPr>
+                </a:tc>
+                <a:extLst>
+                  <a:ext uri="{0D108BD9-81ED-4DB2-BD59-A6C34878D82A}">
+                    <a16:rowId xmlns:a16="http://schemas.microsoft.com/office/drawing/2014/main" val="3032893479"/>
+                  </a:ext>
+                </a:extLst>
+              </a:tr>
+              <a:tr h="230125">
+                <a:tc>
+                  <a:txBody>
+                    <a:bodyPr/>
+                    <a:lstStyle/>
+                    <a:p>
+                      <a:pPr algn="l" fontAlgn="b">
+                        <a:buNone/>
+                      </a:pPr>
+                      <a:r>
+                        <a:rPr lang="en-US" sz="1200" b="0" i="0" u="none" strike="noStrike">
+                          <a:solidFill>
+                            <a:srgbClr val="000000"/>
+                          </a:solidFill>
+                          <a:effectLst/>
+                          <a:latin typeface="Aptos Narrow" panose="020B0004020202020204" pitchFamily="34" charset="0"/>
+                        </a:rPr>
+                        <a:t>[(12, 10), (13, 11)]</a:t>
+                      </a:r>
+                    </a:p>
+                  </a:txBody>
+                  <a:tcPr marL="9525" marR="9525" marT="9525" marB="0" anchor="b">
+                    <a:lnL w="12700" cap="flat" cmpd="sng" algn="ctr">
+                      <a:solidFill>
+                        <a:schemeClr val="tx1"/>
+                      </a:solidFill>
+                      <a:prstDash val="solid"/>
+                      <a:round/>
+                      <a:headEnd type="none" w="med" len="med"/>
+                      <a:tailEnd type="none" w="med" len="med"/>
+                    </a:lnL>
+                    <a:lnR w="12700" cap="flat" cmpd="sng" algn="ctr">
+                      <a:solidFill>
+                        <a:schemeClr val="tx1"/>
+                      </a:solidFill>
+                      <a:prstDash val="solid"/>
+                      <a:round/>
+                      <a:headEnd type="none" w="med" len="med"/>
+                      <a:tailEnd type="none" w="med" len="med"/>
+                    </a:lnR>
+                    <a:lnT w="12700" cap="flat" cmpd="sng" algn="ctr">
+                      <a:solidFill>
+                        <a:schemeClr val="tx1"/>
+                      </a:solidFill>
+                      <a:prstDash val="solid"/>
+                      <a:round/>
+                      <a:headEnd type="none" w="med" len="med"/>
+                      <a:tailEnd type="none" w="med" len="med"/>
+                    </a:lnT>
+                    <a:lnB w="12700" cap="flat" cmpd="sng" algn="ctr">
+                      <a:solidFill>
+                        <a:schemeClr val="tx1"/>
+                      </a:solidFill>
+                      <a:prstDash val="solid"/>
+                      <a:round/>
+                      <a:headEnd type="none" w="med" len="med"/>
+                      <a:tailEnd type="none" w="med" len="med"/>
+                    </a:lnB>
+                    <a:noFill/>
+                  </a:tcPr>
+                </a:tc>
+                <a:tc>
+                  <a:txBody>
+                    <a:bodyPr/>
+                    <a:lstStyle/>
+                    <a:p>
+                      <a:pPr algn="r" fontAlgn="b">
+                        <a:buNone/>
+                      </a:pPr>
+                      <a:r>
+                        <a:rPr lang="en-US" sz="1200" b="0" i="0" u="none" strike="noStrike">
+                          <a:solidFill>
+                            <a:srgbClr val="000000"/>
+                          </a:solidFill>
+                          <a:effectLst/>
+                          <a:latin typeface="Aptos Narrow" panose="020B0004020202020204" pitchFamily="34" charset="0"/>
+                        </a:rPr>
+                        <a:t>2</a:t>
+                      </a:r>
+                    </a:p>
+                  </a:txBody>
+                  <a:tcPr marL="9525" marR="9525" marT="9525" marB="0" anchor="b">
+                    <a:lnL w="12700" cap="flat" cmpd="sng" algn="ctr">
+                      <a:solidFill>
+                        <a:schemeClr val="tx1"/>
+                      </a:solidFill>
+                      <a:prstDash val="solid"/>
+                      <a:round/>
+                      <a:headEnd type="none" w="med" len="med"/>
+                      <a:tailEnd type="none" w="med" len="med"/>
+                    </a:lnL>
+                    <a:lnR w="12700" cap="flat" cmpd="sng" algn="ctr">
+                      <a:solidFill>
+                        <a:schemeClr val="tx1"/>
+                      </a:solidFill>
+                      <a:prstDash val="solid"/>
+                      <a:round/>
+                      <a:headEnd type="none" w="med" len="med"/>
+                      <a:tailEnd type="none" w="med" len="med"/>
+                    </a:lnR>
+                    <a:lnT w="12700" cap="flat" cmpd="sng" algn="ctr">
+                      <a:solidFill>
+                        <a:schemeClr val="tx1"/>
+                      </a:solidFill>
+                      <a:prstDash val="solid"/>
+                      <a:round/>
+                      <a:headEnd type="none" w="med" len="med"/>
+                      <a:tailEnd type="none" w="med" len="med"/>
+                    </a:lnT>
+                    <a:lnB w="12700" cap="flat" cmpd="sng" algn="ctr">
+                      <a:solidFill>
+                        <a:schemeClr val="tx1"/>
+                      </a:solidFill>
+                      <a:prstDash val="solid"/>
+                      <a:round/>
+                      <a:headEnd type="none" w="med" len="med"/>
+                      <a:tailEnd type="none" w="med" len="med"/>
+                    </a:lnB>
+                    <a:noFill/>
+                  </a:tcPr>
+                </a:tc>
+                <a:tc>
+                  <a:txBody>
+                    <a:bodyPr/>
+                    <a:lstStyle/>
+                    <a:p>
+                      <a:pPr algn="r" fontAlgn="b">
+                        <a:buNone/>
+                      </a:pPr>
+                      <a:r>
+                        <a:rPr lang="en-US" sz="1200" b="0" i="0" u="none" strike="noStrike">
+                          <a:solidFill>
+                            <a:srgbClr val="000000"/>
+                          </a:solidFill>
+                          <a:effectLst/>
+                          <a:latin typeface="Aptos Narrow" panose="020B0004020202020204" pitchFamily="34" charset="0"/>
+                        </a:rPr>
+                        <a:t>3.764520512</a:t>
+                      </a:r>
+                    </a:p>
+                  </a:txBody>
+                  <a:tcPr marL="9525" marR="9525" marT="9525" marB="0" anchor="b">
+                    <a:lnL w="12700" cap="flat" cmpd="sng" algn="ctr">
+                      <a:solidFill>
+                        <a:schemeClr val="tx1"/>
+                      </a:solidFill>
+                      <a:prstDash val="solid"/>
+                      <a:round/>
+                      <a:headEnd type="none" w="med" len="med"/>
+                      <a:tailEnd type="none" w="med" len="med"/>
+                    </a:lnL>
+                    <a:lnR w="12700" cap="flat" cmpd="sng" algn="ctr">
+                      <a:solidFill>
+                        <a:schemeClr val="tx1"/>
+                      </a:solidFill>
+                      <a:prstDash val="solid"/>
+                      <a:round/>
+                      <a:headEnd type="none" w="med" len="med"/>
+                      <a:tailEnd type="none" w="med" len="med"/>
+                    </a:lnR>
+                    <a:lnT w="12700" cap="flat" cmpd="sng" algn="ctr">
+                      <a:solidFill>
+                        <a:schemeClr val="tx1"/>
+                      </a:solidFill>
+                      <a:prstDash val="solid"/>
+                      <a:round/>
+                      <a:headEnd type="none" w="med" len="med"/>
+                      <a:tailEnd type="none" w="med" len="med"/>
+                    </a:lnT>
+                    <a:lnB w="12700" cap="flat" cmpd="sng" algn="ctr">
+                      <a:solidFill>
+                        <a:schemeClr val="tx1"/>
+                      </a:solidFill>
+                      <a:prstDash val="solid"/>
+                      <a:round/>
+                      <a:headEnd type="none" w="med" len="med"/>
+                      <a:tailEnd type="none" w="med" len="med"/>
+                    </a:lnB>
+                    <a:noFill/>
+                  </a:tcPr>
+                </a:tc>
+                <a:tc>
+                  <a:txBody>
+                    <a:bodyPr/>
+                    <a:lstStyle/>
+                    <a:p>
+                      <a:pPr algn="ctr" fontAlgn="b">
+                        <a:buNone/>
+                      </a:pPr>
+                      <a:r>
+                        <a:rPr lang="en-US" sz="1200" b="0" i="0" u="none" strike="noStrike">
+                          <a:solidFill>
+                            <a:srgbClr val="000000"/>
+                          </a:solidFill>
+                          <a:effectLst/>
+                          <a:latin typeface="Aptos Narrow" panose="020B0004020202020204" pitchFamily="34" charset="0"/>
+                        </a:rPr>
+                        <a:t>AA</a:t>
+                      </a:r>
+                    </a:p>
+                  </a:txBody>
+                  <a:tcPr marL="9525" marR="9525" marT="9525" marB="0" anchor="b">
+                    <a:lnL w="12700" cap="flat" cmpd="sng" algn="ctr">
+                      <a:solidFill>
+                        <a:schemeClr val="tx1"/>
+                      </a:solidFill>
+                      <a:prstDash val="solid"/>
+                      <a:round/>
+                      <a:headEnd type="none" w="med" len="med"/>
+                      <a:tailEnd type="none" w="med" len="med"/>
+                    </a:lnL>
+                    <a:lnR w="12700" cap="flat" cmpd="sng" algn="ctr">
+                      <a:solidFill>
+                        <a:schemeClr val="tx1"/>
+                      </a:solidFill>
+                      <a:prstDash val="solid"/>
+                      <a:round/>
+                      <a:headEnd type="none" w="med" len="med"/>
+                      <a:tailEnd type="none" w="med" len="med"/>
+                    </a:lnR>
+                    <a:lnT w="12700" cap="flat" cmpd="sng" algn="ctr">
+                      <a:solidFill>
+                        <a:schemeClr val="tx1"/>
+                      </a:solidFill>
+                      <a:prstDash val="solid"/>
+                      <a:round/>
+                      <a:headEnd type="none" w="med" len="med"/>
+                      <a:tailEnd type="none" w="med" len="med"/>
+                    </a:lnT>
+                    <a:lnB w="12700" cap="flat" cmpd="sng" algn="ctr">
+                      <a:solidFill>
+                        <a:schemeClr val="tx1"/>
+                      </a:solidFill>
+                      <a:prstDash val="solid"/>
+                      <a:round/>
+                      <a:headEnd type="none" w="med" len="med"/>
+                      <a:tailEnd type="none" w="med" len="med"/>
+                    </a:lnB>
+                    <a:noFill/>
+                  </a:tcPr>
+                </a:tc>
+                <a:tc>
+                  <a:txBody>
+                    <a:bodyPr/>
+                    <a:lstStyle/>
+                    <a:p>
+                      <a:pPr algn="ctr" fontAlgn="b">
+                        <a:buNone/>
+                      </a:pPr>
+                      <a:r>
+                        <a:rPr lang="en-US" sz="1200" b="0" i="0" u="none" strike="noStrike" dirty="0">
+                          <a:solidFill>
+                            <a:srgbClr val="000000"/>
+                          </a:solidFill>
+                          <a:effectLst/>
+                          <a:latin typeface="Aptos Narrow" panose="020B0004020202020204" pitchFamily="34" charset="0"/>
+                        </a:rPr>
+                        <a:t>AA</a:t>
+                      </a:r>
+                    </a:p>
+                  </a:txBody>
+                  <a:tcPr marL="9525" marR="9525" marT="9525" marB="0" anchor="b">
+                    <a:lnL w="12700" cap="flat" cmpd="sng" algn="ctr">
+                      <a:solidFill>
+                        <a:schemeClr val="tx1"/>
+                      </a:solidFill>
+                      <a:prstDash val="solid"/>
+                      <a:round/>
+                      <a:headEnd type="none" w="med" len="med"/>
+                      <a:tailEnd type="none" w="med" len="med"/>
+                    </a:lnL>
+                    <a:lnR w="12700" cap="flat" cmpd="sng" algn="ctr">
+                      <a:solidFill>
+                        <a:schemeClr val="tx1"/>
+                      </a:solidFill>
+                      <a:prstDash val="solid"/>
+                      <a:round/>
+                      <a:headEnd type="none" w="med" len="med"/>
+                      <a:tailEnd type="none" w="med" len="med"/>
+                    </a:lnR>
+                    <a:lnT w="12700" cap="flat" cmpd="sng" algn="ctr">
+                      <a:solidFill>
+                        <a:schemeClr val="tx1"/>
+                      </a:solidFill>
+                      <a:prstDash val="solid"/>
+                      <a:round/>
+                      <a:headEnd type="none" w="med" len="med"/>
+                      <a:tailEnd type="none" w="med" len="med"/>
+                    </a:lnT>
+                    <a:lnB w="12700" cap="flat" cmpd="sng" algn="ctr">
+                      <a:solidFill>
+                        <a:schemeClr val="tx1"/>
+                      </a:solidFill>
+                      <a:prstDash val="solid"/>
+                      <a:round/>
+                      <a:headEnd type="none" w="med" len="med"/>
+                      <a:tailEnd type="none" w="med" len="med"/>
+                    </a:lnB>
+                    <a:noFill/>
+                  </a:tcPr>
+                </a:tc>
+                <a:extLst>
+                  <a:ext uri="{0D108BD9-81ED-4DB2-BD59-A6C34878D82A}">
+                    <a16:rowId xmlns:a16="http://schemas.microsoft.com/office/drawing/2014/main" val="2186203766"/>
+                  </a:ext>
+                </a:extLst>
+              </a:tr>
+              <a:tr h="230125">
+                <a:tc>
+                  <a:txBody>
+                    <a:bodyPr/>
+                    <a:lstStyle/>
+                    <a:p>
+                      <a:pPr algn="l" fontAlgn="b">
+                        <a:buNone/>
+                      </a:pPr>
+                      <a:r>
+                        <a:rPr lang="en-US" sz="1200" b="0" i="0" u="none" strike="noStrike">
+                          <a:solidFill>
+                            <a:srgbClr val="000000"/>
+                          </a:solidFill>
+                          <a:effectLst/>
+                          <a:latin typeface="Aptos Narrow" panose="020B0004020202020204" pitchFamily="34" charset="0"/>
+                        </a:rPr>
+                        <a:t>[(18, 9), (19, 10)]</a:t>
+                      </a:r>
+                    </a:p>
+                  </a:txBody>
+                  <a:tcPr marL="9525" marR="9525" marT="9525" marB="0" anchor="b">
+                    <a:lnL w="12700" cap="flat" cmpd="sng" algn="ctr">
+                      <a:solidFill>
+                        <a:schemeClr val="tx1"/>
+                      </a:solidFill>
+                      <a:prstDash val="solid"/>
+                      <a:round/>
+                      <a:headEnd type="none" w="med" len="med"/>
+                      <a:tailEnd type="none" w="med" len="med"/>
+                    </a:lnL>
+                    <a:lnR w="12700" cap="flat" cmpd="sng" algn="ctr">
+                      <a:solidFill>
+                        <a:schemeClr val="tx1"/>
+                      </a:solidFill>
+                      <a:prstDash val="solid"/>
+                      <a:round/>
+                      <a:headEnd type="none" w="med" len="med"/>
+                      <a:tailEnd type="none" w="med" len="med"/>
+                    </a:lnR>
+                    <a:lnT w="12700" cap="flat" cmpd="sng" algn="ctr">
+                      <a:solidFill>
+                        <a:schemeClr val="tx1"/>
+                      </a:solidFill>
+                      <a:prstDash val="solid"/>
+                      <a:round/>
+                      <a:headEnd type="none" w="med" len="med"/>
+                      <a:tailEnd type="none" w="med" len="med"/>
+                    </a:lnT>
+                    <a:lnB w="12700" cap="flat" cmpd="sng" algn="ctr">
+                      <a:solidFill>
+                        <a:schemeClr val="tx1"/>
+                      </a:solidFill>
+                      <a:prstDash val="solid"/>
+                      <a:round/>
+                      <a:headEnd type="none" w="med" len="med"/>
+                      <a:tailEnd type="none" w="med" len="med"/>
+                    </a:lnB>
+                    <a:noFill/>
+                  </a:tcPr>
+                </a:tc>
+                <a:tc>
+                  <a:txBody>
+                    <a:bodyPr/>
+                    <a:lstStyle/>
+                    <a:p>
+                      <a:pPr algn="r" fontAlgn="b">
+                        <a:buNone/>
+                      </a:pPr>
+                      <a:r>
+                        <a:rPr lang="en-US" sz="1200" b="0" i="0" u="none" strike="noStrike">
+                          <a:solidFill>
+                            <a:srgbClr val="000000"/>
+                          </a:solidFill>
+                          <a:effectLst/>
+                          <a:latin typeface="Aptos Narrow" panose="020B0004020202020204" pitchFamily="34" charset="0"/>
+                        </a:rPr>
+                        <a:t>2</a:t>
+                      </a:r>
+                    </a:p>
+                  </a:txBody>
+                  <a:tcPr marL="9525" marR="9525" marT="9525" marB="0" anchor="b">
+                    <a:lnL w="12700" cap="flat" cmpd="sng" algn="ctr">
+                      <a:solidFill>
+                        <a:schemeClr val="tx1"/>
+                      </a:solidFill>
+                      <a:prstDash val="solid"/>
+                      <a:round/>
+                      <a:headEnd type="none" w="med" len="med"/>
+                      <a:tailEnd type="none" w="med" len="med"/>
+                    </a:lnL>
+                    <a:lnR w="12700" cap="flat" cmpd="sng" algn="ctr">
+                      <a:solidFill>
+                        <a:schemeClr val="tx1"/>
+                      </a:solidFill>
+                      <a:prstDash val="solid"/>
+                      <a:round/>
+                      <a:headEnd type="none" w="med" len="med"/>
+                      <a:tailEnd type="none" w="med" len="med"/>
+                    </a:lnR>
+                    <a:lnT w="12700" cap="flat" cmpd="sng" algn="ctr">
+                      <a:solidFill>
+                        <a:schemeClr val="tx1"/>
+                      </a:solidFill>
+                      <a:prstDash val="solid"/>
+                      <a:round/>
+                      <a:headEnd type="none" w="med" len="med"/>
+                      <a:tailEnd type="none" w="med" len="med"/>
+                    </a:lnT>
+                    <a:lnB w="12700" cap="flat" cmpd="sng" algn="ctr">
+                      <a:solidFill>
+                        <a:schemeClr val="tx1"/>
+                      </a:solidFill>
+                      <a:prstDash val="solid"/>
+                      <a:round/>
+                      <a:headEnd type="none" w="med" len="med"/>
+                      <a:tailEnd type="none" w="med" len="med"/>
+                    </a:lnB>
+                    <a:noFill/>
+                  </a:tcPr>
+                </a:tc>
+                <a:tc>
+                  <a:txBody>
+                    <a:bodyPr/>
+                    <a:lstStyle/>
+                    <a:p>
+                      <a:pPr algn="r" fontAlgn="b">
+                        <a:buNone/>
+                      </a:pPr>
+                      <a:r>
+                        <a:rPr lang="en-US" sz="1200" b="0" i="0" u="none" strike="noStrike" dirty="0">
+                          <a:solidFill>
+                            <a:srgbClr val="000000"/>
+                          </a:solidFill>
+                          <a:effectLst/>
+                          <a:latin typeface="Aptos Narrow" panose="020B0004020202020204" pitchFamily="34" charset="0"/>
+                        </a:rPr>
+                        <a:t>3.531634204</a:t>
+                      </a:r>
+                    </a:p>
+                  </a:txBody>
+                  <a:tcPr marL="9525" marR="9525" marT="9525" marB="0" anchor="b">
+                    <a:lnL w="12700" cap="flat" cmpd="sng" algn="ctr">
+                      <a:solidFill>
+                        <a:schemeClr val="tx1"/>
+                      </a:solidFill>
+                      <a:prstDash val="solid"/>
+                      <a:round/>
+                      <a:headEnd type="none" w="med" len="med"/>
+                      <a:tailEnd type="none" w="med" len="med"/>
+                    </a:lnL>
+                    <a:lnR w="12700" cap="flat" cmpd="sng" algn="ctr">
+                      <a:solidFill>
+                        <a:schemeClr val="tx1"/>
+                      </a:solidFill>
+                      <a:prstDash val="solid"/>
+                      <a:round/>
+                      <a:headEnd type="none" w="med" len="med"/>
+                      <a:tailEnd type="none" w="med" len="med"/>
+                    </a:lnR>
+                    <a:lnT w="12700" cap="flat" cmpd="sng" algn="ctr">
+                      <a:solidFill>
+                        <a:schemeClr val="tx1"/>
+                      </a:solidFill>
+                      <a:prstDash val="solid"/>
+                      <a:round/>
+                      <a:headEnd type="none" w="med" len="med"/>
+                      <a:tailEnd type="none" w="med" len="med"/>
+                    </a:lnT>
+                    <a:lnB w="12700" cap="flat" cmpd="sng" algn="ctr">
+                      <a:solidFill>
+                        <a:schemeClr val="tx1"/>
+                      </a:solidFill>
+                      <a:prstDash val="solid"/>
+                      <a:round/>
+                      <a:headEnd type="none" w="med" len="med"/>
+                      <a:tailEnd type="none" w="med" len="med"/>
+                    </a:lnB>
+                    <a:noFill/>
+                  </a:tcPr>
+                </a:tc>
+                <a:tc>
+                  <a:txBody>
+                    <a:bodyPr/>
+                    <a:lstStyle/>
+                    <a:p>
+                      <a:pPr algn="ctr" fontAlgn="b">
+                        <a:buNone/>
+                      </a:pPr>
+                      <a:r>
+                        <a:rPr lang="en-US" sz="1200" b="0" i="0" u="none" strike="noStrike">
+                          <a:solidFill>
+                            <a:srgbClr val="000000"/>
+                          </a:solidFill>
+                          <a:effectLst/>
+                          <a:latin typeface="Aptos Narrow" panose="020B0004020202020204" pitchFamily="34" charset="0"/>
+                        </a:rPr>
+                        <a:t>CA</a:t>
+                      </a:r>
+                    </a:p>
+                  </a:txBody>
+                  <a:tcPr marL="9525" marR="9525" marT="9525" marB="0" anchor="b">
+                    <a:lnL w="12700" cap="flat" cmpd="sng" algn="ctr">
+                      <a:solidFill>
+                        <a:schemeClr val="tx1"/>
+                      </a:solidFill>
+                      <a:prstDash val="solid"/>
+                      <a:round/>
+                      <a:headEnd type="none" w="med" len="med"/>
+                      <a:tailEnd type="none" w="med" len="med"/>
+                    </a:lnL>
+                    <a:lnR w="12700" cap="flat" cmpd="sng" algn="ctr">
+                      <a:solidFill>
+                        <a:schemeClr val="tx1"/>
+                      </a:solidFill>
+                      <a:prstDash val="solid"/>
+                      <a:round/>
+                      <a:headEnd type="none" w="med" len="med"/>
+                      <a:tailEnd type="none" w="med" len="med"/>
+                    </a:lnR>
+                    <a:lnT w="12700" cap="flat" cmpd="sng" algn="ctr">
+                      <a:solidFill>
+                        <a:schemeClr val="tx1"/>
+                      </a:solidFill>
+                      <a:prstDash val="solid"/>
+                      <a:round/>
+                      <a:headEnd type="none" w="med" len="med"/>
+                      <a:tailEnd type="none" w="med" len="med"/>
+                    </a:lnT>
+                    <a:lnB w="12700" cap="flat" cmpd="sng" algn="ctr">
+                      <a:solidFill>
+                        <a:schemeClr val="tx1"/>
+                      </a:solidFill>
+                      <a:prstDash val="solid"/>
+                      <a:round/>
+                      <a:headEnd type="none" w="med" len="med"/>
+                      <a:tailEnd type="none" w="med" len="med"/>
+                    </a:lnB>
+                    <a:noFill/>
+                  </a:tcPr>
+                </a:tc>
+                <a:tc>
+                  <a:txBody>
+                    <a:bodyPr/>
+                    <a:lstStyle/>
+                    <a:p>
+                      <a:pPr algn="ctr" fontAlgn="b">
+                        <a:buNone/>
+                      </a:pPr>
+                      <a:r>
+                        <a:rPr lang="en-US" sz="1200" b="0" i="0" u="none" strike="noStrike" dirty="0">
+                          <a:solidFill>
+                            <a:srgbClr val="000000"/>
+                          </a:solidFill>
+                          <a:effectLst/>
+                          <a:latin typeface="Aptos Narrow" panose="020B0004020202020204" pitchFamily="34" charset="0"/>
+                        </a:rPr>
+                        <a:t>CA</a:t>
+                      </a:r>
+                    </a:p>
+                  </a:txBody>
+                  <a:tcPr marL="9525" marR="9525" marT="9525" marB="0" anchor="b">
+                    <a:lnL w="12700" cap="flat" cmpd="sng" algn="ctr">
+                      <a:solidFill>
+                        <a:schemeClr val="tx1"/>
+                      </a:solidFill>
+                      <a:prstDash val="solid"/>
+                      <a:round/>
+                      <a:headEnd type="none" w="med" len="med"/>
+                      <a:tailEnd type="none" w="med" len="med"/>
+                    </a:lnL>
+                    <a:lnR w="12700" cap="flat" cmpd="sng" algn="ctr">
+                      <a:solidFill>
+                        <a:schemeClr val="tx1"/>
+                      </a:solidFill>
+                      <a:prstDash val="solid"/>
+                      <a:round/>
+                      <a:headEnd type="none" w="med" len="med"/>
+                      <a:tailEnd type="none" w="med" len="med"/>
+                    </a:lnR>
+                    <a:lnT w="12700" cap="flat" cmpd="sng" algn="ctr">
+                      <a:solidFill>
+                        <a:schemeClr val="tx1"/>
+                      </a:solidFill>
+                      <a:prstDash val="solid"/>
+                      <a:round/>
+                      <a:headEnd type="none" w="med" len="med"/>
+                      <a:tailEnd type="none" w="med" len="med"/>
+                    </a:lnT>
+                    <a:lnB w="12700" cap="flat" cmpd="sng" algn="ctr">
+                      <a:solidFill>
+                        <a:schemeClr val="tx1"/>
+                      </a:solidFill>
+                      <a:prstDash val="solid"/>
+                      <a:round/>
+                      <a:headEnd type="none" w="med" len="med"/>
+                      <a:tailEnd type="none" w="med" len="med"/>
+                    </a:lnB>
+                    <a:noFill/>
+                  </a:tcPr>
+                </a:tc>
+                <a:extLst>
+                  <a:ext uri="{0D108BD9-81ED-4DB2-BD59-A6C34878D82A}">
+                    <a16:rowId xmlns:a16="http://schemas.microsoft.com/office/drawing/2014/main" val="4080683687"/>
+                  </a:ext>
+                </a:extLst>
+              </a:tr>
+              <a:tr h="230125">
+                <a:tc>
+                  <a:txBody>
+                    <a:bodyPr/>
+                    <a:lstStyle/>
+                    <a:p>
+                      <a:pPr algn="l" fontAlgn="b">
+                        <a:buNone/>
+                      </a:pPr>
+                      <a:r>
+                        <a:rPr lang="en-US" sz="1200" b="0" i="0" u="none" strike="noStrike">
+                          <a:solidFill>
+                            <a:srgbClr val="000000"/>
+                          </a:solidFill>
+                          <a:effectLst/>
+                          <a:latin typeface="Aptos Narrow" panose="020B0004020202020204" pitchFamily="34" charset="0"/>
+                        </a:rPr>
+                        <a:t>[(21, 10), (22, 11)]</a:t>
+                      </a:r>
+                    </a:p>
+                  </a:txBody>
+                  <a:tcPr marL="9525" marR="9525" marT="9525" marB="0" anchor="b">
+                    <a:lnL w="12700" cap="flat" cmpd="sng" algn="ctr">
+                      <a:solidFill>
+                        <a:schemeClr val="tx1"/>
+                      </a:solidFill>
+                      <a:prstDash val="solid"/>
+                      <a:round/>
+                      <a:headEnd type="none" w="med" len="med"/>
+                      <a:tailEnd type="none" w="med" len="med"/>
+                    </a:lnL>
+                    <a:lnR w="12700" cap="flat" cmpd="sng" algn="ctr">
+                      <a:solidFill>
+                        <a:schemeClr val="tx1"/>
+                      </a:solidFill>
+                      <a:prstDash val="solid"/>
+                      <a:round/>
+                      <a:headEnd type="none" w="med" len="med"/>
+                      <a:tailEnd type="none" w="med" len="med"/>
+                    </a:lnR>
+                    <a:lnT w="12700" cap="flat" cmpd="sng" algn="ctr">
+                      <a:solidFill>
+                        <a:schemeClr val="tx1"/>
+                      </a:solidFill>
+                      <a:prstDash val="solid"/>
+                      <a:round/>
+                      <a:headEnd type="none" w="med" len="med"/>
+                      <a:tailEnd type="none" w="med" len="med"/>
+                    </a:lnT>
+                    <a:lnB w="12700" cap="flat" cmpd="sng" algn="ctr">
+                      <a:solidFill>
+                        <a:schemeClr val="tx1"/>
+                      </a:solidFill>
+                      <a:prstDash val="solid"/>
+                      <a:round/>
+                      <a:headEnd type="none" w="med" len="med"/>
+                      <a:tailEnd type="none" w="med" len="med"/>
+                    </a:lnB>
+                    <a:noFill/>
+                  </a:tcPr>
+                </a:tc>
+                <a:tc>
+                  <a:txBody>
+                    <a:bodyPr/>
+                    <a:lstStyle/>
+                    <a:p>
+                      <a:pPr algn="r" fontAlgn="b">
+                        <a:buNone/>
+                      </a:pPr>
+                      <a:r>
+                        <a:rPr lang="en-US" sz="1200" b="0" i="0" u="none" strike="noStrike">
+                          <a:solidFill>
+                            <a:srgbClr val="000000"/>
+                          </a:solidFill>
+                          <a:effectLst/>
+                          <a:latin typeface="Aptos Narrow" panose="020B0004020202020204" pitchFamily="34" charset="0"/>
+                        </a:rPr>
+                        <a:t>2</a:t>
+                      </a:r>
+                    </a:p>
+                  </a:txBody>
+                  <a:tcPr marL="9525" marR="9525" marT="9525" marB="0" anchor="b">
+                    <a:lnL w="12700" cap="flat" cmpd="sng" algn="ctr">
+                      <a:solidFill>
+                        <a:schemeClr val="tx1"/>
+                      </a:solidFill>
+                      <a:prstDash val="solid"/>
+                      <a:round/>
+                      <a:headEnd type="none" w="med" len="med"/>
+                      <a:tailEnd type="none" w="med" len="med"/>
+                    </a:lnL>
+                    <a:lnR w="12700" cap="flat" cmpd="sng" algn="ctr">
+                      <a:solidFill>
+                        <a:schemeClr val="tx1"/>
+                      </a:solidFill>
+                      <a:prstDash val="solid"/>
+                      <a:round/>
+                      <a:headEnd type="none" w="med" len="med"/>
+                      <a:tailEnd type="none" w="med" len="med"/>
+                    </a:lnR>
+                    <a:lnT w="12700" cap="flat" cmpd="sng" algn="ctr">
+                      <a:solidFill>
+                        <a:schemeClr val="tx1"/>
+                      </a:solidFill>
+                      <a:prstDash val="solid"/>
+                      <a:round/>
+                      <a:headEnd type="none" w="med" len="med"/>
+                      <a:tailEnd type="none" w="med" len="med"/>
+                    </a:lnT>
+                    <a:lnB w="12700" cap="flat" cmpd="sng" algn="ctr">
+                      <a:solidFill>
+                        <a:schemeClr val="tx1"/>
+                      </a:solidFill>
+                      <a:prstDash val="solid"/>
+                      <a:round/>
+                      <a:headEnd type="none" w="med" len="med"/>
+                      <a:tailEnd type="none" w="med" len="med"/>
+                    </a:lnB>
+                    <a:noFill/>
+                  </a:tcPr>
+                </a:tc>
+                <a:tc>
+                  <a:txBody>
+                    <a:bodyPr/>
+                    <a:lstStyle/>
+                    <a:p>
+                      <a:pPr algn="r" fontAlgn="b">
+                        <a:buNone/>
+                      </a:pPr>
+                      <a:r>
+                        <a:rPr lang="en-US" sz="1200" b="0" i="0" u="none" strike="noStrike">
+                          <a:solidFill>
+                            <a:srgbClr val="000000"/>
+                          </a:solidFill>
+                          <a:effectLst/>
+                          <a:latin typeface="Aptos Narrow" panose="020B0004020202020204" pitchFamily="34" charset="0"/>
+                        </a:rPr>
+                        <a:t>3.350631165</a:t>
+                      </a:r>
+                    </a:p>
+                  </a:txBody>
+                  <a:tcPr marL="9525" marR="9525" marT="9525" marB="0" anchor="b">
+                    <a:lnL w="12700" cap="flat" cmpd="sng" algn="ctr">
+                      <a:solidFill>
+                        <a:schemeClr val="tx1"/>
+                      </a:solidFill>
+                      <a:prstDash val="solid"/>
+                      <a:round/>
+                      <a:headEnd type="none" w="med" len="med"/>
+                      <a:tailEnd type="none" w="med" len="med"/>
+                    </a:lnL>
+                    <a:lnR w="12700" cap="flat" cmpd="sng" algn="ctr">
+                      <a:solidFill>
+                        <a:schemeClr val="tx1"/>
+                      </a:solidFill>
+                      <a:prstDash val="solid"/>
+                      <a:round/>
+                      <a:headEnd type="none" w="med" len="med"/>
+                      <a:tailEnd type="none" w="med" len="med"/>
+                    </a:lnR>
+                    <a:lnT w="12700" cap="flat" cmpd="sng" algn="ctr">
+                      <a:solidFill>
+                        <a:schemeClr val="tx1"/>
+                      </a:solidFill>
+                      <a:prstDash val="solid"/>
+                      <a:round/>
+                      <a:headEnd type="none" w="med" len="med"/>
+                      <a:tailEnd type="none" w="med" len="med"/>
+                    </a:lnT>
+                    <a:lnB w="12700" cap="flat" cmpd="sng" algn="ctr">
+                      <a:solidFill>
+                        <a:schemeClr val="tx1"/>
+                      </a:solidFill>
+                      <a:prstDash val="solid"/>
+                      <a:round/>
+                      <a:headEnd type="none" w="med" len="med"/>
+                      <a:tailEnd type="none" w="med" len="med"/>
+                    </a:lnB>
+                    <a:noFill/>
+                  </a:tcPr>
+                </a:tc>
+                <a:tc>
+                  <a:txBody>
+                    <a:bodyPr/>
+                    <a:lstStyle/>
+                    <a:p>
+                      <a:pPr algn="ctr" fontAlgn="b">
+                        <a:buNone/>
+                      </a:pPr>
+                      <a:r>
+                        <a:rPr lang="en-US" sz="1200" b="0" i="0" u="none" strike="noStrike">
+                          <a:solidFill>
+                            <a:srgbClr val="000000"/>
+                          </a:solidFill>
+                          <a:effectLst/>
+                          <a:latin typeface="Aptos Narrow" panose="020B0004020202020204" pitchFamily="34" charset="0"/>
+                        </a:rPr>
+                        <a:t>AA</a:t>
+                      </a:r>
+                    </a:p>
+                  </a:txBody>
+                  <a:tcPr marL="9525" marR="9525" marT="9525" marB="0" anchor="b">
+                    <a:lnL w="12700" cap="flat" cmpd="sng" algn="ctr">
+                      <a:solidFill>
+                        <a:schemeClr val="tx1"/>
+                      </a:solidFill>
+                      <a:prstDash val="solid"/>
+                      <a:round/>
+                      <a:headEnd type="none" w="med" len="med"/>
+                      <a:tailEnd type="none" w="med" len="med"/>
+                    </a:lnL>
+                    <a:lnR w="12700" cap="flat" cmpd="sng" algn="ctr">
+                      <a:solidFill>
+                        <a:schemeClr val="tx1"/>
+                      </a:solidFill>
+                      <a:prstDash val="solid"/>
+                      <a:round/>
+                      <a:headEnd type="none" w="med" len="med"/>
+                      <a:tailEnd type="none" w="med" len="med"/>
+                    </a:lnR>
+                    <a:lnT w="12700" cap="flat" cmpd="sng" algn="ctr">
+                      <a:solidFill>
+                        <a:schemeClr val="tx1"/>
+                      </a:solidFill>
+                      <a:prstDash val="solid"/>
+                      <a:round/>
+                      <a:headEnd type="none" w="med" len="med"/>
+                      <a:tailEnd type="none" w="med" len="med"/>
+                    </a:lnT>
+                    <a:lnB w="12700" cap="flat" cmpd="sng" algn="ctr">
+                      <a:solidFill>
+                        <a:schemeClr val="tx1"/>
+                      </a:solidFill>
+                      <a:prstDash val="solid"/>
+                      <a:round/>
+                      <a:headEnd type="none" w="med" len="med"/>
+                      <a:tailEnd type="none" w="med" len="med"/>
+                    </a:lnB>
+                    <a:noFill/>
+                  </a:tcPr>
+                </a:tc>
+                <a:tc>
+                  <a:txBody>
+                    <a:bodyPr/>
+                    <a:lstStyle/>
+                    <a:p>
+                      <a:pPr algn="ctr" fontAlgn="b">
+                        <a:buNone/>
+                      </a:pPr>
+                      <a:r>
+                        <a:rPr lang="en-US" sz="1200" b="0" i="0" u="none" strike="noStrike" dirty="0">
+                          <a:solidFill>
+                            <a:srgbClr val="000000"/>
+                          </a:solidFill>
+                          <a:effectLst/>
+                          <a:latin typeface="Aptos Narrow" panose="020B0004020202020204" pitchFamily="34" charset="0"/>
+                        </a:rPr>
+                        <a:t>AA</a:t>
+                      </a:r>
+                    </a:p>
+                  </a:txBody>
+                  <a:tcPr marL="9525" marR="9525" marT="9525" marB="0" anchor="b">
+                    <a:lnL w="12700" cap="flat" cmpd="sng" algn="ctr">
+                      <a:solidFill>
+                        <a:schemeClr val="tx1"/>
+                      </a:solidFill>
+                      <a:prstDash val="solid"/>
+                      <a:round/>
+                      <a:headEnd type="none" w="med" len="med"/>
+                      <a:tailEnd type="none" w="med" len="med"/>
+                    </a:lnL>
+                    <a:lnR w="12700" cap="flat" cmpd="sng" algn="ctr">
+                      <a:solidFill>
+                        <a:schemeClr val="tx1"/>
+                      </a:solidFill>
+                      <a:prstDash val="solid"/>
+                      <a:round/>
+                      <a:headEnd type="none" w="med" len="med"/>
+                      <a:tailEnd type="none" w="med" len="med"/>
+                    </a:lnR>
+                    <a:lnT w="12700" cap="flat" cmpd="sng" algn="ctr">
+                      <a:solidFill>
+                        <a:schemeClr val="tx1"/>
+                      </a:solidFill>
+                      <a:prstDash val="solid"/>
+                      <a:round/>
+                      <a:headEnd type="none" w="med" len="med"/>
+                      <a:tailEnd type="none" w="med" len="med"/>
+                    </a:lnT>
+                    <a:lnB w="12700" cap="flat" cmpd="sng" algn="ctr">
+                      <a:solidFill>
+                        <a:schemeClr val="tx1"/>
+                      </a:solidFill>
+                      <a:prstDash val="solid"/>
+                      <a:round/>
+                      <a:headEnd type="none" w="med" len="med"/>
+                      <a:tailEnd type="none" w="med" len="med"/>
+                    </a:lnB>
+                    <a:noFill/>
+                  </a:tcPr>
+                </a:tc>
+                <a:extLst>
+                  <a:ext uri="{0D108BD9-81ED-4DB2-BD59-A6C34878D82A}">
+                    <a16:rowId xmlns:a16="http://schemas.microsoft.com/office/drawing/2014/main" val="4137902431"/>
+                  </a:ext>
+                </a:extLst>
+              </a:tr>
+              <a:tr h="230125">
+                <a:tc>
+                  <a:txBody>
+                    <a:bodyPr/>
+                    <a:lstStyle/>
+                    <a:p>
+                      <a:pPr algn="l" fontAlgn="b">
+                        <a:buNone/>
+                      </a:pPr>
+                      <a:r>
+                        <a:rPr lang="en-US" sz="1200" b="0" i="0" u="none" strike="noStrike">
+                          <a:solidFill>
+                            <a:srgbClr val="000000"/>
+                          </a:solidFill>
+                          <a:effectLst/>
+                          <a:latin typeface="Aptos Narrow" panose="020B0004020202020204" pitchFamily="34" charset="0"/>
+                        </a:rPr>
+                        <a:t>[(21, 11), (22, 12)]</a:t>
+                      </a:r>
+                    </a:p>
+                  </a:txBody>
+                  <a:tcPr marL="9525" marR="9525" marT="9525" marB="0" anchor="b">
+                    <a:lnL w="12700" cap="flat" cmpd="sng" algn="ctr">
+                      <a:solidFill>
+                        <a:schemeClr val="tx1"/>
+                      </a:solidFill>
+                      <a:prstDash val="solid"/>
+                      <a:round/>
+                      <a:headEnd type="none" w="med" len="med"/>
+                      <a:tailEnd type="none" w="med" len="med"/>
+                    </a:lnL>
+                    <a:lnR w="12700" cap="flat" cmpd="sng" algn="ctr">
+                      <a:solidFill>
+                        <a:schemeClr val="tx1"/>
+                      </a:solidFill>
+                      <a:prstDash val="solid"/>
+                      <a:round/>
+                      <a:headEnd type="none" w="med" len="med"/>
+                      <a:tailEnd type="none" w="med" len="med"/>
+                    </a:lnR>
+                    <a:lnT w="12700" cap="flat" cmpd="sng" algn="ctr">
+                      <a:solidFill>
+                        <a:schemeClr val="tx1"/>
+                      </a:solidFill>
+                      <a:prstDash val="solid"/>
+                      <a:round/>
+                      <a:headEnd type="none" w="med" len="med"/>
+                      <a:tailEnd type="none" w="med" len="med"/>
+                    </a:lnT>
+                    <a:lnB w="12700" cap="flat" cmpd="sng" algn="ctr">
+                      <a:solidFill>
+                        <a:schemeClr val="tx1"/>
+                      </a:solidFill>
+                      <a:prstDash val="solid"/>
+                      <a:round/>
+                      <a:headEnd type="none" w="med" len="med"/>
+                      <a:tailEnd type="none" w="med" len="med"/>
+                    </a:lnB>
+                    <a:noFill/>
+                  </a:tcPr>
+                </a:tc>
+                <a:tc>
+                  <a:txBody>
+                    <a:bodyPr/>
+                    <a:lstStyle/>
+                    <a:p>
+                      <a:pPr algn="r" fontAlgn="b">
+                        <a:buNone/>
+                      </a:pPr>
+                      <a:r>
+                        <a:rPr lang="en-US" sz="1200" b="0" i="0" u="none" strike="noStrike">
+                          <a:solidFill>
+                            <a:srgbClr val="000000"/>
+                          </a:solidFill>
+                          <a:effectLst/>
+                          <a:latin typeface="Aptos Narrow" panose="020B0004020202020204" pitchFamily="34" charset="0"/>
+                        </a:rPr>
+                        <a:t>2</a:t>
+                      </a:r>
+                    </a:p>
+                  </a:txBody>
+                  <a:tcPr marL="9525" marR="9525" marT="9525" marB="0" anchor="b">
+                    <a:lnL w="12700" cap="flat" cmpd="sng" algn="ctr">
+                      <a:solidFill>
+                        <a:schemeClr val="tx1"/>
+                      </a:solidFill>
+                      <a:prstDash val="solid"/>
+                      <a:round/>
+                      <a:headEnd type="none" w="med" len="med"/>
+                      <a:tailEnd type="none" w="med" len="med"/>
+                    </a:lnL>
+                    <a:lnR w="12700" cap="flat" cmpd="sng" algn="ctr">
+                      <a:solidFill>
+                        <a:schemeClr val="tx1"/>
+                      </a:solidFill>
+                      <a:prstDash val="solid"/>
+                      <a:round/>
+                      <a:headEnd type="none" w="med" len="med"/>
+                      <a:tailEnd type="none" w="med" len="med"/>
+                    </a:lnR>
+                    <a:lnT w="12700" cap="flat" cmpd="sng" algn="ctr">
+                      <a:solidFill>
+                        <a:schemeClr val="tx1"/>
+                      </a:solidFill>
+                      <a:prstDash val="solid"/>
+                      <a:round/>
+                      <a:headEnd type="none" w="med" len="med"/>
+                      <a:tailEnd type="none" w="med" len="med"/>
+                    </a:lnT>
+                    <a:lnB w="12700" cap="flat" cmpd="sng" algn="ctr">
+                      <a:solidFill>
+                        <a:schemeClr val="tx1"/>
+                      </a:solidFill>
+                      <a:prstDash val="solid"/>
+                      <a:round/>
+                      <a:headEnd type="none" w="med" len="med"/>
+                      <a:tailEnd type="none" w="med" len="med"/>
+                    </a:lnB>
+                    <a:noFill/>
+                  </a:tcPr>
+                </a:tc>
+                <a:tc>
+                  <a:txBody>
+                    <a:bodyPr/>
+                    <a:lstStyle/>
+                    <a:p>
+                      <a:pPr algn="r" fontAlgn="b">
+                        <a:buNone/>
+                      </a:pPr>
+                      <a:r>
+                        <a:rPr lang="en-US" sz="1200" b="0" i="0" u="none" strike="noStrike">
+                          <a:solidFill>
+                            <a:srgbClr val="000000"/>
+                          </a:solidFill>
+                          <a:effectLst/>
+                          <a:latin typeface="Aptos Narrow" panose="020B0004020202020204" pitchFamily="34" charset="0"/>
+                        </a:rPr>
+                        <a:t>3.329191463</a:t>
+                      </a:r>
+                    </a:p>
+                  </a:txBody>
+                  <a:tcPr marL="9525" marR="9525" marT="9525" marB="0" anchor="b">
+                    <a:lnL w="12700" cap="flat" cmpd="sng" algn="ctr">
+                      <a:solidFill>
+                        <a:schemeClr val="tx1"/>
+                      </a:solidFill>
+                      <a:prstDash val="solid"/>
+                      <a:round/>
+                      <a:headEnd type="none" w="med" len="med"/>
+                      <a:tailEnd type="none" w="med" len="med"/>
+                    </a:lnL>
+                    <a:lnR w="12700" cap="flat" cmpd="sng" algn="ctr">
+                      <a:solidFill>
+                        <a:schemeClr val="tx1"/>
+                      </a:solidFill>
+                      <a:prstDash val="solid"/>
+                      <a:round/>
+                      <a:headEnd type="none" w="med" len="med"/>
+                      <a:tailEnd type="none" w="med" len="med"/>
+                    </a:lnR>
+                    <a:lnT w="12700" cap="flat" cmpd="sng" algn="ctr">
+                      <a:solidFill>
+                        <a:schemeClr val="tx1"/>
+                      </a:solidFill>
+                      <a:prstDash val="solid"/>
+                      <a:round/>
+                      <a:headEnd type="none" w="med" len="med"/>
+                      <a:tailEnd type="none" w="med" len="med"/>
+                    </a:lnT>
+                    <a:lnB w="12700" cap="flat" cmpd="sng" algn="ctr">
+                      <a:solidFill>
+                        <a:schemeClr val="tx1"/>
+                      </a:solidFill>
+                      <a:prstDash val="solid"/>
+                      <a:round/>
+                      <a:headEnd type="none" w="med" len="med"/>
+                      <a:tailEnd type="none" w="med" len="med"/>
+                    </a:lnB>
+                    <a:noFill/>
+                  </a:tcPr>
+                </a:tc>
+                <a:tc>
+                  <a:txBody>
+                    <a:bodyPr/>
+                    <a:lstStyle/>
+                    <a:p>
+                      <a:pPr algn="ctr" fontAlgn="b">
+                        <a:buNone/>
+                      </a:pPr>
+                      <a:r>
+                        <a:rPr lang="en-US" sz="1200" b="0" i="0" u="none" strike="noStrike">
+                          <a:solidFill>
+                            <a:srgbClr val="000000"/>
+                          </a:solidFill>
+                          <a:effectLst/>
+                          <a:latin typeface="Aptos Narrow" panose="020B0004020202020204" pitchFamily="34" charset="0"/>
+                        </a:rPr>
+                        <a:t>AA</a:t>
+                      </a:r>
+                    </a:p>
+                  </a:txBody>
+                  <a:tcPr marL="9525" marR="9525" marT="9525" marB="0" anchor="b">
+                    <a:lnL w="12700" cap="flat" cmpd="sng" algn="ctr">
+                      <a:solidFill>
+                        <a:schemeClr val="tx1"/>
+                      </a:solidFill>
+                      <a:prstDash val="solid"/>
+                      <a:round/>
+                      <a:headEnd type="none" w="med" len="med"/>
+                      <a:tailEnd type="none" w="med" len="med"/>
+                    </a:lnL>
+                    <a:lnR w="12700" cap="flat" cmpd="sng" algn="ctr">
+                      <a:solidFill>
+                        <a:schemeClr val="tx1"/>
+                      </a:solidFill>
+                      <a:prstDash val="solid"/>
+                      <a:round/>
+                      <a:headEnd type="none" w="med" len="med"/>
+                      <a:tailEnd type="none" w="med" len="med"/>
+                    </a:lnR>
+                    <a:lnT w="12700" cap="flat" cmpd="sng" algn="ctr">
+                      <a:solidFill>
+                        <a:schemeClr val="tx1"/>
+                      </a:solidFill>
+                      <a:prstDash val="solid"/>
+                      <a:round/>
+                      <a:headEnd type="none" w="med" len="med"/>
+                      <a:tailEnd type="none" w="med" len="med"/>
+                    </a:lnT>
+                    <a:lnB w="12700" cap="flat" cmpd="sng" algn="ctr">
+                      <a:solidFill>
+                        <a:schemeClr val="tx1"/>
+                      </a:solidFill>
+                      <a:prstDash val="solid"/>
+                      <a:round/>
+                      <a:headEnd type="none" w="med" len="med"/>
+                      <a:tailEnd type="none" w="med" len="med"/>
+                    </a:lnB>
+                    <a:noFill/>
+                  </a:tcPr>
+                </a:tc>
+                <a:tc>
+                  <a:txBody>
+                    <a:bodyPr/>
+                    <a:lstStyle/>
+                    <a:p>
+                      <a:pPr algn="ctr" fontAlgn="b">
+                        <a:buNone/>
+                      </a:pPr>
+                      <a:r>
+                        <a:rPr lang="en-US" sz="1200" b="0" i="0" u="none" strike="noStrike" dirty="0">
+                          <a:solidFill>
+                            <a:srgbClr val="000000"/>
+                          </a:solidFill>
+                          <a:effectLst/>
+                          <a:latin typeface="Aptos Narrow" panose="020B0004020202020204" pitchFamily="34" charset="0"/>
+                        </a:rPr>
+                        <a:t>AA</a:t>
+                      </a:r>
+                    </a:p>
+                  </a:txBody>
+                  <a:tcPr marL="9525" marR="9525" marT="9525" marB="0" anchor="b">
+                    <a:lnL w="12700" cap="flat" cmpd="sng" algn="ctr">
+                      <a:solidFill>
+                        <a:schemeClr val="tx1"/>
+                      </a:solidFill>
+                      <a:prstDash val="solid"/>
+                      <a:round/>
+                      <a:headEnd type="none" w="med" len="med"/>
+                      <a:tailEnd type="none" w="med" len="med"/>
+                    </a:lnL>
+                    <a:lnR w="12700" cap="flat" cmpd="sng" algn="ctr">
+                      <a:solidFill>
+                        <a:schemeClr val="tx1"/>
+                      </a:solidFill>
+                      <a:prstDash val="solid"/>
+                      <a:round/>
+                      <a:headEnd type="none" w="med" len="med"/>
+                      <a:tailEnd type="none" w="med" len="med"/>
+                    </a:lnR>
+                    <a:lnT w="12700" cap="flat" cmpd="sng" algn="ctr">
+                      <a:solidFill>
+                        <a:schemeClr val="tx1"/>
+                      </a:solidFill>
+                      <a:prstDash val="solid"/>
+                      <a:round/>
+                      <a:headEnd type="none" w="med" len="med"/>
+                      <a:tailEnd type="none" w="med" len="med"/>
+                    </a:lnT>
+                    <a:lnB w="12700" cap="flat" cmpd="sng" algn="ctr">
+                      <a:solidFill>
+                        <a:schemeClr val="tx1"/>
+                      </a:solidFill>
+                      <a:prstDash val="solid"/>
+                      <a:round/>
+                      <a:headEnd type="none" w="med" len="med"/>
+                      <a:tailEnd type="none" w="med" len="med"/>
+                    </a:lnB>
+                    <a:noFill/>
+                  </a:tcPr>
+                </a:tc>
+                <a:extLst>
+                  <a:ext uri="{0D108BD9-81ED-4DB2-BD59-A6C34878D82A}">
+                    <a16:rowId xmlns:a16="http://schemas.microsoft.com/office/drawing/2014/main" val="2733134100"/>
+                  </a:ext>
+                </a:extLst>
+              </a:tr>
+              <a:tr h="230125">
+                <a:tc>
+                  <a:txBody>
+                    <a:bodyPr/>
+                    <a:lstStyle/>
+                    <a:p>
+                      <a:pPr algn="l" fontAlgn="b">
+                        <a:buNone/>
+                      </a:pPr>
+                      <a:r>
+                        <a:rPr lang="en-US" sz="1200" b="0" i="0" u="none" strike="noStrike">
+                          <a:solidFill>
+                            <a:srgbClr val="000000"/>
+                          </a:solidFill>
+                          <a:effectLst/>
+                          <a:latin typeface="Aptos Narrow" panose="020B0004020202020204" pitchFamily="34" charset="0"/>
+                        </a:rPr>
+                        <a:t>[(21, 12), (22, 13)]</a:t>
+                      </a:r>
+                    </a:p>
+                  </a:txBody>
+                  <a:tcPr marL="9525" marR="9525" marT="9525" marB="0" anchor="b">
+                    <a:lnL w="12700" cap="flat" cmpd="sng" algn="ctr">
+                      <a:solidFill>
+                        <a:schemeClr val="tx1"/>
+                      </a:solidFill>
+                      <a:prstDash val="solid"/>
+                      <a:round/>
+                      <a:headEnd type="none" w="med" len="med"/>
+                      <a:tailEnd type="none" w="med" len="med"/>
+                    </a:lnL>
+                    <a:lnR w="12700" cap="flat" cmpd="sng" algn="ctr">
+                      <a:solidFill>
+                        <a:schemeClr val="tx1"/>
+                      </a:solidFill>
+                      <a:prstDash val="solid"/>
+                      <a:round/>
+                      <a:headEnd type="none" w="med" len="med"/>
+                      <a:tailEnd type="none" w="med" len="med"/>
+                    </a:lnR>
+                    <a:lnT w="12700" cap="flat" cmpd="sng" algn="ctr">
+                      <a:solidFill>
+                        <a:schemeClr val="tx1"/>
+                      </a:solidFill>
+                      <a:prstDash val="solid"/>
+                      <a:round/>
+                      <a:headEnd type="none" w="med" len="med"/>
+                      <a:tailEnd type="none" w="med" len="med"/>
+                    </a:lnT>
+                    <a:lnB w="12700" cap="flat" cmpd="sng" algn="ctr">
+                      <a:solidFill>
+                        <a:schemeClr val="tx1"/>
+                      </a:solidFill>
+                      <a:prstDash val="solid"/>
+                      <a:round/>
+                      <a:headEnd type="none" w="med" len="med"/>
+                      <a:tailEnd type="none" w="med" len="med"/>
+                    </a:lnB>
+                    <a:noFill/>
+                  </a:tcPr>
+                </a:tc>
+                <a:tc>
+                  <a:txBody>
+                    <a:bodyPr/>
+                    <a:lstStyle/>
+                    <a:p>
+                      <a:pPr algn="r" fontAlgn="b">
+                        <a:buNone/>
+                      </a:pPr>
+                      <a:r>
+                        <a:rPr lang="en-US" sz="1200" b="0" i="0" u="none" strike="noStrike">
+                          <a:solidFill>
+                            <a:srgbClr val="000000"/>
+                          </a:solidFill>
+                          <a:effectLst/>
+                          <a:latin typeface="Aptos Narrow" panose="020B0004020202020204" pitchFamily="34" charset="0"/>
+                        </a:rPr>
+                        <a:t>2</a:t>
+                      </a:r>
+                    </a:p>
+                  </a:txBody>
+                  <a:tcPr marL="9525" marR="9525" marT="9525" marB="0" anchor="b">
+                    <a:lnL w="12700" cap="flat" cmpd="sng" algn="ctr">
+                      <a:solidFill>
+                        <a:schemeClr val="tx1"/>
+                      </a:solidFill>
+                      <a:prstDash val="solid"/>
+                      <a:round/>
+                      <a:headEnd type="none" w="med" len="med"/>
+                      <a:tailEnd type="none" w="med" len="med"/>
+                    </a:lnL>
+                    <a:lnR w="12700" cap="flat" cmpd="sng" algn="ctr">
+                      <a:solidFill>
+                        <a:schemeClr val="tx1"/>
+                      </a:solidFill>
+                      <a:prstDash val="solid"/>
+                      <a:round/>
+                      <a:headEnd type="none" w="med" len="med"/>
+                      <a:tailEnd type="none" w="med" len="med"/>
+                    </a:lnR>
+                    <a:lnT w="12700" cap="flat" cmpd="sng" algn="ctr">
+                      <a:solidFill>
+                        <a:schemeClr val="tx1"/>
+                      </a:solidFill>
+                      <a:prstDash val="solid"/>
+                      <a:round/>
+                      <a:headEnd type="none" w="med" len="med"/>
+                      <a:tailEnd type="none" w="med" len="med"/>
+                    </a:lnT>
+                    <a:lnB w="12700" cap="flat" cmpd="sng" algn="ctr">
+                      <a:solidFill>
+                        <a:schemeClr val="tx1"/>
+                      </a:solidFill>
+                      <a:prstDash val="solid"/>
+                      <a:round/>
+                      <a:headEnd type="none" w="med" len="med"/>
+                      <a:tailEnd type="none" w="med" len="med"/>
+                    </a:lnB>
+                    <a:noFill/>
+                  </a:tcPr>
+                </a:tc>
+                <a:tc>
+                  <a:txBody>
+                    <a:bodyPr/>
+                    <a:lstStyle/>
+                    <a:p>
+                      <a:pPr algn="r" fontAlgn="b">
+                        <a:buNone/>
+                      </a:pPr>
+                      <a:r>
+                        <a:rPr lang="en-US" sz="1200" b="0" i="0" u="none" strike="noStrike">
+                          <a:solidFill>
+                            <a:srgbClr val="000000"/>
+                          </a:solidFill>
+                          <a:effectLst/>
+                          <a:latin typeface="Aptos Narrow" panose="020B0004020202020204" pitchFamily="34" charset="0"/>
+                        </a:rPr>
+                        <a:t>3.202902699</a:t>
+                      </a:r>
+                    </a:p>
+                  </a:txBody>
+                  <a:tcPr marL="9525" marR="9525" marT="9525" marB="0" anchor="b">
+                    <a:lnL w="12700" cap="flat" cmpd="sng" algn="ctr">
+                      <a:solidFill>
+                        <a:schemeClr val="tx1"/>
+                      </a:solidFill>
+                      <a:prstDash val="solid"/>
+                      <a:round/>
+                      <a:headEnd type="none" w="med" len="med"/>
+                      <a:tailEnd type="none" w="med" len="med"/>
+                    </a:lnL>
+                    <a:lnR w="12700" cap="flat" cmpd="sng" algn="ctr">
+                      <a:solidFill>
+                        <a:schemeClr val="tx1"/>
+                      </a:solidFill>
+                      <a:prstDash val="solid"/>
+                      <a:round/>
+                      <a:headEnd type="none" w="med" len="med"/>
+                      <a:tailEnd type="none" w="med" len="med"/>
+                    </a:lnR>
+                    <a:lnT w="12700" cap="flat" cmpd="sng" algn="ctr">
+                      <a:solidFill>
+                        <a:schemeClr val="tx1"/>
+                      </a:solidFill>
+                      <a:prstDash val="solid"/>
+                      <a:round/>
+                      <a:headEnd type="none" w="med" len="med"/>
+                      <a:tailEnd type="none" w="med" len="med"/>
+                    </a:lnT>
+                    <a:lnB w="12700" cap="flat" cmpd="sng" algn="ctr">
+                      <a:solidFill>
+                        <a:schemeClr val="tx1"/>
+                      </a:solidFill>
+                      <a:prstDash val="solid"/>
+                      <a:round/>
+                      <a:headEnd type="none" w="med" len="med"/>
+                      <a:tailEnd type="none" w="med" len="med"/>
+                    </a:lnB>
+                    <a:noFill/>
+                  </a:tcPr>
+                </a:tc>
+                <a:tc>
+                  <a:txBody>
+                    <a:bodyPr/>
+                    <a:lstStyle/>
+                    <a:p>
+                      <a:pPr algn="ctr" fontAlgn="b">
+                        <a:buNone/>
+                      </a:pPr>
+                      <a:r>
+                        <a:rPr lang="en-US" sz="1200" b="0" i="0" u="none" strike="noStrike">
+                          <a:solidFill>
+                            <a:srgbClr val="000000"/>
+                          </a:solidFill>
+                          <a:effectLst/>
+                          <a:latin typeface="Aptos Narrow" panose="020B0004020202020204" pitchFamily="34" charset="0"/>
+                        </a:rPr>
+                        <a:t>AA</a:t>
+                      </a:r>
+                    </a:p>
+                  </a:txBody>
+                  <a:tcPr marL="9525" marR="9525" marT="9525" marB="0" anchor="b">
+                    <a:lnL w="12700" cap="flat" cmpd="sng" algn="ctr">
+                      <a:solidFill>
+                        <a:schemeClr val="tx1"/>
+                      </a:solidFill>
+                      <a:prstDash val="solid"/>
+                      <a:round/>
+                      <a:headEnd type="none" w="med" len="med"/>
+                      <a:tailEnd type="none" w="med" len="med"/>
+                    </a:lnL>
+                    <a:lnR w="12700" cap="flat" cmpd="sng" algn="ctr">
+                      <a:solidFill>
+                        <a:schemeClr val="tx1"/>
+                      </a:solidFill>
+                      <a:prstDash val="solid"/>
+                      <a:round/>
+                      <a:headEnd type="none" w="med" len="med"/>
+                      <a:tailEnd type="none" w="med" len="med"/>
+                    </a:lnR>
+                    <a:lnT w="12700" cap="flat" cmpd="sng" algn="ctr">
+                      <a:solidFill>
+                        <a:schemeClr val="tx1"/>
+                      </a:solidFill>
+                      <a:prstDash val="solid"/>
+                      <a:round/>
+                      <a:headEnd type="none" w="med" len="med"/>
+                      <a:tailEnd type="none" w="med" len="med"/>
+                    </a:lnT>
+                    <a:lnB w="12700" cap="flat" cmpd="sng" algn="ctr">
+                      <a:solidFill>
+                        <a:schemeClr val="tx1"/>
+                      </a:solidFill>
+                      <a:prstDash val="solid"/>
+                      <a:round/>
+                      <a:headEnd type="none" w="med" len="med"/>
+                      <a:tailEnd type="none" w="med" len="med"/>
+                    </a:lnB>
+                    <a:noFill/>
+                  </a:tcPr>
+                </a:tc>
+                <a:tc>
+                  <a:txBody>
+                    <a:bodyPr/>
+                    <a:lstStyle/>
+                    <a:p>
+                      <a:pPr algn="ctr" fontAlgn="b">
+                        <a:buNone/>
+                      </a:pPr>
+                      <a:r>
+                        <a:rPr lang="en-US" sz="1200" b="0" i="0" u="none" strike="noStrike" dirty="0">
+                          <a:solidFill>
+                            <a:srgbClr val="000000"/>
+                          </a:solidFill>
+                          <a:effectLst/>
+                          <a:latin typeface="Aptos Narrow" panose="020B0004020202020204" pitchFamily="34" charset="0"/>
+                        </a:rPr>
+                        <a:t>AA</a:t>
+                      </a:r>
+                    </a:p>
+                  </a:txBody>
+                  <a:tcPr marL="9525" marR="9525" marT="9525" marB="0" anchor="b">
+                    <a:lnL w="12700" cap="flat" cmpd="sng" algn="ctr">
+                      <a:solidFill>
+                        <a:schemeClr val="tx1"/>
+                      </a:solidFill>
+                      <a:prstDash val="solid"/>
+                      <a:round/>
+                      <a:headEnd type="none" w="med" len="med"/>
+                      <a:tailEnd type="none" w="med" len="med"/>
+                    </a:lnL>
+                    <a:lnR w="12700" cap="flat" cmpd="sng" algn="ctr">
+                      <a:solidFill>
+                        <a:schemeClr val="tx1"/>
+                      </a:solidFill>
+                      <a:prstDash val="solid"/>
+                      <a:round/>
+                      <a:headEnd type="none" w="med" len="med"/>
+                      <a:tailEnd type="none" w="med" len="med"/>
+                    </a:lnR>
+                    <a:lnT w="12700" cap="flat" cmpd="sng" algn="ctr">
+                      <a:solidFill>
+                        <a:schemeClr val="tx1"/>
+                      </a:solidFill>
+                      <a:prstDash val="solid"/>
+                      <a:round/>
+                      <a:headEnd type="none" w="med" len="med"/>
+                      <a:tailEnd type="none" w="med" len="med"/>
+                    </a:lnT>
+                    <a:lnB w="12700" cap="flat" cmpd="sng" algn="ctr">
+                      <a:solidFill>
+                        <a:schemeClr val="tx1"/>
+                      </a:solidFill>
+                      <a:prstDash val="solid"/>
+                      <a:round/>
+                      <a:headEnd type="none" w="med" len="med"/>
+                      <a:tailEnd type="none" w="med" len="med"/>
+                    </a:lnB>
+                    <a:noFill/>
+                  </a:tcPr>
+                </a:tc>
+                <a:extLst>
+                  <a:ext uri="{0D108BD9-81ED-4DB2-BD59-A6C34878D82A}">
+                    <a16:rowId xmlns:a16="http://schemas.microsoft.com/office/drawing/2014/main" val="3493702534"/>
+                  </a:ext>
+                </a:extLst>
+              </a:tr>
+            </a:tbl>
+          </a:graphicData>
+        </a:graphic>
+      </p:graphicFrame>
+      <p:pic>
+        <p:nvPicPr>
+          <p:cNvPr id="4" name="Picture 3">
+            <a:extLst>
+              <a:ext uri="{FF2B5EF4-FFF2-40B4-BE49-F238E27FC236}">
+                <a16:creationId xmlns:a16="http://schemas.microsoft.com/office/drawing/2014/main" id="{44EFBF8B-B223-9C68-EE0A-22D56B90D575}"/>
+              </a:ext>
+            </a:extLst>
+          </p:cNvPr>
+          <p:cNvPicPr>
+            <a:picLocks noChangeAspect="1"/>
+          </p:cNvPicPr>
+          <p:nvPr/>
+        </p:nvPicPr>
+        <p:blipFill>
+          <a:blip r:embed="rId3"/>
+          <a:stretch>
+            <a:fillRect/>
+          </a:stretch>
+        </p:blipFill>
+        <p:spPr>
+          <a:xfrm>
+            <a:off x="5502909" y="2387302"/>
+            <a:ext cx="6541310" cy="4367068"/>
+          </a:xfrm>
+          <a:prstGeom prst="rect">
+            <a:avLst/>
+          </a:prstGeom>
+        </p:spPr>
+      </p:pic>
+    </p:spTree>
+    <p:extLst>
+      <p:ext uri="{BB962C8B-B14F-4D97-AF65-F5344CB8AC3E}">
+        <p14:creationId xmlns:p14="http://schemas.microsoft.com/office/powerpoint/2010/main" val="2467632078"/>
+      </p:ext>
+    </p:extLst>
+  </p:cSld>
+  <p:clrMapOvr>
+    <a:masterClrMapping/>
+  </p:clrMapOvr>
+</p:sld>
+</file>
+
+<file path=ppt/slides/slide9.xml><?xml version="1.0" encoding="utf-8"?>
+<p:sld xmlns:a="http://schemas.openxmlformats.org/drawingml/2006/main" xmlns:r="http://schemas.openxmlformats.org/officeDocument/2006/relationships" xmlns:p="http://schemas.openxmlformats.org/presentationml/2006/main">
+  <p:cSld>
+    <p:bg>
+      <p:bgPr>
+        <a:solidFill>
+          <a:schemeClr val="accent4">
+            <a:lumMod val="20000"/>
+            <a:lumOff val="80000"/>
+          </a:schemeClr>
+        </a:solidFill>
+        <a:effectLst/>
+      </p:bgPr>
+    </p:bg>
+    <p:spTree>
+      <p:nvGrpSpPr>
+        <p:cNvPr id="1" name="">
+          <a:extLst>
+            <a:ext uri="{FF2B5EF4-FFF2-40B4-BE49-F238E27FC236}">
+              <a16:creationId xmlns:a16="http://schemas.microsoft.com/office/drawing/2014/main" id="{6E471207-1026-3D11-05AE-FF5BB70D7A54}"/>
+            </a:ext>
+          </a:extLst>
+        </p:cNvPr>
+        <p:cNvGrpSpPr/>
+        <p:nvPr/>
+      </p:nvGrpSpPr>
+      <p:grpSpPr>
+        <a:xfrm>
+          <a:off x="0" y="0"/>
+          <a:ext cx="0" cy="0"/>
+          <a:chOff x="0" y="0"/>
+          <a:chExt cx="0" cy="0"/>
+        </a:xfrm>
+      </p:grpSpPr>
+      <p:sp>
+        <p:nvSpPr>
+          <p:cNvPr id="2" name="Title 1">
+            <a:extLst>
+              <a:ext uri="{FF2B5EF4-FFF2-40B4-BE49-F238E27FC236}">
+                <a16:creationId xmlns:a16="http://schemas.microsoft.com/office/drawing/2014/main" id="{04BB0E8A-7B3E-B5C5-D8A1-EAFBC481C934}"/>
+              </a:ext>
+            </a:extLst>
+          </p:cNvPr>
+          <p:cNvSpPr>
+            <a:spLocks noGrp="1"/>
+          </p:cNvSpPr>
+          <p:nvPr>
+            <p:ph type="title"/>
+          </p:nvPr>
+        </p:nvSpPr>
+        <p:spPr>
+          <a:xfrm>
+            <a:off x="116114" y="103630"/>
+            <a:ext cx="10515600" cy="1325563"/>
+          </a:xfrm>
+        </p:spPr>
+        <p:txBody>
+          <a:bodyPr/>
+          <a:lstStyle/>
+          <a:p>
+            <a:r>
+              <a:rPr lang="en-US" dirty="0"/>
+              <a:t>Ex1 Mo1 80pct threshold</a:t>
+            </a:r>
+          </a:p>
+        </p:txBody>
+      </p:sp>
+      <p:pic>
+        <p:nvPicPr>
+          <p:cNvPr id="5" name="Content Placeholder 4" descr="A colorful text on a black background&#10;&#10;AI-generated content may be incorrect.">
+            <a:extLst>
+              <a:ext uri="{FF2B5EF4-FFF2-40B4-BE49-F238E27FC236}">
+                <a16:creationId xmlns:a16="http://schemas.microsoft.com/office/drawing/2014/main" id="{0066D877-4822-F903-FECC-587672BBE9AE}"/>
+              </a:ext>
+            </a:extLst>
+          </p:cNvPr>
+          <p:cNvPicPr>
+            <a:picLocks noGrp="1" noChangeAspect="1"/>
+          </p:cNvPicPr>
+          <p:nvPr>
+            <p:ph idx="1"/>
+          </p:nvPr>
+        </p:nvPicPr>
+        <p:blipFill>
+          <a:blip r:embed="rId3"/>
+          <a:stretch>
+            <a:fillRect/>
+          </a:stretch>
+        </p:blipFill>
+        <p:spPr>
+          <a:xfrm>
+            <a:off x="6257755" y="-40777"/>
+            <a:ext cx="5517614" cy="1469970"/>
+          </a:xfrm>
+        </p:spPr>
+      </p:pic>
+      <p:pic>
+        <p:nvPicPr>
+          <p:cNvPr id="3" name="Picture 2">
+            <a:extLst>
+              <a:ext uri="{FF2B5EF4-FFF2-40B4-BE49-F238E27FC236}">
+                <a16:creationId xmlns:a16="http://schemas.microsoft.com/office/drawing/2014/main" id="{732D034A-398E-1332-F401-2CD716CE1524}"/>
+              </a:ext>
+            </a:extLst>
+          </p:cNvPr>
+          <p:cNvPicPr>
+            <a:picLocks noChangeAspect="1"/>
+          </p:cNvPicPr>
+          <p:nvPr/>
+        </p:nvPicPr>
+        <p:blipFill>
+          <a:blip r:embed="rId4"/>
+          <a:stretch>
+            <a:fillRect/>
+          </a:stretch>
+        </p:blipFill>
+        <p:spPr>
+          <a:xfrm>
+            <a:off x="0" y="1803978"/>
+            <a:ext cx="5863359" cy="4188114"/>
+          </a:xfrm>
+          <a:prstGeom prst="rect">
+            <a:avLst/>
+          </a:prstGeom>
+        </p:spPr>
+      </p:pic>
+      <p:pic>
+        <p:nvPicPr>
+          <p:cNvPr id="6" name="Picture 5">
+            <a:extLst>
+              <a:ext uri="{FF2B5EF4-FFF2-40B4-BE49-F238E27FC236}">
+                <a16:creationId xmlns:a16="http://schemas.microsoft.com/office/drawing/2014/main" id="{21F0A666-3BF6-F65D-540D-B5D0867E1041}"/>
+              </a:ext>
+            </a:extLst>
+          </p:cNvPr>
+          <p:cNvPicPr>
+            <a:picLocks noChangeAspect="1"/>
+          </p:cNvPicPr>
+          <p:nvPr/>
+        </p:nvPicPr>
+        <p:blipFill>
+          <a:blip r:embed="rId5"/>
+          <a:stretch>
+            <a:fillRect/>
+          </a:stretch>
+        </p:blipFill>
+        <p:spPr>
+          <a:xfrm>
+            <a:off x="6257755" y="1547092"/>
+            <a:ext cx="5691790" cy="5030622"/>
+          </a:xfrm>
+          <a:prstGeom prst="rect">
+            <a:avLst/>
+          </a:prstGeom>
+        </p:spPr>
+      </p:pic>
+    </p:spTree>
+    <p:extLst>
+      <p:ext uri="{BB962C8B-B14F-4D97-AF65-F5344CB8AC3E}">
+        <p14:creationId xmlns:p14="http://schemas.microsoft.com/office/powerpoint/2010/main" val="1893440590"/>
       </p:ext>
     </p:extLst>
   </p:cSld>
@@ -7875,4 +13930,319 @@
     </a:ext>
   </a:extLst>
 </a:theme>
+</file>
+
+<file path=ppt/theme/theme2.xml><?xml version="1.0" encoding="utf-8"?>
+<a:theme xmlns:a="http://schemas.openxmlformats.org/drawingml/2006/main" name="Office Theme">
+  <a:themeElements>
+    <a:clrScheme name="Office">
+      <a:dk1>
+        <a:sysClr val="windowText" lastClr="000000"/>
+      </a:dk1>
+      <a:lt1>
+        <a:sysClr val="window" lastClr="FFFFFF"/>
+      </a:lt1>
+      <a:dk2>
+        <a:srgbClr val="0E2841"/>
+      </a:dk2>
+      <a:lt2>
+        <a:srgbClr val="E8E8E8"/>
+      </a:lt2>
+      <a:accent1>
+        <a:srgbClr val="156082"/>
+      </a:accent1>
+      <a:accent2>
+        <a:srgbClr val="E97132"/>
+      </a:accent2>
+      <a:accent3>
+        <a:srgbClr val="196B24"/>
+      </a:accent3>
+      <a:accent4>
+        <a:srgbClr val="0F9ED5"/>
+      </a:accent4>
+      <a:accent5>
+        <a:srgbClr val="A02B93"/>
+      </a:accent5>
+      <a:accent6>
+        <a:srgbClr val="4EA72E"/>
+      </a:accent6>
+      <a:hlink>
+        <a:srgbClr val="467886"/>
+      </a:hlink>
+      <a:folHlink>
+        <a:srgbClr val="96607D"/>
+      </a:folHlink>
+    </a:clrScheme>
+    <a:fontScheme name="Office">
+      <a:majorFont>
+        <a:latin typeface="Aptos Display" panose="02110004020202020204"/>
+        <a:ea typeface=""/>
+        <a:cs typeface=""/>
+        <a:font script="Jpan" typeface="游ゴシック Light"/>
+        <a:font script="Hang" typeface="맑은 고딕"/>
+        <a:font script="Hans" typeface="等线 Light"/>
+        <a:font script="Hant" typeface="新細明體"/>
+        <a:font script="Arab" typeface="Times New Roman"/>
+        <a:font script="Hebr" typeface="Times New Roman"/>
+        <a:font script="Thai" typeface="Angsana New"/>
+        <a:font script="Ethi" typeface="Nyala"/>
+        <a:font script="Beng" typeface="Vrinda"/>
+        <a:font script="Gujr" typeface="Shruti"/>
+        <a:font script="Khmr" typeface="MoolBoran"/>
+        <a:font script="Knda" typeface="Tunga"/>
+        <a:font script="Guru" typeface="Raavi"/>
+        <a:font script="Cans" typeface="Euphemia"/>
+        <a:font script="Cher" typeface="Plantagenet Cherokee"/>
+        <a:font script="Yiii" typeface="Microsoft Yi Baiti"/>
+        <a:font script="Tibt" typeface="Microsoft Himalaya"/>
+        <a:font script="Thaa" typeface="MV Boli"/>
+        <a:font script="Deva" typeface="Mangal"/>
+        <a:font script="Telu" typeface="Gautami"/>
+        <a:font script="Taml" typeface="Latha"/>
+        <a:font script="Syrc" typeface="Estrangelo Edessa"/>
+        <a:font script="Orya" typeface="Kalinga"/>
+        <a:font script="Mlym" typeface="Kartika"/>
+        <a:font script="Laoo" typeface="DokChampa"/>
+        <a:font script="Sinh" typeface="Iskoola Pota"/>
+        <a:font script="Mong" typeface="Mongolian Baiti"/>
+        <a:font script="Viet" typeface="Times New Roman"/>
+        <a:font script="Uigh" typeface="Microsoft Uighur"/>
+        <a:font script="Geor" typeface="Sylfaen"/>
+        <a:font script="Armn" typeface="Arial"/>
+        <a:font script="Bugi" typeface="Leelawadee UI"/>
+        <a:font script="Bopo" typeface="Microsoft JhengHei"/>
+        <a:font script="Java" typeface="Javanese Text"/>
+        <a:font script="Lisu" typeface="Segoe UI"/>
+        <a:font script="Mymr" typeface="Myanmar Text"/>
+        <a:font script="Nkoo" typeface="Ebrima"/>
+        <a:font script="Olck" typeface="Nirmala UI"/>
+        <a:font script="Osma" typeface="Ebrima"/>
+        <a:font script="Phag" typeface="Phagspa"/>
+        <a:font script="Syrn" typeface="Estrangelo Edessa"/>
+        <a:font script="Syrj" typeface="Estrangelo Edessa"/>
+        <a:font script="Syre" typeface="Estrangelo Edessa"/>
+        <a:font script="Sora" typeface="Nirmala UI"/>
+        <a:font script="Tale" typeface="Microsoft Tai Le"/>
+        <a:font script="Talu" typeface="Microsoft New Tai Lue"/>
+        <a:font script="Tfng" typeface="Ebrima"/>
+      </a:majorFont>
+      <a:minorFont>
+        <a:latin typeface="Aptos" panose="02110004020202020204"/>
+        <a:ea typeface=""/>
+        <a:cs typeface=""/>
+        <a:font script="Jpan" typeface="游ゴシック"/>
+        <a:font script="Hang" typeface="맑은 고딕"/>
+        <a:font script="Hans" typeface="等线"/>
+        <a:font script="Hant" typeface="新細明體"/>
+        <a:font script="Arab" typeface="Arial"/>
+        <a:font script="Hebr" typeface="Arial"/>
+        <a:font script="Thai" typeface="Cordia New"/>
+        <a:font script="Ethi" typeface="Nyala"/>
+        <a:font script="Beng" typeface="Vrinda"/>
+        <a:font script="Gujr" typeface="Shruti"/>
+        <a:font script="Khmr" typeface="DaunPenh"/>
+        <a:font script="Knda" typeface="Tunga"/>
+        <a:font script="Guru" typeface="Raavi"/>
+        <a:font script="Cans" typeface="Euphemia"/>
+        <a:font script="Cher" typeface="Plantagenet Cherokee"/>
+        <a:font script="Yiii" typeface="Microsoft Yi Baiti"/>
+        <a:font script="Tibt" typeface="Microsoft Himalaya"/>
+        <a:font script="Thaa" typeface="MV Boli"/>
+        <a:font script="Deva" typeface="Mangal"/>
+        <a:font script="Telu" typeface="Gautami"/>
+        <a:font script="Taml" typeface="Latha"/>
+        <a:font script="Syrc" typeface="Estrangelo Edessa"/>
+        <a:font script="Orya" typeface="Kalinga"/>
+        <a:font script="Mlym" typeface="Kartika"/>
+        <a:font script="Laoo" typeface="DokChampa"/>
+        <a:font script="Sinh" typeface="Iskoola Pota"/>
+        <a:font script="Mong" typeface="Mongolian Baiti"/>
+        <a:font script="Viet" typeface="Arial"/>
+        <a:font script="Uigh" typeface="Microsoft Uighur"/>
+        <a:font script="Geor" typeface="Sylfaen"/>
+        <a:font script="Armn" typeface="Arial"/>
+        <a:font script="Bugi" typeface="Leelawadee UI"/>
+        <a:font script="Bopo" typeface="Microsoft JhengHei"/>
+        <a:font script="Java" typeface="Javanese Text"/>
+        <a:font script="Lisu" typeface="Segoe UI"/>
+        <a:font script="Mymr" typeface="Myanmar Text"/>
+        <a:font script="Nkoo" typeface="Ebrima"/>
+        <a:font script="Olck" typeface="Nirmala UI"/>
+        <a:font script="Osma" typeface="Ebrima"/>
+        <a:font script="Phag" typeface="Phagspa"/>
+        <a:font script="Syrn" typeface="Estrangelo Edessa"/>
+        <a:font script="Syrj" typeface="Estrangelo Edessa"/>
+        <a:font script="Syre" typeface="Estrangelo Edessa"/>
+        <a:font script="Sora" typeface="Nirmala UI"/>
+        <a:font script="Tale" typeface="Microsoft Tai Le"/>
+        <a:font script="Talu" typeface="Microsoft New Tai Lue"/>
+        <a:font script="Tfng" typeface="Ebrima"/>
+      </a:minorFont>
+    </a:fontScheme>
+    <a:fmtScheme name="Office">
+      <a:fillStyleLst>
+        <a:solidFill>
+          <a:schemeClr val="phClr"/>
+        </a:solidFill>
+        <a:gradFill rotWithShape="1">
+          <a:gsLst>
+            <a:gs pos="0">
+              <a:schemeClr val="phClr">
+                <a:lumMod val="110000"/>
+                <a:satMod val="105000"/>
+                <a:tint val="67000"/>
+              </a:schemeClr>
+            </a:gs>
+            <a:gs pos="50000">
+              <a:schemeClr val="phClr">
+                <a:lumMod val="105000"/>
+                <a:satMod val="103000"/>
+                <a:tint val="73000"/>
+              </a:schemeClr>
+            </a:gs>
+            <a:gs pos="100000">
+              <a:schemeClr val="phClr">
+                <a:lumMod val="105000"/>
+                <a:satMod val="109000"/>
+                <a:tint val="81000"/>
+              </a:schemeClr>
+            </a:gs>
+          </a:gsLst>
+          <a:lin ang="5400000" scaled="0"/>
+        </a:gradFill>
+        <a:gradFill rotWithShape="1">
+          <a:gsLst>
+            <a:gs pos="0">
+              <a:schemeClr val="phClr">
+                <a:satMod val="103000"/>
+                <a:lumMod val="102000"/>
+                <a:tint val="94000"/>
+              </a:schemeClr>
+            </a:gs>
+            <a:gs pos="50000">
+              <a:schemeClr val="phClr">
+                <a:satMod val="110000"/>
+                <a:lumMod val="100000"/>
+                <a:shade val="100000"/>
+              </a:schemeClr>
+            </a:gs>
+            <a:gs pos="100000">
+              <a:schemeClr val="phClr">
+                <a:lumMod val="99000"/>
+                <a:satMod val="120000"/>
+                <a:shade val="78000"/>
+              </a:schemeClr>
+            </a:gs>
+          </a:gsLst>
+          <a:lin ang="5400000" scaled="0"/>
+        </a:gradFill>
+      </a:fillStyleLst>
+      <a:lnStyleLst>
+        <a:ln w="12700" cap="flat" cmpd="sng" algn="ctr">
+          <a:solidFill>
+            <a:schemeClr val="phClr"/>
+          </a:solidFill>
+          <a:prstDash val="solid"/>
+          <a:miter lim="800000"/>
+        </a:ln>
+        <a:ln w="19050" cap="flat" cmpd="sng" algn="ctr">
+          <a:solidFill>
+            <a:schemeClr val="phClr"/>
+          </a:solidFill>
+          <a:prstDash val="solid"/>
+          <a:miter lim="800000"/>
+        </a:ln>
+        <a:ln w="25400" cap="flat" cmpd="sng" algn="ctr">
+          <a:solidFill>
+            <a:schemeClr val="phClr"/>
+          </a:solidFill>
+          <a:prstDash val="solid"/>
+          <a:miter lim="800000"/>
+        </a:ln>
+      </a:lnStyleLst>
+      <a:effectStyleLst>
+        <a:effectStyle>
+          <a:effectLst/>
+        </a:effectStyle>
+        <a:effectStyle>
+          <a:effectLst/>
+        </a:effectStyle>
+        <a:effectStyle>
+          <a:effectLst>
+            <a:outerShdw blurRad="57150" dist="19050" dir="5400000" algn="ctr" rotWithShape="0">
+              <a:srgbClr val="000000">
+                <a:alpha val="63000"/>
+              </a:srgbClr>
+            </a:outerShdw>
+          </a:effectLst>
+        </a:effectStyle>
+      </a:effectStyleLst>
+      <a:bgFillStyleLst>
+        <a:solidFill>
+          <a:schemeClr val="phClr"/>
+        </a:solidFill>
+        <a:solidFill>
+          <a:schemeClr val="phClr">
+            <a:tint val="95000"/>
+            <a:satMod val="170000"/>
+          </a:schemeClr>
+        </a:solidFill>
+        <a:gradFill rotWithShape="1">
+          <a:gsLst>
+            <a:gs pos="0">
+              <a:schemeClr val="phClr">
+                <a:tint val="93000"/>
+                <a:satMod val="150000"/>
+                <a:shade val="98000"/>
+                <a:lumMod val="102000"/>
+              </a:schemeClr>
+            </a:gs>
+            <a:gs pos="50000">
+              <a:schemeClr val="phClr">
+                <a:tint val="98000"/>
+                <a:satMod val="130000"/>
+                <a:shade val="90000"/>
+                <a:lumMod val="103000"/>
+              </a:schemeClr>
+            </a:gs>
+            <a:gs pos="100000">
+              <a:schemeClr val="phClr">
+                <a:shade val="63000"/>
+                <a:satMod val="120000"/>
+              </a:schemeClr>
+            </a:gs>
+          </a:gsLst>
+          <a:lin ang="5400000" scaled="0"/>
+        </a:gradFill>
+      </a:bgFillStyleLst>
+    </a:fmtScheme>
+  </a:themeElements>
+  <a:objectDefaults>
+    <a:lnDef>
+      <a:spPr/>
+      <a:bodyPr/>
+      <a:lstStyle/>
+      <a:style>
+        <a:lnRef idx="2">
+          <a:schemeClr val="accent1"/>
+        </a:lnRef>
+        <a:fillRef idx="0">
+          <a:schemeClr val="accent1"/>
+        </a:fillRef>
+        <a:effectRef idx="1">
+          <a:schemeClr val="accent1"/>
+        </a:effectRef>
+        <a:fontRef idx="minor">
+          <a:schemeClr val="tx1"/>
+        </a:fontRef>
+      </a:style>
+    </a:lnDef>
+  </a:objectDefaults>
+  <a:extraClrSchemeLst/>
+  <a:extLst>
+    <a:ext uri="{05A4C25C-085E-4340-85A3-A5531E510DB2}">
+      <thm15:themeFamily xmlns:thm15="http://schemas.microsoft.com/office/thememl/2012/main" name="Office Theme" id="{2E142A2C-CD16-42D6-873A-C26D2A0506FA}" vid="{1BDDFF52-6CD6-40A5-AB3C-68EB2F1E4D0A}"/>
+    </a:ext>
+  </a:extLst>
+</a:theme>
 </file>
--- a/Presentations/May Motif Gallery.pptx
+++ b/Presentations/May Motif Gallery.pptx
@@ -5,7 +5,7 @@
     <p:sldMasterId id="2147483648" r:id="rId1"/>
   </p:sldMasterIdLst>
   <p:notesMasterIdLst>
-    <p:notesMasterId r:id="rId12"/>
+    <p:notesMasterId r:id="rId22"/>
   </p:notesMasterIdLst>
   <p:sldIdLst>
     <p:sldId id="256" r:id="rId2"/>
@@ -18,6 +18,16 @@
     <p:sldId id="262" r:id="rId9"/>
     <p:sldId id="263" r:id="rId10"/>
     <p:sldId id="264" r:id="rId11"/>
+    <p:sldId id="266" r:id="rId12"/>
+    <p:sldId id="267" r:id="rId13"/>
+    <p:sldId id="268" r:id="rId14"/>
+    <p:sldId id="269" r:id="rId15"/>
+    <p:sldId id="270" r:id="rId16"/>
+    <p:sldId id="271" r:id="rId17"/>
+    <p:sldId id="272" r:id="rId18"/>
+    <p:sldId id="273" r:id="rId19"/>
+    <p:sldId id="274" r:id="rId20"/>
+    <p:sldId id="275" r:id="rId21"/>
   </p:sldIdLst>
   <p:sldSz cx="12192000" cy="6858000"/>
   <p:notesSz cx="6858000" cy="9144000"/>
@@ -116,6 +126,11 @@
       </a:defRPr>
     </a:lvl9pPr>
   </p:defaultTextStyle>
+  <p:extLst>
+    <p:ext uri="{EFAFB233-063F-42B5-8137-9DF3F51BA10A}">
+      <p15:sldGuideLst xmlns:p15="http://schemas.microsoft.com/office/powerpoint/2012/main"/>
+    </p:ext>
+  </p:extLst>
 </p:presentation>
 </file>
 
@@ -201,7 +216,7 @@
           <a:p>
             <a:fld id="{215846FF-D9D8-F644-971D-9D9A7741D920}" type="datetimeFigureOut">
               <a:rPr lang="en-US" smtClean="0"/>
-              <a:t>5/5/26</a:t>
+              <a:t>5/11/26</a:t>
             </a:fld>
             <a:endParaRPr lang="en-US"/>
           </a:p>
@@ -562,6 +577,101 @@
 </p:notes>
 </file>
 
+<file path=ppt/notesSlides/notesSlide2.xml><?xml version="1.0" encoding="utf-8"?>
+<p:notes xmlns:a="http://schemas.openxmlformats.org/drawingml/2006/main" xmlns:r="http://schemas.openxmlformats.org/officeDocument/2006/relationships" xmlns:p="http://schemas.openxmlformats.org/presentationml/2006/main">
+  <p:cSld>
+    <p:spTree>
+      <p:nvGrpSpPr>
+        <p:cNvPr id="1" name=""/>
+        <p:cNvGrpSpPr/>
+        <p:nvPr/>
+      </p:nvGrpSpPr>
+      <p:grpSpPr>
+        <a:xfrm>
+          <a:off x="0" y="0"/>
+          <a:ext cx="0" cy="0"/>
+          <a:chOff x="0" y="0"/>
+          <a:chExt cx="0" cy="0"/>
+        </a:xfrm>
+      </p:grpSpPr>
+      <p:sp>
+        <p:nvSpPr>
+          <p:cNvPr id="2" name="Slide Image Placeholder 1"/>
+          <p:cNvSpPr>
+            <a:spLocks noGrp="1" noRot="1" noChangeAspect="1"/>
+          </p:cNvSpPr>
+          <p:nvPr>
+            <p:ph type="sldImg"/>
+          </p:nvPr>
+        </p:nvSpPr>
+        <p:spPr/>
+      </p:sp>
+      <p:sp>
+        <p:nvSpPr>
+          <p:cNvPr id="3" name="Notes Placeholder 2"/>
+          <p:cNvSpPr>
+            <a:spLocks noGrp="1"/>
+          </p:cNvSpPr>
+          <p:nvPr>
+            <p:ph type="body" idx="1"/>
+          </p:nvPr>
+        </p:nvSpPr>
+        <p:spPr/>
+        <p:txBody>
+          <a:bodyPr/>
+          <a:lstStyle/>
+          <a:p>
+            <a:r>
+              <a:rPr lang="en-US" dirty="0"/>
+              <a:t>https://</a:t>
+            </a:r>
+            <a:r>
+              <a:rPr lang="en-US" dirty="0" err="1"/>
+              <a:t>www.researchgate.net</a:t>
+            </a:r>
+            <a:r>
+              <a:rPr lang="en-US" dirty="0"/>
+              <a:t>/figure/LexA-repressor-dimer-bound-to-its-cognate-SOS-boxes-PDB-code-3JSO-a-Schematic_fig11_263936900</a:t>
+            </a:r>
+          </a:p>
+        </p:txBody>
+      </p:sp>
+      <p:sp>
+        <p:nvSpPr>
+          <p:cNvPr id="4" name="Slide Number Placeholder 3"/>
+          <p:cNvSpPr>
+            <a:spLocks noGrp="1"/>
+          </p:cNvSpPr>
+          <p:nvPr>
+            <p:ph type="sldNum" sz="quarter" idx="5"/>
+          </p:nvPr>
+        </p:nvSpPr>
+        <p:spPr/>
+        <p:txBody>
+          <a:bodyPr/>
+          <a:lstStyle/>
+          <a:p>
+            <a:fld id="{141815C7-3430-1D47-896C-791E6467C6CE}" type="slidenum">
+              <a:rPr lang="en-US" smtClean="0"/>
+              <a:t>15</a:t>
+            </a:fld>
+            <a:endParaRPr lang="en-US"/>
+          </a:p>
+        </p:txBody>
+      </p:sp>
+    </p:spTree>
+    <p:extLst>
+      <p:ext uri="{BB962C8B-B14F-4D97-AF65-F5344CB8AC3E}">
+        <p14:creationId xmlns:p14="http://schemas.microsoft.com/office/powerpoint/2010/main" val="1201637168"/>
+      </p:ext>
+    </p:extLst>
+  </p:cSld>
+  <p:clrMapOvr>
+    <a:masterClrMapping/>
+  </p:clrMapOvr>
+</p:notes>
+</file>
+
 <file path=ppt/slideLayouts/slideLayout1.xml><?xml version="1.0" encoding="utf-8"?>
 <p:sldLayout xmlns:a="http://schemas.openxmlformats.org/drawingml/2006/main" xmlns:r="http://schemas.openxmlformats.org/officeDocument/2006/relationships" xmlns:p="http://schemas.openxmlformats.org/presentationml/2006/main" type="title" preserve="1">
   <p:cSld name="Title Slide">
@@ -709,7 +819,7 @@
           <a:p>
             <a:fld id="{1280BD87-46A1-BC47-9C77-7F721A56BA45}" type="datetimeFigureOut">
               <a:rPr lang="en-US" smtClean="0"/>
-              <a:t>5/5/26</a:t>
+              <a:t>5/11/26</a:t>
             </a:fld>
             <a:endParaRPr lang="en-US"/>
           </a:p>
@@ -907,7 +1017,7 @@
           <a:p>
             <a:fld id="{1280BD87-46A1-BC47-9C77-7F721A56BA45}" type="datetimeFigureOut">
               <a:rPr lang="en-US" smtClean="0"/>
-              <a:t>5/5/26</a:t>
+              <a:t>5/11/26</a:t>
             </a:fld>
             <a:endParaRPr lang="en-US"/>
           </a:p>
@@ -1115,7 +1225,7 @@
           <a:p>
             <a:fld id="{1280BD87-46A1-BC47-9C77-7F721A56BA45}" type="datetimeFigureOut">
               <a:rPr lang="en-US" smtClean="0"/>
-              <a:t>5/5/26</a:t>
+              <a:t>5/11/26</a:t>
             </a:fld>
             <a:endParaRPr lang="en-US"/>
           </a:p>
@@ -1313,7 +1423,7 @@
           <a:p>
             <a:fld id="{1280BD87-46A1-BC47-9C77-7F721A56BA45}" type="datetimeFigureOut">
               <a:rPr lang="en-US" smtClean="0"/>
-              <a:t>5/5/26</a:t>
+              <a:t>5/11/26</a:t>
             </a:fld>
             <a:endParaRPr lang="en-US"/>
           </a:p>
@@ -1588,7 +1698,7 @@
           <a:p>
             <a:fld id="{1280BD87-46A1-BC47-9C77-7F721A56BA45}" type="datetimeFigureOut">
               <a:rPr lang="en-US" smtClean="0"/>
-              <a:t>5/5/26</a:t>
+              <a:t>5/11/26</a:t>
             </a:fld>
             <a:endParaRPr lang="en-US"/>
           </a:p>
@@ -1853,7 +1963,7 @@
           <a:p>
             <a:fld id="{1280BD87-46A1-BC47-9C77-7F721A56BA45}" type="datetimeFigureOut">
               <a:rPr lang="en-US" smtClean="0"/>
-              <a:t>5/5/26</a:t>
+              <a:t>5/11/26</a:t>
             </a:fld>
             <a:endParaRPr lang="en-US"/>
           </a:p>
@@ -2265,7 +2375,7 @@
           <a:p>
             <a:fld id="{1280BD87-46A1-BC47-9C77-7F721A56BA45}" type="datetimeFigureOut">
               <a:rPr lang="en-US" smtClean="0"/>
-              <a:t>5/5/26</a:t>
+              <a:t>5/11/26</a:t>
             </a:fld>
             <a:endParaRPr lang="en-US"/>
           </a:p>
@@ -2406,7 +2516,7 @@
           <a:p>
             <a:fld id="{1280BD87-46A1-BC47-9C77-7F721A56BA45}" type="datetimeFigureOut">
               <a:rPr lang="en-US" smtClean="0"/>
-              <a:t>5/5/26</a:t>
+              <a:t>5/11/26</a:t>
             </a:fld>
             <a:endParaRPr lang="en-US"/>
           </a:p>
@@ -2519,7 +2629,7 @@
           <a:p>
             <a:fld id="{1280BD87-46A1-BC47-9C77-7F721A56BA45}" type="datetimeFigureOut">
               <a:rPr lang="en-US" smtClean="0"/>
-              <a:t>5/5/26</a:t>
+              <a:t>5/11/26</a:t>
             </a:fld>
             <a:endParaRPr lang="en-US"/>
           </a:p>
@@ -2830,7 +2940,7 @@
           <a:p>
             <a:fld id="{1280BD87-46A1-BC47-9C77-7F721A56BA45}" type="datetimeFigureOut">
               <a:rPr lang="en-US" smtClean="0"/>
-              <a:t>5/5/26</a:t>
+              <a:t>5/11/26</a:t>
             </a:fld>
             <a:endParaRPr lang="en-US"/>
           </a:p>
@@ -3118,7 +3228,7 @@
           <a:p>
             <a:fld id="{1280BD87-46A1-BC47-9C77-7F721A56BA45}" type="datetimeFigureOut">
               <a:rPr lang="en-US" smtClean="0"/>
-              <a:t>5/5/26</a:t>
+              <a:t>5/11/26</a:t>
             </a:fld>
             <a:endParaRPr lang="en-US"/>
           </a:p>
@@ -3359,7 +3469,7 @@
           <a:p>
             <a:fld id="{1280BD87-46A1-BC47-9C77-7F721A56BA45}" type="datetimeFigureOut">
               <a:rPr lang="en-US" smtClean="0"/>
-              <a:t>5/5/26</a:t>
+              <a:t>5/11/26</a:t>
             </a:fld>
             <a:endParaRPr lang="en-US"/>
           </a:p>
@@ -3827,7 +3937,7 @@
           <a:p>
             <a:r>
               <a:rPr lang="en-US" dirty="0"/>
-              <a:t>06 May 2026</a:t>
+              <a:t>12 May 2026</a:t>
             </a:r>
           </a:p>
         </p:txBody>
@@ -3898,7 +4008,7 @@
         <p:spPr>
           <a:xfrm>
             <a:off x="116114" y="103630"/>
-            <a:ext cx="10515600" cy="1325563"/>
+            <a:ext cx="5818132" cy="1325563"/>
           </a:xfrm>
         </p:spPr>
         <p:txBody>
@@ -3907,7 +4017,15 @@
           <a:p>
             <a:r>
               <a:rPr lang="en-US" dirty="0"/>
-              <a:t>Ex1 Mo1 Output</a:t>
+              <a:t>Ex1 Mo1 Output – </a:t>
+            </a:r>
+            <a:r>
+              <a:rPr lang="en-US" dirty="0">
+                <a:solidFill>
+                  <a:srgbClr val="FF0000"/>
+                </a:solidFill>
+              </a:rPr>
+              <a:t>Try Reverse</a:t>
             </a:r>
           </a:p>
         </p:txBody>
@@ -3986,14 +4104,14 @@
           <p:nvPr>
             <p:extLst>
               <p:ext uri="{D42A27DB-BD31-4B8C-83A1-F6EECF244321}">
-                <p14:modId xmlns:p14="http://schemas.microsoft.com/office/powerpoint/2010/main" val="2003269083"/>
+                <p14:modId xmlns:p14="http://schemas.microsoft.com/office/powerpoint/2010/main" val="1726553433"/>
               </p:ext>
             </p:extLst>
           </p:nvPr>
         </p:nvGraphicFramePr>
         <p:xfrm>
           <a:off x="206564" y="1832324"/>
-          <a:ext cx="5291580" cy="3193351"/>
+          <a:ext cx="5291580" cy="3234595"/>
         </p:xfrm>
         <a:graphic>
           <a:graphicData uri="http://schemas.openxmlformats.org/drawingml/2006/table">
@@ -4544,12 +4662,12 @@
                         <a:buNone/>
                       </a:pPr>
                       <a:r>
-                        <a:rPr lang="en-US" sz="1100" u="none" strike="noStrike">
+                        <a:rPr lang="en-US" sz="1100" u="none" strike="noStrike" dirty="0">
                           <a:effectLst/>
                         </a:rPr>
                         <a:t>TG</a:t>
                       </a:r>
-                      <a:endParaRPr lang="en-US" sz="1100" b="0" i="0" u="none" strike="noStrike">
+                      <a:endParaRPr lang="en-US" sz="1100" b="0" i="0" u="none" strike="noStrike" dirty="0">
                         <a:solidFill>
                           <a:srgbClr val="000000"/>
                         </a:solidFill>
@@ -4566,7 +4684,7 @@
                   </a:ext>
                 </a:extLst>
               </a:tr>
-              <a:tr h="190500">
+              <a:tr h="386049">
                 <a:tc>
                   <a:txBody>
                     <a:bodyPr/>
@@ -5366,6 +5484,5369 @@
     <p:extLst>
       <p:ext uri="{BB962C8B-B14F-4D97-AF65-F5344CB8AC3E}">
         <p14:creationId xmlns:p14="http://schemas.microsoft.com/office/powerpoint/2010/main" val="3449857364"/>
+      </p:ext>
+    </p:extLst>
+  </p:cSld>
+  <p:clrMapOvr>
+    <a:masterClrMapping/>
+  </p:clrMapOvr>
+</p:sld>
+</file>
+
+<file path=ppt/slides/slide11.xml><?xml version="1.0" encoding="utf-8"?>
+<p:sld xmlns:a="http://schemas.openxmlformats.org/drawingml/2006/main" xmlns:r="http://schemas.openxmlformats.org/officeDocument/2006/relationships" xmlns:p="http://schemas.openxmlformats.org/presentationml/2006/main">
+  <p:cSld>
+    <p:bg>
+      <p:bgPr>
+        <a:solidFill>
+          <a:schemeClr val="bg1"/>
+        </a:solidFill>
+        <a:effectLst/>
+      </p:bgPr>
+    </p:bg>
+    <p:spTree>
+      <p:nvGrpSpPr>
+        <p:cNvPr id="1" name="">
+          <a:extLst>
+            <a:ext uri="{FF2B5EF4-FFF2-40B4-BE49-F238E27FC236}">
+              <a16:creationId xmlns:a16="http://schemas.microsoft.com/office/drawing/2014/main" id="{0EBD0574-A427-3EA3-47B0-6C553CE84FBF}"/>
+            </a:ext>
+          </a:extLst>
+        </p:cNvPr>
+        <p:cNvGrpSpPr/>
+        <p:nvPr/>
+      </p:nvGrpSpPr>
+      <p:grpSpPr>
+        <a:xfrm>
+          <a:off x="0" y="0"/>
+          <a:ext cx="0" cy="0"/>
+          <a:chOff x="0" y="0"/>
+          <a:chExt cx="0" cy="0"/>
+        </a:xfrm>
+      </p:grpSpPr>
+      <p:sp>
+        <p:nvSpPr>
+          <p:cNvPr id="2" name="Title 1">
+            <a:extLst>
+              <a:ext uri="{FF2B5EF4-FFF2-40B4-BE49-F238E27FC236}">
+                <a16:creationId xmlns:a16="http://schemas.microsoft.com/office/drawing/2014/main" id="{38C916DD-E081-56D1-3FFB-B006C12F9850}"/>
+              </a:ext>
+            </a:extLst>
+          </p:cNvPr>
+          <p:cNvSpPr>
+            <a:spLocks noGrp="1"/>
+          </p:cNvSpPr>
+          <p:nvPr>
+            <p:ph type="title"/>
+          </p:nvPr>
+        </p:nvSpPr>
+        <p:spPr>
+          <a:xfrm>
+            <a:off x="116114" y="103630"/>
+            <a:ext cx="10515600" cy="1325563"/>
+          </a:xfrm>
+        </p:spPr>
+        <p:txBody>
+          <a:bodyPr/>
+          <a:lstStyle/>
+          <a:p>
+            <a:r>
+              <a:rPr lang="en-US" dirty="0"/>
+              <a:t>Ex1 Mo2 80pct threshold</a:t>
+            </a:r>
+          </a:p>
+        </p:txBody>
+      </p:sp>
+      <p:pic>
+        <p:nvPicPr>
+          <p:cNvPr id="6" name="Picture 5">
+            <a:extLst>
+              <a:ext uri="{FF2B5EF4-FFF2-40B4-BE49-F238E27FC236}">
+                <a16:creationId xmlns:a16="http://schemas.microsoft.com/office/drawing/2014/main" id="{03BC85C0-340B-B282-2F28-15200F75D3A3}"/>
+              </a:ext>
+            </a:extLst>
+          </p:cNvPr>
+          <p:cNvPicPr>
+            <a:picLocks noChangeAspect="1"/>
+          </p:cNvPicPr>
+          <p:nvPr/>
+        </p:nvPicPr>
+        <p:blipFill>
+          <a:blip r:embed="rId2"/>
+          <a:stretch>
+            <a:fillRect/>
+          </a:stretch>
+        </p:blipFill>
+        <p:spPr>
+          <a:xfrm>
+            <a:off x="6023748" y="179389"/>
+            <a:ext cx="6052138" cy="1617571"/>
+          </a:xfrm>
+          <a:prstGeom prst="rect">
+            <a:avLst/>
+          </a:prstGeom>
+        </p:spPr>
+      </p:pic>
+      <p:pic>
+        <p:nvPicPr>
+          <p:cNvPr id="7" name="Picture 6">
+            <a:extLst>
+              <a:ext uri="{FF2B5EF4-FFF2-40B4-BE49-F238E27FC236}">
+                <a16:creationId xmlns:a16="http://schemas.microsoft.com/office/drawing/2014/main" id="{88D8090F-205D-669F-B248-A93B5E327D00}"/>
+              </a:ext>
+            </a:extLst>
+          </p:cNvPr>
+          <p:cNvPicPr>
+            <a:picLocks noChangeAspect="1"/>
+          </p:cNvPicPr>
+          <p:nvPr/>
+        </p:nvPicPr>
+        <p:blipFill>
+          <a:blip r:embed="rId3"/>
+          <a:stretch>
+            <a:fillRect/>
+          </a:stretch>
+        </p:blipFill>
+        <p:spPr>
+          <a:xfrm>
+            <a:off x="299444" y="1737185"/>
+            <a:ext cx="6052138" cy="4273123"/>
+          </a:xfrm>
+          <a:prstGeom prst="rect">
+            <a:avLst/>
+          </a:prstGeom>
+        </p:spPr>
+      </p:pic>
+      <p:pic>
+        <p:nvPicPr>
+          <p:cNvPr id="9" name="Picture 8">
+            <a:extLst>
+              <a:ext uri="{FF2B5EF4-FFF2-40B4-BE49-F238E27FC236}">
+                <a16:creationId xmlns:a16="http://schemas.microsoft.com/office/drawing/2014/main" id="{03E6A6FB-F989-B04E-D44D-8E39C16DD0FD}"/>
+              </a:ext>
+            </a:extLst>
+          </p:cNvPr>
+          <p:cNvPicPr>
+            <a:picLocks noChangeAspect="1"/>
+          </p:cNvPicPr>
+          <p:nvPr/>
+        </p:nvPicPr>
+        <p:blipFill>
+          <a:blip r:embed="rId4"/>
+          <a:stretch>
+            <a:fillRect/>
+          </a:stretch>
+        </p:blipFill>
+        <p:spPr>
+          <a:xfrm>
+            <a:off x="6608064" y="1950956"/>
+            <a:ext cx="5029200" cy="4445000"/>
+          </a:xfrm>
+          <a:prstGeom prst="rect">
+            <a:avLst/>
+          </a:prstGeom>
+        </p:spPr>
+      </p:pic>
+    </p:spTree>
+    <p:extLst>
+      <p:ext uri="{BB962C8B-B14F-4D97-AF65-F5344CB8AC3E}">
+        <p14:creationId xmlns:p14="http://schemas.microsoft.com/office/powerpoint/2010/main" val="44491613"/>
+      </p:ext>
+    </p:extLst>
+  </p:cSld>
+  <p:clrMapOvr>
+    <a:masterClrMapping/>
+  </p:clrMapOvr>
+</p:sld>
+</file>
+
+<file path=ppt/slides/slide12.xml><?xml version="1.0" encoding="utf-8"?>
+<p:sld xmlns:a="http://schemas.openxmlformats.org/drawingml/2006/main" xmlns:r="http://schemas.openxmlformats.org/officeDocument/2006/relationships" xmlns:p="http://schemas.openxmlformats.org/presentationml/2006/main">
+  <p:cSld>
+    <p:bg>
+      <p:bgPr>
+        <a:solidFill>
+          <a:schemeClr val="bg1"/>
+        </a:solidFill>
+        <a:effectLst/>
+      </p:bgPr>
+    </p:bg>
+    <p:spTree>
+      <p:nvGrpSpPr>
+        <p:cNvPr id="1" name="">
+          <a:extLst>
+            <a:ext uri="{FF2B5EF4-FFF2-40B4-BE49-F238E27FC236}">
+              <a16:creationId xmlns:a16="http://schemas.microsoft.com/office/drawing/2014/main" id="{56149FE7-0381-D0D4-FD03-5BCEC6CE44E1}"/>
+            </a:ext>
+          </a:extLst>
+        </p:cNvPr>
+        <p:cNvGrpSpPr/>
+        <p:nvPr/>
+      </p:nvGrpSpPr>
+      <p:grpSpPr>
+        <a:xfrm>
+          <a:off x="0" y="0"/>
+          <a:ext cx="0" cy="0"/>
+          <a:chOff x="0" y="0"/>
+          <a:chExt cx="0" cy="0"/>
+        </a:xfrm>
+      </p:grpSpPr>
+      <p:sp>
+        <p:nvSpPr>
+          <p:cNvPr id="2" name="Title 1">
+            <a:extLst>
+              <a:ext uri="{FF2B5EF4-FFF2-40B4-BE49-F238E27FC236}">
+                <a16:creationId xmlns:a16="http://schemas.microsoft.com/office/drawing/2014/main" id="{B28CDC4E-1DED-199E-9591-D74A759865CC}"/>
+              </a:ext>
+            </a:extLst>
+          </p:cNvPr>
+          <p:cNvSpPr>
+            <a:spLocks noGrp="1"/>
+          </p:cNvSpPr>
+          <p:nvPr>
+            <p:ph type="title"/>
+          </p:nvPr>
+        </p:nvSpPr>
+        <p:spPr>
+          <a:xfrm>
+            <a:off x="116114" y="103630"/>
+            <a:ext cx="10515600" cy="1325563"/>
+          </a:xfrm>
+        </p:spPr>
+        <p:txBody>
+          <a:bodyPr/>
+          <a:lstStyle/>
+          <a:p>
+            <a:r>
+              <a:rPr lang="en-US" dirty="0"/>
+              <a:t>Ex1 Mo2 Output</a:t>
+            </a:r>
+          </a:p>
+        </p:txBody>
+      </p:sp>
+      <p:pic>
+        <p:nvPicPr>
+          <p:cNvPr id="8" name="Picture 7">
+            <a:extLst>
+              <a:ext uri="{FF2B5EF4-FFF2-40B4-BE49-F238E27FC236}">
+                <a16:creationId xmlns:a16="http://schemas.microsoft.com/office/drawing/2014/main" id="{8DD75105-2895-1E8A-7E20-CD2C93121BF6}"/>
+              </a:ext>
+            </a:extLst>
+          </p:cNvPr>
+          <p:cNvPicPr>
+            <a:picLocks noChangeAspect="1"/>
+          </p:cNvPicPr>
+          <p:nvPr/>
+        </p:nvPicPr>
+        <p:blipFill>
+          <a:blip r:embed="rId2"/>
+          <a:stretch>
+            <a:fillRect/>
+          </a:stretch>
+        </p:blipFill>
+        <p:spPr>
+          <a:xfrm>
+            <a:off x="5281064" y="-167039"/>
+            <a:ext cx="6985000" cy="1866900"/>
+          </a:xfrm>
+          <a:prstGeom prst="rect">
+            <a:avLst/>
+          </a:prstGeom>
+        </p:spPr>
+      </p:pic>
+      <p:graphicFrame>
+        <p:nvGraphicFramePr>
+          <p:cNvPr id="9" name="Table 8">
+            <a:extLst>
+              <a:ext uri="{FF2B5EF4-FFF2-40B4-BE49-F238E27FC236}">
+                <a16:creationId xmlns:a16="http://schemas.microsoft.com/office/drawing/2014/main" id="{9615C7E9-4BFF-7486-96EE-4DE69F8F6E93}"/>
+              </a:ext>
+            </a:extLst>
+          </p:cNvPr>
+          <p:cNvGraphicFramePr>
+            <a:graphicFrameLocks noGrp="1"/>
+          </p:cNvGraphicFramePr>
+          <p:nvPr>
+            <p:extLst>
+              <p:ext uri="{D42A27DB-BD31-4B8C-83A1-F6EECF244321}">
+                <p14:modId xmlns:p14="http://schemas.microsoft.com/office/powerpoint/2010/main" val="2473886088"/>
+              </p:ext>
+            </p:extLst>
+          </p:nvPr>
+        </p:nvGraphicFramePr>
+        <p:xfrm>
+          <a:off x="147781" y="2387302"/>
+          <a:ext cx="5502910" cy="2451398"/>
+        </p:xfrm>
+        <a:graphic>
+          <a:graphicData uri="http://schemas.openxmlformats.org/drawingml/2006/table">
+            <a:tbl>
+              <a:tblPr>
+                <a:tableStyleId>{5C22544A-7EE6-4342-B048-85BDC9FD1C3A}</a:tableStyleId>
+              </a:tblPr>
+              <a:tblGrid>
+                <a:gridCol w="1100582">
+                  <a:extLst>
+                    <a:ext uri="{9D8B030D-6E8A-4147-A177-3AD203B41FA5}">
+                      <a16:colId xmlns:a16="http://schemas.microsoft.com/office/drawing/2014/main" val="2034673502"/>
+                    </a:ext>
+                  </a:extLst>
+                </a:gridCol>
+                <a:gridCol w="1100582">
+                  <a:extLst>
+                    <a:ext uri="{9D8B030D-6E8A-4147-A177-3AD203B41FA5}">
+                      <a16:colId xmlns:a16="http://schemas.microsoft.com/office/drawing/2014/main" val="2388367810"/>
+                    </a:ext>
+                  </a:extLst>
+                </a:gridCol>
+                <a:gridCol w="1100582">
+                  <a:extLst>
+                    <a:ext uri="{9D8B030D-6E8A-4147-A177-3AD203B41FA5}">
+                      <a16:colId xmlns:a16="http://schemas.microsoft.com/office/drawing/2014/main" val="3194324290"/>
+                    </a:ext>
+                  </a:extLst>
+                </a:gridCol>
+                <a:gridCol w="1100582">
+                  <a:extLst>
+                    <a:ext uri="{9D8B030D-6E8A-4147-A177-3AD203B41FA5}">
+                      <a16:colId xmlns:a16="http://schemas.microsoft.com/office/drawing/2014/main" val="1823193689"/>
+                    </a:ext>
+                  </a:extLst>
+                </a:gridCol>
+                <a:gridCol w="1100582">
+                  <a:extLst>
+                    <a:ext uri="{9D8B030D-6E8A-4147-A177-3AD203B41FA5}">
+                      <a16:colId xmlns:a16="http://schemas.microsoft.com/office/drawing/2014/main" val="519302968"/>
+                    </a:ext>
+                  </a:extLst>
+                </a:gridCol>
+              </a:tblGrid>
+              <a:tr h="0">
+                <a:tc>
+                  <a:txBody>
+                    <a:bodyPr/>
+                    <a:lstStyle/>
+                    <a:p>
+                      <a:pPr algn="ctr" fontAlgn="t">
+                        <a:buNone/>
+                      </a:pPr>
+                      <a:r>
+                        <a:rPr lang="en-US" sz="1100" u="none" strike="noStrike">
+                          <a:effectLst/>
+                        </a:rPr>
+                        <a:t>coords</a:t>
+                      </a:r>
+                      <a:endParaRPr lang="en-US" sz="1100" b="1" i="0" u="none" strike="noStrike">
+                        <a:solidFill>
+                          <a:srgbClr val="000000"/>
+                        </a:solidFill>
+                        <a:effectLst/>
+                        <a:latin typeface="Calibri" panose="020F0502020204030204" pitchFamily="34" charset="0"/>
+                      </a:endParaRPr>
+                    </a:p>
+                  </a:txBody>
+                  <a:tcPr marL="9525" marR="9525" marT="9525" marB="0"/>
+                </a:tc>
+                <a:tc>
+                  <a:txBody>
+                    <a:bodyPr/>
+                    <a:lstStyle/>
+                    <a:p>
+                      <a:pPr algn="ctr" fontAlgn="t">
+                        <a:buNone/>
+                      </a:pPr>
+                      <a:r>
+                        <a:rPr lang="en-US" sz="1100" u="none" strike="noStrike">
+                          <a:effectLst/>
+                        </a:rPr>
+                        <a:t>length</a:t>
+                      </a:r>
+                      <a:endParaRPr lang="en-US" sz="1100" b="1" i="0" u="none" strike="noStrike">
+                        <a:solidFill>
+                          <a:srgbClr val="000000"/>
+                        </a:solidFill>
+                        <a:effectLst/>
+                        <a:latin typeface="Calibri" panose="020F0502020204030204" pitchFamily="34" charset="0"/>
+                      </a:endParaRPr>
+                    </a:p>
+                  </a:txBody>
+                  <a:tcPr marL="9525" marR="9525" marT="9525" marB="0"/>
+                </a:tc>
+                <a:tc>
+                  <a:txBody>
+                    <a:bodyPr/>
+                    <a:lstStyle/>
+                    <a:p>
+                      <a:pPr algn="ctr" fontAlgn="t">
+                        <a:buNone/>
+                      </a:pPr>
+                      <a:r>
+                        <a:rPr lang="en-US" sz="1100" u="none" strike="noStrike">
+                          <a:effectLst/>
+                        </a:rPr>
+                        <a:t>score</a:t>
+                      </a:r>
+                      <a:endParaRPr lang="en-US" sz="1100" b="1" i="0" u="none" strike="noStrike">
+                        <a:solidFill>
+                          <a:srgbClr val="000000"/>
+                        </a:solidFill>
+                        <a:effectLst/>
+                        <a:latin typeface="Calibri" panose="020F0502020204030204" pitchFamily="34" charset="0"/>
+                      </a:endParaRPr>
+                    </a:p>
+                  </a:txBody>
+                  <a:tcPr marL="9525" marR="9525" marT="9525" marB="0"/>
+                </a:tc>
+                <a:tc>
+                  <a:txBody>
+                    <a:bodyPr/>
+                    <a:lstStyle/>
+                    <a:p>
+                      <a:pPr algn="ctr" fontAlgn="t">
+                        <a:buNone/>
+                      </a:pPr>
+                      <a:r>
+                        <a:rPr lang="en-US" sz="1100" u="none" strike="noStrike">
+                          <a:effectLst/>
+                        </a:rPr>
+                        <a:t>group1</a:t>
+                      </a:r>
+                      <a:endParaRPr lang="en-US" sz="1100" b="1" i="0" u="none" strike="noStrike">
+                        <a:solidFill>
+                          <a:srgbClr val="000000"/>
+                        </a:solidFill>
+                        <a:effectLst/>
+                        <a:latin typeface="Calibri" panose="020F0502020204030204" pitchFamily="34" charset="0"/>
+                      </a:endParaRPr>
+                    </a:p>
+                  </a:txBody>
+                  <a:tcPr marL="9525" marR="9525" marT="9525" marB="0"/>
+                </a:tc>
+                <a:tc>
+                  <a:txBody>
+                    <a:bodyPr/>
+                    <a:lstStyle/>
+                    <a:p>
+                      <a:pPr algn="ctr" fontAlgn="t">
+                        <a:buNone/>
+                      </a:pPr>
+                      <a:r>
+                        <a:rPr lang="en-US" sz="1100" u="none" strike="noStrike">
+                          <a:effectLst/>
+                        </a:rPr>
+                        <a:t>group2</a:t>
+                      </a:r>
+                      <a:endParaRPr lang="en-US" sz="1100" b="1" i="0" u="none" strike="noStrike">
+                        <a:solidFill>
+                          <a:srgbClr val="000000"/>
+                        </a:solidFill>
+                        <a:effectLst/>
+                        <a:latin typeface="Calibri" panose="020F0502020204030204" pitchFamily="34" charset="0"/>
+                      </a:endParaRPr>
+                    </a:p>
+                  </a:txBody>
+                  <a:tcPr marL="9525" marR="9525" marT="9525" marB="0"/>
+                </a:tc>
+                <a:extLst>
+                  <a:ext uri="{0D108BD9-81ED-4DB2-BD59-A6C34878D82A}">
+                    <a16:rowId xmlns:a16="http://schemas.microsoft.com/office/drawing/2014/main" val="3956179726"/>
+                  </a:ext>
+                </a:extLst>
+              </a:tr>
+              <a:tr h="190500">
+                <a:tc>
+                  <a:txBody>
+                    <a:bodyPr/>
+                    <a:lstStyle/>
+                    <a:p>
+                      <a:pPr algn="l" fontAlgn="b">
+                        <a:buNone/>
+                      </a:pPr>
+                      <a:r>
+                        <a:rPr lang="en-US" sz="1100" u="none" strike="noStrike">
+                          <a:effectLst/>
+                        </a:rPr>
+                        <a:t>[(21, 0), (22, 1), (23, 2), (24, 3), (25, 4)]</a:t>
+                      </a:r>
+                      <a:endParaRPr lang="en-US" sz="1100" b="0" i="0" u="none" strike="noStrike">
+                        <a:solidFill>
+                          <a:srgbClr val="000000"/>
+                        </a:solidFill>
+                        <a:effectLst/>
+                        <a:latin typeface="Calibri" panose="020F0502020204030204" pitchFamily="34" charset="0"/>
+                      </a:endParaRPr>
+                    </a:p>
+                  </a:txBody>
+                  <a:tcPr marL="9525" marR="9525" marT="9525" marB="0" anchor="b"/>
+                </a:tc>
+                <a:tc>
+                  <a:txBody>
+                    <a:bodyPr/>
+                    <a:lstStyle/>
+                    <a:p>
+                      <a:pPr algn="r" fontAlgn="b">
+                        <a:buNone/>
+                      </a:pPr>
+                      <a:r>
+                        <a:rPr lang="en-US" sz="1100" u="none" strike="noStrike">
+                          <a:effectLst/>
+                        </a:rPr>
+                        <a:t>5</a:t>
+                      </a:r>
+                      <a:endParaRPr lang="en-US" sz="1100" b="0" i="0" u="none" strike="noStrike">
+                        <a:solidFill>
+                          <a:srgbClr val="000000"/>
+                        </a:solidFill>
+                        <a:effectLst/>
+                        <a:latin typeface="Calibri" panose="020F0502020204030204" pitchFamily="34" charset="0"/>
+                      </a:endParaRPr>
+                    </a:p>
+                  </a:txBody>
+                  <a:tcPr marL="9525" marR="9525" marT="9525" marB="0" anchor="b"/>
+                </a:tc>
+                <a:tc>
+                  <a:txBody>
+                    <a:bodyPr/>
+                    <a:lstStyle/>
+                    <a:p>
+                      <a:pPr algn="r" fontAlgn="b">
+                        <a:buNone/>
+                      </a:pPr>
+                      <a:r>
+                        <a:rPr lang="en-US" sz="1100" u="none" strike="noStrike">
+                          <a:effectLst/>
+                        </a:rPr>
+                        <a:t>9.649394</a:t>
+                      </a:r>
+                      <a:endParaRPr lang="en-US" sz="1100" b="0" i="0" u="none" strike="noStrike">
+                        <a:solidFill>
+                          <a:srgbClr val="000000"/>
+                        </a:solidFill>
+                        <a:effectLst/>
+                        <a:latin typeface="Calibri" panose="020F0502020204030204" pitchFamily="34" charset="0"/>
+                      </a:endParaRPr>
+                    </a:p>
+                  </a:txBody>
+                  <a:tcPr marL="9525" marR="9525" marT="9525" marB="0" anchor="b"/>
+                </a:tc>
+                <a:tc>
+                  <a:txBody>
+                    <a:bodyPr/>
+                    <a:lstStyle/>
+                    <a:p>
+                      <a:pPr algn="l" fontAlgn="b">
+                        <a:buNone/>
+                      </a:pPr>
+                      <a:r>
+                        <a:rPr lang="en-US" sz="1100" u="none" strike="noStrike">
+                          <a:effectLst/>
+                        </a:rPr>
+                        <a:t>GTAAA</a:t>
+                      </a:r>
+                      <a:endParaRPr lang="en-US" sz="1100" b="0" i="0" u="none" strike="noStrike">
+                        <a:solidFill>
+                          <a:srgbClr val="000000"/>
+                        </a:solidFill>
+                        <a:effectLst/>
+                        <a:latin typeface="Calibri" panose="020F0502020204030204" pitchFamily="34" charset="0"/>
+                      </a:endParaRPr>
+                    </a:p>
+                  </a:txBody>
+                  <a:tcPr marL="9525" marR="9525" marT="9525" marB="0" anchor="b"/>
+                </a:tc>
+                <a:tc>
+                  <a:txBody>
+                    <a:bodyPr/>
+                    <a:lstStyle/>
+                    <a:p>
+                      <a:pPr algn="l" fontAlgn="b">
+                        <a:buNone/>
+                      </a:pPr>
+                      <a:r>
+                        <a:rPr lang="en-US" sz="1100" u="none" strike="noStrike">
+                          <a:effectLst/>
+                        </a:rPr>
+                        <a:t>GTAAA</a:t>
+                      </a:r>
+                      <a:endParaRPr lang="en-US" sz="1100" b="0" i="0" u="none" strike="noStrike">
+                        <a:solidFill>
+                          <a:srgbClr val="000000"/>
+                        </a:solidFill>
+                        <a:effectLst/>
+                        <a:latin typeface="Calibri" panose="020F0502020204030204" pitchFamily="34" charset="0"/>
+                      </a:endParaRPr>
+                    </a:p>
+                  </a:txBody>
+                  <a:tcPr marL="9525" marR="9525" marT="9525" marB="0" anchor="b"/>
+                </a:tc>
+                <a:extLst>
+                  <a:ext uri="{0D108BD9-81ED-4DB2-BD59-A6C34878D82A}">
+                    <a16:rowId xmlns:a16="http://schemas.microsoft.com/office/drawing/2014/main" val="3243709341"/>
+                  </a:ext>
+                </a:extLst>
+              </a:tr>
+              <a:tr h="190500">
+                <a:tc>
+                  <a:txBody>
+                    <a:bodyPr/>
+                    <a:lstStyle/>
+                    <a:p>
+                      <a:pPr algn="l" fontAlgn="b">
+                        <a:buNone/>
+                      </a:pPr>
+                      <a:r>
+                        <a:rPr lang="en-US" sz="1100" u="none" strike="noStrike">
+                          <a:effectLst/>
+                        </a:rPr>
+                        <a:t>[(3, 2), (4, 3)]</a:t>
+                      </a:r>
+                      <a:endParaRPr lang="en-US" sz="1100" b="0" i="0" u="none" strike="noStrike">
+                        <a:solidFill>
+                          <a:srgbClr val="000000"/>
+                        </a:solidFill>
+                        <a:effectLst/>
+                        <a:latin typeface="Calibri" panose="020F0502020204030204" pitchFamily="34" charset="0"/>
+                      </a:endParaRPr>
+                    </a:p>
+                  </a:txBody>
+                  <a:tcPr marL="9525" marR="9525" marT="9525" marB="0" anchor="b"/>
+                </a:tc>
+                <a:tc>
+                  <a:txBody>
+                    <a:bodyPr/>
+                    <a:lstStyle/>
+                    <a:p>
+                      <a:pPr algn="r" fontAlgn="b">
+                        <a:buNone/>
+                      </a:pPr>
+                      <a:r>
+                        <a:rPr lang="en-US" sz="1100" u="none" strike="noStrike">
+                          <a:effectLst/>
+                        </a:rPr>
+                        <a:t>2</a:t>
+                      </a:r>
+                      <a:endParaRPr lang="en-US" sz="1100" b="0" i="0" u="none" strike="noStrike">
+                        <a:solidFill>
+                          <a:srgbClr val="000000"/>
+                        </a:solidFill>
+                        <a:effectLst/>
+                        <a:latin typeface="Calibri" panose="020F0502020204030204" pitchFamily="34" charset="0"/>
+                      </a:endParaRPr>
+                    </a:p>
+                  </a:txBody>
+                  <a:tcPr marL="9525" marR="9525" marT="9525" marB="0" anchor="b"/>
+                </a:tc>
+                <a:tc>
+                  <a:txBody>
+                    <a:bodyPr/>
+                    <a:lstStyle/>
+                    <a:p>
+                      <a:pPr algn="r" fontAlgn="b">
+                        <a:buNone/>
+                      </a:pPr>
+                      <a:r>
+                        <a:rPr lang="en-US" sz="1100" u="none" strike="noStrike">
+                          <a:effectLst/>
+                        </a:rPr>
+                        <a:t>3.649394</a:t>
+                      </a:r>
+                      <a:endParaRPr lang="en-US" sz="1100" b="0" i="0" u="none" strike="noStrike">
+                        <a:solidFill>
+                          <a:srgbClr val="000000"/>
+                        </a:solidFill>
+                        <a:effectLst/>
+                        <a:latin typeface="Calibri" panose="020F0502020204030204" pitchFamily="34" charset="0"/>
+                      </a:endParaRPr>
+                    </a:p>
+                  </a:txBody>
+                  <a:tcPr marL="9525" marR="9525" marT="9525" marB="0" anchor="b"/>
+                </a:tc>
+                <a:tc>
+                  <a:txBody>
+                    <a:bodyPr/>
+                    <a:lstStyle/>
+                    <a:p>
+                      <a:pPr algn="l" fontAlgn="b">
+                        <a:buNone/>
+                      </a:pPr>
+                      <a:r>
+                        <a:rPr lang="en-US" sz="1100" u="none" strike="noStrike">
+                          <a:effectLst/>
+                        </a:rPr>
+                        <a:t>AA</a:t>
+                      </a:r>
+                      <a:endParaRPr lang="en-US" sz="1100" b="0" i="0" u="none" strike="noStrike">
+                        <a:solidFill>
+                          <a:srgbClr val="000000"/>
+                        </a:solidFill>
+                        <a:effectLst/>
+                        <a:latin typeface="Calibri" panose="020F0502020204030204" pitchFamily="34" charset="0"/>
+                      </a:endParaRPr>
+                    </a:p>
+                  </a:txBody>
+                  <a:tcPr marL="9525" marR="9525" marT="9525" marB="0" anchor="b"/>
+                </a:tc>
+                <a:tc>
+                  <a:txBody>
+                    <a:bodyPr/>
+                    <a:lstStyle/>
+                    <a:p>
+                      <a:pPr algn="l" fontAlgn="b">
+                        <a:buNone/>
+                      </a:pPr>
+                      <a:r>
+                        <a:rPr lang="en-US" sz="1100" u="none" strike="noStrike">
+                          <a:effectLst/>
+                        </a:rPr>
+                        <a:t>AA</a:t>
+                      </a:r>
+                      <a:endParaRPr lang="en-US" sz="1100" b="0" i="0" u="none" strike="noStrike">
+                        <a:solidFill>
+                          <a:srgbClr val="000000"/>
+                        </a:solidFill>
+                        <a:effectLst/>
+                        <a:latin typeface="Calibri" panose="020F0502020204030204" pitchFamily="34" charset="0"/>
+                      </a:endParaRPr>
+                    </a:p>
+                  </a:txBody>
+                  <a:tcPr marL="9525" marR="9525" marT="9525" marB="0" anchor="b"/>
+                </a:tc>
+                <a:extLst>
+                  <a:ext uri="{0D108BD9-81ED-4DB2-BD59-A6C34878D82A}">
+                    <a16:rowId xmlns:a16="http://schemas.microsoft.com/office/drawing/2014/main" val="3984743492"/>
+                  </a:ext>
+                </a:extLst>
+              </a:tr>
+              <a:tr h="190500">
+                <a:tc>
+                  <a:txBody>
+                    <a:bodyPr/>
+                    <a:lstStyle/>
+                    <a:p>
+                      <a:pPr algn="l" fontAlgn="b">
+                        <a:buNone/>
+                      </a:pPr>
+                      <a:r>
+                        <a:rPr lang="en-US" sz="1100" u="none" strike="noStrike">
+                          <a:effectLst/>
+                        </a:rPr>
+                        <a:t>[(10, 0), (11, 1)]</a:t>
+                      </a:r>
+                      <a:endParaRPr lang="en-US" sz="1100" b="0" i="0" u="none" strike="noStrike">
+                        <a:solidFill>
+                          <a:srgbClr val="000000"/>
+                        </a:solidFill>
+                        <a:effectLst/>
+                        <a:latin typeface="Calibri" panose="020F0502020204030204" pitchFamily="34" charset="0"/>
+                      </a:endParaRPr>
+                    </a:p>
+                  </a:txBody>
+                  <a:tcPr marL="9525" marR="9525" marT="9525" marB="0" anchor="b"/>
+                </a:tc>
+                <a:tc>
+                  <a:txBody>
+                    <a:bodyPr/>
+                    <a:lstStyle/>
+                    <a:p>
+                      <a:pPr algn="r" fontAlgn="b">
+                        <a:buNone/>
+                      </a:pPr>
+                      <a:r>
+                        <a:rPr lang="en-US" sz="1100" u="none" strike="noStrike">
+                          <a:effectLst/>
+                        </a:rPr>
+                        <a:t>2</a:t>
+                      </a:r>
+                      <a:endParaRPr lang="en-US" sz="1100" b="0" i="0" u="none" strike="noStrike">
+                        <a:solidFill>
+                          <a:srgbClr val="000000"/>
+                        </a:solidFill>
+                        <a:effectLst/>
+                        <a:latin typeface="Calibri" panose="020F0502020204030204" pitchFamily="34" charset="0"/>
+                      </a:endParaRPr>
+                    </a:p>
+                  </a:txBody>
+                  <a:tcPr marL="9525" marR="9525" marT="9525" marB="0" anchor="b"/>
+                </a:tc>
+                <a:tc>
+                  <a:txBody>
+                    <a:bodyPr/>
+                    <a:lstStyle/>
+                    <a:p>
+                      <a:pPr algn="r" fontAlgn="b">
+                        <a:buNone/>
+                      </a:pPr>
+                      <a:r>
+                        <a:rPr lang="en-US" sz="1100" u="none" strike="noStrike">
+                          <a:effectLst/>
+                        </a:rPr>
+                        <a:t>3.896872</a:t>
+                      </a:r>
+                      <a:endParaRPr lang="en-US" sz="1100" b="0" i="0" u="none" strike="noStrike">
+                        <a:solidFill>
+                          <a:srgbClr val="000000"/>
+                        </a:solidFill>
+                        <a:effectLst/>
+                        <a:latin typeface="Calibri" panose="020F0502020204030204" pitchFamily="34" charset="0"/>
+                      </a:endParaRPr>
+                    </a:p>
+                  </a:txBody>
+                  <a:tcPr marL="9525" marR="9525" marT="9525" marB="0" anchor="b"/>
+                </a:tc>
+                <a:tc>
+                  <a:txBody>
+                    <a:bodyPr/>
+                    <a:lstStyle/>
+                    <a:p>
+                      <a:pPr algn="l" fontAlgn="b">
+                        <a:buNone/>
+                      </a:pPr>
+                      <a:r>
+                        <a:rPr lang="en-US" sz="1100" u="none" strike="noStrike">
+                          <a:effectLst/>
+                        </a:rPr>
+                        <a:t>GT</a:t>
+                      </a:r>
+                      <a:endParaRPr lang="en-US" sz="1100" b="0" i="0" u="none" strike="noStrike">
+                        <a:solidFill>
+                          <a:srgbClr val="000000"/>
+                        </a:solidFill>
+                        <a:effectLst/>
+                        <a:latin typeface="Calibri" panose="020F0502020204030204" pitchFamily="34" charset="0"/>
+                      </a:endParaRPr>
+                    </a:p>
+                  </a:txBody>
+                  <a:tcPr marL="9525" marR="9525" marT="9525" marB="0" anchor="b"/>
+                </a:tc>
+                <a:tc>
+                  <a:txBody>
+                    <a:bodyPr/>
+                    <a:lstStyle/>
+                    <a:p>
+                      <a:pPr algn="l" fontAlgn="b">
+                        <a:buNone/>
+                      </a:pPr>
+                      <a:r>
+                        <a:rPr lang="en-US" sz="1100" u="none" strike="noStrike">
+                          <a:effectLst/>
+                        </a:rPr>
+                        <a:t>GT</a:t>
+                      </a:r>
+                      <a:endParaRPr lang="en-US" sz="1100" b="0" i="0" u="none" strike="noStrike">
+                        <a:solidFill>
+                          <a:srgbClr val="000000"/>
+                        </a:solidFill>
+                        <a:effectLst/>
+                        <a:latin typeface="Calibri" panose="020F0502020204030204" pitchFamily="34" charset="0"/>
+                      </a:endParaRPr>
+                    </a:p>
+                  </a:txBody>
+                  <a:tcPr marL="9525" marR="9525" marT="9525" marB="0" anchor="b"/>
+                </a:tc>
+                <a:extLst>
+                  <a:ext uri="{0D108BD9-81ED-4DB2-BD59-A6C34878D82A}">
+                    <a16:rowId xmlns:a16="http://schemas.microsoft.com/office/drawing/2014/main" val="3718943381"/>
+                  </a:ext>
+                </a:extLst>
+              </a:tr>
+              <a:tr h="190500">
+                <a:tc>
+                  <a:txBody>
+                    <a:bodyPr/>
+                    <a:lstStyle/>
+                    <a:p>
+                      <a:pPr algn="l" fontAlgn="b">
+                        <a:buNone/>
+                      </a:pPr>
+                      <a:r>
+                        <a:rPr lang="en-US" sz="1100" u="none" strike="noStrike">
+                          <a:effectLst/>
+                        </a:rPr>
+                        <a:t>[(13, 1), (14, 2)]</a:t>
+                      </a:r>
+                      <a:endParaRPr lang="en-US" sz="1100" b="0" i="0" u="none" strike="noStrike">
+                        <a:solidFill>
+                          <a:srgbClr val="000000"/>
+                        </a:solidFill>
+                        <a:effectLst/>
+                        <a:latin typeface="Calibri" panose="020F0502020204030204" pitchFamily="34" charset="0"/>
+                      </a:endParaRPr>
+                    </a:p>
+                  </a:txBody>
+                  <a:tcPr marL="9525" marR="9525" marT="9525" marB="0" anchor="b"/>
+                </a:tc>
+                <a:tc>
+                  <a:txBody>
+                    <a:bodyPr/>
+                    <a:lstStyle/>
+                    <a:p>
+                      <a:pPr algn="r" fontAlgn="b">
+                        <a:buNone/>
+                      </a:pPr>
+                      <a:r>
+                        <a:rPr lang="en-US" sz="1100" u="none" strike="noStrike">
+                          <a:effectLst/>
+                        </a:rPr>
+                        <a:t>2</a:t>
+                      </a:r>
+                      <a:endParaRPr lang="en-US" sz="1100" b="0" i="0" u="none" strike="noStrike">
+                        <a:solidFill>
+                          <a:srgbClr val="000000"/>
+                        </a:solidFill>
+                        <a:effectLst/>
+                        <a:latin typeface="Calibri" panose="020F0502020204030204" pitchFamily="34" charset="0"/>
+                      </a:endParaRPr>
+                    </a:p>
+                  </a:txBody>
+                  <a:tcPr marL="9525" marR="9525" marT="9525" marB="0" anchor="b"/>
+                </a:tc>
+                <a:tc>
+                  <a:txBody>
+                    <a:bodyPr/>
+                    <a:lstStyle/>
+                    <a:p>
+                      <a:pPr algn="r" fontAlgn="b">
+                        <a:buNone/>
+                      </a:pPr>
+                      <a:r>
+                        <a:rPr lang="en-US" sz="1100" u="none" strike="noStrike">
+                          <a:effectLst/>
+                        </a:rPr>
+                        <a:t>2.17438</a:t>
+                      </a:r>
+                      <a:endParaRPr lang="en-US" sz="1100" b="0" i="0" u="none" strike="noStrike">
+                        <a:solidFill>
+                          <a:srgbClr val="000000"/>
+                        </a:solidFill>
+                        <a:effectLst/>
+                        <a:latin typeface="Calibri" panose="020F0502020204030204" pitchFamily="34" charset="0"/>
+                      </a:endParaRPr>
+                    </a:p>
+                  </a:txBody>
+                  <a:tcPr marL="9525" marR="9525" marT="9525" marB="0" anchor="b"/>
+                </a:tc>
+                <a:tc>
+                  <a:txBody>
+                    <a:bodyPr/>
+                    <a:lstStyle/>
+                    <a:p>
+                      <a:pPr algn="l" fontAlgn="b">
+                        <a:buNone/>
+                      </a:pPr>
+                      <a:r>
+                        <a:rPr lang="en-US" sz="1100" u="none" strike="noStrike">
+                          <a:effectLst/>
+                        </a:rPr>
+                        <a:t>TA</a:t>
+                      </a:r>
+                      <a:endParaRPr lang="en-US" sz="1100" b="0" i="0" u="none" strike="noStrike">
+                        <a:solidFill>
+                          <a:srgbClr val="000000"/>
+                        </a:solidFill>
+                        <a:effectLst/>
+                        <a:latin typeface="Calibri" panose="020F0502020204030204" pitchFamily="34" charset="0"/>
+                      </a:endParaRPr>
+                    </a:p>
+                  </a:txBody>
+                  <a:tcPr marL="9525" marR="9525" marT="9525" marB="0" anchor="b"/>
+                </a:tc>
+                <a:tc>
+                  <a:txBody>
+                    <a:bodyPr/>
+                    <a:lstStyle/>
+                    <a:p>
+                      <a:pPr algn="l" fontAlgn="b">
+                        <a:buNone/>
+                      </a:pPr>
+                      <a:r>
+                        <a:rPr lang="en-US" sz="1100" u="none" strike="noStrike">
+                          <a:effectLst/>
+                        </a:rPr>
+                        <a:t>TA</a:t>
+                      </a:r>
+                      <a:endParaRPr lang="en-US" sz="1100" b="0" i="0" u="none" strike="noStrike">
+                        <a:solidFill>
+                          <a:srgbClr val="000000"/>
+                        </a:solidFill>
+                        <a:effectLst/>
+                        <a:latin typeface="Calibri" panose="020F0502020204030204" pitchFamily="34" charset="0"/>
+                      </a:endParaRPr>
+                    </a:p>
+                  </a:txBody>
+                  <a:tcPr marL="9525" marR="9525" marT="9525" marB="0" anchor="b"/>
+                </a:tc>
+                <a:extLst>
+                  <a:ext uri="{0D108BD9-81ED-4DB2-BD59-A6C34878D82A}">
+                    <a16:rowId xmlns:a16="http://schemas.microsoft.com/office/drawing/2014/main" val="3532156986"/>
+                  </a:ext>
+                </a:extLst>
+              </a:tr>
+              <a:tr h="190500">
+                <a:tc>
+                  <a:txBody>
+                    <a:bodyPr/>
+                    <a:lstStyle/>
+                    <a:p>
+                      <a:pPr algn="l" fontAlgn="b">
+                        <a:buNone/>
+                      </a:pPr>
+                      <a:r>
+                        <a:rPr lang="en-US" sz="1100" u="none" strike="noStrike">
+                          <a:effectLst/>
+                        </a:rPr>
+                        <a:t>[(14, 4), (15, 5)]</a:t>
+                      </a:r>
+                      <a:endParaRPr lang="en-US" sz="1100" b="0" i="0" u="none" strike="noStrike">
+                        <a:solidFill>
+                          <a:srgbClr val="000000"/>
+                        </a:solidFill>
+                        <a:effectLst/>
+                        <a:latin typeface="Calibri" panose="020F0502020204030204" pitchFamily="34" charset="0"/>
+                      </a:endParaRPr>
+                    </a:p>
+                  </a:txBody>
+                  <a:tcPr marL="9525" marR="9525" marT="9525" marB="0" anchor="b"/>
+                </a:tc>
+                <a:tc>
+                  <a:txBody>
+                    <a:bodyPr/>
+                    <a:lstStyle/>
+                    <a:p>
+                      <a:pPr algn="r" fontAlgn="b">
+                        <a:buNone/>
+                      </a:pPr>
+                      <a:r>
+                        <a:rPr lang="en-US" sz="1100" u="none" strike="noStrike">
+                          <a:effectLst/>
+                        </a:rPr>
+                        <a:t>2</a:t>
+                      </a:r>
+                      <a:endParaRPr lang="en-US" sz="1100" b="0" i="0" u="none" strike="noStrike">
+                        <a:solidFill>
+                          <a:srgbClr val="000000"/>
+                        </a:solidFill>
+                        <a:effectLst/>
+                        <a:latin typeface="Calibri" panose="020F0502020204030204" pitchFamily="34" charset="0"/>
+                      </a:endParaRPr>
+                    </a:p>
+                  </a:txBody>
+                  <a:tcPr marL="9525" marR="9525" marT="9525" marB="0" anchor="b"/>
+                </a:tc>
+                <a:tc>
+                  <a:txBody>
+                    <a:bodyPr/>
+                    <a:lstStyle/>
+                    <a:p>
+                      <a:pPr algn="r" fontAlgn="b">
+                        <a:buNone/>
+                      </a:pPr>
+                      <a:r>
+                        <a:rPr lang="en-US" sz="1100" u="none" strike="noStrike">
+                          <a:effectLst/>
+                        </a:rPr>
+                        <a:t>1.86434</a:t>
+                      </a:r>
+                      <a:endParaRPr lang="en-US" sz="1100" b="0" i="0" u="none" strike="noStrike">
+                        <a:solidFill>
+                          <a:srgbClr val="000000"/>
+                        </a:solidFill>
+                        <a:effectLst/>
+                        <a:latin typeface="Calibri" panose="020F0502020204030204" pitchFamily="34" charset="0"/>
+                      </a:endParaRPr>
+                    </a:p>
+                  </a:txBody>
+                  <a:tcPr marL="9525" marR="9525" marT="9525" marB="0" anchor="b"/>
+                </a:tc>
+                <a:tc>
+                  <a:txBody>
+                    <a:bodyPr/>
+                    <a:lstStyle/>
+                    <a:p>
+                      <a:pPr algn="l" fontAlgn="b">
+                        <a:buNone/>
+                      </a:pPr>
+                      <a:r>
+                        <a:rPr lang="en-US" sz="1100" u="none" strike="noStrike">
+                          <a:effectLst/>
+                        </a:rPr>
+                        <a:t>AG</a:t>
+                      </a:r>
+                      <a:endParaRPr lang="en-US" sz="1100" b="0" i="0" u="none" strike="noStrike">
+                        <a:solidFill>
+                          <a:srgbClr val="000000"/>
+                        </a:solidFill>
+                        <a:effectLst/>
+                        <a:latin typeface="Calibri" panose="020F0502020204030204" pitchFamily="34" charset="0"/>
+                      </a:endParaRPr>
+                    </a:p>
+                  </a:txBody>
+                  <a:tcPr marL="9525" marR="9525" marT="9525" marB="0" anchor="b"/>
+                </a:tc>
+                <a:tc>
+                  <a:txBody>
+                    <a:bodyPr/>
+                    <a:lstStyle/>
+                    <a:p>
+                      <a:pPr algn="l" fontAlgn="b">
+                        <a:buNone/>
+                      </a:pPr>
+                      <a:r>
+                        <a:rPr lang="en-US" sz="1100" u="none" strike="noStrike">
+                          <a:effectLst/>
+                        </a:rPr>
+                        <a:t>AG</a:t>
+                      </a:r>
+                      <a:endParaRPr lang="en-US" sz="1100" b="0" i="0" u="none" strike="noStrike">
+                        <a:solidFill>
+                          <a:srgbClr val="000000"/>
+                        </a:solidFill>
+                        <a:effectLst/>
+                        <a:latin typeface="Calibri" panose="020F0502020204030204" pitchFamily="34" charset="0"/>
+                      </a:endParaRPr>
+                    </a:p>
+                  </a:txBody>
+                  <a:tcPr marL="9525" marR="9525" marT="9525" marB="0" anchor="b"/>
+                </a:tc>
+                <a:extLst>
+                  <a:ext uri="{0D108BD9-81ED-4DB2-BD59-A6C34878D82A}">
+                    <a16:rowId xmlns:a16="http://schemas.microsoft.com/office/drawing/2014/main" val="2053552563"/>
+                  </a:ext>
+                </a:extLst>
+              </a:tr>
+              <a:tr h="190500">
+                <a:tc>
+                  <a:txBody>
+                    <a:bodyPr/>
+                    <a:lstStyle/>
+                    <a:p>
+                      <a:pPr algn="l" fontAlgn="b">
+                        <a:buNone/>
+                      </a:pPr>
+                      <a:r>
+                        <a:rPr lang="en-US" sz="1100" u="none" strike="noStrike">
+                          <a:effectLst/>
+                        </a:rPr>
+                        <a:t>[(21, 10), (22, 11)]</a:t>
+                      </a:r>
+                      <a:endParaRPr lang="en-US" sz="1100" b="0" i="0" u="none" strike="noStrike">
+                        <a:solidFill>
+                          <a:srgbClr val="000000"/>
+                        </a:solidFill>
+                        <a:effectLst/>
+                        <a:latin typeface="Calibri" panose="020F0502020204030204" pitchFamily="34" charset="0"/>
+                      </a:endParaRPr>
+                    </a:p>
+                  </a:txBody>
+                  <a:tcPr marL="9525" marR="9525" marT="9525" marB="0" anchor="b"/>
+                </a:tc>
+                <a:tc>
+                  <a:txBody>
+                    <a:bodyPr/>
+                    <a:lstStyle/>
+                    <a:p>
+                      <a:pPr algn="r" fontAlgn="b">
+                        <a:buNone/>
+                      </a:pPr>
+                      <a:r>
+                        <a:rPr lang="en-US" sz="1100" u="none" strike="noStrike">
+                          <a:effectLst/>
+                        </a:rPr>
+                        <a:t>2</a:t>
+                      </a:r>
+                      <a:endParaRPr lang="en-US" sz="1100" b="0" i="0" u="none" strike="noStrike">
+                        <a:solidFill>
+                          <a:srgbClr val="000000"/>
+                        </a:solidFill>
+                        <a:effectLst/>
+                        <a:latin typeface="Calibri" panose="020F0502020204030204" pitchFamily="34" charset="0"/>
+                      </a:endParaRPr>
+                    </a:p>
+                  </a:txBody>
+                  <a:tcPr marL="9525" marR="9525" marT="9525" marB="0" anchor="b"/>
+                </a:tc>
+                <a:tc>
+                  <a:txBody>
+                    <a:bodyPr/>
+                    <a:lstStyle/>
+                    <a:p>
+                      <a:pPr algn="r" fontAlgn="b">
+                        <a:buNone/>
+                      </a:pPr>
+                      <a:r>
+                        <a:rPr lang="en-US" sz="1100" u="none" strike="noStrike">
+                          <a:effectLst/>
+                        </a:rPr>
+                        <a:t>3.896872</a:t>
+                      </a:r>
+                      <a:endParaRPr lang="en-US" sz="1100" b="0" i="0" u="none" strike="noStrike">
+                        <a:solidFill>
+                          <a:srgbClr val="000000"/>
+                        </a:solidFill>
+                        <a:effectLst/>
+                        <a:latin typeface="Calibri" panose="020F0502020204030204" pitchFamily="34" charset="0"/>
+                      </a:endParaRPr>
+                    </a:p>
+                  </a:txBody>
+                  <a:tcPr marL="9525" marR="9525" marT="9525" marB="0" anchor="b"/>
+                </a:tc>
+                <a:tc>
+                  <a:txBody>
+                    <a:bodyPr/>
+                    <a:lstStyle/>
+                    <a:p>
+                      <a:pPr algn="l" fontAlgn="b">
+                        <a:buNone/>
+                      </a:pPr>
+                      <a:r>
+                        <a:rPr lang="en-US" sz="1100" u="none" strike="noStrike">
+                          <a:effectLst/>
+                        </a:rPr>
+                        <a:t>GT</a:t>
+                      </a:r>
+                      <a:endParaRPr lang="en-US" sz="1100" b="0" i="0" u="none" strike="noStrike">
+                        <a:solidFill>
+                          <a:srgbClr val="000000"/>
+                        </a:solidFill>
+                        <a:effectLst/>
+                        <a:latin typeface="Calibri" panose="020F0502020204030204" pitchFamily="34" charset="0"/>
+                      </a:endParaRPr>
+                    </a:p>
+                  </a:txBody>
+                  <a:tcPr marL="9525" marR="9525" marT="9525" marB="0" anchor="b"/>
+                </a:tc>
+                <a:tc>
+                  <a:txBody>
+                    <a:bodyPr/>
+                    <a:lstStyle/>
+                    <a:p>
+                      <a:pPr algn="l" fontAlgn="b">
+                        <a:buNone/>
+                      </a:pPr>
+                      <a:r>
+                        <a:rPr lang="en-US" sz="1100" u="none" strike="noStrike">
+                          <a:effectLst/>
+                        </a:rPr>
+                        <a:t>GT</a:t>
+                      </a:r>
+                      <a:endParaRPr lang="en-US" sz="1100" b="0" i="0" u="none" strike="noStrike">
+                        <a:solidFill>
+                          <a:srgbClr val="000000"/>
+                        </a:solidFill>
+                        <a:effectLst/>
+                        <a:latin typeface="Calibri" panose="020F0502020204030204" pitchFamily="34" charset="0"/>
+                      </a:endParaRPr>
+                    </a:p>
+                  </a:txBody>
+                  <a:tcPr marL="9525" marR="9525" marT="9525" marB="0" anchor="b"/>
+                </a:tc>
+                <a:extLst>
+                  <a:ext uri="{0D108BD9-81ED-4DB2-BD59-A6C34878D82A}">
+                    <a16:rowId xmlns:a16="http://schemas.microsoft.com/office/drawing/2014/main" val="3011916048"/>
+                  </a:ext>
+                </a:extLst>
+              </a:tr>
+              <a:tr h="237788">
+                <a:tc>
+                  <a:txBody>
+                    <a:bodyPr/>
+                    <a:lstStyle/>
+                    <a:p>
+                      <a:pPr algn="l" fontAlgn="b">
+                        <a:buNone/>
+                      </a:pPr>
+                      <a:r>
+                        <a:rPr lang="en-US" sz="1100" u="none" strike="noStrike" dirty="0">
+                          <a:effectLst/>
+                        </a:rPr>
+                        <a:t>[(22, 13), (23, 14)]</a:t>
+                      </a:r>
+                      <a:endParaRPr lang="en-US" sz="1100" b="0" i="0" u="none" strike="noStrike" dirty="0">
+                        <a:solidFill>
+                          <a:srgbClr val="000000"/>
+                        </a:solidFill>
+                        <a:effectLst/>
+                        <a:latin typeface="Calibri" panose="020F0502020204030204" pitchFamily="34" charset="0"/>
+                      </a:endParaRPr>
+                    </a:p>
+                  </a:txBody>
+                  <a:tcPr marL="9525" marR="9525" marT="9525" marB="0" anchor="b"/>
+                </a:tc>
+                <a:tc>
+                  <a:txBody>
+                    <a:bodyPr/>
+                    <a:lstStyle/>
+                    <a:p>
+                      <a:pPr algn="r" fontAlgn="b">
+                        <a:buNone/>
+                      </a:pPr>
+                      <a:r>
+                        <a:rPr lang="en-US" sz="1100" u="none" strike="noStrike">
+                          <a:effectLst/>
+                        </a:rPr>
+                        <a:t>2</a:t>
+                      </a:r>
+                      <a:endParaRPr lang="en-US" sz="1100" b="0" i="0" u="none" strike="noStrike">
+                        <a:solidFill>
+                          <a:srgbClr val="000000"/>
+                        </a:solidFill>
+                        <a:effectLst/>
+                        <a:latin typeface="Calibri" panose="020F0502020204030204" pitchFamily="34" charset="0"/>
+                      </a:endParaRPr>
+                    </a:p>
+                  </a:txBody>
+                  <a:tcPr marL="9525" marR="9525" marT="9525" marB="0" anchor="b"/>
+                </a:tc>
+                <a:tc>
+                  <a:txBody>
+                    <a:bodyPr/>
+                    <a:lstStyle/>
+                    <a:p>
+                      <a:pPr algn="r" fontAlgn="b">
+                        <a:buNone/>
+                      </a:pPr>
+                      <a:r>
+                        <a:rPr lang="en-US" sz="1100" u="none" strike="noStrike">
+                          <a:effectLst/>
+                        </a:rPr>
+                        <a:t>2.365965</a:t>
+                      </a:r>
+                      <a:endParaRPr lang="en-US" sz="1100" b="0" i="0" u="none" strike="noStrike">
+                        <a:solidFill>
+                          <a:srgbClr val="000000"/>
+                        </a:solidFill>
+                        <a:effectLst/>
+                        <a:latin typeface="Calibri" panose="020F0502020204030204" pitchFamily="34" charset="0"/>
+                      </a:endParaRPr>
+                    </a:p>
+                  </a:txBody>
+                  <a:tcPr marL="9525" marR="9525" marT="9525" marB="0" anchor="b"/>
+                </a:tc>
+                <a:tc>
+                  <a:txBody>
+                    <a:bodyPr/>
+                    <a:lstStyle/>
+                    <a:p>
+                      <a:pPr algn="l" fontAlgn="b">
+                        <a:buNone/>
+                      </a:pPr>
+                      <a:r>
+                        <a:rPr lang="en-US" sz="1100" u="none" strike="noStrike">
+                          <a:effectLst/>
+                        </a:rPr>
+                        <a:t>TA</a:t>
+                      </a:r>
+                      <a:endParaRPr lang="en-US" sz="1100" b="0" i="0" u="none" strike="noStrike">
+                        <a:solidFill>
+                          <a:srgbClr val="000000"/>
+                        </a:solidFill>
+                        <a:effectLst/>
+                        <a:latin typeface="Calibri" panose="020F0502020204030204" pitchFamily="34" charset="0"/>
+                      </a:endParaRPr>
+                    </a:p>
+                  </a:txBody>
+                  <a:tcPr marL="9525" marR="9525" marT="9525" marB="0" anchor="b"/>
+                </a:tc>
+                <a:tc>
+                  <a:txBody>
+                    <a:bodyPr/>
+                    <a:lstStyle/>
+                    <a:p>
+                      <a:pPr algn="l" fontAlgn="b">
+                        <a:buNone/>
+                      </a:pPr>
+                      <a:r>
+                        <a:rPr lang="en-US" sz="1100" u="none" strike="noStrike">
+                          <a:effectLst/>
+                        </a:rPr>
+                        <a:t>TA</a:t>
+                      </a:r>
+                      <a:endParaRPr lang="en-US" sz="1100" b="0" i="0" u="none" strike="noStrike">
+                        <a:solidFill>
+                          <a:srgbClr val="000000"/>
+                        </a:solidFill>
+                        <a:effectLst/>
+                        <a:latin typeface="Calibri" panose="020F0502020204030204" pitchFamily="34" charset="0"/>
+                      </a:endParaRPr>
+                    </a:p>
+                  </a:txBody>
+                  <a:tcPr marL="9525" marR="9525" marT="9525" marB="0" anchor="b"/>
+                </a:tc>
+                <a:extLst>
+                  <a:ext uri="{0D108BD9-81ED-4DB2-BD59-A6C34878D82A}">
+                    <a16:rowId xmlns:a16="http://schemas.microsoft.com/office/drawing/2014/main" val="1928291130"/>
+                  </a:ext>
+                </a:extLst>
+              </a:tr>
+              <a:tr h="190500">
+                <a:tc>
+                  <a:txBody>
+                    <a:bodyPr/>
+                    <a:lstStyle/>
+                    <a:p>
+                      <a:pPr algn="l" fontAlgn="b">
+                        <a:buNone/>
+                      </a:pPr>
+                      <a:r>
+                        <a:rPr lang="en-US" sz="1100" u="none" strike="noStrike">
+                          <a:effectLst/>
+                        </a:rPr>
+                        <a:t>[(23, 3), (24, 4)]</a:t>
+                      </a:r>
+                      <a:endParaRPr lang="en-US" sz="1100" b="0" i="0" u="none" strike="noStrike">
+                        <a:solidFill>
+                          <a:srgbClr val="000000"/>
+                        </a:solidFill>
+                        <a:effectLst/>
+                        <a:latin typeface="Calibri" panose="020F0502020204030204" pitchFamily="34" charset="0"/>
+                      </a:endParaRPr>
+                    </a:p>
+                  </a:txBody>
+                  <a:tcPr marL="9525" marR="9525" marT="9525" marB="0" anchor="b"/>
+                </a:tc>
+                <a:tc>
+                  <a:txBody>
+                    <a:bodyPr/>
+                    <a:lstStyle/>
+                    <a:p>
+                      <a:pPr algn="r" fontAlgn="b">
+                        <a:buNone/>
+                      </a:pPr>
+                      <a:r>
+                        <a:rPr lang="en-US" sz="1100" u="none" strike="noStrike">
+                          <a:effectLst/>
+                        </a:rPr>
+                        <a:t>2</a:t>
+                      </a:r>
+                      <a:endParaRPr lang="en-US" sz="1100" b="0" i="0" u="none" strike="noStrike">
+                        <a:solidFill>
+                          <a:srgbClr val="000000"/>
+                        </a:solidFill>
+                        <a:effectLst/>
+                        <a:latin typeface="Calibri" panose="020F0502020204030204" pitchFamily="34" charset="0"/>
+                      </a:endParaRPr>
+                    </a:p>
+                  </a:txBody>
+                  <a:tcPr marL="9525" marR="9525" marT="9525" marB="0" anchor="b"/>
+                </a:tc>
+                <a:tc>
+                  <a:txBody>
+                    <a:bodyPr/>
+                    <a:lstStyle/>
+                    <a:p>
+                      <a:pPr algn="r" fontAlgn="b">
+                        <a:buNone/>
+                      </a:pPr>
+                      <a:r>
+                        <a:rPr lang="en-US" sz="1100" u="none" strike="noStrike">
+                          <a:effectLst/>
+                        </a:rPr>
+                        <a:t>4</a:t>
+                      </a:r>
+                      <a:endParaRPr lang="en-US" sz="1100" b="0" i="0" u="none" strike="noStrike">
+                        <a:solidFill>
+                          <a:srgbClr val="000000"/>
+                        </a:solidFill>
+                        <a:effectLst/>
+                        <a:latin typeface="Calibri" panose="020F0502020204030204" pitchFamily="34" charset="0"/>
+                      </a:endParaRPr>
+                    </a:p>
+                  </a:txBody>
+                  <a:tcPr marL="9525" marR="9525" marT="9525" marB="0" anchor="b"/>
+                </a:tc>
+                <a:tc>
+                  <a:txBody>
+                    <a:bodyPr/>
+                    <a:lstStyle/>
+                    <a:p>
+                      <a:pPr algn="l" fontAlgn="b">
+                        <a:buNone/>
+                      </a:pPr>
+                      <a:r>
+                        <a:rPr lang="en-US" sz="1100" u="none" strike="noStrike">
+                          <a:effectLst/>
+                        </a:rPr>
+                        <a:t>AA</a:t>
+                      </a:r>
+                      <a:endParaRPr lang="en-US" sz="1100" b="0" i="0" u="none" strike="noStrike">
+                        <a:solidFill>
+                          <a:srgbClr val="000000"/>
+                        </a:solidFill>
+                        <a:effectLst/>
+                        <a:latin typeface="Calibri" panose="020F0502020204030204" pitchFamily="34" charset="0"/>
+                      </a:endParaRPr>
+                    </a:p>
+                  </a:txBody>
+                  <a:tcPr marL="9525" marR="9525" marT="9525" marB="0" anchor="b"/>
+                </a:tc>
+                <a:tc>
+                  <a:txBody>
+                    <a:bodyPr/>
+                    <a:lstStyle/>
+                    <a:p>
+                      <a:pPr algn="l" fontAlgn="b">
+                        <a:buNone/>
+                      </a:pPr>
+                      <a:r>
+                        <a:rPr lang="en-US" sz="1100" u="none" strike="noStrike">
+                          <a:effectLst/>
+                        </a:rPr>
+                        <a:t>AA</a:t>
+                      </a:r>
+                      <a:endParaRPr lang="en-US" sz="1100" b="0" i="0" u="none" strike="noStrike">
+                        <a:solidFill>
+                          <a:srgbClr val="000000"/>
+                        </a:solidFill>
+                        <a:effectLst/>
+                        <a:latin typeface="Calibri" panose="020F0502020204030204" pitchFamily="34" charset="0"/>
+                      </a:endParaRPr>
+                    </a:p>
+                  </a:txBody>
+                  <a:tcPr marL="9525" marR="9525" marT="9525" marB="0" anchor="b"/>
+                </a:tc>
+                <a:extLst>
+                  <a:ext uri="{0D108BD9-81ED-4DB2-BD59-A6C34878D82A}">
+                    <a16:rowId xmlns:a16="http://schemas.microsoft.com/office/drawing/2014/main" val="3332385341"/>
+                  </a:ext>
+                </a:extLst>
+              </a:tr>
+              <a:tr h="190500">
+                <a:tc>
+                  <a:txBody>
+                    <a:bodyPr/>
+                    <a:lstStyle/>
+                    <a:p>
+                      <a:pPr algn="l" fontAlgn="b">
+                        <a:buNone/>
+                      </a:pPr>
+                      <a:r>
+                        <a:rPr lang="en-US" sz="1100" u="none" strike="noStrike">
+                          <a:effectLst/>
+                        </a:rPr>
+                        <a:t>[(24, 2), (25, 3)]</a:t>
+                      </a:r>
+                      <a:endParaRPr lang="en-US" sz="1100" b="0" i="0" u="none" strike="noStrike">
+                        <a:solidFill>
+                          <a:srgbClr val="000000"/>
+                        </a:solidFill>
+                        <a:effectLst/>
+                        <a:latin typeface="Calibri" panose="020F0502020204030204" pitchFamily="34" charset="0"/>
+                      </a:endParaRPr>
+                    </a:p>
+                  </a:txBody>
+                  <a:tcPr marL="9525" marR="9525" marT="9525" marB="0" anchor="b"/>
+                </a:tc>
+                <a:tc>
+                  <a:txBody>
+                    <a:bodyPr/>
+                    <a:lstStyle/>
+                    <a:p>
+                      <a:pPr algn="r" fontAlgn="b">
+                        <a:buNone/>
+                      </a:pPr>
+                      <a:r>
+                        <a:rPr lang="en-US" sz="1100" u="none" strike="noStrike">
+                          <a:effectLst/>
+                        </a:rPr>
+                        <a:t>2</a:t>
+                      </a:r>
+                      <a:endParaRPr lang="en-US" sz="1100" b="0" i="0" u="none" strike="noStrike">
+                        <a:solidFill>
+                          <a:srgbClr val="000000"/>
+                        </a:solidFill>
+                        <a:effectLst/>
+                        <a:latin typeface="Calibri" panose="020F0502020204030204" pitchFamily="34" charset="0"/>
+                      </a:endParaRPr>
+                    </a:p>
+                  </a:txBody>
+                  <a:tcPr marL="9525" marR="9525" marT="9525" marB="0" anchor="b"/>
+                </a:tc>
+                <a:tc>
+                  <a:txBody>
+                    <a:bodyPr/>
+                    <a:lstStyle/>
+                    <a:p>
+                      <a:pPr algn="r" fontAlgn="b">
+                        <a:buNone/>
+                      </a:pPr>
+                      <a:r>
+                        <a:rPr lang="en-US" sz="1100" u="none" strike="noStrike">
+                          <a:effectLst/>
+                        </a:rPr>
+                        <a:t>3.649394</a:t>
+                      </a:r>
+                      <a:endParaRPr lang="en-US" sz="1100" b="0" i="0" u="none" strike="noStrike">
+                        <a:solidFill>
+                          <a:srgbClr val="000000"/>
+                        </a:solidFill>
+                        <a:effectLst/>
+                        <a:latin typeface="Calibri" panose="020F0502020204030204" pitchFamily="34" charset="0"/>
+                      </a:endParaRPr>
+                    </a:p>
+                  </a:txBody>
+                  <a:tcPr marL="9525" marR="9525" marT="9525" marB="0" anchor="b"/>
+                </a:tc>
+                <a:tc>
+                  <a:txBody>
+                    <a:bodyPr/>
+                    <a:lstStyle/>
+                    <a:p>
+                      <a:pPr algn="l" fontAlgn="b">
+                        <a:buNone/>
+                      </a:pPr>
+                      <a:r>
+                        <a:rPr lang="en-US" sz="1100" u="none" strike="noStrike">
+                          <a:effectLst/>
+                        </a:rPr>
+                        <a:t>AA</a:t>
+                      </a:r>
+                      <a:endParaRPr lang="en-US" sz="1100" b="0" i="0" u="none" strike="noStrike">
+                        <a:solidFill>
+                          <a:srgbClr val="000000"/>
+                        </a:solidFill>
+                        <a:effectLst/>
+                        <a:latin typeface="Calibri" panose="020F0502020204030204" pitchFamily="34" charset="0"/>
+                      </a:endParaRPr>
+                    </a:p>
+                  </a:txBody>
+                  <a:tcPr marL="9525" marR="9525" marT="9525" marB="0" anchor="b"/>
+                </a:tc>
+                <a:tc>
+                  <a:txBody>
+                    <a:bodyPr/>
+                    <a:lstStyle/>
+                    <a:p>
+                      <a:pPr algn="l" fontAlgn="b">
+                        <a:buNone/>
+                      </a:pPr>
+                      <a:r>
+                        <a:rPr lang="en-US" sz="1100" u="none" strike="noStrike">
+                          <a:effectLst/>
+                        </a:rPr>
+                        <a:t>AA</a:t>
+                      </a:r>
+                      <a:endParaRPr lang="en-US" sz="1100" b="0" i="0" u="none" strike="noStrike">
+                        <a:solidFill>
+                          <a:srgbClr val="000000"/>
+                        </a:solidFill>
+                        <a:effectLst/>
+                        <a:latin typeface="Calibri" panose="020F0502020204030204" pitchFamily="34" charset="0"/>
+                      </a:endParaRPr>
+                    </a:p>
+                  </a:txBody>
+                  <a:tcPr marL="9525" marR="9525" marT="9525" marB="0" anchor="b"/>
+                </a:tc>
+                <a:extLst>
+                  <a:ext uri="{0D108BD9-81ED-4DB2-BD59-A6C34878D82A}">
+                    <a16:rowId xmlns:a16="http://schemas.microsoft.com/office/drawing/2014/main" val="1698707920"/>
+                  </a:ext>
+                </a:extLst>
+              </a:tr>
+              <a:tr h="190500">
+                <a:tc>
+                  <a:txBody>
+                    <a:bodyPr/>
+                    <a:lstStyle/>
+                    <a:p>
+                      <a:pPr algn="l" fontAlgn="b">
+                        <a:buNone/>
+                      </a:pPr>
+                      <a:r>
+                        <a:rPr lang="en-US" sz="1100" u="none" strike="noStrike">
+                          <a:effectLst/>
+                        </a:rPr>
+                        <a:t>[(24, 23), (25, 24)]</a:t>
+                      </a:r>
+                      <a:endParaRPr lang="en-US" sz="1100" b="0" i="0" u="none" strike="noStrike">
+                        <a:solidFill>
+                          <a:srgbClr val="000000"/>
+                        </a:solidFill>
+                        <a:effectLst/>
+                        <a:latin typeface="Calibri" panose="020F0502020204030204" pitchFamily="34" charset="0"/>
+                      </a:endParaRPr>
+                    </a:p>
+                  </a:txBody>
+                  <a:tcPr marL="9525" marR="9525" marT="9525" marB="0" anchor="b"/>
+                </a:tc>
+                <a:tc>
+                  <a:txBody>
+                    <a:bodyPr/>
+                    <a:lstStyle/>
+                    <a:p>
+                      <a:pPr algn="r" fontAlgn="b">
+                        <a:buNone/>
+                      </a:pPr>
+                      <a:r>
+                        <a:rPr lang="en-US" sz="1100" u="none" strike="noStrike">
+                          <a:effectLst/>
+                        </a:rPr>
+                        <a:t>2</a:t>
+                      </a:r>
+                      <a:endParaRPr lang="en-US" sz="1100" b="0" i="0" u="none" strike="noStrike">
+                        <a:solidFill>
+                          <a:srgbClr val="000000"/>
+                        </a:solidFill>
+                        <a:effectLst/>
+                        <a:latin typeface="Calibri" panose="020F0502020204030204" pitchFamily="34" charset="0"/>
+                      </a:endParaRPr>
+                    </a:p>
+                  </a:txBody>
+                  <a:tcPr marL="9525" marR="9525" marT="9525" marB="0" anchor="b"/>
+                </a:tc>
+                <a:tc>
+                  <a:txBody>
+                    <a:bodyPr/>
+                    <a:lstStyle/>
+                    <a:p>
+                      <a:pPr algn="r" fontAlgn="b">
+                        <a:buNone/>
+                      </a:pPr>
+                      <a:r>
+                        <a:rPr lang="en-US" sz="1100" u="none" strike="noStrike">
+                          <a:effectLst/>
+                        </a:rPr>
+                        <a:t>4</a:t>
+                      </a:r>
+                      <a:endParaRPr lang="en-US" sz="1100" b="0" i="0" u="none" strike="noStrike">
+                        <a:solidFill>
+                          <a:srgbClr val="000000"/>
+                        </a:solidFill>
+                        <a:effectLst/>
+                        <a:latin typeface="Calibri" panose="020F0502020204030204" pitchFamily="34" charset="0"/>
+                      </a:endParaRPr>
+                    </a:p>
+                  </a:txBody>
+                  <a:tcPr marL="9525" marR="9525" marT="9525" marB="0" anchor="b"/>
+                </a:tc>
+                <a:tc>
+                  <a:txBody>
+                    <a:bodyPr/>
+                    <a:lstStyle/>
+                    <a:p>
+                      <a:pPr algn="l" fontAlgn="b">
+                        <a:buNone/>
+                      </a:pPr>
+                      <a:r>
+                        <a:rPr lang="en-US" sz="1100" u="none" strike="noStrike">
+                          <a:effectLst/>
+                        </a:rPr>
+                        <a:t>AA</a:t>
+                      </a:r>
+                      <a:endParaRPr lang="en-US" sz="1100" b="0" i="0" u="none" strike="noStrike">
+                        <a:solidFill>
+                          <a:srgbClr val="000000"/>
+                        </a:solidFill>
+                        <a:effectLst/>
+                        <a:latin typeface="Calibri" panose="020F0502020204030204" pitchFamily="34" charset="0"/>
+                      </a:endParaRPr>
+                    </a:p>
+                  </a:txBody>
+                  <a:tcPr marL="9525" marR="9525" marT="9525" marB="0" anchor="b"/>
+                </a:tc>
+                <a:tc>
+                  <a:txBody>
+                    <a:bodyPr/>
+                    <a:lstStyle/>
+                    <a:p>
+                      <a:pPr algn="l" fontAlgn="b">
+                        <a:buNone/>
+                      </a:pPr>
+                      <a:r>
+                        <a:rPr lang="en-US" sz="1100" u="none" strike="noStrike" dirty="0">
+                          <a:effectLst/>
+                        </a:rPr>
+                        <a:t>AA</a:t>
+                      </a:r>
+                      <a:endParaRPr lang="en-US" sz="1100" b="0" i="0" u="none" strike="noStrike" dirty="0">
+                        <a:solidFill>
+                          <a:srgbClr val="000000"/>
+                        </a:solidFill>
+                        <a:effectLst/>
+                        <a:latin typeface="Calibri" panose="020F0502020204030204" pitchFamily="34" charset="0"/>
+                      </a:endParaRPr>
+                    </a:p>
+                  </a:txBody>
+                  <a:tcPr marL="9525" marR="9525" marT="9525" marB="0" anchor="b"/>
+                </a:tc>
+                <a:extLst>
+                  <a:ext uri="{0D108BD9-81ED-4DB2-BD59-A6C34878D82A}">
+                    <a16:rowId xmlns:a16="http://schemas.microsoft.com/office/drawing/2014/main" val="39054619"/>
+                  </a:ext>
+                </a:extLst>
+              </a:tr>
+            </a:tbl>
+          </a:graphicData>
+        </a:graphic>
+      </p:graphicFrame>
+      <p:pic>
+        <p:nvPicPr>
+          <p:cNvPr id="10" name="Picture 9">
+            <a:extLst>
+              <a:ext uri="{FF2B5EF4-FFF2-40B4-BE49-F238E27FC236}">
+                <a16:creationId xmlns:a16="http://schemas.microsoft.com/office/drawing/2014/main" id="{56B8753A-B308-4C70-5C2B-D106972D0032}"/>
+              </a:ext>
+            </a:extLst>
+          </p:cNvPr>
+          <p:cNvPicPr>
+            <a:picLocks noChangeAspect="1"/>
+          </p:cNvPicPr>
+          <p:nvPr/>
+        </p:nvPicPr>
+        <p:blipFill>
+          <a:blip r:embed="rId3"/>
+          <a:stretch>
+            <a:fillRect/>
+          </a:stretch>
+        </p:blipFill>
+        <p:spPr>
+          <a:xfrm>
+            <a:off x="5925058" y="1970530"/>
+            <a:ext cx="5777277" cy="4021116"/>
+          </a:xfrm>
+          <a:prstGeom prst="rect">
+            <a:avLst/>
+          </a:prstGeom>
+        </p:spPr>
+      </p:pic>
+    </p:spTree>
+    <p:extLst>
+      <p:ext uri="{BB962C8B-B14F-4D97-AF65-F5344CB8AC3E}">
+        <p14:creationId xmlns:p14="http://schemas.microsoft.com/office/powerpoint/2010/main" val="2373399307"/>
+      </p:ext>
+    </p:extLst>
+  </p:cSld>
+  <p:clrMapOvr>
+    <a:masterClrMapping/>
+  </p:clrMapOvr>
+</p:sld>
+</file>
+
+<file path=ppt/slides/slide13.xml><?xml version="1.0" encoding="utf-8"?>
+<p:sld xmlns:a="http://schemas.openxmlformats.org/drawingml/2006/main" xmlns:r="http://schemas.openxmlformats.org/officeDocument/2006/relationships" xmlns:p="http://schemas.openxmlformats.org/presentationml/2006/main">
+  <p:cSld>
+    <p:bg>
+      <p:bgPr>
+        <a:solidFill>
+          <a:schemeClr val="accent4">
+            <a:lumMod val="20000"/>
+            <a:lumOff val="80000"/>
+          </a:schemeClr>
+        </a:solidFill>
+        <a:effectLst/>
+      </p:bgPr>
+    </p:bg>
+    <p:spTree>
+      <p:nvGrpSpPr>
+        <p:cNvPr id="1" name="">
+          <a:extLst>
+            <a:ext uri="{FF2B5EF4-FFF2-40B4-BE49-F238E27FC236}">
+              <a16:creationId xmlns:a16="http://schemas.microsoft.com/office/drawing/2014/main" id="{F4E0473F-6F18-3D2F-A670-DF720CEBEEE8}"/>
+            </a:ext>
+          </a:extLst>
+        </p:cNvPr>
+        <p:cNvGrpSpPr/>
+        <p:nvPr/>
+      </p:nvGrpSpPr>
+      <p:grpSpPr>
+        <a:xfrm>
+          <a:off x="0" y="0"/>
+          <a:ext cx="0" cy="0"/>
+          <a:chOff x="0" y="0"/>
+          <a:chExt cx="0" cy="0"/>
+        </a:xfrm>
+      </p:grpSpPr>
+      <p:sp>
+        <p:nvSpPr>
+          <p:cNvPr id="2" name="Title 1">
+            <a:extLst>
+              <a:ext uri="{FF2B5EF4-FFF2-40B4-BE49-F238E27FC236}">
+                <a16:creationId xmlns:a16="http://schemas.microsoft.com/office/drawing/2014/main" id="{4D37FB9B-86A5-3166-9459-A085F7FFB4B9}"/>
+              </a:ext>
+            </a:extLst>
+          </p:cNvPr>
+          <p:cNvSpPr>
+            <a:spLocks noGrp="1"/>
+          </p:cNvSpPr>
+          <p:nvPr>
+            <p:ph type="title"/>
+          </p:nvPr>
+        </p:nvSpPr>
+        <p:spPr>
+          <a:xfrm>
+            <a:off x="116114" y="103630"/>
+            <a:ext cx="10515600" cy="1325563"/>
+          </a:xfrm>
+        </p:spPr>
+        <p:txBody>
+          <a:bodyPr/>
+          <a:lstStyle/>
+          <a:p>
+            <a:r>
+              <a:rPr lang="en-US" dirty="0"/>
+              <a:t>Ex1 Mo2 80pct </a:t>
+            </a:r>
+            <a:br>
+              <a:rPr lang="en-US" dirty="0"/>
+            </a:br>
+            <a:r>
+              <a:rPr lang="en-US" dirty="0">
+                <a:solidFill>
+                  <a:srgbClr val="FF0000"/>
+                </a:solidFill>
+              </a:rPr>
+              <a:t>Try</a:t>
+            </a:r>
+            <a:r>
+              <a:rPr lang="en-US" dirty="0"/>
+              <a:t> </a:t>
+            </a:r>
+            <a:r>
+              <a:rPr lang="en-US" dirty="0">
+                <a:solidFill>
+                  <a:srgbClr val="FF0000"/>
+                </a:solidFill>
+              </a:rPr>
+              <a:t>Reverse</a:t>
+            </a:r>
+          </a:p>
+        </p:txBody>
+      </p:sp>
+      <p:pic>
+        <p:nvPicPr>
+          <p:cNvPr id="6" name="Picture 5">
+            <a:extLst>
+              <a:ext uri="{FF2B5EF4-FFF2-40B4-BE49-F238E27FC236}">
+                <a16:creationId xmlns:a16="http://schemas.microsoft.com/office/drawing/2014/main" id="{4FEE1E0F-4D00-400D-19C3-1BFE1C3A439A}"/>
+              </a:ext>
+            </a:extLst>
+          </p:cNvPr>
+          <p:cNvPicPr>
+            <a:picLocks noChangeAspect="1"/>
+          </p:cNvPicPr>
+          <p:nvPr/>
+        </p:nvPicPr>
+        <p:blipFill>
+          <a:blip r:embed="rId2"/>
+          <a:stretch>
+            <a:fillRect/>
+          </a:stretch>
+        </p:blipFill>
+        <p:spPr>
+          <a:xfrm>
+            <a:off x="6023748" y="179389"/>
+            <a:ext cx="6052138" cy="1617571"/>
+          </a:xfrm>
+          <a:prstGeom prst="rect">
+            <a:avLst/>
+          </a:prstGeom>
+        </p:spPr>
+      </p:pic>
+      <p:pic>
+        <p:nvPicPr>
+          <p:cNvPr id="3" name="Picture 2">
+            <a:extLst>
+              <a:ext uri="{FF2B5EF4-FFF2-40B4-BE49-F238E27FC236}">
+                <a16:creationId xmlns:a16="http://schemas.microsoft.com/office/drawing/2014/main" id="{5E819213-7076-D375-D987-FDDCDE3492C9}"/>
+              </a:ext>
+            </a:extLst>
+          </p:cNvPr>
+          <p:cNvPicPr>
+            <a:picLocks noChangeAspect="1"/>
+          </p:cNvPicPr>
+          <p:nvPr/>
+        </p:nvPicPr>
+        <p:blipFill>
+          <a:blip r:embed="rId3"/>
+          <a:stretch>
+            <a:fillRect/>
+          </a:stretch>
+        </p:blipFill>
+        <p:spPr>
+          <a:xfrm>
+            <a:off x="305353" y="1950956"/>
+            <a:ext cx="6052137" cy="4273123"/>
+          </a:xfrm>
+          <a:prstGeom prst="rect">
+            <a:avLst/>
+          </a:prstGeom>
+        </p:spPr>
+      </p:pic>
+      <p:pic>
+        <p:nvPicPr>
+          <p:cNvPr id="4" name="Picture 3">
+            <a:extLst>
+              <a:ext uri="{FF2B5EF4-FFF2-40B4-BE49-F238E27FC236}">
+                <a16:creationId xmlns:a16="http://schemas.microsoft.com/office/drawing/2014/main" id="{CC1782D7-41D7-6D15-B37A-8F1993A52C01}"/>
+              </a:ext>
+            </a:extLst>
+          </p:cNvPr>
+          <p:cNvPicPr>
+            <a:picLocks noChangeAspect="1"/>
+          </p:cNvPicPr>
+          <p:nvPr/>
+        </p:nvPicPr>
+        <p:blipFill>
+          <a:blip r:embed="rId4"/>
+          <a:stretch>
+            <a:fillRect/>
+          </a:stretch>
+        </p:blipFill>
+        <p:spPr>
+          <a:xfrm>
+            <a:off x="6535217" y="1796960"/>
+            <a:ext cx="5029200" cy="4445000"/>
+          </a:xfrm>
+          <a:prstGeom prst="rect">
+            <a:avLst/>
+          </a:prstGeom>
+        </p:spPr>
+      </p:pic>
+    </p:spTree>
+    <p:extLst>
+      <p:ext uri="{BB962C8B-B14F-4D97-AF65-F5344CB8AC3E}">
+        <p14:creationId xmlns:p14="http://schemas.microsoft.com/office/powerpoint/2010/main" val="3591922998"/>
+      </p:ext>
+    </p:extLst>
+  </p:cSld>
+  <p:clrMapOvr>
+    <a:masterClrMapping/>
+  </p:clrMapOvr>
+</p:sld>
+</file>
+
+<file path=ppt/slides/slide14.xml><?xml version="1.0" encoding="utf-8"?>
+<p:sld xmlns:a="http://schemas.openxmlformats.org/drawingml/2006/main" xmlns:r="http://schemas.openxmlformats.org/officeDocument/2006/relationships" xmlns:p="http://schemas.openxmlformats.org/presentationml/2006/main">
+  <p:cSld>
+    <p:bg>
+      <p:bgPr>
+        <a:solidFill>
+          <a:schemeClr val="accent4">
+            <a:lumMod val="20000"/>
+            <a:lumOff val="80000"/>
+          </a:schemeClr>
+        </a:solidFill>
+        <a:effectLst/>
+      </p:bgPr>
+    </p:bg>
+    <p:spTree>
+      <p:nvGrpSpPr>
+        <p:cNvPr id="1" name="">
+          <a:extLst>
+            <a:ext uri="{FF2B5EF4-FFF2-40B4-BE49-F238E27FC236}">
+              <a16:creationId xmlns:a16="http://schemas.microsoft.com/office/drawing/2014/main" id="{B3DA8FFC-07E8-79BA-DCD1-CA786EA11069}"/>
+            </a:ext>
+          </a:extLst>
+        </p:cNvPr>
+        <p:cNvGrpSpPr/>
+        <p:nvPr/>
+      </p:nvGrpSpPr>
+      <p:grpSpPr>
+        <a:xfrm>
+          <a:off x="0" y="0"/>
+          <a:ext cx="0" cy="0"/>
+          <a:chOff x="0" y="0"/>
+          <a:chExt cx="0" cy="0"/>
+        </a:xfrm>
+      </p:grpSpPr>
+      <p:sp>
+        <p:nvSpPr>
+          <p:cNvPr id="2" name="Title 1">
+            <a:extLst>
+              <a:ext uri="{FF2B5EF4-FFF2-40B4-BE49-F238E27FC236}">
+                <a16:creationId xmlns:a16="http://schemas.microsoft.com/office/drawing/2014/main" id="{9AAD0EDD-02B5-FC5E-1F89-01D1386E129F}"/>
+              </a:ext>
+            </a:extLst>
+          </p:cNvPr>
+          <p:cNvSpPr>
+            <a:spLocks noGrp="1"/>
+          </p:cNvSpPr>
+          <p:nvPr>
+            <p:ph type="title"/>
+          </p:nvPr>
+        </p:nvSpPr>
+        <p:spPr>
+          <a:xfrm>
+            <a:off x="116114" y="103630"/>
+            <a:ext cx="10515600" cy="1325563"/>
+          </a:xfrm>
+        </p:spPr>
+        <p:txBody>
+          <a:bodyPr/>
+          <a:lstStyle/>
+          <a:p>
+            <a:r>
+              <a:rPr lang="en-US" dirty="0"/>
+              <a:t>Ex1 Mo2 Output</a:t>
+            </a:r>
+          </a:p>
+        </p:txBody>
+      </p:sp>
+      <p:pic>
+        <p:nvPicPr>
+          <p:cNvPr id="8" name="Picture 7">
+            <a:extLst>
+              <a:ext uri="{FF2B5EF4-FFF2-40B4-BE49-F238E27FC236}">
+                <a16:creationId xmlns:a16="http://schemas.microsoft.com/office/drawing/2014/main" id="{156BE39A-9469-034C-637F-740072778BD0}"/>
+              </a:ext>
+            </a:extLst>
+          </p:cNvPr>
+          <p:cNvPicPr>
+            <a:picLocks noChangeAspect="1"/>
+          </p:cNvPicPr>
+          <p:nvPr/>
+        </p:nvPicPr>
+        <p:blipFill>
+          <a:blip r:embed="rId2"/>
+          <a:stretch>
+            <a:fillRect/>
+          </a:stretch>
+        </p:blipFill>
+        <p:spPr>
+          <a:xfrm>
+            <a:off x="5281064" y="-167039"/>
+            <a:ext cx="6985000" cy="1866900"/>
+          </a:xfrm>
+          <a:prstGeom prst="rect">
+            <a:avLst/>
+          </a:prstGeom>
+        </p:spPr>
+      </p:pic>
+      <p:graphicFrame>
+        <p:nvGraphicFramePr>
+          <p:cNvPr id="3" name="Table 2">
+            <a:extLst>
+              <a:ext uri="{FF2B5EF4-FFF2-40B4-BE49-F238E27FC236}">
+                <a16:creationId xmlns:a16="http://schemas.microsoft.com/office/drawing/2014/main" id="{4E92EF70-E752-AB0F-DB28-911BA92AA84B}"/>
+              </a:ext>
+            </a:extLst>
+          </p:cNvPr>
+          <p:cNvGraphicFramePr>
+            <a:graphicFrameLocks noGrp="1"/>
+          </p:cNvGraphicFramePr>
+          <p:nvPr>
+            <p:extLst>
+              <p:ext uri="{D42A27DB-BD31-4B8C-83A1-F6EECF244321}">
+                <p14:modId xmlns:p14="http://schemas.microsoft.com/office/powerpoint/2010/main" val="2418270437"/>
+              </p:ext>
+            </p:extLst>
+          </p:nvPr>
+        </p:nvGraphicFramePr>
+        <p:xfrm>
+          <a:off x="340929" y="1603273"/>
+          <a:ext cx="5133596" cy="4021113"/>
+        </p:xfrm>
+        <a:graphic>
+          <a:graphicData uri="http://schemas.openxmlformats.org/drawingml/2006/table">
+            <a:tbl>
+              <a:tblPr>
+                <a:tableStyleId>{5C22544A-7EE6-4342-B048-85BDC9FD1C3A}</a:tableStyleId>
+              </a:tblPr>
+              <a:tblGrid>
+                <a:gridCol w="1286990">
+                  <a:extLst>
+                    <a:ext uri="{9D8B030D-6E8A-4147-A177-3AD203B41FA5}">
+                      <a16:colId xmlns:a16="http://schemas.microsoft.com/office/drawing/2014/main" val="746880658"/>
+                    </a:ext>
+                  </a:extLst>
+                </a:gridCol>
+                <a:gridCol w="766449">
+                  <a:extLst>
+                    <a:ext uri="{9D8B030D-6E8A-4147-A177-3AD203B41FA5}">
+                      <a16:colId xmlns:a16="http://schemas.microsoft.com/office/drawing/2014/main" val="1832088274"/>
+                    </a:ext>
+                  </a:extLst>
+                </a:gridCol>
+                <a:gridCol w="1026719">
+                  <a:extLst>
+                    <a:ext uri="{9D8B030D-6E8A-4147-A177-3AD203B41FA5}">
+                      <a16:colId xmlns:a16="http://schemas.microsoft.com/office/drawing/2014/main" val="16369540"/>
+                    </a:ext>
+                  </a:extLst>
+                </a:gridCol>
+                <a:gridCol w="1026719">
+                  <a:extLst>
+                    <a:ext uri="{9D8B030D-6E8A-4147-A177-3AD203B41FA5}">
+                      <a16:colId xmlns:a16="http://schemas.microsoft.com/office/drawing/2014/main" val="2356201576"/>
+                    </a:ext>
+                  </a:extLst>
+                </a:gridCol>
+                <a:gridCol w="1026719">
+                  <a:extLst>
+                    <a:ext uri="{9D8B030D-6E8A-4147-A177-3AD203B41FA5}">
+                      <a16:colId xmlns:a16="http://schemas.microsoft.com/office/drawing/2014/main" val="3615731050"/>
+                    </a:ext>
+                  </a:extLst>
+                </a:gridCol>
+              </a:tblGrid>
+              <a:tr h="291174">
+                <a:tc>
+                  <a:txBody>
+                    <a:bodyPr/>
+                    <a:lstStyle/>
+                    <a:p>
+                      <a:pPr algn="ctr" fontAlgn="t">
+                        <a:buNone/>
+                      </a:pPr>
+                      <a:r>
+                        <a:rPr lang="en-US" sz="1100" u="none" strike="noStrike">
+                          <a:effectLst/>
+                        </a:rPr>
+                        <a:t>coords</a:t>
+                      </a:r>
+                      <a:endParaRPr lang="en-US" sz="1100" b="1" i="0" u="none" strike="noStrike">
+                        <a:solidFill>
+                          <a:srgbClr val="000000"/>
+                        </a:solidFill>
+                        <a:effectLst/>
+                        <a:latin typeface="Calibri" panose="020F0502020204030204" pitchFamily="34" charset="0"/>
+                      </a:endParaRPr>
+                    </a:p>
+                  </a:txBody>
+                  <a:tcPr marL="9525" marR="9525" marT="9525" marB="0"/>
+                </a:tc>
+                <a:tc>
+                  <a:txBody>
+                    <a:bodyPr/>
+                    <a:lstStyle/>
+                    <a:p>
+                      <a:pPr algn="ctr" fontAlgn="t">
+                        <a:buNone/>
+                      </a:pPr>
+                      <a:r>
+                        <a:rPr lang="en-US" sz="1100" u="none" strike="noStrike" dirty="0">
+                          <a:effectLst/>
+                        </a:rPr>
+                        <a:t>length</a:t>
+                      </a:r>
+                      <a:endParaRPr lang="en-US" sz="1100" b="1" i="0" u="none" strike="noStrike" dirty="0">
+                        <a:solidFill>
+                          <a:srgbClr val="000000"/>
+                        </a:solidFill>
+                        <a:effectLst/>
+                        <a:latin typeface="Calibri" panose="020F0502020204030204" pitchFamily="34" charset="0"/>
+                      </a:endParaRPr>
+                    </a:p>
+                  </a:txBody>
+                  <a:tcPr marL="9525" marR="9525" marT="9525" marB="0"/>
+                </a:tc>
+                <a:tc>
+                  <a:txBody>
+                    <a:bodyPr/>
+                    <a:lstStyle/>
+                    <a:p>
+                      <a:pPr algn="ctr" fontAlgn="t">
+                        <a:buNone/>
+                      </a:pPr>
+                      <a:r>
+                        <a:rPr lang="en-US" sz="1100" u="none" strike="noStrike" dirty="0">
+                          <a:effectLst/>
+                        </a:rPr>
+                        <a:t>score</a:t>
+                      </a:r>
+                      <a:endParaRPr lang="en-US" sz="1100" b="1" i="0" u="none" strike="noStrike" dirty="0">
+                        <a:solidFill>
+                          <a:srgbClr val="000000"/>
+                        </a:solidFill>
+                        <a:effectLst/>
+                        <a:latin typeface="Calibri" panose="020F0502020204030204" pitchFamily="34" charset="0"/>
+                      </a:endParaRPr>
+                    </a:p>
+                  </a:txBody>
+                  <a:tcPr marL="9525" marR="9525" marT="9525" marB="0"/>
+                </a:tc>
+                <a:tc>
+                  <a:txBody>
+                    <a:bodyPr/>
+                    <a:lstStyle/>
+                    <a:p>
+                      <a:pPr algn="ctr" fontAlgn="t">
+                        <a:buNone/>
+                      </a:pPr>
+                      <a:r>
+                        <a:rPr lang="en-US" sz="1100" u="none" strike="noStrike">
+                          <a:effectLst/>
+                        </a:rPr>
+                        <a:t>group1</a:t>
+                      </a:r>
+                      <a:endParaRPr lang="en-US" sz="1100" b="1" i="0" u="none" strike="noStrike">
+                        <a:solidFill>
+                          <a:srgbClr val="000000"/>
+                        </a:solidFill>
+                        <a:effectLst/>
+                        <a:latin typeface="Calibri" panose="020F0502020204030204" pitchFamily="34" charset="0"/>
+                      </a:endParaRPr>
+                    </a:p>
+                  </a:txBody>
+                  <a:tcPr marL="9525" marR="9525" marT="9525" marB="0"/>
+                </a:tc>
+                <a:tc>
+                  <a:txBody>
+                    <a:bodyPr/>
+                    <a:lstStyle/>
+                    <a:p>
+                      <a:pPr algn="ctr" fontAlgn="t">
+                        <a:buNone/>
+                      </a:pPr>
+                      <a:r>
+                        <a:rPr lang="en-US" sz="1100" u="none" strike="noStrike">
+                          <a:effectLst/>
+                        </a:rPr>
+                        <a:t>group2</a:t>
+                      </a:r>
+                      <a:endParaRPr lang="en-US" sz="1100" b="1" i="0" u="none" strike="noStrike">
+                        <a:solidFill>
+                          <a:srgbClr val="000000"/>
+                        </a:solidFill>
+                        <a:effectLst/>
+                        <a:latin typeface="Calibri" panose="020F0502020204030204" pitchFamily="34" charset="0"/>
+                      </a:endParaRPr>
+                    </a:p>
+                  </a:txBody>
+                  <a:tcPr marL="9525" marR="9525" marT="9525" marB="0"/>
+                </a:tc>
+                <a:extLst>
+                  <a:ext uri="{0D108BD9-81ED-4DB2-BD59-A6C34878D82A}">
+                    <a16:rowId xmlns:a16="http://schemas.microsoft.com/office/drawing/2014/main" val="1287575119"/>
+                  </a:ext>
+                </a:extLst>
+              </a:tr>
+              <a:tr h="527025">
+                <a:tc>
+                  <a:txBody>
+                    <a:bodyPr/>
+                    <a:lstStyle/>
+                    <a:p>
+                      <a:pPr algn="l" fontAlgn="b">
+                        <a:buNone/>
+                      </a:pPr>
+                      <a:r>
+                        <a:rPr lang="en-US" sz="1100" u="none" strike="noStrike">
+                          <a:effectLst/>
+                        </a:rPr>
+                        <a:t>[(20, 10), (21, 9), (22, 8)]</a:t>
+                      </a:r>
+                      <a:endParaRPr lang="en-US" sz="1100" b="0" i="0" u="none" strike="noStrike">
+                        <a:solidFill>
+                          <a:srgbClr val="000000"/>
+                        </a:solidFill>
+                        <a:effectLst/>
+                        <a:latin typeface="Calibri" panose="020F0502020204030204" pitchFamily="34" charset="0"/>
+                      </a:endParaRPr>
+                    </a:p>
+                  </a:txBody>
+                  <a:tcPr marL="9525" marR="9525" marT="9525" marB="0" anchor="b"/>
+                </a:tc>
+                <a:tc>
+                  <a:txBody>
+                    <a:bodyPr/>
+                    <a:lstStyle/>
+                    <a:p>
+                      <a:pPr algn="ctr" fontAlgn="b">
+                        <a:buNone/>
+                      </a:pPr>
+                      <a:r>
+                        <a:rPr lang="en-US" sz="1100" u="none" strike="noStrike">
+                          <a:effectLst/>
+                        </a:rPr>
+                        <a:t>3</a:t>
+                      </a:r>
+                      <a:endParaRPr lang="en-US" sz="1100" b="0" i="0" u="none" strike="noStrike">
+                        <a:solidFill>
+                          <a:srgbClr val="000000"/>
+                        </a:solidFill>
+                        <a:effectLst/>
+                        <a:latin typeface="Calibri" panose="020F0502020204030204" pitchFamily="34" charset="0"/>
+                      </a:endParaRPr>
+                    </a:p>
+                  </a:txBody>
+                  <a:tcPr marL="9525" marR="9525" marT="9525" marB="0" anchor="b"/>
+                </a:tc>
+                <a:tc>
+                  <a:txBody>
+                    <a:bodyPr/>
+                    <a:lstStyle/>
+                    <a:p>
+                      <a:pPr algn="ctr" fontAlgn="b">
+                        <a:buNone/>
+                      </a:pPr>
+                      <a:r>
+                        <a:rPr lang="en-US" sz="1100" u="none" strike="noStrike" dirty="0">
+                          <a:effectLst/>
+                        </a:rPr>
+                        <a:t>3.33551</a:t>
+                      </a:r>
+                      <a:endParaRPr lang="en-US" sz="1100" b="0" i="0" u="none" strike="noStrike" dirty="0">
+                        <a:solidFill>
+                          <a:srgbClr val="000000"/>
+                        </a:solidFill>
+                        <a:effectLst/>
+                        <a:latin typeface="Calibri" panose="020F0502020204030204" pitchFamily="34" charset="0"/>
+                      </a:endParaRPr>
+                    </a:p>
+                  </a:txBody>
+                  <a:tcPr marL="9525" marR="9525" marT="9525" marB="0" anchor="b"/>
+                </a:tc>
+                <a:tc>
+                  <a:txBody>
+                    <a:bodyPr/>
+                    <a:lstStyle/>
+                    <a:p>
+                      <a:pPr algn="ctr" fontAlgn="b">
+                        <a:buNone/>
+                      </a:pPr>
+                      <a:r>
+                        <a:rPr lang="en-US" sz="1100" u="none" strike="noStrike">
+                          <a:effectLst/>
+                        </a:rPr>
+                        <a:t>CGT</a:t>
+                      </a:r>
+                      <a:endParaRPr lang="en-US" sz="1100" b="0" i="0" u="none" strike="noStrike">
+                        <a:solidFill>
+                          <a:srgbClr val="000000"/>
+                        </a:solidFill>
+                        <a:effectLst/>
+                        <a:latin typeface="Calibri" panose="020F0502020204030204" pitchFamily="34" charset="0"/>
+                      </a:endParaRPr>
+                    </a:p>
+                  </a:txBody>
+                  <a:tcPr marL="9525" marR="9525" marT="9525" marB="0" anchor="b"/>
+                </a:tc>
+                <a:tc>
+                  <a:txBody>
+                    <a:bodyPr/>
+                    <a:lstStyle/>
+                    <a:p>
+                      <a:pPr algn="ctr" fontAlgn="b">
+                        <a:buNone/>
+                      </a:pPr>
+                      <a:r>
+                        <a:rPr lang="en-US" sz="1100" u="none" strike="noStrike">
+                          <a:effectLst/>
+                        </a:rPr>
+                        <a:t>GCA</a:t>
+                      </a:r>
+                      <a:endParaRPr lang="en-US" sz="1100" b="0" i="0" u="none" strike="noStrike">
+                        <a:solidFill>
+                          <a:srgbClr val="000000"/>
+                        </a:solidFill>
+                        <a:effectLst/>
+                        <a:latin typeface="Calibri" panose="020F0502020204030204" pitchFamily="34" charset="0"/>
+                      </a:endParaRPr>
+                    </a:p>
+                  </a:txBody>
+                  <a:tcPr marL="9525" marR="9525" marT="9525" marB="0" anchor="b"/>
+                </a:tc>
+                <a:extLst>
+                  <a:ext uri="{0D108BD9-81ED-4DB2-BD59-A6C34878D82A}">
+                    <a16:rowId xmlns:a16="http://schemas.microsoft.com/office/drawing/2014/main" val="3594981752"/>
+                  </a:ext>
+                </a:extLst>
+              </a:tr>
+              <a:tr h="291174">
+                <a:tc>
+                  <a:txBody>
+                    <a:bodyPr/>
+                    <a:lstStyle/>
+                    <a:p>
+                      <a:pPr algn="l" fontAlgn="b">
+                        <a:buNone/>
+                      </a:pPr>
+                      <a:r>
+                        <a:rPr lang="en-US" sz="1100" u="none" strike="noStrike">
+                          <a:effectLst/>
+                        </a:rPr>
+                        <a:t>[(8, 1), (9, 0)]</a:t>
+                      </a:r>
+                      <a:endParaRPr lang="en-US" sz="1100" b="0" i="0" u="none" strike="noStrike">
+                        <a:solidFill>
+                          <a:srgbClr val="000000"/>
+                        </a:solidFill>
+                        <a:effectLst/>
+                        <a:latin typeface="Calibri" panose="020F0502020204030204" pitchFamily="34" charset="0"/>
+                      </a:endParaRPr>
+                    </a:p>
+                  </a:txBody>
+                  <a:tcPr marL="9525" marR="9525" marT="9525" marB="0" anchor="b"/>
+                </a:tc>
+                <a:tc>
+                  <a:txBody>
+                    <a:bodyPr/>
+                    <a:lstStyle/>
+                    <a:p>
+                      <a:pPr algn="ctr" fontAlgn="b">
+                        <a:buNone/>
+                      </a:pPr>
+                      <a:r>
+                        <a:rPr lang="en-US" sz="1100" u="none" strike="noStrike">
+                          <a:effectLst/>
+                        </a:rPr>
+                        <a:t>2</a:t>
+                      </a:r>
+                      <a:endParaRPr lang="en-US" sz="1100" b="0" i="0" u="none" strike="noStrike">
+                        <a:solidFill>
+                          <a:srgbClr val="000000"/>
+                        </a:solidFill>
+                        <a:effectLst/>
+                        <a:latin typeface="Calibri" panose="020F0502020204030204" pitchFamily="34" charset="0"/>
+                      </a:endParaRPr>
+                    </a:p>
+                  </a:txBody>
+                  <a:tcPr marL="9525" marR="9525" marT="9525" marB="0" anchor="b"/>
+                </a:tc>
+                <a:tc>
+                  <a:txBody>
+                    <a:bodyPr/>
+                    <a:lstStyle/>
+                    <a:p>
+                      <a:pPr algn="ctr" fontAlgn="b">
+                        <a:buNone/>
+                      </a:pPr>
+                      <a:r>
+                        <a:rPr lang="en-US" sz="1100" u="none" strike="noStrike">
+                          <a:effectLst/>
+                        </a:rPr>
+                        <a:t>1.860874</a:t>
+                      </a:r>
+                      <a:endParaRPr lang="en-US" sz="1100" b="0" i="0" u="none" strike="noStrike">
+                        <a:solidFill>
+                          <a:srgbClr val="000000"/>
+                        </a:solidFill>
+                        <a:effectLst/>
+                        <a:latin typeface="Calibri" panose="020F0502020204030204" pitchFamily="34" charset="0"/>
+                      </a:endParaRPr>
+                    </a:p>
+                  </a:txBody>
+                  <a:tcPr marL="9525" marR="9525" marT="9525" marB="0" anchor="b"/>
+                </a:tc>
+                <a:tc>
+                  <a:txBody>
+                    <a:bodyPr/>
+                    <a:lstStyle/>
+                    <a:p>
+                      <a:pPr algn="ctr" fontAlgn="b">
+                        <a:buNone/>
+                      </a:pPr>
+                      <a:r>
+                        <a:rPr lang="en-US" sz="1100" u="none" strike="noStrike" dirty="0">
+                          <a:effectLst/>
+                        </a:rPr>
+                        <a:t>AC</a:t>
+                      </a:r>
+                      <a:endParaRPr lang="en-US" sz="1100" b="0" i="0" u="none" strike="noStrike" dirty="0">
+                        <a:solidFill>
+                          <a:srgbClr val="000000"/>
+                        </a:solidFill>
+                        <a:effectLst/>
+                        <a:latin typeface="Calibri" panose="020F0502020204030204" pitchFamily="34" charset="0"/>
+                      </a:endParaRPr>
+                    </a:p>
+                  </a:txBody>
+                  <a:tcPr marL="9525" marR="9525" marT="9525" marB="0" anchor="b"/>
+                </a:tc>
+                <a:tc>
+                  <a:txBody>
+                    <a:bodyPr/>
+                    <a:lstStyle/>
+                    <a:p>
+                      <a:pPr algn="ctr" fontAlgn="b">
+                        <a:buNone/>
+                      </a:pPr>
+                      <a:r>
+                        <a:rPr lang="en-US" sz="1100" u="none" strike="noStrike">
+                          <a:effectLst/>
+                        </a:rPr>
+                        <a:t>TG</a:t>
+                      </a:r>
+                      <a:endParaRPr lang="en-US" sz="1100" b="0" i="0" u="none" strike="noStrike">
+                        <a:solidFill>
+                          <a:srgbClr val="000000"/>
+                        </a:solidFill>
+                        <a:effectLst/>
+                        <a:latin typeface="Calibri" panose="020F0502020204030204" pitchFamily="34" charset="0"/>
+                      </a:endParaRPr>
+                    </a:p>
+                  </a:txBody>
+                  <a:tcPr marL="9525" marR="9525" marT="9525" marB="0" anchor="b"/>
+                </a:tc>
+                <a:extLst>
+                  <a:ext uri="{0D108BD9-81ED-4DB2-BD59-A6C34878D82A}">
+                    <a16:rowId xmlns:a16="http://schemas.microsoft.com/office/drawing/2014/main" val="2389759804"/>
+                  </a:ext>
+                </a:extLst>
+              </a:tr>
+              <a:tr h="291174">
+                <a:tc>
+                  <a:txBody>
+                    <a:bodyPr/>
+                    <a:lstStyle/>
+                    <a:p>
+                      <a:pPr algn="l" fontAlgn="b">
+                        <a:buNone/>
+                      </a:pPr>
+                      <a:r>
+                        <a:rPr lang="en-US" sz="1100" u="none" strike="noStrike">
+                          <a:effectLst/>
+                        </a:rPr>
+                        <a:t>[(9, 7), (10, 6)]</a:t>
+                      </a:r>
+                      <a:endParaRPr lang="en-US" sz="1100" b="0" i="0" u="none" strike="noStrike">
+                        <a:solidFill>
+                          <a:srgbClr val="000000"/>
+                        </a:solidFill>
+                        <a:effectLst/>
+                        <a:latin typeface="Calibri" panose="020F0502020204030204" pitchFamily="34" charset="0"/>
+                      </a:endParaRPr>
+                    </a:p>
+                  </a:txBody>
+                  <a:tcPr marL="9525" marR="9525" marT="9525" marB="0" anchor="b"/>
+                </a:tc>
+                <a:tc>
+                  <a:txBody>
+                    <a:bodyPr/>
+                    <a:lstStyle/>
+                    <a:p>
+                      <a:pPr algn="ctr" fontAlgn="b">
+                        <a:buNone/>
+                      </a:pPr>
+                      <a:r>
+                        <a:rPr lang="en-US" sz="1100" u="none" strike="noStrike" dirty="0">
+                          <a:effectLst/>
+                        </a:rPr>
+                        <a:t>2</a:t>
+                      </a:r>
+                      <a:endParaRPr lang="en-US" sz="1100" b="0" i="0" u="none" strike="noStrike" dirty="0">
+                        <a:solidFill>
+                          <a:srgbClr val="000000"/>
+                        </a:solidFill>
+                        <a:effectLst/>
+                        <a:latin typeface="Calibri" panose="020F0502020204030204" pitchFamily="34" charset="0"/>
+                      </a:endParaRPr>
+                    </a:p>
+                  </a:txBody>
+                  <a:tcPr marL="9525" marR="9525" marT="9525" marB="0" anchor="b"/>
+                </a:tc>
+                <a:tc>
+                  <a:txBody>
+                    <a:bodyPr/>
+                    <a:lstStyle/>
+                    <a:p>
+                      <a:pPr algn="ctr" fontAlgn="b">
+                        <a:buNone/>
+                      </a:pPr>
+                      <a:r>
+                        <a:rPr lang="en-US" sz="1100" u="none" strike="noStrike">
+                          <a:effectLst/>
+                        </a:rPr>
+                        <a:t>1.479916</a:t>
+                      </a:r>
+                      <a:endParaRPr lang="en-US" sz="1100" b="0" i="0" u="none" strike="noStrike">
+                        <a:solidFill>
+                          <a:srgbClr val="000000"/>
+                        </a:solidFill>
+                        <a:effectLst/>
+                        <a:latin typeface="Calibri" panose="020F0502020204030204" pitchFamily="34" charset="0"/>
+                      </a:endParaRPr>
+                    </a:p>
+                  </a:txBody>
+                  <a:tcPr marL="9525" marR="9525" marT="9525" marB="0" anchor="b"/>
+                </a:tc>
+                <a:tc>
+                  <a:txBody>
+                    <a:bodyPr/>
+                    <a:lstStyle/>
+                    <a:p>
+                      <a:pPr algn="ctr" fontAlgn="b">
+                        <a:buNone/>
+                      </a:pPr>
+                      <a:r>
+                        <a:rPr lang="en-US" sz="1100" u="none" strike="noStrike" dirty="0">
+                          <a:effectLst/>
+                        </a:rPr>
+                        <a:t>CG</a:t>
+                      </a:r>
+                      <a:endParaRPr lang="en-US" sz="1100" b="0" i="0" u="none" strike="noStrike" dirty="0">
+                        <a:solidFill>
+                          <a:srgbClr val="000000"/>
+                        </a:solidFill>
+                        <a:effectLst/>
+                        <a:latin typeface="Calibri" panose="020F0502020204030204" pitchFamily="34" charset="0"/>
+                      </a:endParaRPr>
+                    </a:p>
+                  </a:txBody>
+                  <a:tcPr marL="9525" marR="9525" marT="9525" marB="0" anchor="b"/>
+                </a:tc>
+                <a:tc>
+                  <a:txBody>
+                    <a:bodyPr/>
+                    <a:lstStyle/>
+                    <a:p>
+                      <a:pPr algn="ctr" fontAlgn="b">
+                        <a:buNone/>
+                      </a:pPr>
+                      <a:r>
+                        <a:rPr lang="en-US" sz="1100" u="none" strike="noStrike">
+                          <a:effectLst/>
+                        </a:rPr>
+                        <a:t>GC</a:t>
+                      </a:r>
+                      <a:endParaRPr lang="en-US" sz="1100" b="0" i="0" u="none" strike="noStrike">
+                        <a:solidFill>
+                          <a:srgbClr val="000000"/>
+                        </a:solidFill>
+                        <a:effectLst/>
+                        <a:latin typeface="Calibri" panose="020F0502020204030204" pitchFamily="34" charset="0"/>
+                      </a:endParaRPr>
+                    </a:p>
+                  </a:txBody>
+                  <a:tcPr marL="9525" marR="9525" marT="9525" marB="0" anchor="b"/>
+                </a:tc>
+                <a:extLst>
+                  <a:ext uri="{0D108BD9-81ED-4DB2-BD59-A6C34878D82A}">
+                    <a16:rowId xmlns:a16="http://schemas.microsoft.com/office/drawing/2014/main" val="3905101117"/>
+                  </a:ext>
+                </a:extLst>
+              </a:tr>
+              <a:tr h="291174">
+                <a:tc>
+                  <a:txBody>
+                    <a:bodyPr/>
+                    <a:lstStyle/>
+                    <a:p>
+                      <a:pPr algn="l" fontAlgn="b">
+                        <a:buNone/>
+                      </a:pPr>
+                      <a:r>
+                        <a:rPr lang="en-US" sz="1100" u="none" strike="noStrike">
+                          <a:effectLst/>
+                        </a:rPr>
+                        <a:t>[(10, 9), (11, 8)]</a:t>
+                      </a:r>
+                      <a:endParaRPr lang="en-US" sz="1100" b="0" i="0" u="none" strike="noStrike">
+                        <a:solidFill>
+                          <a:srgbClr val="000000"/>
+                        </a:solidFill>
+                        <a:effectLst/>
+                        <a:latin typeface="Calibri" panose="020F0502020204030204" pitchFamily="34" charset="0"/>
+                      </a:endParaRPr>
+                    </a:p>
+                  </a:txBody>
+                  <a:tcPr marL="9525" marR="9525" marT="9525" marB="0" anchor="b"/>
+                </a:tc>
+                <a:tc>
+                  <a:txBody>
+                    <a:bodyPr/>
+                    <a:lstStyle/>
+                    <a:p>
+                      <a:pPr algn="ctr" fontAlgn="b">
+                        <a:buNone/>
+                      </a:pPr>
+                      <a:r>
+                        <a:rPr lang="en-US" sz="1100" u="none" strike="noStrike">
+                          <a:effectLst/>
+                        </a:rPr>
+                        <a:t>2</a:t>
+                      </a:r>
+                      <a:endParaRPr lang="en-US" sz="1100" b="0" i="0" u="none" strike="noStrike">
+                        <a:solidFill>
+                          <a:srgbClr val="000000"/>
+                        </a:solidFill>
+                        <a:effectLst/>
+                        <a:latin typeface="Calibri" panose="020F0502020204030204" pitchFamily="34" charset="0"/>
+                      </a:endParaRPr>
+                    </a:p>
+                  </a:txBody>
+                  <a:tcPr marL="9525" marR="9525" marT="9525" marB="0" anchor="b"/>
+                </a:tc>
+                <a:tc>
+                  <a:txBody>
+                    <a:bodyPr/>
+                    <a:lstStyle/>
+                    <a:p>
+                      <a:pPr algn="ctr" fontAlgn="b">
+                        <a:buNone/>
+                      </a:pPr>
+                      <a:r>
+                        <a:rPr lang="en-US" sz="1100" u="none" strike="noStrike">
+                          <a:effectLst/>
+                        </a:rPr>
+                        <a:t>1.881161</a:t>
+                      </a:r>
+                      <a:endParaRPr lang="en-US" sz="1100" b="0" i="0" u="none" strike="noStrike">
+                        <a:solidFill>
+                          <a:srgbClr val="000000"/>
+                        </a:solidFill>
+                        <a:effectLst/>
+                        <a:latin typeface="Calibri" panose="020F0502020204030204" pitchFamily="34" charset="0"/>
+                      </a:endParaRPr>
+                    </a:p>
+                  </a:txBody>
+                  <a:tcPr marL="9525" marR="9525" marT="9525" marB="0" anchor="b"/>
+                </a:tc>
+                <a:tc>
+                  <a:txBody>
+                    <a:bodyPr/>
+                    <a:lstStyle/>
+                    <a:p>
+                      <a:pPr algn="ctr" fontAlgn="b">
+                        <a:buNone/>
+                      </a:pPr>
+                      <a:r>
+                        <a:rPr lang="en-US" sz="1100" u="none" strike="noStrike" dirty="0">
+                          <a:effectLst/>
+                        </a:rPr>
+                        <a:t>GT</a:t>
+                      </a:r>
+                      <a:endParaRPr lang="en-US" sz="1100" b="0" i="0" u="none" strike="noStrike" dirty="0">
+                        <a:solidFill>
+                          <a:srgbClr val="000000"/>
+                        </a:solidFill>
+                        <a:effectLst/>
+                        <a:latin typeface="Calibri" panose="020F0502020204030204" pitchFamily="34" charset="0"/>
+                      </a:endParaRPr>
+                    </a:p>
+                  </a:txBody>
+                  <a:tcPr marL="9525" marR="9525" marT="9525" marB="0" anchor="b"/>
+                </a:tc>
+                <a:tc>
+                  <a:txBody>
+                    <a:bodyPr/>
+                    <a:lstStyle/>
+                    <a:p>
+                      <a:pPr algn="ctr" fontAlgn="b">
+                        <a:buNone/>
+                      </a:pPr>
+                      <a:r>
+                        <a:rPr lang="en-US" sz="1100" u="none" strike="noStrike">
+                          <a:effectLst/>
+                        </a:rPr>
+                        <a:t>CA</a:t>
+                      </a:r>
+                      <a:endParaRPr lang="en-US" sz="1100" b="0" i="0" u="none" strike="noStrike">
+                        <a:solidFill>
+                          <a:srgbClr val="000000"/>
+                        </a:solidFill>
+                        <a:effectLst/>
+                        <a:latin typeface="Calibri" panose="020F0502020204030204" pitchFamily="34" charset="0"/>
+                      </a:endParaRPr>
+                    </a:p>
+                  </a:txBody>
+                  <a:tcPr marL="9525" marR="9525" marT="9525" marB="0" anchor="b"/>
+                </a:tc>
+                <a:extLst>
+                  <a:ext uri="{0D108BD9-81ED-4DB2-BD59-A6C34878D82A}">
+                    <a16:rowId xmlns:a16="http://schemas.microsoft.com/office/drawing/2014/main" val="2640721197"/>
+                  </a:ext>
+                </a:extLst>
+              </a:tr>
+              <a:tr h="291174">
+                <a:tc>
+                  <a:txBody>
+                    <a:bodyPr/>
+                    <a:lstStyle/>
+                    <a:p>
+                      <a:pPr algn="l" fontAlgn="b">
+                        <a:buNone/>
+                      </a:pPr>
+                      <a:r>
+                        <a:rPr lang="en-US" sz="1100" u="none" strike="noStrike">
+                          <a:effectLst/>
+                        </a:rPr>
+                        <a:t>[(11, 2), (12, 1)]</a:t>
+                      </a:r>
+                      <a:endParaRPr lang="en-US" sz="1100" b="0" i="0" u="none" strike="noStrike">
+                        <a:solidFill>
+                          <a:srgbClr val="000000"/>
+                        </a:solidFill>
+                        <a:effectLst/>
+                        <a:latin typeface="Calibri" panose="020F0502020204030204" pitchFamily="34" charset="0"/>
+                      </a:endParaRPr>
+                    </a:p>
+                  </a:txBody>
+                  <a:tcPr marL="9525" marR="9525" marT="9525" marB="0" anchor="b"/>
+                </a:tc>
+                <a:tc>
+                  <a:txBody>
+                    <a:bodyPr/>
+                    <a:lstStyle/>
+                    <a:p>
+                      <a:pPr algn="ctr" fontAlgn="b">
+                        <a:buNone/>
+                      </a:pPr>
+                      <a:r>
+                        <a:rPr lang="en-US" sz="1100" u="none" strike="noStrike">
+                          <a:effectLst/>
+                        </a:rPr>
+                        <a:t>2</a:t>
+                      </a:r>
+                      <a:endParaRPr lang="en-US" sz="1100" b="0" i="0" u="none" strike="noStrike">
+                        <a:solidFill>
+                          <a:srgbClr val="000000"/>
+                        </a:solidFill>
+                        <a:effectLst/>
+                        <a:latin typeface="Calibri" panose="020F0502020204030204" pitchFamily="34" charset="0"/>
+                      </a:endParaRPr>
+                    </a:p>
+                  </a:txBody>
+                  <a:tcPr marL="9525" marR="9525" marT="9525" marB="0" anchor="b"/>
+                </a:tc>
+                <a:tc>
+                  <a:txBody>
+                    <a:bodyPr/>
+                    <a:lstStyle/>
+                    <a:p>
+                      <a:pPr algn="ctr" fontAlgn="b">
+                        <a:buNone/>
+                      </a:pPr>
+                      <a:r>
+                        <a:rPr lang="en-US" sz="1100" u="none" strike="noStrike">
+                          <a:effectLst/>
+                        </a:rPr>
+                        <a:t>2.108458</a:t>
+                      </a:r>
+                      <a:endParaRPr lang="en-US" sz="1100" b="0" i="0" u="none" strike="noStrike">
+                        <a:solidFill>
+                          <a:srgbClr val="000000"/>
+                        </a:solidFill>
+                        <a:effectLst/>
+                        <a:latin typeface="Calibri" panose="020F0502020204030204" pitchFamily="34" charset="0"/>
+                      </a:endParaRPr>
+                    </a:p>
+                  </a:txBody>
+                  <a:tcPr marL="9525" marR="9525" marT="9525" marB="0" anchor="b"/>
+                </a:tc>
+                <a:tc>
+                  <a:txBody>
+                    <a:bodyPr/>
+                    <a:lstStyle/>
+                    <a:p>
+                      <a:pPr algn="ctr" fontAlgn="b">
+                        <a:buNone/>
+                      </a:pPr>
+                      <a:r>
+                        <a:rPr lang="en-US" sz="1100" u="none" strike="noStrike" dirty="0">
+                          <a:effectLst/>
+                        </a:rPr>
+                        <a:t>TA</a:t>
+                      </a:r>
+                      <a:endParaRPr lang="en-US" sz="1100" b="0" i="0" u="none" strike="noStrike" dirty="0">
+                        <a:solidFill>
+                          <a:srgbClr val="000000"/>
+                        </a:solidFill>
+                        <a:effectLst/>
+                        <a:latin typeface="Calibri" panose="020F0502020204030204" pitchFamily="34" charset="0"/>
+                      </a:endParaRPr>
+                    </a:p>
+                  </a:txBody>
+                  <a:tcPr marL="9525" marR="9525" marT="9525" marB="0" anchor="b"/>
+                </a:tc>
+                <a:tc>
+                  <a:txBody>
+                    <a:bodyPr/>
+                    <a:lstStyle/>
+                    <a:p>
+                      <a:pPr algn="ctr" fontAlgn="b">
+                        <a:buNone/>
+                      </a:pPr>
+                      <a:r>
+                        <a:rPr lang="en-US" sz="1100" u="none" strike="noStrike">
+                          <a:effectLst/>
+                        </a:rPr>
+                        <a:t>AT</a:t>
+                      </a:r>
+                      <a:endParaRPr lang="en-US" sz="1100" b="0" i="0" u="none" strike="noStrike">
+                        <a:solidFill>
+                          <a:srgbClr val="000000"/>
+                        </a:solidFill>
+                        <a:effectLst/>
+                        <a:latin typeface="Calibri" panose="020F0502020204030204" pitchFamily="34" charset="0"/>
+                      </a:endParaRPr>
+                    </a:p>
+                  </a:txBody>
+                  <a:tcPr marL="9525" marR="9525" marT="9525" marB="0" anchor="b"/>
+                </a:tc>
+                <a:extLst>
+                  <a:ext uri="{0D108BD9-81ED-4DB2-BD59-A6C34878D82A}">
+                    <a16:rowId xmlns:a16="http://schemas.microsoft.com/office/drawing/2014/main" val="1562759408"/>
+                  </a:ext>
+                </a:extLst>
+              </a:tr>
+              <a:tr h="291174">
+                <a:tc>
+                  <a:txBody>
+                    <a:bodyPr/>
+                    <a:lstStyle/>
+                    <a:p>
+                      <a:pPr algn="l" fontAlgn="b">
+                        <a:buNone/>
+                      </a:pPr>
+                      <a:r>
+                        <a:rPr lang="en-US" sz="1100" u="none" strike="noStrike">
+                          <a:effectLst/>
+                        </a:rPr>
+                        <a:t>[(13, 2), (14, 1)]</a:t>
+                      </a:r>
+                      <a:endParaRPr lang="en-US" sz="1100" b="0" i="0" u="none" strike="noStrike">
+                        <a:solidFill>
+                          <a:srgbClr val="000000"/>
+                        </a:solidFill>
+                        <a:effectLst/>
+                        <a:latin typeface="Calibri" panose="020F0502020204030204" pitchFamily="34" charset="0"/>
+                      </a:endParaRPr>
+                    </a:p>
+                  </a:txBody>
+                  <a:tcPr marL="9525" marR="9525" marT="9525" marB="0" anchor="b"/>
+                </a:tc>
+                <a:tc>
+                  <a:txBody>
+                    <a:bodyPr/>
+                    <a:lstStyle/>
+                    <a:p>
+                      <a:pPr algn="ctr" fontAlgn="b">
+                        <a:buNone/>
+                      </a:pPr>
+                      <a:r>
+                        <a:rPr lang="en-US" sz="1100" u="none" strike="noStrike">
+                          <a:effectLst/>
+                        </a:rPr>
+                        <a:t>2</a:t>
+                      </a:r>
+                      <a:endParaRPr lang="en-US" sz="1100" b="0" i="0" u="none" strike="noStrike">
+                        <a:solidFill>
+                          <a:srgbClr val="000000"/>
+                        </a:solidFill>
+                        <a:effectLst/>
+                        <a:latin typeface="Calibri" panose="020F0502020204030204" pitchFamily="34" charset="0"/>
+                      </a:endParaRPr>
+                    </a:p>
+                  </a:txBody>
+                  <a:tcPr marL="9525" marR="9525" marT="9525" marB="0" anchor="b"/>
+                </a:tc>
+                <a:tc>
+                  <a:txBody>
+                    <a:bodyPr/>
+                    <a:lstStyle/>
+                    <a:p>
+                      <a:pPr algn="ctr" fontAlgn="b">
+                        <a:buNone/>
+                      </a:pPr>
+                      <a:r>
+                        <a:rPr lang="en-US" sz="1100" u="none" strike="noStrike">
+                          <a:effectLst/>
+                        </a:rPr>
+                        <a:t>2.227702</a:t>
+                      </a:r>
+                      <a:endParaRPr lang="en-US" sz="1100" b="0" i="0" u="none" strike="noStrike">
+                        <a:solidFill>
+                          <a:srgbClr val="000000"/>
+                        </a:solidFill>
+                        <a:effectLst/>
+                        <a:latin typeface="Calibri" panose="020F0502020204030204" pitchFamily="34" charset="0"/>
+                      </a:endParaRPr>
+                    </a:p>
+                  </a:txBody>
+                  <a:tcPr marL="9525" marR="9525" marT="9525" marB="0" anchor="b"/>
+                </a:tc>
+                <a:tc>
+                  <a:txBody>
+                    <a:bodyPr/>
+                    <a:lstStyle/>
+                    <a:p>
+                      <a:pPr algn="ctr" fontAlgn="b">
+                        <a:buNone/>
+                      </a:pPr>
+                      <a:r>
+                        <a:rPr lang="en-US" sz="1100" u="none" strike="noStrike" dirty="0">
+                          <a:effectLst/>
+                        </a:rPr>
+                        <a:t>TA</a:t>
+                      </a:r>
+                      <a:endParaRPr lang="en-US" sz="1100" b="0" i="0" u="none" strike="noStrike" dirty="0">
+                        <a:solidFill>
+                          <a:srgbClr val="000000"/>
+                        </a:solidFill>
+                        <a:effectLst/>
+                        <a:latin typeface="Calibri" panose="020F0502020204030204" pitchFamily="34" charset="0"/>
+                      </a:endParaRPr>
+                    </a:p>
+                  </a:txBody>
+                  <a:tcPr marL="9525" marR="9525" marT="9525" marB="0" anchor="b"/>
+                </a:tc>
+                <a:tc>
+                  <a:txBody>
+                    <a:bodyPr/>
+                    <a:lstStyle/>
+                    <a:p>
+                      <a:pPr algn="ctr" fontAlgn="b">
+                        <a:buNone/>
+                      </a:pPr>
+                      <a:r>
+                        <a:rPr lang="en-US" sz="1100" u="none" strike="noStrike">
+                          <a:effectLst/>
+                        </a:rPr>
+                        <a:t>AT</a:t>
+                      </a:r>
+                      <a:endParaRPr lang="en-US" sz="1100" b="0" i="0" u="none" strike="noStrike">
+                        <a:solidFill>
+                          <a:srgbClr val="000000"/>
+                        </a:solidFill>
+                        <a:effectLst/>
+                        <a:latin typeface="Calibri" panose="020F0502020204030204" pitchFamily="34" charset="0"/>
+                      </a:endParaRPr>
+                    </a:p>
+                  </a:txBody>
+                  <a:tcPr marL="9525" marR="9525" marT="9525" marB="0" anchor="b"/>
+                </a:tc>
+                <a:extLst>
+                  <a:ext uri="{0D108BD9-81ED-4DB2-BD59-A6C34878D82A}">
+                    <a16:rowId xmlns:a16="http://schemas.microsoft.com/office/drawing/2014/main" val="3439924083"/>
+                  </a:ext>
+                </a:extLst>
+              </a:tr>
+              <a:tr h="291174">
+                <a:tc>
+                  <a:txBody>
+                    <a:bodyPr/>
+                    <a:lstStyle/>
+                    <a:p>
+                      <a:pPr algn="l" fontAlgn="b">
+                        <a:buNone/>
+                      </a:pPr>
+                      <a:r>
+                        <a:rPr lang="en-US" sz="1100" u="none" strike="noStrike">
+                          <a:effectLst/>
+                        </a:rPr>
+                        <a:t>[(13, 12), (14, 11)]</a:t>
+                      </a:r>
+                      <a:endParaRPr lang="en-US" sz="1100" b="0" i="0" u="none" strike="noStrike">
+                        <a:solidFill>
+                          <a:srgbClr val="000000"/>
+                        </a:solidFill>
+                        <a:effectLst/>
+                        <a:latin typeface="Calibri" panose="020F0502020204030204" pitchFamily="34" charset="0"/>
+                      </a:endParaRPr>
+                    </a:p>
+                  </a:txBody>
+                  <a:tcPr marL="9525" marR="9525" marT="9525" marB="0" anchor="b"/>
+                </a:tc>
+                <a:tc>
+                  <a:txBody>
+                    <a:bodyPr/>
+                    <a:lstStyle/>
+                    <a:p>
+                      <a:pPr algn="ctr" fontAlgn="b">
+                        <a:buNone/>
+                      </a:pPr>
+                      <a:r>
+                        <a:rPr lang="en-US" sz="1100" u="none" strike="noStrike">
+                          <a:effectLst/>
+                        </a:rPr>
+                        <a:t>2</a:t>
+                      </a:r>
+                      <a:endParaRPr lang="en-US" sz="1100" b="0" i="0" u="none" strike="noStrike">
+                        <a:solidFill>
+                          <a:srgbClr val="000000"/>
+                        </a:solidFill>
+                        <a:effectLst/>
+                        <a:latin typeface="Calibri" panose="020F0502020204030204" pitchFamily="34" charset="0"/>
+                      </a:endParaRPr>
+                    </a:p>
+                  </a:txBody>
+                  <a:tcPr marL="9525" marR="9525" marT="9525" marB="0" anchor="b"/>
+                </a:tc>
+                <a:tc>
+                  <a:txBody>
+                    <a:bodyPr/>
+                    <a:lstStyle/>
+                    <a:p>
+                      <a:pPr algn="ctr" fontAlgn="b">
+                        <a:buNone/>
+                      </a:pPr>
+                      <a:r>
+                        <a:rPr lang="en-US" sz="1100" u="none" strike="noStrike">
+                          <a:effectLst/>
+                        </a:rPr>
+                        <a:t>1.545232</a:t>
+                      </a:r>
+                      <a:endParaRPr lang="en-US" sz="1100" b="0" i="0" u="none" strike="noStrike">
+                        <a:solidFill>
+                          <a:srgbClr val="000000"/>
+                        </a:solidFill>
+                        <a:effectLst/>
+                        <a:latin typeface="Calibri" panose="020F0502020204030204" pitchFamily="34" charset="0"/>
+                      </a:endParaRPr>
+                    </a:p>
+                  </a:txBody>
+                  <a:tcPr marL="9525" marR="9525" marT="9525" marB="0" anchor="b"/>
+                </a:tc>
+                <a:tc>
+                  <a:txBody>
+                    <a:bodyPr/>
+                    <a:lstStyle/>
+                    <a:p>
+                      <a:pPr algn="ctr" fontAlgn="b">
+                        <a:buNone/>
+                      </a:pPr>
+                      <a:r>
+                        <a:rPr lang="en-US" sz="1100" u="none" strike="noStrike" dirty="0">
+                          <a:effectLst/>
+                        </a:rPr>
+                        <a:t>TA</a:t>
+                      </a:r>
+                      <a:endParaRPr lang="en-US" sz="1100" b="0" i="0" u="none" strike="noStrike" dirty="0">
+                        <a:solidFill>
+                          <a:srgbClr val="000000"/>
+                        </a:solidFill>
+                        <a:effectLst/>
+                        <a:latin typeface="Calibri" panose="020F0502020204030204" pitchFamily="34" charset="0"/>
+                      </a:endParaRPr>
+                    </a:p>
+                  </a:txBody>
+                  <a:tcPr marL="9525" marR="9525" marT="9525" marB="0" anchor="b"/>
+                </a:tc>
+                <a:tc>
+                  <a:txBody>
+                    <a:bodyPr/>
+                    <a:lstStyle/>
+                    <a:p>
+                      <a:pPr algn="ctr" fontAlgn="b">
+                        <a:buNone/>
+                      </a:pPr>
+                      <a:r>
+                        <a:rPr lang="en-US" sz="1100" u="none" strike="noStrike">
+                          <a:effectLst/>
+                        </a:rPr>
+                        <a:t>AT</a:t>
+                      </a:r>
+                      <a:endParaRPr lang="en-US" sz="1100" b="0" i="0" u="none" strike="noStrike">
+                        <a:solidFill>
+                          <a:srgbClr val="000000"/>
+                        </a:solidFill>
+                        <a:effectLst/>
+                        <a:latin typeface="Calibri" panose="020F0502020204030204" pitchFamily="34" charset="0"/>
+                      </a:endParaRPr>
+                    </a:p>
+                  </a:txBody>
+                  <a:tcPr marL="9525" marR="9525" marT="9525" marB="0" anchor="b"/>
+                </a:tc>
+                <a:extLst>
+                  <a:ext uri="{0D108BD9-81ED-4DB2-BD59-A6C34878D82A}">
+                    <a16:rowId xmlns:a16="http://schemas.microsoft.com/office/drawing/2014/main" val="1746666785"/>
+                  </a:ext>
+                </a:extLst>
+              </a:tr>
+              <a:tr h="291174">
+                <a:tc>
+                  <a:txBody>
+                    <a:bodyPr/>
+                    <a:lstStyle/>
+                    <a:p>
+                      <a:pPr algn="l" fontAlgn="b">
+                        <a:buNone/>
+                      </a:pPr>
+                      <a:r>
+                        <a:rPr lang="en-US" sz="1100" u="none" strike="noStrike">
+                          <a:effectLst/>
+                        </a:rPr>
+                        <a:t>[(20, 7), (21, 6)]</a:t>
+                      </a:r>
+                      <a:endParaRPr lang="en-US" sz="1100" b="0" i="0" u="none" strike="noStrike">
+                        <a:solidFill>
+                          <a:srgbClr val="000000"/>
+                        </a:solidFill>
+                        <a:effectLst/>
+                        <a:latin typeface="Calibri" panose="020F0502020204030204" pitchFamily="34" charset="0"/>
+                      </a:endParaRPr>
+                    </a:p>
+                  </a:txBody>
+                  <a:tcPr marL="9525" marR="9525" marT="9525" marB="0" anchor="b"/>
+                </a:tc>
+                <a:tc>
+                  <a:txBody>
+                    <a:bodyPr/>
+                    <a:lstStyle/>
+                    <a:p>
+                      <a:pPr algn="ctr" fontAlgn="b">
+                        <a:buNone/>
+                      </a:pPr>
+                      <a:r>
+                        <a:rPr lang="en-US" sz="1100" u="none" strike="noStrike">
+                          <a:effectLst/>
+                        </a:rPr>
+                        <a:t>2</a:t>
+                      </a:r>
+                      <a:endParaRPr lang="en-US" sz="1100" b="0" i="0" u="none" strike="noStrike">
+                        <a:solidFill>
+                          <a:srgbClr val="000000"/>
+                        </a:solidFill>
+                        <a:effectLst/>
+                        <a:latin typeface="Calibri" panose="020F0502020204030204" pitchFamily="34" charset="0"/>
+                      </a:endParaRPr>
+                    </a:p>
+                  </a:txBody>
+                  <a:tcPr marL="9525" marR="9525" marT="9525" marB="0" anchor="b"/>
+                </a:tc>
+                <a:tc>
+                  <a:txBody>
+                    <a:bodyPr/>
+                    <a:lstStyle/>
+                    <a:p>
+                      <a:pPr algn="ctr" fontAlgn="b">
+                        <a:buNone/>
+                      </a:pPr>
+                      <a:r>
+                        <a:rPr lang="en-US" sz="1100" u="none" strike="noStrike">
+                          <a:effectLst/>
+                        </a:rPr>
+                        <a:t>1.204598</a:t>
+                      </a:r>
+                      <a:endParaRPr lang="en-US" sz="1100" b="0" i="0" u="none" strike="noStrike">
+                        <a:solidFill>
+                          <a:srgbClr val="000000"/>
+                        </a:solidFill>
+                        <a:effectLst/>
+                        <a:latin typeface="Calibri" panose="020F0502020204030204" pitchFamily="34" charset="0"/>
+                      </a:endParaRPr>
+                    </a:p>
+                  </a:txBody>
+                  <a:tcPr marL="9525" marR="9525" marT="9525" marB="0" anchor="b"/>
+                </a:tc>
+                <a:tc>
+                  <a:txBody>
+                    <a:bodyPr/>
+                    <a:lstStyle/>
+                    <a:p>
+                      <a:pPr algn="ctr" fontAlgn="b">
+                        <a:buNone/>
+                      </a:pPr>
+                      <a:r>
+                        <a:rPr lang="en-US" sz="1100" u="none" strike="noStrike" dirty="0">
+                          <a:effectLst/>
+                        </a:rPr>
+                        <a:t>CG</a:t>
+                      </a:r>
+                      <a:endParaRPr lang="en-US" sz="1100" b="0" i="0" u="none" strike="noStrike" dirty="0">
+                        <a:solidFill>
+                          <a:srgbClr val="000000"/>
+                        </a:solidFill>
+                        <a:effectLst/>
+                        <a:latin typeface="Calibri" panose="020F0502020204030204" pitchFamily="34" charset="0"/>
+                      </a:endParaRPr>
+                    </a:p>
+                  </a:txBody>
+                  <a:tcPr marL="9525" marR="9525" marT="9525" marB="0" anchor="b"/>
+                </a:tc>
+                <a:tc>
+                  <a:txBody>
+                    <a:bodyPr/>
+                    <a:lstStyle/>
+                    <a:p>
+                      <a:pPr algn="ctr" fontAlgn="b">
+                        <a:buNone/>
+                      </a:pPr>
+                      <a:r>
+                        <a:rPr lang="en-US" sz="1100" u="none" strike="noStrike">
+                          <a:effectLst/>
+                        </a:rPr>
+                        <a:t>GC</a:t>
+                      </a:r>
+                      <a:endParaRPr lang="en-US" sz="1100" b="0" i="0" u="none" strike="noStrike">
+                        <a:solidFill>
+                          <a:srgbClr val="000000"/>
+                        </a:solidFill>
+                        <a:effectLst/>
+                        <a:latin typeface="Calibri" panose="020F0502020204030204" pitchFamily="34" charset="0"/>
+                      </a:endParaRPr>
+                    </a:p>
+                  </a:txBody>
+                  <a:tcPr marL="9525" marR="9525" marT="9525" marB="0" anchor="b"/>
+                </a:tc>
+                <a:extLst>
+                  <a:ext uri="{0D108BD9-81ED-4DB2-BD59-A6C34878D82A}">
+                    <a16:rowId xmlns:a16="http://schemas.microsoft.com/office/drawing/2014/main" val="2485462789"/>
+                  </a:ext>
+                </a:extLst>
+              </a:tr>
+              <a:tr h="291174">
+                <a:tc>
+                  <a:txBody>
+                    <a:bodyPr/>
+                    <a:lstStyle/>
+                    <a:p>
+                      <a:pPr algn="l" fontAlgn="b">
+                        <a:buNone/>
+                      </a:pPr>
+                      <a:r>
+                        <a:rPr lang="en-US" sz="1100" u="none" strike="noStrike">
+                          <a:effectLst/>
+                        </a:rPr>
+                        <a:t>[(22, 2), (23, 1)]</a:t>
+                      </a:r>
+                      <a:endParaRPr lang="en-US" sz="1100" b="0" i="0" u="none" strike="noStrike">
+                        <a:solidFill>
+                          <a:srgbClr val="000000"/>
+                        </a:solidFill>
+                        <a:effectLst/>
+                        <a:latin typeface="Calibri" panose="020F0502020204030204" pitchFamily="34" charset="0"/>
+                      </a:endParaRPr>
+                    </a:p>
+                  </a:txBody>
+                  <a:tcPr marL="9525" marR="9525" marT="9525" marB="0" anchor="b"/>
+                </a:tc>
+                <a:tc>
+                  <a:txBody>
+                    <a:bodyPr/>
+                    <a:lstStyle/>
+                    <a:p>
+                      <a:pPr algn="ctr" fontAlgn="b">
+                        <a:buNone/>
+                      </a:pPr>
+                      <a:r>
+                        <a:rPr lang="en-US" sz="1100" u="none" strike="noStrike">
+                          <a:effectLst/>
+                        </a:rPr>
+                        <a:t>2</a:t>
+                      </a:r>
+                      <a:endParaRPr lang="en-US" sz="1100" b="0" i="0" u="none" strike="noStrike">
+                        <a:solidFill>
+                          <a:srgbClr val="000000"/>
+                        </a:solidFill>
+                        <a:effectLst/>
+                        <a:latin typeface="Calibri" panose="020F0502020204030204" pitchFamily="34" charset="0"/>
+                      </a:endParaRPr>
+                    </a:p>
+                  </a:txBody>
+                  <a:tcPr marL="9525" marR="9525" marT="9525" marB="0" anchor="b"/>
+                </a:tc>
+                <a:tc>
+                  <a:txBody>
+                    <a:bodyPr/>
+                    <a:lstStyle/>
+                    <a:p>
+                      <a:pPr algn="ctr" fontAlgn="b">
+                        <a:buNone/>
+                      </a:pPr>
+                      <a:r>
+                        <a:rPr lang="en-US" sz="1100" u="none" strike="noStrike">
+                          <a:effectLst/>
+                        </a:rPr>
+                        <a:t>3.649394</a:t>
+                      </a:r>
+                      <a:endParaRPr lang="en-US" sz="1100" b="0" i="0" u="none" strike="noStrike">
+                        <a:solidFill>
+                          <a:srgbClr val="000000"/>
+                        </a:solidFill>
+                        <a:effectLst/>
+                        <a:latin typeface="Calibri" panose="020F0502020204030204" pitchFamily="34" charset="0"/>
+                      </a:endParaRPr>
+                    </a:p>
+                  </a:txBody>
+                  <a:tcPr marL="9525" marR="9525" marT="9525" marB="0" anchor="b"/>
+                </a:tc>
+                <a:tc>
+                  <a:txBody>
+                    <a:bodyPr/>
+                    <a:lstStyle/>
+                    <a:p>
+                      <a:pPr algn="ctr" fontAlgn="b">
+                        <a:buNone/>
+                      </a:pPr>
+                      <a:r>
+                        <a:rPr lang="en-US" sz="1100" u="none" strike="noStrike" dirty="0">
+                          <a:effectLst/>
+                        </a:rPr>
+                        <a:t>TA</a:t>
+                      </a:r>
+                      <a:endParaRPr lang="en-US" sz="1100" b="0" i="0" u="none" strike="noStrike" dirty="0">
+                        <a:solidFill>
+                          <a:srgbClr val="000000"/>
+                        </a:solidFill>
+                        <a:effectLst/>
+                        <a:latin typeface="Calibri" panose="020F0502020204030204" pitchFamily="34" charset="0"/>
+                      </a:endParaRPr>
+                    </a:p>
+                  </a:txBody>
+                  <a:tcPr marL="9525" marR="9525" marT="9525" marB="0" anchor="b"/>
+                </a:tc>
+                <a:tc>
+                  <a:txBody>
+                    <a:bodyPr/>
+                    <a:lstStyle/>
+                    <a:p>
+                      <a:pPr algn="ctr" fontAlgn="b">
+                        <a:buNone/>
+                      </a:pPr>
+                      <a:r>
+                        <a:rPr lang="en-US" sz="1100" u="none" strike="noStrike">
+                          <a:effectLst/>
+                        </a:rPr>
+                        <a:t>AT</a:t>
+                      </a:r>
+                      <a:endParaRPr lang="en-US" sz="1100" b="0" i="0" u="none" strike="noStrike">
+                        <a:solidFill>
+                          <a:srgbClr val="000000"/>
+                        </a:solidFill>
+                        <a:effectLst/>
+                        <a:latin typeface="Calibri" panose="020F0502020204030204" pitchFamily="34" charset="0"/>
+                      </a:endParaRPr>
+                    </a:p>
+                  </a:txBody>
+                  <a:tcPr marL="9525" marR="9525" marT="9525" marB="0" anchor="b"/>
+                </a:tc>
+                <a:extLst>
+                  <a:ext uri="{0D108BD9-81ED-4DB2-BD59-A6C34878D82A}">
+                    <a16:rowId xmlns:a16="http://schemas.microsoft.com/office/drawing/2014/main" val="1997817292"/>
+                  </a:ext>
+                </a:extLst>
+              </a:tr>
+              <a:tr h="291174">
+                <a:tc>
+                  <a:txBody>
+                    <a:bodyPr/>
+                    <a:lstStyle/>
+                    <a:p>
+                      <a:pPr algn="l" fontAlgn="b">
+                        <a:buNone/>
+                      </a:pPr>
+                      <a:r>
+                        <a:rPr lang="en-US" sz="1100" u="none" strike="noStrike">
+                          <a:effectLst/>
+                        </a:rPr>
+                        <a:t>[(22, 12), (23, 11)]</a:t>
+                      </a:r>
+                      <a:endParaRPr lang="en-US" sz="1100" b="0" i="0" u="none" strike="noStrike">
+                        <a:solidFill>
+                          <a:srgbClr val="000000"/>
+                        </a:solidFill>
+                        <a:effectLst/>
+                        <a:latin typeface="Calibri" panose="020F0502020204030204" pitchFamily="34" charset="0"/>
+                      </a:endParaRPr>
+                    </a:p>
+                  </a:txBody>
+                  <a:tcPr marL="9525" marR="9525" marT="9525" marB="0" anchor="b"/>
+                </a:tc>
+                <a:tc>
+                  <a:txBody>
+                    <a:bodyPr/>
+                    <a:lstStyle/>
+                    <a:p>
+                      <a:pPr algn="ctr" fontAlgn="b">
+                        <a:buNone/>
+                      </a:pPr>
+                      <a:r>
+                        <a:rPr lang="en-US" sz="1100" u="none" strike="noStrike">
+                          <a:effectLst/>
+                        </a:rPr>
+                        <a:t>2</a:t>
+                      </a:r>
+                      <a:endParaRPr lang="en-US" sz="1100" b="0" i="0" u="none" strike="noStrike">
+                        <a:solidFill>
+                          <a:srgbClr val="000000"/>
+                        </a:solidFill>
+                        <a:effectLst/>
+                        <a:latin typeface="Calibri" panose="020F0502020204030204" pitchFamily="34" charset="0"/>
+                      </a:endParaRPr>
+                    </a:p>
+                  </a:txBody>
+                  <a:tcPr marL="9525" marR="9525" marT="9525" marB="0" anchor="b"/>
+                </a:tc>
+                <a:tc>
+                  <a:txBody>
+                    <a:bodyPr/>
+                    <a:lstStyle/>
+                    <a:p>
+                      <a:pPr algn="ctr" fontAlgn="b">
+                        <a:buNone/>
+                      </a:pPr>
+                      <a:r>
+                        <a:rPr lang="en-US" sz="1100" u="none" strike="noStrike">
+                          <a:effectLst/>
+                        </a:rPr>
+                        <a:t>2.457249</a:t>
+                      </a:r>
+                      <a:endParaRPr lang="en-US" sz="1100" b="0" i="0" u="none" strike="noStrike">
+                        <a:solidFill>
+                          <a:srgbClr val="000000"/>
+                        </a:solidFill>
+                        <a:effectLst/>
+                        <a:latin typeface="Calibri" panose="020F0502020204030204" pitchFamily="34" charset="0"/>
+                      </a:endParaRPr>
+                    </a:p>
+                  </a:txBody>
+                  <a:tcPr marL="9525" marR="9525" marT="9525" marB="0" anchor="b"/>
+                </a:tc>
+                <a:tc>
+                  <a:txBody>
+                    <a:bodyPr/>
+                    <a:lstStyle/>
+                    <a:p>
+                      <a:pPr algn="ctr" fontAlgn="b">
+                        <a:buNone/>
+                      </a:pPr>
+                      <a:r>
+                        <a:rPr lang="en-US" sz="1100" u="none" strike="noStrike">
+                          <a:effectLst/>
+                        </a:rPr>
+                        <a:t>TA</a:t>
+                      </a:r>
+                      <a:endParaRPr lang="en-US" sz="1100" b="0" i="0" u="none" strike="noStrike">
+                        <a:solidFill>
+                          <a:srgbClr val="000000"/>
+                        </a:solidFill>
+                        <a:effectLst/>
+                        <a:latin typeface="Calibri" panose="020F0502020204030204" pitchFamily="34" charset="0"/>
+                      </a:endParaRPr>
+                    </a:p>
+                  </a:txBody>
+                  <a:tcPr marL="9525" marR="9525" marT="9525" marB="0" anchor="b"/>
+                </a:tc>
+                <a:tc>
+                  <a:txBody>
+                    <a:bodyPr/>
+                    <a:lstStyle/>
+                    <a:p>
+                      <a:pPr algn="ctr" fontAlgn="b">
+                        <a:buNone/>
+                      </a:pPr>
+                      <a:r>
+                        <a:rPr lang="en-US" sz="1100" u="none" strike="noStrike" dirty="0">
+                          <a:effectLst/>
+                        </a:rPr>
+                        <a:t>AT</a:t>
+                      </a:r>
+                      <a:endParaRPr lang="en-US" sz="1100" b="0" i="0" u="none" strike="noStrike" dirty="0">
+                        <a:solidFill>
+                          <a:srgbClr val="000000"/>
+                        </a:solidFill>
+                        <a:effectLst/>
+                        <a:latin typeface="Calibri" panose="020F0502020204030204" pitchFamily="34" charset="0"/>
+                      </a:endParaRPr>
+                    </a:p>
+                  </a:txBody>
+                  <a:tcPr marL="9525" marR="9525" marT="9525" marB="0" anchor="b"/>
+                </a:tc>
+                <a:extLst>
+                  <a:ext uri="{0D108BD9-81ED-4DB2-BD59-A6C34878D82A}">
+                    <a16:rowId xmlns:a16="http://schemas.microsoft.com/office/drawing/2014/main" val="961361615"/>
+                  </a:ext>
+                </a:extLst>
+              </a:tr>
+              <a:tr h="291174">
+                <a:tc>
+                  <a:txBody>
+                    <a:bodyPr/>
+                    <a:lstStyle/>
+                    <a:p>
+                      <a:pPr algn="l" fontAlgn="b">
+                        <a:buNone/>
+                      </a:pPr>
+                      <a:r>
+                        <a:rPr lang="en-US" sz="1100" u="none" strike="noStrike">
+                          <a:effectLst/>
+                        </a:rPr>
+                        <a:t>[(22, 14), (23, 13)]</a:t>
+                      </a:r>
+                      <a:endParaRPr lang="en-US" sz="1100" b="0" i="0" u="none" strike="noStrike">
+                        <a:solidFill>
+                          <a:srgbClr val="000000"/>
+                        </a:solidFill>
+                        <a:effectLst/>
+                        <a:latin typeface="Calibri" panose="020F0502020204030204" pitchFamily="34" charset="0"/>
+                      </a:endParaRPr>
+                    </a:p>
+                  </a:txBody>
+                  <a:tcPr marL="9525" marR="9525" marT="9525" marB="0" anchor="b"/>
+                </a:tc>
+                <a:tc>
+                  <a:txBody>
+                    <a:bodyPr/>
+                    <a:lstStyle/>
+                    <a:p>
+                      <a:pPr algn="ctr" fontAlgn="b">
+                        <a:buNone/>
+                      </a:pPr>
+                      <a:r>
+                        <a:rPr lang="en-US" sz="1100" u="none" strike="noStrike">
+                          <a:effectLst/>
+                        </a:rPr>
+                        <a:t>2</a:t>
+                      </a:r>
+                      <a:endParaRPr lang="en-US" sz="1100" b="0" i="0" u="none" strike="noStrike">
+                        <a:solidFill>
+                          <a:srgbClr val="000000"/>
+                        </a:solidFill>
+                        <a:effectLst/>
+                        <a:latin typeface="Calibri" panose="020F0502020204030204" pitchFamily="34" charset="0"/>
+                      </a:endParaRPr>
+                    </a:p>
+                  </a:txBody>
+                  <a:tcPr marL="9525" marR="9525" marT="9525" marB="0" anchor="b"/>
+                </a:tc>
+                <a:tc>
+                  <a:txBody>
+                    <a:bodyPr/>
+                    <a:lstStyle/>
+                    <a:p>
+                      <a:pPr algn="ctr" fontAlgn="b">
+                        <a:buNone/>
+                      </a:pPr>
+                      <a:r>
+                        <a:rPr lang="en-US" sz="1100" u="none" strike="noStrike">
+                          <a:effectLst/>
+                        </a:rPr>
+                        <a:t>2.365965</a:t>
+                      </a:r>
+                      <a:endParaRPr lang="en-US" sz="1100" b="0" i="0" u="none" strike="noStrike">
+                        <a:solidFill>
+                          <a:srgbClr val="000000"/>
+                        </a:solidFill>
+                        <a:effectLst/>
+                        <a:latin typeface="Calibri" panose="020F0502020204030204" pitchFamily="34" charset="0"/>
+                      </a:endParaRPr>
+                    </a:p>
+                  </a:txBody>
+                  <a:tcPr marL="9525" marR="9525" marT="9525" marB="0" anchor="b"/>
+                </a:tc>
+                <a:tc>
+                  <a:txBody>
+                    <a:bodyPr/>
+                    <a:lstStyle/>
+                    <a:p>
+                      <a:pPr algn="ctr" fontAlgn="b">
+                        <a:buNone/>
+                      </a:pPr>
+                      <a:r>
+                        <a:rPr lang="en-US" sz="1100" u="none" strike="noStrike">
+                          <a:effectLst/>
+                        </a:rPr>
+                        <a:t>TA</a:t>
+                      </a:r>
+                      <a:endParaRPr lang="en-US" sz="1100" b="0" i="0" u="none" strike="noStrike">
+                        <a:solidFill>
+                          <a:srgbClr val="000000"/>
+                        </a:solidFill>
+                        <a:effectLst/>
+                        <a:latin typeface="Calibri" panose="020F0502020204030204" pitchFamily="34" charset="0"/>
+                      </a:endParaRPr>
+                    </a:p>
+                  </a:txBody>
+                  <a:tcPr marL="9525" marR="9525" marT="9525" marB="0" anchor="b"/>
+                </a:tc>
+                <a:tc>
+                  <a:txBody>
+                    <a:bodyPr/>
+                    <a:lstStyle/>
+                    <a:p>
+                      <a:pPr algn="ctr" fontAlgn="b">
+                        <a:buNone/>
+                      </a:pPr>
+                      <a:r>
+                        <a:rPr lang="en-US" sz="1100" u="none" strike="noStrike" dirty="0">
+                          <a:effectLst/>
+                        </a:rPr>
+                        <a:t>AT</a:t>
+                      </a:r>
+                      <a:endParaRPr lang="en-US" sz="1100" b="0" i="0" u="none" strike="noStrike" dirty="0">
+                        <a:solidFill>
+                          <a:srgbClr val="000000"/>
+                        </a:solidFill>
+                        <a:effectLst/>
+                        <a:latin typeface="Calibri" panose="020F0502020204030204" pitchFamily="34" charset="0"/>
+                      </a:endParaRPr>
+                    </a:p>
+                  </a:txBody>
+                  <a:tcPr marL="9525" marR="9525" marT="9525" marB="0" anchor="b"/>
+                </a:tc>
+                <a:extLst>
+                  <a:ext uri="{0D108BD9-81ED-4DB2-BD59-A6C34878D82A}">
+                    <a16:rowId xmlns:a16="http://schemas.microsoft.com/office/drawing/2014/main" val="161347675"/>
+                  </a:ext>
+                </a:extLst>
+              </a:tr>
+              <a:tr h="291174">
+                <a:tc>
+                  <a:txBody>
+                    <a:bodyPr/>
+                    <a:lstStyle/>
+                    <a:p>
+                      <a:pPr algn="l" fontAlgn="b">
+                        <a:buNone/>
+                      </a:pPr>
+                      <a:endParaRPr lang="en-US" sz="1100" b="0" i="0" u="none" strike="noStrike">
+                        <a:solidFill>
+                          <a:srgbClr val="000000"/>
+                        </a:solidFill>
+                        <a:effectLst/>
+                        <a:latin typeface="Calibri" panose="020F0502020204030204" pitchFamily="34" charset="0"/>
+                      </a:endParaRPr>
+                    </a:p>
+                  </a:txBody>
+                  <a:tcPr marL="9525" marR="9525" marT="9525" marB="0" anchor="b"/>
+                </a:tc>
+                <a:tc>
+                  <a:txBody>
+                    <a:bodyPr/>
+                    <a:lstStyle/>
+                    <a:p>
+                      <a:pPr algn="l" fontAlgn="b">
+                        <a:buNone/>
+                      </a:pPr>
+                      <a:endParaRPr lang="en-US" sz="1100" b="0" i="0" u="none" strike="noStrike">
+                        <a:solidFill>
+                          <a:srgbClr val="000000"/>
+                        </a:solidFill>
+                        <a:effectLst/>
+                        <a:latin typeface="Calibri" panose="020F0502020204030204" pitchFamily="34" charset="0"/>
+                      </a:endParaRPr>
+                    </a:p>
+                  </a:txBody>
+                  <a:tcPr marL="9525" marR="9525" marT="9525" marB="0" anchor="b"/>
+                </a:tc>
+                <a:tc>
+                  <a:txBody>
+                    <a:bodyPr/>
+                    <a:lstStyle/>
+                    <a:p>
+                      <a:pPr algn="l" fontAlgn="b">
+                        <a:buNone/>
+                      </a:pPr>
+                      <a:endParaRPr lang="en-US" sz="1100" b="0" i="0" u="none" strike="noStrike">
+                        <a:solidFill>
+                          <a:srgbClr val="000000"/>
+                        </a:solidFill>
+                        <a:effectLst/>
+                        <a:latin typeface="Calibri" panose="020F0502020204030204" pitchFamily="34" charset="0"/>
+                      </a:endParaRPr>
+                    </a:p>
+                  </a:txBody>
+                  <a:tcPr marL="9525" marR="9525" marT="9525" marB="0" anchor="b"/>
+                </a:tc>
+                <a:tc>
+                  <a:txBody>
+                    <a:bodyPr/>
+                    <a:lstStyle/>
+                    <a:p>
+                      <a:pPr algn="l" fontAlgn="b">
+                        <a:buNone/>
+                      </a:pPr>
+                      <a:endParaRPr lang="en-US" sz="1100" b="0" i="0" u="none" strike="noStrike" dirty="0">
+                        <a:solidFill>
+                          <a:srgbClr val="000000"/>
+                        </a:solidFill>
+                        <a:effectLst/>
+                        <a:latin typeface="Calibri" panose="020F0502020204030204" pitchFamily="34" charset="0"/>
+                      </a:endParaRPr>
+                    </a:p>
+                  </a:txBody>
+                  <a:tcPr marL="9525" marR="9525" marT="9525" marB="0" anchor="b"/>
+                </a:tc>
+                <a:tc>
+                  <a:txBody>
+                    <a:bodyPr/>
+                    <a:lstStyle/>
+                    <a:p>
+                      <a:pPr algn="l" fontAlgn="b">
+                        <a:buNone/>
+                      </a:pPr>
+                      <a:endParaRPr lang="en-US" sz="1100" b="0" i="0" u="none" strike="noStrike" dirty="0">
+                        <a:solidFill>
+                          <a:srgbClr val="000000"/>
+                        </a:solidFill>
+                        <a:effectLst/>
+                        <a:latin typeface="Calibri" panose="020F0502020204030204" pitchFamily="34" charset="0"/>
+                      </a:endParaRPr>
+                    </a:p>
+                  </a:txBody>
+                  <a:tcPr marL="9525" marR="9525" marT="9525" marB="0" anchor="b"/>
+                </a:tc>
+                <a:extLst>
+                  <a:ext uri="{0D108BD9-81ED-4DB2-BD59-A6C34878D82A}">
+                    <a16:rowId xmlns:a16="http://schemas.microsoft.com/office/drawing/2014/main" val="2336631852"/>
+                  </a:ext>
+                </a:extLst>
+              </a:tr>
+            </a:tbl>
+          </a:graphicData>
+        </a:graphic>
+      </p:graphicFrame>
+      <p:pic>
+        <p:nvPicPr>
+          <p:cNvPr id="4" name="Picture 3">
+            <a:extLst>
+              <a:ext uri="{FF2B5EF4-FFF2-40B4-BE49-F238E27FC236}">
+                <a16:creationId xmlns:a16="http://schemas.microsoft.com/office/drawing/2014/main" id="{E008464A-0270-7122-41DA-242BA3EAA677}"/>
+              </a:ext>
+            </a:extLst>
+          </p:cNvPr>
+          <p:cNvPicPr>
+            <a:picLocks noChangeAspect="1"/>
+          </p:cNvPicPr>
+          <p:nvPr/>
+        </p:nvPicPr>
+        <p:blipFill>
+          <a:blip r:embed="rId3"/>
+          <a:stretch>
+            <a:fillRect/>
+          </a:stretch>
+        </p:blipFill>
+        <p:spPr>
+          <a:xfrm>
+            <a:off x="5724739" y="1970530"/>
+            <a:ext cx="6097650" cy="4305257"/>
+          </a:xfrm>
+          <a:prstGeom prst="rect">
+            <a:avLst/>
+          </a:prstGeom>
+        </p:spPr>
+      </p:pic>
+    </p:spTree>
+    <p:extLst>
+      <p:ext uri="{BB962C8B-B14F-4D97-AF65-F5344CB8AC3E}">
+        <p14:creationId xmlns:p14="http://schemas.microsoft.com/office/powerpoint/2010/main" val="3274363939"/>
+      </p:ext>
+    </p:extLst>
+  </p:cSld>
+  <p:clrMapOvr>
+    <a:masterClrMapping/>
+  </p:clrMapOvr>
+</p:sld>
+</file>
+
+<file path=ppt/slides/slide15.xml><?xml version="1.0" encoding="utf-8"?>
+<p:sld xmlns:a="http://schemas.openxmlformats.org/drawingml/2006/main" xmlns:r="http://schemas.openxmlformats.org/officeDocument/2006/relationships" xmlns:p="http://schemas.openxmlformats.org/presentationml/2006/main">
+  <p:cSld>
+    <p:spTree>
+      <p:nvGrpSpPr>
+        <p:cNvPr id="1" name=""/>
+        <p:cNvGrpSpPr/>
+        <p:nvPr/>
+      </p:nvGrpSpPr>
+      <p:grpSpPr>
+        <a:xfrm>
+          <a:off x="0" y="0"/>
+          <a:ext cx="0" cy="0"/>
+          <a:chOff x="0" y="0"/>
+          <a:chExt cx="0" cy="0"/>
+        </a:xfrm>
+      </p:grpSpPr>
+      <p:pic>
+        <p:nvPicPr>
+          <p:cNvPr id="10242" name="Picture 2" descr="LexA repressor dimer bound to its cognate SOS boxes (PDB code 3JSO). (... |  Download Scientific Diagram">
+            <a:extLst>
+              <a:ext uri="{FF2B5EF4-FFF2-40B4-BE49-F238E27FC236}">
+                <a16:creationId xmlns:a16="http://schemas.microsoft.com/office/drawing/2014/main" id="{CC5F115B-ECC5-97A4-5F4B-10DB946DAED3}"/>
+              </a:ext>
+            </a:extLst>
+          </p:cNvPr>
+          <p:cNvPicPr>
+            <a:picLocks noGrp="1" noChangeAspect="1" noChangeArrowheads="1"/>
+          </p:cNvPicPr>
+          <p:nvPr>
+            <p:ph idx="1"/>
+          </p:nvPr>
+        </p:nvPicPr>
+        <p:blipFill>
+          <a:blip r:embed="rId3">
+            <a:extLst>
+              <a:ext uri="{28A0092B-C50C-407E-A947-70E740481C1C}">
+                <a14:useLocalDpi xmlns:a14="http://schemas.microsoft.com/office/drawing/2010/main" val="0"/>
+              </a:ext>
+            </a:extLst>
+          </a:blip>
+          <a:srcRect/>
+          <a:stretch>
+            <a:fillRect/>
+          </a:stretch>
+        </p:blipFill>
+        <p:spPr bwMode="auto">
+          <a:xfrm>
+            <a:off x="686117" y="1068090"/>
+            <a:ext cx="4102100" cy="2794000"/>
+          </a:xfrm>
+          <a:prstGeom prst="rect">
+            <a:avLst/>
+          </a:prstGeom>
+          <a:noFill/>
+          <a:extLst>
+            <a:ext uri="{909E8E84-426E-40DD-AFC4-6F175D3DCCD1}">
+              <a14:hiddenFill xmlns:a14="http://schemas.microsoft.com/office/drawing/2010/main">
+                <a:solidFill>
+                  <a:srgbClr val="FFFFFF"/>
+                </a:solidFill>
+              </a14:hiddenFill>
+            </a:ext>
+          </a:extLst>
+        </p:spPr>
+      </p:pic>
+      <p:sp>
+        <p:nvSpPr>
+          <p:cNvPr id="5" name="TextBox 4">
+            <a:extLst>
+              <a:ext uri="{FF2B5EF4-FFF2-40B4-BE49-F238E27FC236}">
+                <a16:creationId xmlns:a16="http://schemas.microsoft.com/office/drawing/2014/main" id="{DB49F7AF-F7A4-1720-6E52-B4094643EAC4}"/>
+              </a:ext>
+            </a:extLst>
+          </p:cNvPr>
+          <p:cNvSpPr txBox="1"/>
+          <p:nvPr/>
+        </p:nvSpPr>
+        <p:spPr>
+          <a:xfrm>
+            <a:off x="5101272" y="1331367"/>
+            <a:ext cx="6404611" cy="5309146"/>
+          </a:xfrm>
+          <a:prstGeom prst="rect">
+            <a:avLst/>
+          </a:prstGeom>
+          <a:noFill/>
+        </p:spPr>
+        <p:txBody>
+          <a:bodyPr wrap="square" rtlCol="0">
+            <a:spAutoFit/>
+          </a:bodyPr>
+          <a:lstStyle/>
+          <a:p>
+            <a:r>
+              <a:rPr lang="en-US" sz="1500" b="1" i="1" dirty="0"/>
+              <a:t>These all bind as dimers – expect inverted repeats:</a:t>
+            </a:r>
+          </a:p>
+          <a:p>
+            <a:pPr marL="171450" indent="-171450">
+              <a:buFont typeface="Arial" panose="020B0604020202020204" pitchFamily="34" charset="0"/>
+              <a:buChar char="•"/>
+            </a:pPr>
+            <a:endParaRPr lang="en-US" sz="1500" b="1" i="1" dirty="0"/>
+          </a:p>
+          <a:p>
+            <a:pPr marL="171450" indent="-171450">
+              <a:buFont typeface="Arial" panose="020B0604020202020204" pitchFamily="34" charset="0"/>
+              <a:buChar char="•"/>
+            </a:pPr>
+            <a:r>
+              <a:rPr lang="en-US" sz="1500" b="1" dirty="0" err="1"/>
+              <a:t>LexA</a:t>
+            </a:r>
+            <a:r>
+              <a:rPr lang="en-US" sz="1500" dirty="0"/>
+              <a:t> – When damage is detected, </a:t>
+            </a:r>
+            <a:r>
+              <a:rPr lang="en-US" sz="1500" dirty="0" err="1"/>
+              <a:t>LexA</a:t>
+            </a:r>
+            <a:r>
+              <a:rPr lang="en-US" sz="1500" dirty="0"/>
+              <a:t> is destroyed, turning the repair genes "on". </a:t>
+            </a:r>
+          </a:p>
+          <a:p>
+            <a:pPr marL="171450" indent="-171450">
+              <a:buFont typeface="Arial" panose="020B0604020202020204" pitchFamily="34" charset="0"/>
+              <a:buChar char="•"/>
+            </a:pPr>
+            <a:r>
+              <a:rPr lang="en-US" sz="1500" b="1" dirty="0"/>
+              <a:t>FNR</a:t>
+            </a:r>
+            <a:r>
+              <a:rPr lang="en-US" sz="1500" dirty="0"/>
+              <a:t> – Senses oxygen. Helps switch between breathing aerobic and anaerobic</a:t>
+            </a:r>
+          </a:p>
+          <a:p>
+            <a:pPr marL="171450" indent="-171450">
+              <a:buFont typeface="Arial" panose="020B0604020202020204" pitchFamily="34" charset="0"/>
+              <a:buChar char="•"/>
+            </a:pPr>
+            <a:r>
+              <a:rPr lang="en-US" sz="1500" b="1" dirty="0"/>
+              <a:t>CRP</a:t>
+            </a:r>
+            <a:r>
+              <a:rPr lang="en-US" sz="1500" dirty="0"/>
+              <a:t> – activates &gt;100 genes in energy metabolism. If a bacterium runs out of glucose, CRP turns on genes to digest other secondary sugars (like lactose)</a:t>
+            </a:r>
+          </a:p>
+          <a:p>
+            <a:endParaRPr lang="en-US" sz="1500" dirty="0"/>
+          </a:p>
+          <a:p>
+            <a:r>
+              <a:rPr lang="en-US" sz="1500" b="1" i="1" dirty="0"/>
+              <a:t>A stranger case: Fur</a:t>
+            </a:r>
+          </a:p>
+          <a:p>
+            <a:endParaRPr lang="en-US" sz="1500" dirty="0"/>
+          </a:p>
+          <a:p>
+            <a:pPr marL="171450" indent="-171450">
+              <a:buFont typeface="Arial" panose="020B0604020202020204" pitchFamily="34" charset="0"/>
+              <a:buChar char="•"/>
+            </a:pPr>
+            <a:r>
+              <a:rPr lang="en-US" sz="1500" dirty="0"/>
+              <a:t>Ferric Uptake Regulator -- controls how bacteria handle iron</a:t>
+            </a:r>
+          </a:p>
+          <a:p>
+            <a:pPr marL="628650" lvl="1" indent="-171450">
+              <a:buFont typeface="Arial" panose="020B0604020202020204" pitchFamily="34" charset="0"/>
+              <a:buChar char="•"/>
+            </a:pPr>
+            <a:r>
+              <a:rPr lang="en-US" sz="1500" dirty="0"/>
+              <a:t>If a cell absorbs too much iron, Fur binds to DNA to shut down iron-absorbing genes</a:t>
+            </a:r>
+          </a:p>
+          <a:p>
+            <a:pPr marL="171450" indent="-171450">
+              <a:buFont typeface="Arial" panose="020B0604020202020204" pitchFamily="34" charset="0"/>
+              <a:buChar char="•"/>
+            </a:pPr>
+            <a:r>
+              <a:rPr lang="en-US" sz="1500" dirty="0"/>
+              <a:t>For decades, scientists argued about what the Fur motif looked like</a:t>
+            </a:r>
+          </a:p>
+          <a:p>
+            <a:pPr marL="171450" indent="-171450">
+              <a:buFont typeface="Arial" panose="020B0604020202020204" pitchFamily="34" charset="0"/>
+              <a:buChar char="•"/>
+            </a:pPr>
+            <a:r>
+              <a:rPr lang="en-US" sz="1500" dirty="0"/>
+              <a:t>19-bp palindrome model  with one dimer </a:t>
+            </a:r>
+            <a:r>
+              <a:rPr lang="en-US" sz="1500" dirty="0">
+                <a:sym typeface="Wingdings" pitchFamily="2" charset="2"/>
+              </a:rPr>
+              <a:t> subset heptamer inverted repeats (7-1-7)² overlapping internal structure with 21-bp sequence</a:t>
+            </a:r>
+          </a:p>
+          <a:p>
+            <a:pPr marL="171450" indent="-171450">
+              <a:buFont typeface="Arial" panose="020B0604020202020204" pitchFamily="34" charset="0"/>
+              <a:buChar char="•"/>
+            </a:pPr>
+            <a:r>
+              <a:rPr lang="en-US" sz="1500" b="1" dirty="0">
+                <a:sym typeface="Wingdings" pitchFamily="2" charset="2"/>
+              </a:rPr>
+              <a:t>Basically, Fur’s binding site isn’t just a fixed concrete set – need to check for internal subset symmetry too  captures real biological chaos from multiple dimers </a:t>
+            </a:r>
+          </a:p>
+          <a:p>
+            <a:endParaRPr lang="en-US" sz="1200" dirty="0">
+              <a:sym typeface="Wingdings" pitchFamily="2" charset="2"/>
+            </a:endParaRPr>
+          </a:p>
+          <a:p>
+            <a:pPr marL="171450" indent="-171450">
+              <a:buFont typeface="Arial" panose="020B0604020202020204" pitchFamily="34" charset="0"/>
+              <a:buChar char="•"/>
+            </a:pPr>
+            <a:endParaRPr lang="en-US" sz="1200" dirty="0"/>
+          </a:p>
+        </p:txBody>
+      </p:sp>
+      <p:pic>
+        <p:nvPicPr>
+          <p:cNvPr id="7" name="Picture 6">
+            <a:extLst>
+              <a:ext uri="{FF2B5EF4-FFF2-40B4-BE49-F238E27FC236}">
+                <a16:creationId xmlns:a16="http://schemas.microsoft.com/office/drawing/2014/main" id="{EF6B24D4-E8E6-72F9-878D-1EBC7CE35A97}"/>
+              </a:ext>
+            </a:extLst>
+          </p:cNvPr>
+          <p:cNvPicPr>
+            <a:picLocks noChangeAspect="1"/>
+          </p:cNvPicPr>
+          <p:nvPr/>
+        </p:nvPicPr>
+        <p:blipFill>
+          <a:blip r:embed="rId4"/>
+          <a:srcRect b="17782"/>
+          <a:stretch>
+            <a:fillRect/>
+          </a:stretch>
+        </p:blipFill>
+        <p:spPr>
+          <a:xfrm>
+            <a:off x="681990" y="4047620"/>
+            <a:ext cx="4102100" cy="2777212"/>
+          </a:xfrm>
+          <a:prstGeom prst="rect">
+            <a:avLst/>
+          </a:prstGeom>
+        </p:spPr>
+      </p:pic>
+      <p:sp>
+        <p:nvSpPr>
+          <p:cNvPr id="2" name="Title 1">
+            <a:extLst>
+              <a:ext uri="{FF2B5EF4-FFF2-40B4-BE49-F238E27FC236}">
+                <a16:creationId xmlns:a16="http://schemas.microsoft.com/office/drawing/2014/main" id="{CF2091ED-2912-577D-C031-69FA50B3E639}"/>
+              </a:ext>
+            </a:extLst>
+          </p:cNvPr>
+          <p:cNvSpPr>
+            <a:spLocks noGrp="1"/>
+          </p:cNvSpPr>
+          <p:nvPr>
+            <p:ph type="title"/>
+          </p:nvPr>
+        </p:nvSpPr>
+        <p:spPr>
+          <a:xfrm>
+            <a:off x="238760" y="0"/>
+            <a:ext cx="10515600" cy="1325563"/>
+          </a:xfrm>
+        </p:spPr>
+        <p:txBody>
+          <a:bodyPr/>
+          <a:lstStyle/>
+          <a:p>
+            <a:r>
+              <a:rPr lang="en-US" dirty="0" err="1"/>
+              <a:t>CollecTF</a:t>
+            </a:r>
+            <a:r>
+              <a:rPr lang="en-US" dirty="0"/>
+              <a:t> - Experimental test cases</a:t>
+            </a:r>
+          </a:p>
+        </p:txBody>
+      </p:sp>
+    </p:spTree>
+    <p:extLst>
+      <p:ext uri="{BB962C8B-B14F-4D97-AF65-F5344CB8AC3E}">
+        <p14:creationId xmlns:p14="http://schemas.microsoft.com/office/powerpoint/2010/main" val="957486069"/>
+      </p:ext>
+    </p:extLst>
+  </p:cSld>
+  <p:clrMapOvr>
+    <a:masterClrMapping/>
+  </p:clrMapOvr>
+</p:sld>
+</file>
+
+<file path=ppt/slides/slide16.xml><?xml version="1.0" encoding="utf-8"?>
+<p:sld xmlns:a="http://schemas.openxmlformats.org/drawingml/2006/main" xmlns:r="http://schemas.openxmlformats.org/officeDocument/2006/relationships" xmlns:p="http://schemas.openxmlformats.org/presentationml/2006/main">
+  <p:cSld>
+    <p:spTree>
+      <p:nvGrpSpPr>
+        <p:cNvPr id="1" name=""/>
+        <p:cNvGrpSpPr/>
+        <p:nvPr/>
+      </p:nvGrpSpPr>
+      <p:grpSpPr>
+        <a:xfrm>
+          <a:off x="0" y="0"/>
+          <a:ext cx="0" cy="0"/>
+          <a:chOff x="0" y="0"/>
+          <a:chExt cx="0" cy="0"/>
+        </a:xfrm>
+      </p:grpSpPr>
+      <p:sp>
+        <p:nvSpPr>
+          <p:cNvPr id="2" name="Title 1">
+            <a:extLst>
+              <a:ext uri="{FF2B5EF4-FFF2-40B4-BE49-F238E27FC236}">
+                <a16:creationId xmlns:a16="http://schemas.microsoft.com/office/drawing/2014/main" id="{283A9357-FA68-30A4-04A3-E863D9D8752F}"/>
+              </a:ext>
+            </a:extLst>
+          </p:cNvPr>
+          <p:cNvSpPr>
+            <a:spLocks noGrp="1"/>
+          </p:cNvSpPr>
+          <p:nvPr>
+            <p:ph type="title"/>
+          </p:nvPr>
+        </p:nvSpPr>
+        <p:spPr>
+          <a:xfrm>
+            <a:off x="172458" y="0"/>
+            <a:ext cx="10515600" cy="1325563"/>
+          </a:xfrm>
+        </p:spPr>
+        <p:txBody>
+          <a:bodyPr/>
+          <a:lstStyle/>
+          <a:p>
+            <a:r>
+              <a:rPr lang="en-US" dirty="0"/>
+              <a:t>File I/O to process bulk .</a:t>
+            </a:r>
+            <a:r>
+              <a:rPr lang="en-US" dirty="0" err="1"/>
+              <a:t>fas</a:t>
+            </a:r>
+            <a:r>
+              <a:rPr lang="en-US" dirty="0"/>
+              <a:t> files</a:t>
+            </a:r>
+          </a:p>
+        </p:txBody>
+      </p:sp>
+      <p:sp>
+        <p:nvSpPr>
+          <p:cNvPr id="3" name="Content Placeholder 2">
+            <a:extLst>
+              <a:ext uri="{FF2B5EF4-FFF2-40B4-BE49-F238E27FC236}">
+                <a16:creationId xmlns:a16="http://schemas.microsoft.com/office/drawing/2014/main" id="{F0917ABA-ED97-6F33-273C-5E6C87A0E68A}"/>
+              </a:ext>
+            </a:extLst>
+          </p:cNvPr>
+          <p:cNvSpPr>
+            <a:spLocks noGrp="1"/>
+          </p:cNvSpPr>
+          <p:nvPr>
+            <p:ph idx="1"/>
+          </p:nvPr>
+        </p:nvSpPr>
+        <p:spPr>
+          <a:xfrm>
+            <a:off x="327660" y="1258252"/>
+            <a:ext cx="11864340" cy="4341495"/>
+          </a:xfrm>
+        </p:spPr>
+        <p:txBody>
+          <a:bodyPr>
+            <a:normAutofit fontScale="92500" lnSpcReduction="10000"/>
+          </a:bodyPr>
+          <a:lstStyle/>
+          <a:p>
+            <a:r>
+              <a:rPr lang="en-US" dirty="0"/>
+              <a:t>General structure from </a:t>
+            </a:r>
+            <a:r>
+              <a:rPr lang="en-US" dirty="0" err="1"/>
+              <a:t>CollecTF</a:t>
+            </a:r>
+            <a:r>
+              <a:rPr lang="en-US" dirty="0"/>
+              <a:t> &gt;TF_{protein}_{</a:t>
+            </a:r>
+            <a:r>
+              <a:rPr lang="en-US" dirty="0" err="1"/>
+              <a:t>UniProt_ID</a:t>
+            </a:r>
+            <a:r>
+              <a:rPr lang="en-US" dirty="0"/>
+              <a:t>}|genome_{accession} {organism}|start={n}|end={n}|strand={direction}</a:t>
+            </a:r>
+          </a:p>
+          <a:p>
+            <a:r>
+              <a:rPr lang="en-US" dirty="0"/>
+              <a:t>E.g.</a:t>
+            </a:r>
+          </a:p>
+          <a:p>
+            <a:pPr lvl="1"/>
+            <a:r>
+              <a:rPr lang="en-US" dirty="0"/>
+              <a:t>&gt;TF_Fur_P0C6C8|genome_NC_002505.1 Vibrio cholerae O1 biovar El Tor str. N16961|start=...|end=...|strand=...</a:t>
+            </a:r>
+          </a:p>
+          <a:p>
+            <a:r>
+              <a:rPr lang="en-US" dirty="0"/>
+              <a:t>3 keys:</a:t>
+            </a:r>
+          </a:p>
+          <a:p>
+            <a:pPr lvl="1"/>
+            <a:r>
+              <a:rPr lang="en-US" dirty="0"/>
+              <a:t>P0C6C8 — </a:t>
+            </a:r>
+            <a:r>
+              <a:rPr lang="en-US" dirty="0" err="1"/>
+              <a:t>UniProt</a:t>
+            </a:r>
+            <a:r>
+              <a:rPr lang="en-US" dirty="0"/>
+              <a:t> ID (unique protein)</a:t>
+            </a:r>
+          </a:p>
+          <a:p>
+            <a:pPr lvl="1"/>
+            <a:r>
+              <a:rPr lang="en-US" dirty="0"/>
+              <a:t>NC_002505.1 — genome accession (unique assembly)</a:t>
+            </a:r>
+          </a:p>
+          <a:p>
+            <a:pPr lvl="1"/>
+            <a:r>
+              <a:rPr lang="en-US" dirty="0"/>
+              <a:t>Vibrio cholerae O1 biovar El Tor str. N16961 — organism name (human-readable)</a:t>
+            </a:r>
+          </a:p>
+          <a:p>
+            <a:r>
+              <a:rPr lang="en-US" dirty="0"/>
+              <a:t>Settled file structure:</a:t>
+            </a:r>
+          </a:p>
+          <a:p>
+            <a:pPr marL="457200" lvl="1" indent="0">
+              <a:buNone/>
+            </a:pPr>
+            <a:r>
+              <a:rPr lang="en-US" dirty="0" err="1"/>
+              <a:t>CollectTF_FASTA</a:t>
+            </a:r>
+            <a:r>
+              <a:rPr lang="en-US" dirty="0"/>
+              <a:t> / Fur / Vibrio_cholerae_O1_biovar… /  </a:t>
+            </a:r>
+            <a:r>
+              <a:rPr lang="en-US" b="1" dirty="0">
+                <a:solidFill>
+                  <a:srgbClr val="FF0000"/>
+                </a:solidFill>
+              </a:rPr>
+              <a:t>TF_Fur_P0C6C8.fas</a:t>
+            </a:r>
+          </a:p>
+        </p:txBody>
+      </p:sp>
+      <p:pic>
+        <p:nvPicPr>
+          <p:cNvPr id="4" name="Picture 3">
+            <a:extLst>
+              <a:ext uri="{FF2B5EF4-FFF2-40B4-BE49-F238E27FC236}">
+                <a16:creationId xmlns:a16="http://schemas.microsoft.com/office/drawing/2014/main" id="{42E2F353-7073-3CEB-380C-317754A24A89}"/>
+              </a:ext>
+            </a:extLst>
+          </p:cNvPr>
+          <p:cNvPicPr>
+            <a:picLocks noChangeAspect="1"/>
+          </p:cNvPicPr>
+          <p:nvPr/>
+        </p:nvPicPr>
+        <p:blipFill>
+          <a:blip r:embed="rId2"/>
+          <a:stretch>
+            <a:fillRect/>
+          </a:stretch>
+        </p:blipFill>
+        <p:spPr>
+          <a:xfrm>
+            <a:off x="1829584" y="5377543"/>
+            <a:ext cx="7772400" cy="1480457"/>
+          </a:xfrm>
+          <a:prstGeom prst="rect">
+            <a:avLst/>
+          </a:prstGeom>
+        </p:spPr>
+      </p:pic>
+    </p:spTree>
+    <p:extLst>
+      <p:ext uri="{BB962C8B-B14F-4D97-AF65-F5344CB8AC3E}">
+        <p14:creationId xmlns:p14="http://schemas.microsoft.com/office/powerpoint/2010/main" val="1124477176"/>
+      </p:ext>
+    </p:extLst>
+  </p:cSld>
+  <p:clrMapOvr>
+    <a:masterClrMapping/>
+  </p:clrMapOvr>
+</p:sld>
+</file>
+
+<file path=ppt/slides/slide17.xml><?xml version="1.0" encoding="utf-8"?>
+<p:sld xmlns:a="http://schemas.openxmlformats.org/drawingml/2006/main" xmlns:r="http://schemas.openxmlformats.org/officeDocument/2006/relationships" xmlns:p="http://schemas.openxmlformats.org/presentationml/2006/main">
+  <p:cSld>
+    <p:spTree>
+      <p:nvGrpSpPr>
+        <p:cNvPr id="1" name=""/>
+        <p:cNvGrpSpPr/>
+        <p:nvPr/>
+      </p:nvGrpSpPr>
+      <p:grpSpPr>
+        <a:xfrm>
+          <a:off x="0" y="0"/>
+          <a:ext cx="0" cy="0"/>
+          <a:chOff x="0" y="0"/>
+          <a:chExt cx="0" cy="0"/>
+        </a:xfrm>
+      </p:grpSpPr>
+      <p:sp>
+        <p:nvSpPr>
+          <p:cNvPr id="2" name="Title 1">
+            <a:extLst>
+              <a:ext uri="{FF2B5EF4-FFF2-40B4-BE49-F238E27FC236}">
+                <a16:creationId xmlns:a16="http://schemas.microsoft.com/office/drawing/2014/main" id="{DE52FA3C-879E-E1DF-6610-B4D98D2161C6}"/>
+              </a:ext>
+            </a:extLst>
+          </p:cNvPr>
+          <p:cNvSpPr>
+            <a:spLocks noGrp="1"/>
+          </p:cNvSpPr>
+          <p:nvPr>
+            <p:ph type="title"/>
+          </p:nvPr>
+        </p:nvSpPr>
+        <p:spPr>
+          <a:xfrm>
+            <a:off x="327377" y="-126929"/>
+            <a:ext cx="10515600" cy="1325563"/>
+          </a:xfrm>
+        </p:spPr>
+        <p:txBody>
+          <a:bodyPr/>
+          <a:lstStyle/>
+          <a:p>
+            <a:r>
+              <a:rPr lang="en-US" dirty="0"/>
+              <a:t>Initial test case – Staph Q9L4P1 </a:t>
+            </a:r>
+          </a:p>
+        </p:txBody>
+      </p:sp>
+      <p:pic>
+        <p:nvPicPr>
+          <p:cNvPr id="9" name="Picture 8">
+            <a:extLst>
+              <a:ext uri="{FF2B5EF4-FFF2-40B4-BE49-F238E27FC236}">
+                <a16:creationId xmlns:a16="http://schemas.microsoft.com/office/drawing/2014/main" id="{E3D6A368-9916-BDC5-FFE3-BDA6F0DA7010}"/>
+              </a:ext>
+            </a:extLst>
+          </p:cNvPr>
+          <p:cNvPicPr>
+            <a:picLocks noChangeAspect="1"/>
+          </p:cNvPicPr>
+          <p:nvPr/>
+        </p:nvPicPr>
+        <p:blipFill>
+          <a:blip r:embed="rId2"/>
+          <a:stretch>
+            <a:fillRect/>
+          </a:stretch>
+        </p:blipFill>
+        <p:spPr>
+          <a:xfrm>
+            <a:off x="87489" y="3746500"/>
+            <a:ext cx="4356100" cy="3111500"/>
+          </a:xfrm>
+          <a:prstGeom prst="rect">
+            <a:avLst/>
+          </a:prstGeom>
+        </p:spPr>
+      </p:pic>
+      <p:graphicFrame>
+        <p:nvGraphicFramePr>
+          <p:cNvPr id="10" name="Table 9">
+            <a:extLst>
+              <a:ext uri="{FF2B5EF4-FFF2-40B4-BE49-F238E27FC236}">
+                <a16:creationId xmlns:a16="http://schemas.microsoft.com/office/drawing/2014/main" id="{3CFB449E-33EA-B534-25CB-A8567C3F70F2}"/>
+              </a:ext>
+            </a:extLst>
+          </p:cNvPr>
+          <p:cNvGraphicFramePr>
+            <a:graphicFrameLocks noGrp="1"/>
+          </p:cNvGraphicFramePr>
+          <p:nvPr>
+            <p:extLst>
+              <p:ext uri="{D42A27DB-BD31-4B8C-83A1-F6EECF244321}">
+                <p14:modId xmlns:p14="http://schemas.microsoft.com/office/powerpoint/2010/main" val="811485378"/>
+              </p:ext>
+            </p:extLst>
+          </p:nvPr>
+        </p:nvGraphicFramePr>
+        <p:xfrm>
+          <a:off x="5500248" y="1198634"/>
+          <a:ext cx="5772589" cy="558729"/>
+        </p:xfrm>
+        <a:graphic>
+          <a:graphicData uri="http://schemas.openxmlformats.org/drawingml/2006/table">
+            <a:tbl>
+              <a:tblPr>
+                <a:tableStyleId>{5C22544A-7EE6-4342-B048-85BDC9FD1C3A}</a:tableStyleId>
+              </a:tblPr>
+              <a:tblGrid>
+                <a:gridCol w="1643502">
+                  <a:extLst>
+                    <a:ext uri="{9D8B030D-6E8A-4147-A177-3AD203B41FA5}">
+                      <a16:colId xmlns:a16="http://schemas.microsoft.com/office/drawing/2014/main" val="2842497698"/>
+                    </a:ext>
+                  </a:extLst>
+                </a:gridCol>
+                <a:gridCol w="439709">
+                  <a:extLst>
+                    <a:ext uri="{9D8B030D-6E8A-4147-A177-3AD203B41FA5}">
+                      <a16:colId xmlns:a16="http://schemas.microsoft.com/office/drawing/2014/main" val="954903060"/>
+                    </a:ext>
+                  </a:extLst>
+                </a:gridCol>
+                <a:gridCol w="803084">
+                  <a:extLst>
+                    <a:ext uri="{9D8B030D-6E8A-4147-A177-3AD203B41FA5}">
+                      <a16:colId xmlns:a16="http://schemas.microsoft.com/office/drawing/2014/main" val="1037236549"/>
+                    </a:ext>
+                  </a:extLst>
+                </a:gridCol>
+                <a:gridCol w="962098">
+                  <a:extLst>
+                    <a:ext uri="{9D8B030D-6E8A-4147-A177-3AD203B41FA5}">
+                      <a16:colId xmlns:a16="http://schemas.microsoft.com/office/drawing/2014/main" val="3164434672"/>
+                    </a:ext>
+                  </a:extLst>
+                </a:gridCol>
+                <a:gridCol w="962098">
+                  <a:extLst>
+                    <a:ext uri="{9D8B030D-6E8A-4147-A177-3AD203B41FA5}">
+                      <a16:colId xmlns:a16="http://schemas.microsoft.com/office/drawing/2014/main" val="530295114"/>
+                    </a:ext>
+                  </a:extLst>
+                </a:gridCol>
+                <a:gridCol w="962098">
+                  <a:extLst>
+                    <a:ext uri="{9D8B030D-6E8A-4147-A177-3AD203B41FA5}">
+                      <a16:colId xmlns:a16="http://schemas.microsoft.com/office/drawing/2014/main" val="3896224713"/>
+                    </a:ext>
+                  </a:extLst>
+                </a:gridCol>
+              </a:tblGrid>
+              <a:tr h="198836">
+                <a:tc>
+                  <a:txBody>
+                    <a:bodyPr/>
+                    <a:lstStyle/>
+                    <a:p>
+                      <a:pPr algn="ctr" fontAlgn="t">
+                        <a:buNone/>
+                      </a:pPr>
+                      <a:r>
+                        <a:rPr lang="en-US" sz="1100" u="none" strike="noStrike">
+                          <a:effectLst/>
+                        </a:rPr>
+                        <a:t>coords</a:t>
+                      </a:r>
+                      <a:endParaRPr lang="en-US" sz="1100" b="1" i="0" u="none" strike="noStrike">
+                        <a:solidFill>
+                          <a:srgbClr val="000000"/>
+                        </a:solidFill>
+                        <a:effectLst/>
+                        <a:latin typeface="Calibri" panose="020F0502020204030204" pitchFamily="34" charset="0"/>
+                      </a:endParaRPr>
+                    </a:p>
+                  </a:txBody>
+                  <a:tcPr marL="9525" marR="9525" marT="9525" marB="0"/>
+                </a:tc>
+                <a:tc>
+                  <a:txBody>
+                    <a:bodyPr/>
+                    <a:lstStyle/>
+                    <a:p>
+                      <a:pPr algn="ctr" fontAlgn="t">
+                        <a:buNone/>
+                      </a:pPr>
+                      <a:r>
+                        <a:rPr lang="en-US" sz="1100" u="none" strike="noStrike">
+                          <a:effectLst/>
+                        </a:rPr>
+                        <a:t>length</a:t>
+                      </a:r>
+                      <a:endParaRPr lang="en-US" sz="1100" b="1" i="0" u="none" strike="noStrike">
+                        <a:solidFill>
+                          <a:srgbClr val="000000"/>
+                        </a:solidFill>
+                        <a:effectLst/>
+                        <a:latin typeface="Calibri" panose="020F0502020204030204" pitchFamily="34" charset="0"/>
+                      </a:endParaRPr>
+                    </a:p>
+                  </a:txBody>
+                  <a:tcPr marL="9525" marR="9525" marT="9525" marB="0"/>
+                </a:tc>
+                <a:tc>
+                  <a:txBody>
+                    <a:bodyPr/>
+                    <a:lstStyle/>
+                    <a:p>
+                      <a:pPr algn="ctr" fontAlgn="t">
+                        <a:buNone/>
+                      </a:pPr>
+                      <a:r>
+                        <a:rPr lang="en-US" sz="1100" u="none" strike="noStrike">
+                          <a:effectLst/>
+                        </a:rPr>
+                        <a:t>score</a:t>
+                      </a:r>
+                      <a:endParaRPr lang="en-US" sz="1100" b="1" i="0" u="none" strike="noStrike">
+                        <a:solidFill>
+                          <a:srgbClr val="000000"/>
+                        </a:solidFill>
+                        <a:effectLst/>
+                        <a:latin typeface="Calibri" panose="020F0502020204030204" pitchFamily="34" charset="0"/>
+                      </a:endParaRPr>
+                    </a:p>
+                  </a:txBody>
+                  <a:tcPr marL="9525" marR="9525" marT="9525" marB="0"/>
+                </a:tc>
+                <a:tc>
+                  <a:txBody>
+                    <a:bodyPr/>
+                    <a:lstStyle/>
+                    <a:p>
+                      <a:pPr algn="ctr" fontAlgn="t">
+                        <a:buNone/>
+                      </a:pPr>
+                      <a:r>
+                        <a:rPr lang="en-US" sz="1100" u="none" strike="noStrike">
+                          <a:effectLst/>
+                        </a:rPr>
+                        <a:t>group1</a:t>
+                      </a:r>
+                      <a:endParaRPr lang="en-US" sz="1100" b="1" i="0" u="none" strike="noStrike">
+                        <a:solidFill>
+                          <a:srgbClr val="000000"/>
+                        </a:solidFill>
+                        <a:effectLst/>
+                        <a:latin typeface="Calibri" panose="020F0502020204030204" pitchFamily="34" charset="0"/>
+                      </a:endParaRPr>
+                    </a:p>
+                  </a:txBody>
+                  <a:tcPr marL="9525" marR="9525" marT="9525" marB="0"/>
+                </a:tc>
+                <a:tc>
+                  <a:txBody>
+                    <a:bodyPr/>
+                    <a:lstStyle/>
+                    <a:p>
+                      <a:pPr algn="ctr" fontAlgn="t">
+                        <a:buNone/>
+                      </a:pPr>
+                      <a:r>
+                        <a:rPr lang="en-US" sz="1100" u="none" strike="noStrike">
+                          <a:effectLst/>
+                        </a:rPr>
+                        <a:t>group2</a:t>
+                      </a:r>
+                      <a:endParaRPr lang="en-US" sz="1100" b="1" i="0" u="none" strike="noStrike">
+                        <a:solidFill>
+                          <a:srgbClr val="000000"/>
+                        </a:solidFill>
+                        <a:effectLst/>
+                        <a:latin typeface="Calibri" panose="020F0502020204030204" pitchFamily="34" charset="0"/>
+                      </a:endParaRPr>
+                    </a:p>
+                  </a:txBody>
+                  <a:tcPr marL="9525" marR="9525" marT="9525" marB="0"/>
+                </a:tc>
+                <a:tc>
+                  <a:txBody>
+                    <a:bodyPr/>
+                    <a:lstStyle/>
+                    <a:p>
+                      <a:pPr algn="ctr" fontAlgn="t">
+                        <a:buNone/>
+                      </a:pPr>
+                      <a:r>
+                        <a:rPr lang="en-US" sz="1100" u="none" strike="noStrike">
+                          <a:effectLst/>
+                        </a:rPr>
+                        <a:t>p_value</a:t>
+                      </a:r>
+                      <a:endParaRPr lang="en-US" sz="1100" b="1" i="0" u="none" strike="noStrike">
+                        <a:solidFill>
+                          <a:srgbClr val="000000"/>
+                        </a:solidFill>
+                        <a:effectLst/>
+                        <a:latin typeface="Calibri" panose="020F0502020204030204" pitchFamily="34" charset="0"/>
+                      </a:endParaRPr>
+                    </a:p>
+                  </a:txBody>
+                  <a:tcPr marL="9525" marR="9525" marT="9525" marB="0"/>
+                </a:tc>
+                <a:extLst>
+                  <a:ext uri="{0D108BD9-81ED-4DB2-BD59-A6C34878D82A}">
+                    <a16:rowId xmlns:a16="http://schemas.microsoft.com/office/drawing/2014/main" val="4111213703"/>
+                  </a:ext>
+                </a:extLst>
+              </a:tr>
+              <a:tr h="359893">
+                <a:tc>
+                  <a:txBody>
+                    <a:bodyPr/>
+                    <a:lstStyle/>
+                    <a:p>
+                      <a:pPr algn="l" fontAlgn="b">
+                        <a:buNone/>
+                      </a:pPr>
+                      <a:r>
+                        <a:rPr lang="en-US" sz="1100" u="none" strike="noStrike" dirty="0">
+                          <a:effectLst/>
+                        </a:rPr>
+                        <a:t>[(8, 5), (9, 4), (10, 3), (11, 2), (12, 1)]</a:t>
+                      </a:r>
+                      <a:endParaRPr lang="en-US" sz="1100" b="0" i="0" u="none" strike="noStrike" dirty="0">
+                        <a:solidFill>
+                          <a:srgbClr val="000000"/>
+                        </a:solidFill>
+                        <a:effectLst/>
+                        <a:latin typeface="Calibri" panose="020F0502020204030204" pitchFamily="34" charset="0"/>
+                      </a:endParaRPr>
+                    </a:p>
+                  </a:txBody>
+                  <a:tcPr marL="9525" marR="9525" marT="9525" marB="0" anchor="b"/>
+                </a:tc>
+                <a:tc>
+                  <a:txBody>
+                    <a:bodyPr/>
+                    <a:lstStyle/>
+                    <a:p>
+                      <a:pPr algn="r" fontAlgn="b">
+                        <a:buNone/>
+                      </a:pPr>
+                      <a:r>
+                        <a:rPr lang="en-US" sz="1100" u="none" strike="noStrike" dirty="0">
+                          <a:effectLst/>
+                        </a:rPr>
+                        <a:t>5</a:t>
+                      </a:r>
+                      <a:endParaRPr lang="en-US" sz="1100" b="0" i="0" u="none" strike="noStrike" dirty="0">
+                        <a:solidFill>
+                          <a:srgbClr val="000000"/>
+                        </a:solidFill>
+                        <a:effectLst/>
+                        <a:latin typeface="Calibri" panose="020F0502020204030204" pitchFamily="34" charset="0"/>
+                      </a:endParaRPr>
+                    </a:p>
+                  </a:txBody>
+                  <a:tcPr marL="9525" marR="9525" marT="9525" marB="0" anchor="b"/>
+                </a:tc>
+                <a:tc>
+                  <a:txBody>
+                    <a:bodyPr/>
+                    <a:lstStyle/>
+                    <a:p>
+                      <a:pPr algn="r" fontAlgn="b">
+                        <a:buNone/>
+                      </a:pPr>
+                      <a:r>
+                        <a:rPr lang="en-US" sz="1100" u="none" strike="noStrike">
+                          <a:effectLst/>
+                        </a:rPr>
+                        <a:t>7.930041</a:t>
+                      </a:r>
+                      <a:endParaRPr lang="en-US" sz="1100" b="0" i="0" u="none" strike="noStrike">
+                        <a:solidFill>
+                          <a:srgbClr val="000000"/>
+                        </a:solidFill>
+                        <a:effectLst/>
+                        <a:latin typeface="Calibri" panose="020F0502020204030204" pitchFamily="34" charset="0"/>
+                      </a:endParaRPr>
+                    </a:p>
+                  </a:txBody>
+                  <a:tcPr marL="9525" marR="9525" marT="9525" marB="0" anchor="b"/>
+                </a:tc>
+                <a:tc>
+                  <a:txBody>
+                    <a:bodyPr/>
+                    <a:lstStyle/>
+                    <a:p>
+                      <a:pPr algn="l" fontAlgn="b">
+                        <a:buNone/>
+                      </a:pPr>
+                      <a:r>
+                        <a:rPr lang="en-US" sz="1100" u="none" strike="noStrike" dirty="0">
+                          <a:effectLst/>
+                        </a:rPr>
+                        <a:t>TGTTC</a:t>
+                      </a:r>
+                      <a:endParaRPr lang="en-US" sz="1100" b="0" i="0" u="none" strike="noStrike" dirty="0">
+                        <a:solidFill>
+                          <a:srgbClr val="000000"/>
+                        </a:solidFill>
+                        <a:effectLst/>
+                        <a:latin typeface="Calibri" panose="020F0502020204030204" pitchFamily="34" charset="0"/>
+                      </a:endParaRPr>
+                    </a:p>
+                  </a:txBody>
+                  <a:tcPr marL="9525" marR="9525" marT="9525" marB="0" anchor="b"/>
+                </a:tc>
+                <a:tc>
+                  <a:txBody>
+                    <a:bodyPr/>
+                    <a:lstStyle/>
+                    <a:p>
+                      <a:pPr algn="l" fontAlgn="b">
+                        <a:buNone/>
+                      </a:pPr>
+                      <a:r>
+                        <a:rPr lang="en-US" sz="1100" u="none" strike="noStrike">
+                          <a:effectLst/>
+                        </a:rPr>
+                        <a:t>ACAAG</a:t>
+                      </a:r>
+                      <a:endParaRPr lang="en-US" sz="1100" b="0" i="0" u="none" strike="noStrike">
+                        <a:solidFill>
+                          <a:srgbClr val="000000"/>
+                        </a:solidFill>
+                        <a:effectLst/>
+                        <a:latin typeface="Calibri" panose="020F0502020204030204" pitchFamily="34" charset="0"/>
+                      </a:endParaRPr>
+                    </a:p>
+                  </a:txBody>
+                  <a:tcPr marL="9525" marR="9525" marT="9525" marB="0" anchor="b"/>
+                </a:tc>
+                <a:tc>
+                  <a:txBody>
+                    <a:bodyPr/>
+                    <a:lstStyle/>
+                    <a:p>
+                      <a:pPr algn="r" fontAlgn="b">
+                        <a:buNone/>
+                      </a:pPr>
+                      <a:r>
+                        <a:rPr lang="en-US" sz="1100" u="none" strike="noStrike" dirty="0">
+                          <a:effectLst/>
+                        </a:rPr>
+                        <a:t>0</a:t>
+                      </a:r>
+                      <a:endParaRPr lang="en-US" sz="1100" b="0" i="0" u="none" strike="noStrike" dirty="0">
+                        <a:solidFill>
+                          <a:srgbClr val="000000"/>
+                        </a:solidFill>
+                        <a:effectLst/>
+                        <a:latin typeface="Calibri" panose="020F0502020204030204" pitchFamily="34" charset="0"/>
+                      </a:endParaRPr>
+                    </a:p>
+                  </a:txBody>
+                  <a:tcPr marL="9525" marR="9525" marT="9525" marB="0" anchor="b"/>
+                </a:tc>
+                <a:extLst>
+                  <a:ext uri="{0D108BD9-81ED-4DB2-BD59-A6C34878D82A}">
+                    <a16:rowId xmlns:a16="http://schemas.microsoft.com/office/drawing/2014/main" val="158789491"/>
+                  </a:ext>
+                </a:extLst>
+              </a:tr>
+            </a:tbl>
+          </a:graphicData>
+        </a:graphic>
+      </p:graphicFrame>
+      <p:pic>
+        <p:nvPicPr>
+          <p:cNvPr id="11" name="Picture 10">
+            <a:extLst>
+              <a:ext uri="{FF2B5EF4-FFF2-40B4-BE49-F238E27FC236}">
+                <a16:creationId xmlns:a16="http://schemas.microsoft.com/office/drawing/2014/main" id="{3FAF4C2D-3B3F-DA08-EA13-5EBE660854B1}"/>
+              </a:ext>
+            </a:extLst>
+          </p:cNvPr>
+          <p:cNvPicPr>
+            <a:picLocks noChangeAspect="1"/>
+          </p:cNvPicPr>
+          <p:nvPr/>
+        </p:nvPicPr>
+        <p:blipFill>
+          <a:blip r:embed="rId3"/>
+          <a:stretch>
+            <a:fillRect/>
+          </a:stretch>
+        </p:blipFill>
+        <p:spPr>
+          <a:xfrm>
+            <a:off x="5164403" y="2121711"/>
+            <a:ext cx="5168020" cy="4711250"/>
+          </a:xfrm>
+          <a:prstGeom prst="rect">
+            <a:avLst/>
+          </a:prstGeom>
+        </p:spPr>
+      </p:pic>
+      <p:sp>
+        <p:nvSpPr>
+          <p:cNvPr id="13" name="Gerader Verbinder 12">
+            <a:extLst>
+              <a:ext uri="{FF2B5EF4-FFF2-40B4-BE49-F238E27FC236}">
+                <a16:creationId xmlns:a16="http://schemas.microsoft.com/office/drawing/2014/main" id="{54DB1744-B2F5-44CA-8E3F-1159C340D009}"/>
+              </a:ext>
+            </a:extLst>
+          </p:cNvPr>
+          <p:cNvSpPr/>
+          <p:nvPr/>
+        </p:nvSpPr>
+        <p:spPr>
+          <a:xfrm rot="8154506">
+            <a:off x="5545951" y="5468760"/>
+            <a:ext cx="2011680" cy="0"/>
+          </a:xfrm>
+          <a:prstGeom prst="line">
+            <a:avLst/>
+          </a:prstGeom>
+          <a:solidFill>
+            <a:srgbClr val="FF0066">
+              <a:alpha val="5000"/>
+            </a:srgbClr>
+          </a:solidFill>
+          <a:ln w="12600">
+            <a:solidFill>
+              <a:srgbClr val="FF0066"/>
+            </a:solidFill>
+          </a:ln>
+        </p:spPr>
+        <p:style>
+          <a:lnRef idx="2">
+            <a:schemeClr val="accent1"/>
+          </a:lnRef>
+          <a:fillRef idx="0">
+            <a:schemeClr val="accent1"/>
+          </a:fillRef>
+          <a:effectRef idx="1">
+            <a:schemeClr val="accent1"/>
+          </a:effectRef>
+          <a:fontRef idx="minor">
+            <a:schemeClr val="tx1"/>
+          </a:fontRef>
+        </p:style>
+        <p:txBody>
+          <a:bodyPr wrap="none" rtlCol="0" anchor="ctr" anchorCtr="1"/>
+          <a:lstStyle/>
+          <a:p>
+            <a:endParaRPr lang="fr-FR">
+              <a:solidFill>
+                <a:srgbClr val="FF0066"/>
+              </a:solidFill>
+            </a:endParaRPr>
+          </a:p>
+        </p:txBody>
+      </p:sp>
+      <p:pic>
+        <p:nvPicPr>
+          <p:cNvPr id="16" name="Picture 15">
+            <a:extLst>
+              <a:ext uri="{FF2B5EF4-FFF2-40B4-BE49-F238E27FC236}">
+                <a16:creationId xmlns:a16="http://schemas.microsoft.com/office/drawing/2014/main" id="{4D7BAFE4-510D-03D8-CF3F-E3522C4CE1B2}"/>
+              </a:ext>
+            </a:extLst>
+          </p:cNvPr>
+          <p:cNvPicPr>
+            <a:picLocks noChangeAspect="1"/>
+          </p:cNvPicPr>
+          <p:nvPr/>
+        </p:nvPicPr>
+        <p:blipFill>
+          <a:blip r:embed="rId4"/>
+          <a:stretch>
+            <a:fillRect/>
+          </a:stretch>
+        </p:blipFill>
+        <p:spPr>
+          <a:xfrm>
+            <a:off x="327377" y="924932"/>
+            <a:ext cx="4548051" cy="2504068"/>
+          </a:xfrm>
+          <a:prstGeom prst="rect">
+            <a:avLst/>
+          </a:prstGeom>
+        </p:spPr>
+      </p:pic>
+    </p:spTree>
+    <p:extLst>
+      <p:ext uri="{BB962C8B-B14F-4D97-AF65-F5344CB8AC3E}">
+        <p14:creationId xmlns:p14="http://schemas.microsoft.com/office/powerpoint/2010/main" val="2120340437"/>
+      </p:ext>
+    </p:extLst>
+  </p:cSld>
+  <p:clrMapOvr>
+    <a:masterClrMapping/>
+  </p:clrMapOvr>
+</p:sld>
+</file>
+
+<file path=ppt/slides/slide18.xml><?xml version="1.0" encoding="utf-8"?>
+<p:sld xmlns:a="http://schemas.openxmlformats.org/drawingml/2006/main" xmlns:r="http://schemas.openxmlformats.org/officeDocument/2006/relationships" xmlns:p="http://schemas.openxmlformats.org/presentationml/2006/main">
+  <p:cSld>
+    <p:spTree>
+      <p:nvGrpSpPr>
+        <p:cNvPr id="1" name=""/>
+        <p:cNvGrpSpPr/>
+        <p:nvPr/>
+      </p:nvGrpSpPr>
+      <p:grpSpPr>
+        <a:xfrm>
+          <a:off x="0" y="0"/>
+          <a:ext cx="0" cy="0"/>
+          <a:chOff x="0" y="0"/>
+          <a:chExt cx="0" cy="0"/>
+        </a:xfrm>
+      </p:grpSpPr>
+      <p:sp>
+        <p:nvSpPr>
+          <p:cNvPr id="2" name="Title 1">
+            <a:extLst>
+              <a:ext uri="{FF2B5EF4-FFF2-40B4-BE49-F238E27FC236}">
+                <a16:creationId xmlns:a16="http://schemas.microsoft.com/office/drawing/2014/main" id="{49D9FB33-AC88-85FF-ABCD-9FB856C901F9}"/>
+              </a:ext>
+            </a:extLst>
+          </p:cNvPr>
+          <p:cNvSpPr>
+            <a:spLocks noGrp="1"/>
+          </p:cNvSpPr>
+          <p:nvPr>
+            <p:ph type="title"/>
+          </p:nvPr>
+        </p:nvSpPr>
+        <p:spPr/>
+        <p:txBody>
+          <a:bodyPr/>
+          <a:lstStyle/>
+          <a:p>
+            <a:endParaRPr lang="en-US"/>
+          </a:p>
+        </p:txBody>
+      </p:sp>
+      <p:sp>
+        <p:nvSpPr>
+          <p:cNvPr id="3" name="Content Placeholder 2">
+            <a:extLst>
+              <a:ext uri="{FF2B5EF4-FFF2-40B4-BE49-F238E27FC236}">
+                <a16:creationId xmlns:a16="http://schemas.microsoft.com/office/drawing/2014/main" id="{9CD1A934-8E8D-29C8-F6C4-B713B2AB63F3}"/>
+              </a:ext>
+            </a:extLst>
+          </p:cNvPr>
+          <p:cNvSpPr>
+            <a:spLocks noGrp="1"/>
+          </p:cNvSpPr>
+          <p:nvPr>
+            <p:ph idx="1"/>
+          </p:nvPr>
+        </p:nvSpPr>
+        <p:spPr/>
+        <p:txBody>
+          <a:bodyPr/>
+          <a:lstStyle/>
+          <a:p>
+            <a:endParaRPr lang="en-US"/>
+          </a:p>
+        </p:txBody>
+      </p:sp>
+      <p:pic>
+        <p:nvPicPr>
+          <p:cNvPr id="4" name="Picture 3">
+            <a:extLst>
+              <a:ext uri="{FF2B5EF4-FFF2-40B4-BE49-F238E27FC236}">
+                <a16:creationId xmlns:a16="http://schemas.microsoft.com/office/drawing/2014/main" id="{B25AB56C-0F68-5680-AE67-D4475B8CB3B4}"/>
+              </a:ext>
+            </a:extLst>
+          </p:cNvPr>
+          <p:cNvPicPr>
+            <a:picLocks noChangeAspect="1"/>
+          </p:cNvPicPr>
+          <p:nvPr/>
+        </p:nvPicPr>
+        <p:blipFill>
+          <a:blip r:embed="rId2"/>
+          <a:stretch>
+            <a:fillRect/>
+          </a:stretch>
+        </p:blipFill>
+        <p:spPr>
+          <a:xfrm>
+            <a:off x="1163105" y="681037"/>
+            <a:ext cx="7988475" cy="5560160"/>
+          </a:xfrm>
+          <a:prstGeom prst="rect">
+            <a:avLst/>
+          </a:prstGeom>
+        </p:spPr>
+      </p:pic>
+    </p:spTree>
+    <p:extLst>
+      <p:ext uri="{BB962C8B-B14F-4D97-AF65-F5344CB8AC3E}">
+        <p14:creationId xmlns:p14="http://schemas.microsoft.com/office/powerpoint/2010/main" val="2702555198"/>
+      </p:ext>
+    </p:extLst>
+  </p:cSld>
+  <p:clrMapOvr>
+    <a:masterClrMapping/>
+  </p:clrMapOvr>
+</p:sld>
+</file>
+
+<file path=ppt/slides/slide19.xml><?xml version="1.0" encoding="utf-8"?>
+<p:sld xmlns:a="http://schemas.openxmlformats.org/drawingml/2006/main" xmlns:r="http://schemas.openxmlformats.org/officeDocument/2006/relationships" xmlns:p="http://schemas.openxmlformats.org/presentationml/2006/main">
+  <p:cSld>
+    <p:spTree>
+      <p:nvGrpSpPr>
+        <p:cNvPr id="1" name=""/>
+        <p:cNvGrpSpPr/>
+        <p:nvPr/>
+      </p:nvGrpSpPr>
+      <p:grpSpPr>
+        <a:xfrm>
+          <a:off x="0" y="0"/>
+          <a:ext cx="0" cy="0"/>
+          <a:chOff x="0" y="0"/>
+          <a:chExt cx="0" cy="0"/>
+        </a:xfrm>
+      </p:grpSpPr>
+      <p:sp>
+        <p:nvSpPr>
+          <p:cNvPr id="2" name="Title 1">
+            <a:extLst>
+              <a:ext uri="{FF2B5EF4-FFF2-40B4-BE49-F238E27FC236}">
+                <a16:creationId xmlns:a16="http://schemas.microsoft.com/office/drawing/2014/main" id="{AC7E291D-C0AA-4270-1239-564A04BFA2E4}"/>
+              </a:ext>
+            </a:extLst>
+          </p:cNvPr>
+          <p:cNvSpPr>
+            <a:spLocks noGrp="1"/>
+          </p:cNvSpPr>
+          <p:nvPr>
+            <p:ph type="title"/>
+          </p:nvPr>
+        </p:nvSpPr>
+        <p:spPr/>
+        <p:txBody>
+          <a:bodyPr/>
+          <a:lstStyle/>
+          <a:p>
+            <a:r>
+              <a:rPr lang="en-US" dirty="0"/>
+              <a:t>Next steps</a:t>
+            </a:r>
+          </a:p>
+        </p:txBody>
+      </p:sp>
+      <p:sp>
+        <p:nvSpPr>
+          <p:cNvPr id="3" name="Content Placeholder 2">
+            <a:extLst>
+              <a:ext uri="{FF2B5EF4-FFF2-40B4-BE49-F238E27FC236}">
+                <a16:creationId xmlns:a16="http://schemas.microsoft.com/office/drawing/2014/main" id="{050C11D6-7ABA-E6FA-F2CC-30A616C87337}"/>
+              </a:ext>
+            </a:extLst>
+          </p:cNvPr>
+          <p:cNvSpPr>
+            <a:spLocks noGrp="1"/>
+          </p:cNvSpPr>
+          <p:nvPr>
+            <p:ph idx="1"/>
+          </p:nvPr>
+        </p:nvSpPr>
+        <p:spPr>
+          <a:xfrm>
+            <a:off x="357188" y="1557339"/>
+            <a:ext cx="4167828" cy="4691062"/>
+          </a:xfrm>
+        </p:spPr>
+        <p:txBody>
+          <a:bodyPr>
+            <a:normAutofit lnSpcReduction="10000"/>
+          </a:bodyPr>
+          <a:lstStyle/>
+          <a:p>
+            <a:r>
+              <a:rPr lang="en-US" dirty="0"/>
+              <a:t>Test more real cases </a:t>
+            </a:r>
+          </a:p>
+          <a:p>
+            <a:r>
+              <a:rPr lang="en-US" dirty="0"/>
+              <a:t>Behavior in one or low-sample cases</a:t>
+            </a:r>
+          </a:p>
+          <a:p>
+            <a:r>
+              <a:rPr lang="en-US" dirty="0"/>
+              <a:t>Null cases (truly no signal)</a:t>
+            </a:r>
+          </a:p>
+          <a:p>
+            <a:r>
+              <a:rPr lang="en-US" dirty="0"/>
+              <a:t>Mapping back to consensus sequence – check robustly to ambiguity</a:t>
+            </a:r>
+          </a:p>
+          <a:p>
+            <a:r>
+              <a:rPr lang="en-US" dirty="0"/>
+              <a:t>IR map back for better readability</a:t>
+            </a:r>
+          </a:p>
+          <a:p>
+            <a:endParaRPr lang="en-US" dirty="0"/>
+          </a:p>
+          <a:p>
+            <a:endParaRPr lang="en-US" dirty="0"/>
+          </a:p>
+          <a:p>
+            <a:endParaRPr lang="en-US" dirty="0"/>
+          </a:p>
+        </p:txBody>
+      </p:sp>
+      <p:pic>
+        <p:nvPicPr>
+          <p:cNvPr id="4" name="Picture 3">
+            <a:extLst>
+              <a:ext uri="{FF2B5EF4-FFF2-40B4-BE49-F238E27FC236}">
+                <a16:creationId xmlns:a16="http://schemas.microsoft.com/office/drawing/2014/main" id="{7A2FB658-C691-AA34-B26F-FE882A46EE7D}"/>
+              </a:ext>
+            </a:extLst>
+          </p:cNvPr>
+          <p:cNvPicPr>
+            <a:picLocks noChangeAspect="1"/>
+          </p:cNvPicPr>
+          <p:nvPr/>
+        </p:nvPicPr>
+        <p:blipFill>
+          <a:blip r:embed="rId2"/>
+          <a:stretch>
+            <a:fillRect/>
+          </a:stretch>
+        </p:blipFill>
+        <p:spPr>
+          <a:xfrm>
+            <a:off x="4472684" y="770583"/>
+            <a:ext cx="7071616" cy="2636527"/>
+          </a:xfrm>
+          <a:prstGeom prst="rect">
+            <a:avLst/>
+          </a:prstGeom>
+        </p:spPr>
+      </p:pic>
+      <p:pic>
+        <p:nvPicPr>
+          <p:cNvPr id="5" name="Picture 4">
+            <a:extLst>
+              <a:ext uri="{FF2B5EF4-FFF2-40B4-BE49-F238E27FC236}">
+                <a16:creationId xmlns:a16="http://schemas.microsoft.com/office/drawing/2014/main" id="{7C5D9DBE-86D3-27C8-B574-A8AA8C5CFF73}"/>
+              </a:ext>
+            </a:extLst>
+          </p:cNvPr>
+          <p:cNvPicPr>
+            <a:picLocks noChangeAspect="1"/>
+          </p:cNvPicPr>
+          <p:nvPr/>
+        </p:nvPicPr>
+        <p:blipFill>
+          <a:blip r:embed="rId3"/>
+          <a:stretch>
+            <a:fillRect/>
+          </a:stretch>
+        </p:blipFill>
+        <p:spPr>
+          <a:xfrm>
+            <a:off x="4715515" y="3661086"/>
+            <a:ext cx="4846946" cy="2636526"/>
+          </a:xfrm>
+          <a:prstGeom prst="rect">
+            <a:avLst/>
+          </a:prstGeom>
+        </p:spPr>
+      </p:pic>
+    </p:spTree>
+    <p:extLst>
+      <p:ext uri="{BB962C8B-B14F-4D97-AF65-F5344CB8AC3E}">
+        <p14:creationId xmlns:p14="http://schemas.microsoft.com/office/powerpoint/2010/main" val="51817044"/>
       </p:ext>
     </p:extLst>
   </p:cSld>
@@ -5436,10 +10917,15 @@
             <p:ph idx="1"/>
           </p:nvPr>
         </p:nvSpPr>
-        <p:spPr/>
+        <p:spPr>
+          <a:xfrm>
+            <a:off x="383211" y="1835095"/>
+            <a:ext cx="7174878" cy="4322818"/>
+          </a:xfrm>
+        </p:spPr>
         <p:txBody>
           <a:bodyPr>
-            <a:normAutofit lnSpcReduction="10000"/>
+            <a:normAutofit fontScale="77500" lnSpcReduction="20000"/>
           </a:bodyPr>
           <a:lstStyle/>
           <a:p>
@@ -5449,7 +10935,7 @@
             </a:r>
             <a:r>
               <a:rPr lang="en-US" dirty="0"/>
-              <a:t>: a measure of conservation between two positions (e.g. PIC-JSD)</a:t>
+              <a:t>: a measure of conservation between two positions (e.g. information content and other derivatives)</a:t>
             </a:r>
           </a:p>
           <a:p>
@@ -5459,7 +10945,7 @@
             </a:r>
             <a:r>
               <a:rPr lang="en-US" dirty="0"/>
-              <a:t>: measure of diagonal strength between two or more positions</a:t>
+              <a:t>: measure of continuous diagonal strength among 2+ consecutive positions</a:t>
             </a:r>
           </a:p>
           <a:p>
@@ -5477,7 +10963,7 @@
           <a:p>
             <a:r>
               <a:rPr lang="en-US" dirty="0"/>
-              <a:t>Threshold more objectively using distribution of metrics </a:t>
+              <a:t>Threshold more adaptively with distribution of metrics </a:t>
             </a:r>
           </a:p>
           <a:p>
@@ -5516,10 +11002,187 @@
           </a:p>
         </p:txBody>
       </p:sp>
+      <p:pic>
+        <p:nvPicPr>
+          <p:cNvPr id="4" name="Content Placeholder 4" descr="A colorful text on a black background&#10;&#10;AI-generated content may be incorrect.">
+            <a:extLst>
+              <a:ext uri="{FF2B5EF4-FFF2-40B4-BE49-F238E27FC236}">
+                <a16:creationId xmlns:a16="http://schemas.microsoft.com/office/drawing/2014/main" id="{46766235-D5DF-94E6-FC75-B044E3E075E8}"/>
+              </a:ext>
+            </a:extLst>
+          </p:cNvPr>
+          <p:cNvPicPr>
+            <a:picLocks noChangeAspect="1"/>
+          </p:cNvPicPr>
+          <p:nvPr/>
+        </p:nvPicPr>
+        <p:blipFill>
+          <a:blip r:embed="rId2"/>
+          <a:stretch>
+            <a:fillRect/>
+          </a:stretch>
+        </p:blipFill>
+        <p:spPr>
+          <a:xfrm>
+            <a:off x="4900442" y="220718"/>
+            <a:ext cx="5517614" cy="1469970"/>
+          </a:xfrm>
+          <a:prstGeom prst="rect">
+            <a:avLst/>
+          </a:prstGeom>
+        </p:spPr>
+      </p:pic>
+      <p:pic>
+        <p:nvPicPr>
+          <p:cNvPr id="5" name="Picture 4">
+            <a:extLst>
+              <a:ext uri="{FF2B5EF4-FFF2-40B4-BE49-F238E27FC236}">
+                <a16:creationId xmlns:a16="http://schemas.microsoft.com/office/drawing/2014/main" id="{D0B5184E-092C-97C9-D0A1-2B480D50970E}"/>
+              </a:ext>
+            </a:extLst>
+          </p:cNvPr>
+          <p:cNvPicPr>
+            <a:picLocks noChangeAspect="1"/>
+          </p:cNvPicPr>
+          <p:nvPr/>
+        </p:nvPicPr>
+        <p:blipFill>
+          <a:blip r:embed="rId3"/>
+          <a:srcRect b="17782"/>
+          <a:stretch>
+            <a:fillRect/>
+          </a:stretch>
+        </p:blipFill>
+        <p:spPr>
+          <a:xfrm>
+            <a:off x="7811453" y="2040394"/>
+            <a:ext cx="4102100" cy="2777212"/>
+          </a:xfrm>
+          <a:prstGeom prst="rect">
+            <a:avLst/>
+          </a:prstGeom>
+        </p:spPr>
+      </p:pic>
     </p:spTree>
     <p:extLst>
       <p:ext uri="{BB962C8B-B14F-4D97-AF65-F5344CB8AC3E}">
         <p14:creationId xmlns:p14="http://schemas.microsoft.com/office/powerpoint/2010/main" val="3060313142"/>
+      </p:ext>
+    </p:extLst>
+  </p:cSld>
+  <p:clrMapOvr>
+    <a:masterClrMapping/>
+  </p:clrMapOvr>
+</p:sld>
+</file>
+
+<file path=ppt/slides/slide20.xml><?xml version="1.0" encoding="utf-8"?>
+<p:sld xmlns:a="http://schemas.openxmlformats.org/drawingml/2006/main" xmlns:r="http://schemas.openxmlformats.org/officeDocument/2006/relationships" xmlns:p="http://schemas.openxmlformats.org/presentationml/2006/main">
+  <p:cSld>
+    <p:spTree>
+      <p:nvGrpSpPr>
+        <p:cNvPr id="1" name=""/>
+        <p:cNvGrpSpPr/>
+        <p:nvPr/>
+      </p:nvGrpSpPr>
+      <p:grpSpPr>
+        <a:xfrm>
+          <a:off x="0" y="0"/>
+          <a:ext cx="0" cy="0"/>
+          <a:chOff x="0" y="0"/>
+          <a:chExt cx="0" cy="0"/>
+        </a:xfrm>
+      </p:grpSpPr>
+      <p:sp>
+        <p:nvSpPr>
+          <p:cNvPr id="2" name="Title 1">
+            <a:extLst>
+              <a:ext uri="{FF2B5EF4-FFF2-40B4-BE49-F238E27FC236}">
+                <a16:creationId xmlns:a16="http://schemas.microsoft.com/office/drawing/2014/main" id="{332FC05B-5A4A-8AB7-3B9F-F48DF440FDE9}"/>
+              </a:ext>
+            </a:extLst>
+          </p:cNvPr>
+          <p:cNvSpPr>
+            <a:spLocks noGrp="1"/>
+          </p:cNvSpPr>
+          <p:nvPr>
+            <p:ph type="title"/>
+          </p:nvPr>
+        </p:nvSpPr>
+        <p:spPr/>
+        <p:txBody>
+          <a:bodyPr/>
+          <a:lstStyle/>
+          <a:p>
+            <a:r>
+              <a:rPr lang="en-US" dirty="0"/>
+              <a:t>Null case generator</a:t>
+            </a:r>
+          </a:p>
+        </p:txBody>
+      </p:sp>
+      <p:sp>
+        <p:nvSpPr>
+          <p:cNvPr id="3" name="Content Placeholder 2">
+            <a:extLst>
+              <a:ext uri="{FF2B5EF4-FFF2-40B4-BE49-F238E27FC236}">
+                <a16:creationId xmlns:a16="http://schemas.microsoft.com/office/drawing/2014/main" id="{886B3DA9-8B13-5A3D-6B28-803EDFCC9217}"/>
+              </a:ext>
+            </a:extLst>
+          </p:cNvPr>
+          <p:cNvSpPr>
+            <a:spLocks noGrp="1"/>
+          </p:cNvSpPr>
+          <p:nvPr>
+            <p:ph idx="1"/>
+          </p:nvPr>
+        </p:nvSpPr>
+        <p:spPr/>
+        <p:txBody>
+          <a:bodyPr/>
+          <a:lstStyle/>
+          <a:p>
+            <a:r>
+              <a:rPr lang="en-US" dirty="0"/>
+              <a:t>Generate random sequences of length N</a:t>
+            </a:r>
+          </a:p>
+          <a:p>
+            <a:r>
+              <a:rPr lang="en-US" dirty="0"/>
+              <a:t>Create a motif and compute the IC </a:t>
+            </a:r>
+          </a:p>
+          <a:p>
+            <a:r>
+              <a:rPr lang="en-US" dirty="0"/>
+              <a:t>Select one random position from one of the sequences, and change the base pair </a:t>
+            </a:r>
+          </a:p>
+          <a:p>
+            <a:r>
+              <a:rPr lang="en-US" dirty="0"/>
+              <a:t>Compute IC. If the IC is greater then discard the change, if not, discard the change </a:t>
+            </a:r>
+          </a:p>
+          <a:p>
+            <a:r>
+              <a:rPr lang="en-US" dirty="0"/>
+              <a:t>Goal is to make the IC go up high to a total of X bits </a:t>
+            </a:r>
+          </a:p>
+          <a:p>
+            <a:r>
+              <a:rPr lang="en-US" dirty="0"/>
+              <a:t>Loop</a:t>
+            </a:r>
+          </a:p>
+        </p:txBody>
+      </p:sp>
+    </p:spTree>
+    <p:extLst>
+      <p:ext uri="{BB962C8B-B14F-4D97-AF65-F5344CB8AC3E}">
+        <p14:creationId xmlns:p14="http://schemas.microsoft.com/office/powerpoint/2010/main" val="2932112272"/>
       </p:ext>
     </p:extLst>
   </p:cSld>
@@ -5562,7 +11225,12 @@
             <p:ph type="title"/>
           </p:nvPr>
         </p:nvSpPr>
-        <p:spPr/>
+        <p:spPr>
+          <a:xfrm>
+            <a:off x="466725" y="247705"/>
+            <a:ext cx="10515600" cy="1325563"/>
+          </a:xfrm>
+        </p:spPr>
         <p:txBody>
           <a:bodyPr/>
           <a:lstStyle/>
@@ -5590,14 +11258,25 @@
             <p:ph idx="1"/>
           </p:nvPr>
         </p:nvSpPr>
-        <p:spPr/>
+        <p:spPr>
+          <a:xfrm>
+            <a:off x="838200" y="1354138"/>
+            <a:ext cx="10515600" cy="4351338"/>
+          </a:xfrm>
+        </p:spPr>
         <p:txBody>
           <a:bodyPr/>
           <a:lstStyle/>
           <a:p>
             <a:r>
               <a:rPr lang="en-US" dirty="0"/>
-              <a:t>Percentile based on matrix of conservation metric</a:t>
+              <a:t>Before: fixed information content constant </a:t>
+            </a:r>
+          </a:p>
+          <a:p>
+            <a:r>
+              <a:rPr lang="en-US" dirty="0"/>
+              <a:t>Now: Percentile based on matrix of conservation metric</a:t>
             </a:r>
           </a:p>
         </p:txBody>
@@ -5892,14 +11571,14 @@
           <p:nvPr>
             <p:extLst>
               <p:ext uri="{D42A27DB-BD31-4B8C-83A1-F6EECF244321}">
-                <p14:modId xmlns:p14="http://schemas.microsoft.com/office/powerpoint/2010/main" val="545062159"/>
+                <p14:modId xmlns:p14="http://schemas.microsoft.com/office/powerpoint/2010/main" val="4273673342"/>
               </p:ext>
             </p:extLst>
           </p:nvPr>
         </p:nvGraphicFramePr>
         <p:xfrm>
-          <a:off x="6756401" y="2883694"/>
-          <a:ext cx="5435599" cy="2309145"/>
+          <a:off x="6665398" y="2840702"/>
+          <a:ext cx="5435599" cy="2298350"/>
         </p:xfrm>
         <a:graphic>
           <a:graphicData uri="http://schemas.openxmlformats.org/drawingml/2006/table">
@@ -6132,7 +11811,7 @@
                         <a:buNone/>
                       </a:pPr>
                       <a:r>
-                        <a:rPr lang="en-US" sz="1200" b="0" i="0" u="none" strike="noStrike">
+                        <a:rPr lang="en-US" sz="1200" b="1" i="0" u="none" strike="noStrike" dirty="0">
                           <a:solidFill>
                             <a:srgbClr val="000000"/>
                           </a:solidFill>
@@ -6192,7 +11871,7 @@
                         <a:buNone/>
                       </a:pPr>
                       <a:r>
-                        <a:rPr lang="en-US" sz="1200" b="0" i="0" u="none" strike="noStrike">
+                        <a:rPr lang="en-US" sz="1200" b="1" i="0" u="none" strike="noStrike">
                           <a:solidFill>
                             <a:srgbClr val="000000"/>
                           </a:solidFill>
@@ -6439,7 +12118,7 @@
                         <a:buNone/>
                       </a:pPr>
                       <a:r>
-                        <a:rPr lang="en-US" sz="1200" b="0" i="0" u="none" strike="noStrike">
+                        <a:rPr lang="en-US" sz="1200" b="1" i="0" u="none" strike="noStrike" dirty="0">
                           <a:solidFill>
                             <a:srgbClr val="000000"/>
                           </a:solidFill>
@@ -6499,7 +12178,7 @@
                         <a:buNone/>
                       </a:pPr>
                       <a:r>
-                        <a:rPr lang="en-US" sz="1200" b="0" i="0" u="none" strike="noStrike">
+                        <a:rPr lang="en-US" sz="1200" b="1" i="0" u="none" strike="noStrike">
                           <a:solidFill>
                             <a:srgbClr val="000000"/>
                           </a:solidFill>
@@ -6614,7 +12293,9 @@
                       <a:headEnd type="none" w="med" len="med"/>
                       <a:tailEnd type="none" w="med" len="med"/>
                     </a:lnB>
-                    <a:noFill/>
+                    <a:solidFill>
+                      <a:schemeClr val="accent2"/>
+                    </a:solidFill>
                   </a:tcPr>
                 </a:tc>
                 <a:tc>
@@ -6674,7 +12355,9 @@
                       <a:headEnd type="none" w="med" len="med"/>
                       <a:tailEnd type="none" w="med" len="med"/>
                     </a:lnB>
-                    <a:noFill/>
+                    <a:solidFill>
+                      <a:schemeClr val="accent2"/>
+                    </a:solidFill>
                   </a:tcPr>
                 </a:tc>
                 <a:tc>
@@ -6734,7 +12417,9 @@
                       <a:headEnd type="none" w="med" len="med"/>
                       <a:tailEnd type="none" w="med" len="med"/>
                     </a:lnB>
-                    <a:noFill/>
+                    <a:solidFill>
+                      <a:schemeClr val="accent2"/>
+                    </a:solidFill>
                   </a:tcPr>
                 </a:tc>
                 <a:tc>
@@ -6746,7 +12431,7 @@
                         <a:buNone/>
                       </a:pPr>
                       <a:r>
-                        <a:rPr lang="en-US" sz="1200" b="0" i="0" u="none" strike="noStrike">
+                        <a:rPr lang="en-US" sz="1200" b="1" i="0" u="none" strike="noStrike" dirty="0">
                           <a:solidFill>
                             <a:srgbClr val="000000"/>
                           </a:solidFill>
@@ -6794,7 +12479,9 @@
                       <a:headEnd type="none" w="med" len="med"/>
                       <a:tailEnd type="none" w="med" len="med"/>
                     </a:lnB>
-                    <a:noFill/>
+                    <a:solidFill>
+                      <a:schemeClr val="accent2"/>
+                    </a:solidFill>
                   </a:tcPr>
                 </a:tc>
                 <a:tc>
@@ -6806,7 +12493,7 @@
                         <a:buNone/>
                       </a:pPr>
                       <a:r>
-                        <a:rPr lang="en-US" sz="1200" b="0" i="0" u="none" strike="noStrike">
+                        <a:rPr lang="en-US" sz="1200" b="1" i="0" u="none" strike="noStrike" dirty="0">
                           <a:solidFill>
                             <a:srgbClr val="000000"/>
                           </a:solidFill>
@@ -6854,7 +12541,9 @@
                       <a:headEnd type="none" w="med" len="med"/>
                       <a:tailEnd type="none" w="med" len="med"/>
                     </a:lnB>
-                    <a:noFill/>
+                    <a:solidFill>
+                      <a:schemeClr val="accent2"/>
+                    </a:solidFill>
                   </a:tcPr>
                 </a:tc>
                 <a:extLst>
@@ -7053,7 +12742,7 @@
                         <a:buNone/>
                       </a:pPr>
                       <a:r>
-                        <a:rPr lang="en-US" sz="1200" b="0" i="0" u="none" strike="noStrike" dirty="0">
+                        <a:rPr lang="en-US" sz="1200" b="1" i="0" u="none" strike="noStrike" dirty="0">
                           <a:solidFill>
                             <a:srgbClr val="000000"/>
                           </a:solidFill>
@@ -7113,7 +12802,7 @@
                         <a:buNone/>
                       </a:pPr>
                       <a:r>
-                        <a:rPr lang="en-US" sz="1200" b="0" i="0" u="none" strike="noStrike">
+                        <a:rPr lang="en-US" sz="1200" b="1" i="0" u="none" strike="noStrike">
                           <a:solidFill>
                             <a:srgbClr val="000000"/>
                           </a:solidFill>
@@ -7228,7 +12917,9 @@
                       <a:headEnd type="none" w="med" len="med"/>
                       <a:tailEnd type="none" w="med" len="med"/>
                     </a:lnB>
-                    <a:noFill/>
+                    <a:solidFill>
+                      <a:schemeClr val="accent2"/>
+                    </a:solidFill>
                   </a:tcPr>
                 </a:tc>
                 <a:tc>
@@ -7288,7 +12979,9 @@
                       <a:headEnd type="none" w="med" len="med"/>
                       <a:tailEnd type="none" w="med" len="med"/>
                     </a:lnB>
-                    <a:noFill/>
+                    <a:solidFill>
+                      <a:schemeClr val="accent2"/>
+                    </a:solidFill>
                   </a:tcPr>
                 </a:tc>
                 <a:tc>
@@ -7348,7 +13041,9 @@
                       <a:headEnd type="none" w="med" len="med"/>
                       <a:tailEnd type="none" w="med" len="med"/>
                     </a:lnB>
-                    <a:noFill/>
+                    <a:solidFill>
+                      <a:schemeClr val="accent2"/>
+                    </a:solidFill>
                   </a:tcPr>
                 </a:tc>
                 <a:tc>
@@ -7360,7 +13055,7 @@
                         <a:buNone/>
                       </a:pPr>
                       <a:r>
-                        <a:rPr lang="en-US" sz="1200" b="0" i="0" u="none" strike="noStrike" dirty="0">
+                        <a:rPr lang="en-US" sz="1200" b="1" i="0" u="none" strike="noStrike" dirty="0">
                           <a:solidFill>
                             <a:srgbClr val="000000"/>
                           </a:solidFill>
@@ -7408,7 +13103,9 @@
                       <a:headEnd type="none" w="med" len="med"/>
                       <a:tailEnd type="none" w="med" len="med"/>
                     </a:lnB>
-                    <a:noFill/>
+                    <a:solidFill>
+                      <a:schemeClr val="accent2"/>
+                    </a:solidFill>
                   </a:tcPr>
                 </a:tc>
                 <a:tc>
@@ -7420,7 +13117,7 @@
                         <a:buNone/>
                       </a:pPr>
                       <a:r>
-                        <a:rPr lang="en-US" sz="1200" b="0" i="0" u="none" strike="noStrike" dirty="0">
+                        <a:rPr lang="en-US" sz="1200" b="1" i="0" u="none" strike="noStrike" dirty="0">
                           <a:solidFill>
                             <a:srgbClr val="000000"/>
                           </a:solidFill>
@@ -7468,7 +13165,9 @@
                       <a:headEnd type="none" w="med" len="med"/>
                       <a:tailEnd type="none" w="med" len="med"/>
                     </a:lnB>
-                    <a:noFill/>
+                    <a:solidFill>
+                      <a:schemeClr val="accent2"/>
+                    </a:solidFill>
                   </a:tcPr>
                 </a:tc>
                 <a:extLst>
@@ -7477,7 +13176,7 @@
                   </a:ext>
                 </a:extLst>
               </a:tr>
-              <a:tr h="203200">
+              <a:tr h="172244">
                 <a:tc>
                   <a:txBody>
                     <a:bodyPr/>
@@ -7535,7 +13234,9 @@
                       <a:headEnd type="none" w="med" len="med"/>
                       <a:tailEnd type="none" w="med" len="med"/>
                     </a:lnB>
-                    <a:noFill/>
+                    <a:solidFill>
+                      <a:schemeClr val="accent2"/>
+                    </a:solidFill>
                   </a:tcPr>
                 </a:tc>
                 <a:tc>
@@ -7595,7 +13296,9 @@
                       <a:headEnd type="none" w="med" len="med"/>
                       <a:tailEnd type="none" w="med" len="med"/>
                     </a:lnB>
-                    <a:noFill/>
+                    <a:solidFill>
+                      <a:schemeClr val="accent2"/>
+                    </a:solidFill>
                   </a:tcPr>
                 </a:tc>
                 <a:tc>
@@ -7655,7 +13358,9 @@
                       <a:headEnd type="none" w="med" len="med"/>
                       <a:tailEnd type="none" w="med" len="med"/>
                     </a:lnB>
-                    <a:noFill/>
+                    <a:solidFill>
+                      <a:schemeClr val="accent2"/>
+                    </a:solidFill>
                   </a:tcPr>
                 </a:tc>
                 <a:tc>
@@ -7667,7 +13372,7 @@
                         <a:buNone/>
                       </a:pPr>
                       <a:r>
-                        <a:rPr lang="en-US" sz="1200" b="0" i="0" u="none" strike="noStrike">
+                        <a:rPr lang="en-US" sz="1200" b="1" i="0" u="none" strike="noStrike">
                           <a:solidFill>
                             <a:srgbClr val="000000"/>
                           </a:solidFill>
@@ -7715,7 +13420,9 @@
                       <a:headEnd type="none" w="med" len="med"/>
                       <a:tailEnd type="none" w="med" len="med"/>
                     </a:lnB>
-                    <a:noFill/>
+                    <a:solidFill>
+                      <a:schemeClr val="accent2"/>
+                    </a:solidFill>
                   </a:tcPr>
                 </a:tc>
                 <a:tc>
@@ -7727,7 +13434,7 @@
                         <a:buNone/>
                       </a:pPr>
                       <a:r>
-                        <a:rPr lang="en-US" sz="1200" b="0" i="0" u="none" strike="noStrike" dirty="0">
+                        <a:rPr lang="en-US" sz="1200" b="1" i="0" u="none" strike="noStrike" dirty="0">
                           <a:solidFill>
                             <a:srgbClr val="000000"/>
                           </a:solidFill>
@@ -7775,7 +13482,9 @@
                       <a:headEnd type="none" w="med" len="med"/>
                       <a:tailEnd type="none" w="med" len="med"/>
                     </a:lnB>
-                    <a:noFill/>
+                    <a:solidFill>
+                      <a:schemeClr val="accent2"/>
+                    </a:solidFill>
                   </a:tcPr>
                 </a:tc>
                 <a:extLst>
@@ -7842,7 +13551,9 @@
                       <a:headEnd type="none" w="med" len="med"/>
                       <a:tailEnd type="none" w="med" len="med"/>
                     </a:lnB>
-                    <a:noFill/>
+                    <a:solidFill>
+                      <a:schemeClr val="accent2"/>
+                    </a:solidFill>
                   </a:tcPr>
                 </a:tc>
                 <a:tc>
@@ -7902,7 +13613,9 @@
                       <a:headEnd type="none" w="med" len="med"/>
                       <a:tailEnd type="none" w="med" len="med"/>
                     </a:lnB>
-                    <a:noFill/>
+                    <a:solidFill>
+                      <a:schemeClr val="accent2"/>
+                    </a:solidFill>
                   </a:tcPr>
                 </a:tc>
                 <a:tc>
@@ -7962,7 +13675,9 @@
                       <a:headEnd type="none" w="med" len="med"/>
                       <a:tailEnd type="none" w="med" len="med"/>
                     </a:lnB>
-                    <a:noFill/>
+                    <a:solidFill>
+                      <a:schemeClr val="accent2"/>
+                    </a:solidFill>
                   </a:tcPr>
                 </a:tc>
                 <a:tc>
@@ -7974,7 +13689,7 @@
                         <a:buNone/>
                       </a:pPr>
                       <a:r>
-                        <a:rPr lang="en-US" sz="1200" b="0" i="0" u="none" strike="noStrike">
+                        <a:rPr lang="en-US" sz="1200" b="1" i="0" u="none" strike="noStrike">
                           <a:solidFill>
                             <a:srgbClr val="000000"/>
                           </a:solidFill>
@@ -8022,7 +13737,9 @@
                       <a:headEnd type="none" w="med" len="med"/>
                       <a:tailEnd type="none" w="med" len="med"/>
                     </a:lnB>
-                    <a:noFill/>
+                    <a:solidFill>
+                      <a:schemeClr val="accent2"/>
+                    </a:solidFill>
                   </a:tcPr>
                 </a:tc>
                 <a:tc>
@@ -8034,7 +13751,7 @@
                         <a:buNone/>
                       </a:pPr>
                       <a:r>
-                        <a:rPr lang="en-US" sz="1200" b="0" i="0" u="none" strike="noStrike" dirty="0">
+                        <a:rPr lang="en-US" sz="1200" b="1" i="0" u="none" strike="noStrike" dirty="0">
                           <a:solidFill>
                             <a:srgbClr val="000000"/>
                           </a:solidFill>
@@ -8082,7 +13799,9 @@
                       <a:headEnd type="none" w="med" len="med"/>
                       <a:tailEnd type="none" w="med" len="med"/>
                     </a:lnB>
-                    <a:noFill/>
+                    <a:solidFill>
+                      <a:schemeClr val="accent2"/>
+                    </a:solidFill>
                   </a:tcPr>
                 </a:tc>
                 <a:extLst>
@@ -8101,6 +13820,66 @@
                         <a:buNone/>
                       </a:pPr>
                       <a:r>
+                        <a:rPr lang="en-US" sz="1200" b="0" i="0" u="none" strike="noStrike" dirty="0">
+                          <a:solidFill>
+                            <a:srgbClr val="000000"/>
+                          </a:solidFill>
+                          <a:effectLst/>
+                          <a:latin typeface="Aptos Narrow" panose="020B0004020202020204" pitchFamily="34" charset="0"/>
+                        </a:rPr>
+                        <a:t>[(18, 9), (19, 10)]</a:t>
+                      </a:r>
+                    </a:p>
+                  </a:txBody>
+                  <a:tcPr marL="9525" marR="9525" marT="9525" marB="0" anchor="b">
+                    <a:lnL w="12700" cap="flat" cmpd="sng" algn="ctr">
+                      <a:solidFill>
+                        <a:schemeClr val="tx1"/>
+                      </a:solidFill>
+                      <a:prstDash val="solid"/>
+                      <a:round/>
+                      <a:headEnd type="none" w="med" len="med"/>
+                      <a:tailEnd type="none" w="med" len="med"/>
+                    </a:lnL>
+                    <a:lnR w="12700" cap="flat" cmpd="sng" algn="ctr">
+                      <a:solidFill>
+                        <a:schemeClr val="tx1"/>
+                      </a:solidFill>
+                      <a:prstDash val="solid"/>
+                      <a:round/>
+                      <a:headEnd type="none" w="med" len="med"/>
+                      <a:tailEnd type="none" w="med" len="med"/>
+                    </a:lnR>
+                    <a:lnT w="12700" cap="flat" cmpd="sng" algn="ctr">
+                      <a:solidFill>
+                        <a:schemeClr val="tx1"/>
+                      </a:solidFill>
+                      <a:prstDash val="solid"/>
+                      <a:round/>
+                      <a:headEnd type="none" w="med" len="med"/>
+                      <a:tailEnd type="none" w="med" len="med"/>
+                    </a:lnT>
+                    <a:lnB w="12700" cap="flat" cmpd="sng" algn="ctr">
+                      <a:solidFill>
+                        <a:schemeClr val="tx1"/>
+                      </a:solidFill>
+                      <a:prstDash val="solid"/>
+                      <a:round/>
+                      <a:headEnd type="none" w="med" len="med"/>
+                      <a:tailEnd type="none" w="med" len="med"/>
+                    </a:lnB>
+                    <a:noFill/>
+                  </a:tcPr>
+                </a:tc>
+                <a:tc>
+                  <a:txBody>
+                    <a:bodyPr/>
+                    <a:lstStyle/>
+                    <a:p>
+                      <a:pPr algn="ctr" fontAlgn="b">
+                        <a:buNone/>
+                      </a:pPr>
+                      <a:r>
                         <a:rPr lang="en-US" sz="1200" b="0" i="0" u="none" strike="noStrike">
                           <a:solidFill>
                             <a:srgbClr val="000000"/>
@@ -8108,7 +13887,7 @@
                           <a:effectLst/>
                           <a:latin typeface="Aptos Narrow" panose="020B0004020202020204" pitchFamily="34" charset="0"/>
                         </a:rPr>
-                        <a:t>[(18, 9), (19, 10)]</a:t>
+                        <a:t>2</a:t>
                       </a:r>
                     </a:p>
                   </a:txBody>
@@ -8168,7 +13947,7 @@
                           <a:effectLst/>
                           <a:latin typeface="Aptos Narrow" panose="020B0004020202020204" pitchFamily="34" charset="0"/>
                         </a:rPr>
-                        <a:t>2</a:t>
+                        <a:t>3.5316342</a:t>
                       </a:r>
                     </a:p>
                   </a:txBody>
@@ -8221,14 +14000,14 @@
                         <a:buNone/>
                       </a:pPr>
                       <a:r>
-                        <a:rPr lang="en-US" sz="1200" b="0" i="0" u="none" strike="noStrike">
+                        <a:rPr lang="en-US" sz="1200" b="1" i="0" u="none" strike="noStrike">
                           <a:solidFill>
                             <a:srgbClr val="000000"/>
                           </a:solidFill>
                           <a:effectLst/>
                           <a:latin typeface="Aptos Narrow" panose="020B0004020202020204" pitchFamily="34" charset="0"/>
                         </a:rPr>
-                        <a:t>3.5316342</a:t>
+                        <a:t>CA</a:t>
                       </a:r>
                     </a:p>
                   </a:txBody>
@@ -8281,67 +14060,7 @@
                         <a:buNone/>
                       </a:pPr>
                       <a:r>
-                        <a:rPr lang="en-US" sz="1200" b="0" i="0" u="none" strike="noStrike">
-                          <a:solidFill>
-                            <a:srgbClr val="000000"/>
-                          </a:solidFill>
-                          <a:effectLst/>
-                          <a:latin typeface="Aptos Narrow" panose="020B0004020202020204" pitchFamily="34" charset="0"/>
-                        </a:rPr>
-                        <a:t>CA</a:t>
-                      </a:r>
-                    </a:p>
-                  </a:txBody>
-                  <a:tcPr marL="9525" marR="9525" marT="9525" marB="0" anchor="b">
-                    <a:lnL w="12700" cap="flat" cmpd="sng" algn="ctr">
-                      <a:solidFill>
-                        <a:schemeClr val="tx1"/>
-                      </a:solidFill>
-                      <a:prstDash val="solid"/>
-                      <a:round/>
-                      <a:headEnd type="none" w="med" len="med"/>
-                      <a:tailEnd type="none" w="med" len="med"/>
-                    </a:lnL>
-                    <a:lnR w="12700" cap="flat" cmpd="sng" algn="ctr">
-                      <a:solidFill>
-                        <a:schemeClr val="tx1"/>
-                      </a:solidFill>
-                      <a:prstDash val="solid"/>
-                      <a:round/>
-                      <a:headEnd type="none" w="med" len="med"/>
-                      <a:tailEnd type="none" w="med" len="med"/>
-                    </a:lnR>
-                    <a:lnT w="12700" cap="flat" cmpd="sng" algn="ctr">
-                      <a:solidFill>
-                        <a:schemeClr val="tx1"/>
-                      </a:solidFill>
-                      <a:prstDash val="solid"/>
-                      <a:round/>
-                      <a:headEnd type="none" w="med" len="med"/>
-                      <a:tailEnd type="none" w="med" len="med"/>
-                    </a:lnT>
-                    <a:lnB w="12700" cap="flat" cmpd="sng" algn="ctr">
-                      <a:solidFill>
-                        <a:schemeClr val="tx1"/>
-                      </a:solidFill>
-                      <a:prstDash val="solid"/>
-                      <a:round/>
-                      <a:headEnd type="none" w="med" len="med"/>
-                      <a:tailEnd type="none" w="med" len="med"/>
-                    </a:lnB>
-                    <a:noFill/>
-                  </a:tcPr>
-                </a:tc>
-                <a:tc>
-                  <a:txBody>
-                    <a:bodyPr/>
-                    <a:lstStyle/>
-                    <a:p>
-                      <a:pPr algn="ctr" fontAlgn="b">
-                        <a:buNone/>
-                      </a:pPr>
-                      <a:r>
-                        <a:rPr lang="en-US" sz="1200" b="0" i="0" u="none" strike="noStrike" dirty="0">
+                        <a:rPr lang="en-US" sz="1200" b="1" i="0" u="none" strike="noStrike" dirty="0">
                           <a:solidFill>
                             <a:srgbClr val="000000"/>
                           </a:solidFill>
@@ -8408,66 +14127,6 @@
                         <a:buNone/>
                       </a:pPr>
                       <a:r>
-                        <a:rPr lang="en-US" sz="1200" b="0" i="0" u="none" strike="noStrike">
-                          <a:solidFill>
-                            <a:srgbClr val="000000"/>
-                          </a:solidFill>
-                          <a:effectLst/>
-                          <a:latin typeface="Aptos Narrow" panose="020B0004020202020204" pitchFamily="34" charset="0"/>
-                        </a:rPr>
-                        <a:t>[(21, 10), (22, 11)]</a:t>
-                      </a:r>
-                    </a:p>
-                  </a:txBody>
-                  <a:tcPr marL="9525" marR="9525" marT="9525" marB="0" anchor="b">
-                    <a:lnL w="12700" cap="flat" cmpd="sng" algn="ctr">
-                      <a:solidFill>
-                        <a:schemeClr val="tx1"/>
-                      </a:solidFill>
-                      <a:prstDash val="solid"/>
-                      <a:round/>
-                      <a:headEnd type="none" w="med" len="med"/>
-                      <a:tailEnd type="none" w="med" len="med"/>
-                    </a:lnL>
-                    <a:lnR w="12700" cap="flat" cmpd="sng" algn="ctr">
-                      <a:solidFill>
-                        <a:schemeClr val="tx1"/>
-                      </a:solidFill>
-                      <a:prstDash val="solid"/>
-                      <a:round/>
-                      <a:headEnd type="none" w="med" len="med"/>
-                      <a:tailEnd type="none" w="med" len="med"/>
-                    </a:lnR>
-                    <a:lnT w="12700" cap="flat" cmpd="sng" algn="ctr">
-                      <a:solidFill>
-                        <a:schemeClr val="tx1"/>
-                      </a:solidFill>
-                      <a:prstDash val="solid"/>
-                      <a:round/>
-                      <a:headEnd type="none" w="med" len="med"/>
-                      <a:tailEnd type="none" w="med" len="med"/>
-                    </a:lnT>
-                    <a:lnB w="12700" cap="flat" cmpd="sng" algn="ctr">
-                      <a:solidFill>
-                        <a:schemeClr val="tx1"/>
-                      </a:solidFill>
-                      <a:prstDash val="solid"/>
-                      <a:round/>
-                      <a:headEnd type="none" w="med" len="med"/>
-                      <a:tailEnd type="none" w="med" len="med"/>
-                    </a:lnB>
-                    <a:noFill/>
-                  </a:tcPr>
-                </a:tc>
-                <a:tc>
-                  <a:txBody>
-                    <a:bodyPr/>
-                    <a:lstStyle/>
-                    <a:p>
-                      <a:pPr algn="ctr" fontAlgn="b">
-                        <a:buNone/>
-                      </a:pPr>
-                      <a:r>
                         <a:rPr lang="en-US" sz="1200" b="0" i="0" u="none" strike="noStrike" dirty="0">
                           <a:solidFill>
                             <a:srgbClr val="000000"/>
@@ -8475,7 +14134,7 @@
                           <a:effectLst/>
                           <a:latin typeface="Aptos Narrow" panose="020B0004020202020204" pitchFamily="34" charset="0"/>
                         </a:rPr>
-                        <a:t>2</a:t>
+                        <a:t>[(21, 10), (22, 11)]</a:t>
                       </a:r>
                     </a:p>
                   </a:txBody>
@@ -8516,127 +14175,9 @@
                       <a:headEnd type="none" w="med" len="med"/>
                       <a:tailEnd type="none" w="med" len="med"/>
                     </a:lnB>
-                    <a:noFill/>
-                  </a:tcPr>
-                </a:tc>
-                <a:tc>
-                  <a:txBody>
-                    <a:bodyPr/>
-                    <a:lstStyle/>
-                    <a:p>
-                      <a:pPr algn="ctr" fontAlgn="b">
-                        <a:buNone/>
-                      </a:pPr>
-                      <a:r>
-                        <a:rPr lang="en-US" sz="1200" b="0" i="0" u="none" strike="noStrike">
-                          <a:solidFill>
-                            <a:srgbClr val="000000"/>
-                          </a:solidFill>
-                          <a:effectLst/>
-                          <a:latin typeface="Aptos Narrow" panose="020B0004020202020204" pitchFamily="34" charset="0"/>
-                        </a:rPr>
-                        <a:t>3.35063117</a:t>
-                      </a:r>
-                    </a:p>
-                  </a:txBody>
-                  <a:tcPr marL="9525" marR="9525" marT="9525" marB="0" anchor="b">
-                    <a:lnL w="12700" cap="flat" cmpd="sng" algn="ctr">
-                      <a:solidFill>
-                        <a:schemeClr val="tx1"/>
-                      </a:solidFill>
-                      <a:prstDash val="solid"/>
-                      <a:round/>
-                      <a:headEnd type="none" w="med" len="med"/>
-                      <a:tailEnd type="none" w="med" len="med"/>
-                    </a:lnL>
-                    <a:lnR w="12700" cap="flat" cmpd="sng" algn="ctr">
-                      <a:solidFill>
-                        <a:schemeClr val="tx1"/>
-                      </a:solidFill>
-                      <a:prstDash val="solid"/>
-                      <a:round/>
-                      <a:headEnd type="none" w="med" len="med"/>
-                      <a:tailEnd type="none" w="med" len="med"/>
-                    </a:lnR>
-                    <a:lnT w="12700" cap="flat" cmpd="sng" algn="ctr">
-                      <a:solidFill>
-                        <a:schemeClr val="tx1"/>
-                      </a:solidFill>
-                      <a:prstDash val="solid"/>
-                      <a:round/>
-                      <a:headEnd type="none" w="med" len="med"/>
-                      <a:tailEnd type="none" w="med" len="med"/>
-                    </a:lnT>
-                    <a:lnB w="12700" cap="flat" cmpd="sng" algn="ctr">
-                      <a:solidFill>
-                        <a:schemeClr val="tx1"/>
-                      </a:solidFill>
-                      <a:prstDash val="solid"/>
-                      <a:round/>
-                      <a:headEnd type="none" w="med" len="med"/>
-                      <a:tailEnd type="none" w="med" len="med"/>
-                    </a:lnB>
-                    <a:noFill/>
-                  </a:tcPr>
-                </a:tc>
-                <a:tc>
-                  <a:txBody>
-                    <a:bodyPr/>
-                    <a:lstStyle/>
-                    <a:p>
-                      <a:pPr algn="ctr" fontAlgn="b">
-                        <a:buNone/>
-                      </a:pPr>
-                      <a:r>
-                        <a:rPr lang="en-US" sz="1200" b="0" i="0" u="none" strike="noStrike">
-                          <a:solidFill>
-                            <a:srgbClr val="000000"/>
-                          </a:solidFill>
-                          <a:effectLst/>
-                          <a:latin typeface="Aptos Narrow" panose="020B0004020202020204" pitchFamily="34" charset="0"/>
-                        </a:rPr>
-                        <a:t>AA</a:t>
-                      </a:r>
-                    </a:p>
-                  </a:txBody>
-                  <a:tcPr marL="9525" marR="9525" marT="9525" marB="0" anchor="b">
-                    <a:lnL w="12700" cap="flat" cmpd="sng" algn="ctr">
-                      <a:solidFill>
-                        <a:schemeClr val="tx1"/>
-                      </a:solidFill>
-                      <a:prstDash val="solid"/>
-                      <a:round/>
-                      <a:headEnd type="none" w="med" len="med"/>
-                      <a:tailEnd type="none" w="med" len="med"/>
-                    </a:lnL>
-                    <a:lnR w="12700" cap="flat" cmpd="sng" algn="ctr">
-                      <a:solidFill>
-                        <a:schemeClr val="tx1"/>
-                      </a:solidFill>
-                      <a:prstDash val="solid"/>
-                      <a:round/>
-                      <a:headEnd type="none" w="med" len="med"/>
-                      <a:tailEnd type="none" w="med" len="med"/>
-                    </a:lnR>
-                    <a:lnT w="12700" cap="flat" cmpd="sng" algn="ctr">
-                      <a:solidFill>
-                        <a:schemeClr val="tx1"/>
-                      </a:solidFill>
-                      <a:prstDash val="solid"/>
-                      <a:round/>
-                      <a:headEnd type="none" w="med" len="med"/>
-                      <a:tailEnd type="none" w="med" len="med"/>
-                    </a:lnT>
-                    <a:lnB w="12700" cap="flat" cmpd="sng" algn="ctr">
-                      <a:solidFill>
-                        <a:schemeClr val="tx1"/>
-                      </a:solidFill>
-                      <a:prstDash val="solid"/>
-                      <a:round/>
-                      <a:headEnd type="none" w="med" len="med"/>
-                      <a:tailEnd type="none" w="med" len="med"/>
-                    </a:lnB>
-                    <a:noFill/>
+                    <a:solidFill>
+                      <a:schemeClr val="accent2"/>
+                    </a:solidFill>
                   </a:tcPr>
                 </a:tc>
                 <a:tc>
@@ -8655,7 +14196,7 @@
                           <a:effectLst/>
                           <a:latin typeface="Aptos Narrow" panose="020B0004020202020204" pitchFamily="34" charset="0"/>
                         </a:rPr>
-                        <a:t>AA</a:t>
+                        <a:t>2</a:t>
                       </a:r>
                     </a:p>
                   </a:txBody>
@@ -8696,7 +14237,195 @@
                       <a:headEnd type="none" w="med" len="med"/>
                       <a:tailEnd type="none" w="med" len="med"/>
                     </a:lnB>
-                    <a:noFill/>
+                    <a:solidFill>
+                      <a:schemeClr val="accent2"/>
+                    </a:solidFill>
+                  </a:tcPr>
+                </a:tc>
+                <a:tc>
+                  <a:txBody>
+                    <a:bodyPr/>
+                    <a:lstStyle/>
+                    <a:p>
+                      <a:pPr algn="ctr" fontAlgn="b">
+                        <a:buNone/>
+                      </a:pPr>
+                      <a:r>
+                        <a:rPr lang="en-US" sz="1200" b="0" i="0" u="none" strike="noStrike" dirty="0">
+                          <a:solidFill>
+                            <a:srgbClr val="000000"/>
+                          </a:solidFill>
+                          <a:effectLst/>
+                          <a:latin typeface="Aptos Narrow" panose="020B0004020202020204" pitchFamily="34" charset="0"/>
+                        </a:rPr>
+                        <a:t>3.35063117</a:t>
+                      </a:r>
+                    </a:p>
+                  </a:txBody>
+                  <a:tcPr marL="9525" marR="9525" marT="9525" marB="0" anchor="b">
+                    <a:lnL w="12700" cap="flat" cmpd="sng" algn="ctr">
+                      <a:solidFill>
+                        <a:schemeClr val="tx1"/>
+                      </a:solidFill>
+                      <a:prstDash val="solid"/>
+                      <a:round/>
+                      <a:headEnd type="none" w="med" len="med"/>
+                      <a:tailEnd type="none" w="med" len="med"/>
+                    </a:lnL>
+                    <a:lnR w="12700" cap="flat" cmpd="sng" algn="ctr">
+                      <a:solidFill>
+                        <a:schemeClr val="tx1"/>
+                      </a:solidFill>
+                      <a:prstDash val="solid"/>
+                      <a:round/>
+                      <a:headEnd type="none" w="med" len="med"/>
+                      <a:tailEnd type="none" w="med" len="med"/>
+                    </a:lnR>
+                    <a:lnT w="12700" cap="flat" cmpd="sng" algn="ctr">
+                      <a:solidFill>
+                        <a:schemeClr val="tx1"/>
+                      </a:solidFill>
+                      <a:prstDash val="solid"/>
+                      <a:round/>
+                      <a:headEnd type="none" w="med" len="med"/>
+                      <a:tailEnd type="none" w="med" len="med"/>
+                    </a:lnT>
+                    <a:lnB w="12700" cap="flat" cmpd="sng" algn="ctr">
+                      <a:solidFill>
+                        <a:schemeClr val="tx1"/>
+                      </a:solidFill>
+                      <a:prstDash val="solid"/>
+                      <a:round/>
+                      <a:headEnd type="none" w="med" len="med"/>
+                      <a:tailEnd type="none" w="med" len="med"/>
+                    </a:lnB>
+                    <a:solidFill>
+                      <a:schemeClr val="accent2"/>
+                    </a:solidFill>
+                  </a:tcPr>
+                </a:tc>
+                <a:tc>
+                  <a:txBody>
+                    <a:bodyPr/>
+                    <a:lstStyle/>
+                    <a:p>
+                      <a:pPr algn="ctr" fontAlgn="b">
+                        <a:buNone/>
+                      </a:pPr>
+                      <a:r>
+                        <a:rPr lang="en-US" sz="1200" b="1" i="0" u="none" strike="noStrike" dirty="0">
+                          <a:solidFill>
+                            <a:srgbClr val="000000"/>
+                          </a:solidFill>
+                          <a:effectLst/>
+                          <a:latin typeface="Aptos Narrow" panose="020B0004020202020204" pitchFamily="34" charset="0"/>
+                        </a:rPr>
+                        <a:t>AA</a:t>
+                      </a:r>
+                    </a:p>
+                  </a:txBody>
+                  <a:tcPr marL="9525" marR="9525" marT="9525" marB="0" anchor="b">
+                    <a:lnL w="12700" cap="flat" cmpd="sng" algn="ctr">
+                      <a:solidFill>
+                        <a:schemeClr val="tx1"/>
+                      </a:solidFill>
+                      <a:prstDash val="solid"/>
+                      <a:round/>
+                      <a:headEnd type="none" w="med" len="med"/>
+                      <a:tailEnd type="none" w="med" len="med"/>
+                    </a:lnL>
+                    <a:lnR w="12700" cap="flat" cmpd="sng" algn="ctr">
+                      <a:solidFill>
+                        <a:schemeClr val="tx1"/>
+                      </a:solidFill>
+                      <a:prstDash val="solid"/>
+                      <a:round/>
+                      <a:headEnd type="none" w="med" len="med"/>
+                      <a:tailEnd type="none" w="med" len="med"/>
+                    </a:lnR>
+                    <a:lnT w="12700" cap="flat" cmpd="sng" algn="ctr">
+                      <a:solidFill>
+                        <a:schemeClr val="tx1"/>
+                      </a:solidFill>
+                      <a:prstDash val="solid"/>
+                      <a:round/>
+                      <a:headEnd type="none" w="med" len="med"/>
+                      <a:tailEnd type="none" w="med" len="med"/>
+                    </a:lnT>
+                    <a:lnB w="12700" cap="flat" cmpd="sng" algn="ctr">
+                      <a:solidFill>
+                        <a:schemeClr val="tx1"/>
+                      </a:solidFill>
+                      <a:prstDash val="solid"/>
+                      <a:round/>
+                      <a:headEnd type="none" w="med" len="med"/>
+                      <a:tailEnd type="none" w="med" len="med"/>
+                    </a:lnB>
+                    <a:solidFill>
+                      <a:schemeClr val="accent2"/>
+                    </a:solidFill>
+                  </a:tcPr>
+                </a:tc>
+                <a:tc>
+                  <a:txBody>
+                    <a:bodyPr/>
+                    <a:lstStyle/>
+                    <a:p>
+                      <a:pPr algn="ctr" fontAlgn="b">
+                        <a:buNone/>
+                      </a:pPr>
+                      <a:r>
+                        <a:rPr lang="en-US" sz="1200" b="1" i="0" u="none" strike="noStrike" dirty="0">
+                          <a:solidFill>
+                            <a:srgbClr val="000000"/>
+                          </a:solidFill>
+                          <a:effectLst/>
+                          <a:latin typeface="Aptos Narrow" panose="020B0004020202020204" pitchFamily="34" charset="0"/>
+                        </a:rPr>
+                        <a:t>AA</a:t>
+                      </a:r>
+                    </a:p>
+                  </a:txBody>
+                  <a:tcPr marL="9525" marR="9525" marT="9525" marB="0" anchor="b">
+                    <a:lnL w="12700" cap="flat" cmpd="sng" algn="ctr">
+                      <a:solidFill>
+                        <a:schemeClr val="tx1"/>
+                      </a:solidFill>
+                      <a:prstDash val="solid"/>
+                      <a:round/>
+                      <a:headEnd type="none" w="med" len="med"/>
+                      <a:tailEnd type="none" w="med" len="med"/>
+                    </a:lnL>
+                    <a:lnR w="12700" cap="flat" cmpd="sng" algn="ctr">
+                      <a:solidFill>
+                        <a:schemeClr val="tx1"/>
+                      </a:solidFill>
+                      <a:prstDash val="solid"/>
+                      <a:round/>
+                      <a:headEnd type="none" w="med" len="med"/>
+                      <a:tailEnd type="none" w="med" len="med"/>
+                    </a:lnR>
+                    <a:lnT w="12700" cap="flat" cmpd="sng" algn="ctr">
+                      <a:solidFill>
+                        <a:schemeClr val="tx1"/>
+                      </a:solidFill>
+                      <a:prstDash val="solid"/>
+                      <a:round/>
+                      <a:headEnd type="none" w="med" len="med"/>
+                      <a:tailEnd type="none" w="med" len="med"/>
+                    </a:lnT>
+                    <a:lnB w="12700" cap="flat" cmpd="sng" algn="ctr">
+                      <a:solidFill>
+                        <a:schemeClr val="tx1"/>
+                      </a:solidFill>
+                      <a:prstDash val="solid"/>
+                      <a:round/>
+                      <a:headEnd type="none" w="med" len="med"/>
+                      <a:tailEnd type="none" w="med" len="med"/>
+                    </a:lnB>
+                    <a:solidFill>
+                      <a:schemeClr val="accent2"/>
+                    </a:solidFill>
                   </a:tcPr>
                 </a:tc>
                 <a:extLst>
@@ -8763,7 +14492,9 @@
                       <a:headEnd type="none" w="med" len="med"/>
                       <a:tailEnd type="none" w="med" len="med"/>
                     </a:lnB>
-                    <a:noFill/>
+                    <a:solidFill>
+                      <a:schemeClr val="accent2"/>
+                    </a:solidFill>
                   </a:tcPr>
                 </a:tc>
                 <a:tc>
@@ -8823,7 +14554,9 @@
                       <a:headEnd type="none" w="med" len="med"/>
                       <a:tailEnd type="none" w="med" len="med"/>
                     </a:lnB>
-                    <a:noFill/>
+                    <a:solidFill>
+                      <a:schemeClr val="accent2"/>
+                    </a:solidFill>
                   </a:tcPr>
                 </a:tc>
                 <a:tc>
@@ -8883,7 +14616,9 @@
                       <a:headEnd type="none" w="med" len="med"/>
                       <a:tailEnd type="none" w="med" len="med"/>
                     </a:lnB>
-                    <a:noFill/>
+                    <a:solidFill>
+                      <a:schemeClr val="accent2"/>
+                    </a:solidFill>
                   </a:tcPr>
                 </a:tc>
                 <a:tc>
@@ -8895,7 +14630,7 @@
                         <a:buNone/>
                       </a:pPr>
                       <a:r>
-                        <a:rPr lang="en-US" sz="1200" b="0" i="0" u="none" strike="noStrike">
+                        <a:rPr lang="en-US" sz="1200" b="1" i="0" u="none" strike="noStrike">
                           <a:solidFill>
                             <a:srgbClr val="000000"/>
                           </a:solidFill>
@@ -8943,7 +14678,9 @@
                       <a:headEnd type="none" w="med" len="med"/>
                       <a:tailEnd type="none" w="med" len="med"/>
                     </a:lnB>
-                    <a:noFill/>
+                    <a:solidFill>
+                      <a:schemeClr val="accent2"/>
+                    </a:solidFill>
                   </a:tcPr>
                 </a:tc>
                 <a:tc>
@@ -8955,7 +14692,7 @@
                         <a:buNone/>
                       </a:pPr>
                       <a:r>
-                        <a:rPr lang="en-US" sz="1200" b="0" i="0" u="none" strike="noStrike" dirty="0">
+                        <a:rPr lang="en-US" sz="1200" b="1" i="0" u="none" strike="noStrike" dirty="0">
                           <a:solidFill>
                             <a:srgbClr val="000000"/>
                           </a:solidFill>
@@ -9003,7 +14740,9 @@
                       <a:headEnd type="none" w="med" len="med"/>
                       <a:tailEnd type="none" w="med" len="med"/>
                     </a:lnB>
-                    <a:noFill/>
+                    <a:solidFill>
+                      <a:schemeClr val="accent2"/>
+                    </a:solidFill>
                   </a:tcPr>
                 </a:tc>
                 <a:extLst>
@@ -9070,7 +14809,71 @@
                       <a:headEnd type="none" w="med" len="med"/>
                       <a:tailEnd type="none" w="med" len="med"/>
                     </a:lnB>
-                    <a:noFill/>
+                    <a:solidFill>
+                      <a:schemeClr val="accent2"/>
+                    </a:solidFill>
+                  </a:tcPr>
+                </a:tc>
+                <a:tc>
+                  <a:txBody>
+                    <a:bodyPr/>
+                    <a:lstStyle/>
+                    <a:p>
+                      <a:pPr algn="ctr" fontAlgn="b">
+                        <a:buNone/>
+                      </a:pPr>
+                      <a:r>
+                        <a:rPr lang="en-US" sz="1200" b="0" i="0" u="none" strike="noStrike" dirty="0">
+                          <a:solidFill>
+                            <a:srgbClr val="000000"/>
+                          </a:solidFill>
+                          <a:effectLst/>
+                          <a:latin typeface="Aptos Narrow" panose="020B0004020202020204" pitchFamily="34" charset="0"/>
+                        </a:rPr>
+                        <a:t>2</a:t>
+                      </a:r>
+                    </a:p>
+                  </a:txBody>
+                  <a:tcPr marL="9525" marR="9525" marT="9525" marB="0" anchor="b">
+                    <a:lnL w="12700" cap="flat" cmpd="sng" algn="ctr">
+                      <a:solidFill>
+                        <a:schemeClr val="tx1"/>
+                      </a:solidFill>
+                      <a:prstDash val="solid"/>
+                      <a:round/>
+                      <a:headEnd type="none" w="med" len="med"/>
+                      <a:tailEnd type="none" w="med" len="med"/>
+                    </a:lnL>
+                    <a:lnR w="12700" cap="flat" cmpd="sng" algn="ctr">
+                      <a:solidFill>
+                        <a:schemeClr val="tx1"/>
+                      </a:solidFill>
+                      <a:prstDash val="solid"/>
+                      <a:round/>
+                      <a:headEnd type="none" w="med" len="med"/>
+                      <a:tailEnd type="none" w="med" len="med"/>
+                    </a:lnR>
+                    <a:lnT w="12700" cap="flat" cmpd="sng" algn="ctr">
+                      <a:solidFill>
+                        <a:schemeClr val="tx1"/>
+                      </a:solidFill>
+                      <a:prstDash val="solid"/>
+                      <a:round/>
+                      <a:headEnd type="none" w="med" len="med"/>
+                      <a:tailEnd type="none" w="med" len="med"/>
+                    </a:lnT>
+                    <a:lnB w="12700" cap="flat" cmpd="sng" algn="ctr">
+                      <a:solidFill>
+                        <a:schemeClr val="tx1"/>
+                      </a:solidFill>
+                      <a:prstDash val="solid"/>
+                      <a:round/>
+                      <a:headEnd type="none" w="med" len="med"/>
+                      <a:tailEnd type="none" w="med" len="med"/>
+                    </a:lnB>
+                    <a:solidFill>
+                      <a:schemeClr val="accent2"/>
+                    </a:solidFill>
                   </a:tcPr>
                 </a:tc>
                 <a:tc>
@@ -9089,7 +14892,7 @@
                           <a:effectLst/>
                           <a:latin typeface="Aptos Narrow" panose="020B0004020202020204" pitchFamily="34" charset="0"/>
                         </a:rPr>
-                        <a:t>2</a:t>
+                        <a:t>3.2029027</a:t>
                       </a:r>
                     </a:p>
                   </a:txBody>
@@ -9130,7 +14933,9 @@
                       <a:headEnd type="none" w="med" len="med"/>
                       <a:tailEnd type="none" w="med" len="med"/>
                     </a:lnB>
-                    <a:noFill/>
+                    <a:solidFill>
+                      <a:schemeClr val="accent2"/>
+                    </a:solidFill>
                   </a:tcPr>
                 </a:tc>
                 <a:tc>
@@ -9142,14 +14947,14 @@
                         <a:buNone/>
                       </a:pPr>
                       <a:r>
-                        <a:rPr lang="en-US" sz="1200" b="0" i="0" u="none" strike="noStrike">
+                        <a:rPr lang="en-US" sz="1200" b="1" i="0" u="none" strike="noStrike">
                           <a:solidFill>
                             <a:srgbClr val="000000"/>
                           </a:solidFill>
                           <a:effectLst/>
                           <a:latin typeface="Aptos Narrow" panose="020B0004020202020204" pitchFamily="34" charset="0"/>
                         </a:rPr>
-                        <a:t>3.2029027</a:t>
+                        <a:t>AA</a:t>
                       </a:r>
                     </a:p>
                   </a:txBody>
@@ -9190,7 +14995,9 @@
                       <a:headEnd type="none" w="med" len="med"/>
                       <a:tailEnd type="none" w="med" len="med"/>
                     </a:lnB>
-                    <a:noFill/>
+                    <a:solidFill>
+                      <a:schemeClr val="accent2"/>
+                    </a:solidFill>
                   </a:tcPr>
                 </a:tc>
                 <a:tc>
@@ -9202,7 +15009,7 @@
                         <a:buNone/>
                       </a:pPr>
                       <a:r>
-                        <a:rPr lang="en-US" sz="1200" b="0" i="0" u="none" strike="noStrike">
+                        <a:rPr lang="en-US" sz="1200" b="1" i="0" u="none" strike="noStrike" dirty="0">
                           <a:solidFill>
                             <a:srgbClr val="000000"/>
                           </a:solidFill>
@@ -9250,67 +15057,9 @@
                       <a:headEnd type="none" w="med" len="med"/>
                       <a:tailEnd type="none" w="med" len="med"/>
                     </a:lnB>
-                    <a:noFill/>
-                  </a:tcPr>
-                </a:tc>
-                <a:tc>
-                  <a:txBody>
-                    <a:bodyPr/>
-                    <a:lstStyle/>
-                    <a:p>
-                      <a:pPr algn="ctr" fontAlgn="b">
-                        <a:buNone/>
-                      </a:pPr>
-                      <a:r>
-                        <a:rPr lang="en-US" sz="1200" b="0" i="0" u="none" strike="noStrike" dirty="0">
-                          <a:solidFill>
-                            <a:srgbClr val="000000"/>
-                          </a:solidFill>
-                          <a:effectLst/>
-                          <a:latin typeface="Aptos Narrow" panose="020B0004020202020204" pitchFamily="34" charset="0"/>
-                        </a:rPr>
-                        <a:t>AA</a:t>
-                      </a:r>
-                    </a:p>
-                  </a:txBody>
-                  <a:tcPr marL="9525" marR="9525" marT="9525" marB="0" anchor="b">
-                    <a:lnL w="12700" cap="flat" cmpd="sng" algn="ctr">
-                      <a:solidFill>
-                        <a:schemeClr val="tx1"/>
-                      </a:solidFill>
-                      <a:prstDash val="solid"/>
-                      <a:round/>
-                      <a:headEnd type="none" w="med" len="med"/>
-                      <a:tailEnd type="none" w="med" len="med"/>
-                    </a:lnL>
-                    <a:lnR w="12700" cap="flat" cmpd="sng" algn="ctr">
-                      <a:solidFill>
-                        <a:schemeClr val="tx1"/>
-                      </a:solidFill>
-                      <a:prstDash val="solid"/>
-                      <a:round/>
-                      <a:headEnd type="none" w="med" len="med"/>
-                      <a:tailEnd type="none" w="med" len="med"/>
-                    </a:lnR>
-                    <a:lnT w="12700" cap="flat" cmpd="sng" algn="ctr">
-                      <a:solidFill>
-                        <a:schemeClr val="tx1"/>
-                      </a:solidFill>
-                      <a:prstDash val="solid"/>
-                      <a:round/>
-                      <a:headEnd type="none" w="med" len="med"/>
-                      <a:tailEnd type="none" w="med" len="med"/>
-                    </a:lnT>
-                    <a:lnB w="12700" cap="flat" cmpd="sng" algn="ctr">
-                      <a:solidFill>
-                        <a:schemeClr val="tx1"/>
-                      </a:solidFill>
-                      <a:prstDash val="solid"/>
-                      <a:round/>
-                      <a:headEnd type="none" w="med" len="med"/>
-                      <a:tailEnd type="none" w="med" len="med"/>
-                    </a:lnB>
-                    <a:noFill/>
+                    <a:solidFill>
+                      <a:schemeClr val="accent2"/>
+                    </a:solidFill>
                   </a:tcPr>
                 </a:tc>
                 <a:extLst>
@@ -9371,8 +15120,8 @@
         </p:nvSpPr>
         <p:spPr>
           <a:xfrm>
-            <a:off x="0" y="-4841"/>
-            <a:ext cx="10515600" cy="1325563"/>
+            <a:off x="173038" y="0"/>
+            <a:ext cx="10515600" cy="1099870"/>
           </a:xfrm>
         </p:spPr>
         <p:txBody>
@@ -9381,7 +15130,7 @@
           <a:p>
             <a:r>
               <a:rPr lang="en-US" dirty="0"/>
-              <a:t>Bootstrapping Notes </a:t>
+              <a:t>Bootstrapping Scores</a:t>
             </a:r>
           </a:p>
         </p:txBody>
@@ -9404,7 +15153,7 @@
         </p:nvSpPr>
         <p:spPr>
           <a:xfrm>
-            <a:off x="606845" y="1042720"/>
+            <a:off x="621133" y="879474"/>
             <a:ext cx="10515600" cy="4351338"/>
           </a:xfrm>
         </p:spPr>
@@ -9414,13 +15163,21 @@
           <a:p>
             <a:r>
               <a:rPr lang="en-US" dirty="0"/>
-              <a:t>Concept – is our set of diagonal candidates nonrandom, conditional on the observed score distribution </a:t>
+              <a:t>Concept – is our set of diagonal candidates nonrandom, conditional on the observed score distribution?</a:t>
             </a:r>
           </a:p>
           <a:p>
             <a:r>
               <a:rPr lang="en-US" dirty="0"/>
-              <a:t>Same shuffle applied to rows and columns – do not shuffle both independently as the goal is to break the position-wise relationship </a:t>
+              <a:t>Same shuffle applied to rows and columns – do not shuffle both axes </a:t>
+            </a:r>
+            <a:r>
+              <a:rPr lang="en-US" i="1" dirty="0"/>
+              <a:t>independently, </a:t>
+            </a:r>
+            <a:r>
+              <a:rPr lang="en-US" dirty="0"/>
+              <a:t>as the goal is to break the position-wise relationship </a:t>
             </a:r>
           </a:p>
           <a:p>
@@ -9433,19 +15190,15 @@
             <a:pPr lvl="1"/>
             <a:r>
               <a:rPr lang="en-US" dirty="0"/>
-              <a:t>Some iterations might have no output if threshold met – fix with default to zero</a:t>
+              <a:t>Thresholding with IC-JSD – want a more objective threshold, go for information only </a:t>
             </a:r>
           </a:p>
           <a:p>
             <a:pPr lvl="1"/>
             <a:r>
-              <a:rPr lang="en-US" i="1" dirty="0"/>
-              <a:t>Carrying down same threshold from original metrics</a:t>
+              <a:rPr lang="en-US" dirty="0"/>
+              <a:t>Some iterations might have no output if threshold isn’t met – fix with default zero</a:t>
             </a:r>
-            <a:endParaRPr lang="en-US" dirty="0"/>
-          </a:p>
-          <a:p>
-            <a:endParaRPr lang="en-US" dirty="0"/>
           </a:p>
         </p:txBody>
       </p:sp>
@@ -9471,8 +15224,8 @@
         </p:blipFill>
         <p:spPr>
           <a:xfrm>
-            <a:off x="444500" y="4893064"/>
-            <a:ext cx="7734300" cy="1282700"/>
+            <a:off x="173038" y="4933950"/>
+            <a:ext cx="6384925" cy="1058912"/>
           </a:xfrm>
           <a:prstGeom prst="rect">
             <a:avLst/>
@@ -9502,8 +15255,8 @@
         </p:blipFill>
         <p:spPr>
           <a:xfrm>
-            <a:off x="6488935" y="5674769"/>
-            <a:ext cx="5563518" cy="1271218"/>
+            <a:off x="6405193" y="5575300"/>
+            <a:ext cx="5613769" cy="1282700"/>
           </a:xfrm>
           <a:prstGeom prst="rect">
             <a:avLst/>
@@ -9597,13 +15350,13 @@
         </p:nvSpPr>
         <p:spPr>
           <a:xfrm>
-            <a:off x="422564" y="1035915"/>
-            <a:ext cx="10515600" cy="4351338"/>
+            <a:off x="422564" y="1035914"/>
+            <a:ext cx="10515600" cy="5193435"/>
           </a:xfrm>
         </p:spPr>
         <p:txBody>
           <a:bodyPr>
-            <a:normAutofit fontScale="85000" lnSpcReduction="20000"/>
+            <a:normAutofit fontScale="92500" lnSpcReduction="10000"/>
           </a:bodyPr>
           <a:lstStyle/>
           <a:p>
@@ -9613,7 +15366,7 @@
             </a:r>
             <a:r>
               <a:rPr lang="en-US" dirty="0"/>
-              <a:t>  - compute base proportions in aligned sequences</a:t>
+              <a:t>  - compute BP proportions in aligned sequences</a:t>
             </a:r>
           </a:p>
           <a:p>
@@ -9661,9 +15414,10 @@
           <a:p>
             <a:pPr lvl="1"/>
             <a:r>
-              <a:rPr lang="en-US" dirty="0"/>
-              <a:t>Pearson</a:t>
+              <a:rPr lang="en-US" dirty="0" err="1"/>
+              <a:t>pearson</a:t>
             </a:r>
+            <a:endParaRPr lang="en-US" dirty="0"/>
           </a:p>
           <a:p>
             <a:r>
@@ -13510,7 +19264,7 @@
           <a:p>
             <a:r>
               <a:rPr lang="en-US" dirty="0"/>
-              <a:t>Ex1 Mo1 80pct threshold</a:t>
+              <a:t>Ex1 Mo1 80pct Reverse</a:t>
             </a:r>
           </a:p>
         </p:txBody>

--- a/Presentations/May Motif Gallery.pptx
+++ b/Presentations/May Motif Gallery.pptx
@@ -5,7 +5,7 @@
     <p:sldMasterId id="2147483648" r:id="rId1"/>
   </p:sldMasterIdLst>
   <p:notesMasterIdLst>
-    <p:notesMasterId r:id="rId22"/>
+    <p:notesMasterId r:id="rId25"/>
   </p:notesMasterIdLst>
   <p:sldIdLst>
     <p:sldId id="256" r:id="rId2"/>
@@ -28,6 +28,9 @@
     <p:sldId id="273" r:id="rId19"/>
     <p:sldId id="274" r:id="rId20"/>
     <p:sldId id="275" r:id="rId21"/>
+    <p:sldId id="279" r:id="rId22"/>
+    <p:sldId id="276" r:id="rId23"/>
+    <p:sldId id="277" r:id="rId24"/>
   </p:sldIdLst>
   <p:sldSz cx="12192000" cy="6858000"/>
   <p:notesSz cx="6858000" cy="9144000"/>
@@ -4047,7 +4050,7 @@
           </p:nvPr>
         </p:nvPicPr>
         <p:blipFill>
-          <a:blip r:embed="rId2"/>
+          <a:blip/>
           <a:stretch>
             <a:fillRect/>
           </a:stretch>
@@ -4074,7 +4077,7 @@
           <p:nvPr/>
         </p:nvPicPr>
         <p:blipFill>
-          <a:blip r:embed="rId3"/>
+          <a:blip/>
           <a:stretch>
             <a:fillRect/>
           </a:stretch>
@@ -5572,7 +5575,7 @@
           <p:nvPr/>
         </p:nvPicPr>
         <p:blipFill>
-          <a:blip r:embed="rId2"/>
+          <a:blip/>
           <a:stretch>
             <a:fillRect/>
           </a:stretch>
@@ -5602,7 +5605,7 @@
           <p:nvPr/>
         </p:nvPicPr>
         <p:blipFill>
-          <a:blip r:embed="rId3"/>
+          <a:blip/>
           <a:stretch>
             <a:fillRect/>
           </a:stretch>
@@ -5632,7 +5635,7 @@
           <p:nvPr/>
         </p:nvPicPr>
         <p:blipFill>
-          <a:blip r:embed="rId4"/>
+          <a:blip/>
           <a:stretch>
             <a:fillRect/>
           </a:stretch>
@@ -5739,7 +5742,7 @@
           <p:nvPr/>
         </p:nvPicPr>
         <p:blipFill>
-          <a:blip r:embed="rId2"/>
+          <a:blip/>
           <a:stretch>
             <a:fillRect/>
           </a:stretch>
@@ -7292,7 +7295,7 @@
           <p:nvPr/>
         </p:nvPicPr>
         <p:blipFill>
-          <a:blip r:embed="rId3"/>
+          <a:blip/>
           <a:stretch>
             <a:fillRect/>
           </a:stretch>
@@ -7425,7 +7428,7 @@
           <p:nvPr/>
         </p:nvPicPr>
         <p:blipFill>
-          <a:blip r:embed="rId2"/>
+          <a:blip/>
           <a:stretch>
             <a:fillRect/>
           </a:stretch>
@@ -7455,7 +7458,7 @@
           <p:nvPr/>
         </p:nvPicPr>
         <p:blipFill>
-          <a:blip r:embed="rId3"/>
+          <a:blip/>
           <a:stretch>
             <a:fillRect/>
           </a:stretch>
@@ -7485,7 +7488,7 @@
           <p:nvPr/>
         </p:nvPicPr>
         <p:blipFill>
-          <a:blip r:embed="rId4"/>
+          <a:blip/>
           <a:stretch>
             <a:fillRect/>
           </a:stretch>
@@ -7595,7 +7598,7 @@
           <p:nvPr/>
         </p:nvPicPr>
         <p:blipFill>
-          <a:blip r:embed="rId2"/>
+          <a:blip/>
           <a:stretch>
             <a:fillRect/>
           </a:stretch>
@@ -9382,7 +9385,7 @@
           <p:nvPr/>
         </p:nvPicPr>
         <p:blipFill>
-          <a:blip r:embed="rId3"/>
+          <a:blip/>
           <a:stretch>
             <a:fillRect/>
           </a:stretch>
@@ -9444,7 +9447,7 @@
           </p:nvPr>
         </p:nvPicPr>
         <p:blipFill>
-          <a:blip r:embed="rId3">
+          <a:blip>
             <a:extLst>
               <a:ext uri="{28A0092B-C50C-407E-A947-70E740481C1C}">
                 <a14:useLocalDpi xmlns:a14="http://schemas.microsoft.com/office/drawing/2010/main" val="0"/>
@@ -9491,7 +9494,7 @@
         <p:spPr>
           <a:xfrm>
             <a:off x="5101272" y="1331367"/>
-            <a:ext cx="6404611" cy="5309146"/>
+            <a:ext cx="6800216" cy="4847481"/>
           </a:xfrm>
           <a:prstGeom prst="rect">
             <a:avLst/>
@@ -9665,7 +9668,7 @@
           <p:nvPr/>
         </p:nvPicPr>
         <p:blipFill>
-          <a:blip r:embed="rId4"/>
+          <a:blip/>
           <a:srcRect b="17782"/>
           <a:stretch>
             <a:fillRect/>
@@ -11017,7 +11020,7 @@
           <p:nvPr/>
         </p:nvPicPr>
         <p:blipFill>
-          <a:blip r:embed="rId2"/>
+          <a:blip/>
           <a:stretch>
             <a:fillRect/>
           </a:stretch>
@@ -11047,7 +11050,7 @@
           <p:nvPr/>
         </p:nvPicPr>
         <p:blipFill>
-          <a:blip r:embed="rId3"/>
+          <a:blip/>
           <a:srcRect b="17782"/>
           <a:stretch>
             <a:fillRect/>
@@ -11162,13 +11165,13 @@
           <a:p>
             <a:r>
               <a:rPr lang="en-US" dirty="0"/>
-              <a:t>Compute IC. If the IC is greater then discard the change, if not, discard the change </a:t>
+              <a:t>Compute IC. If the IC is lower then discard the change, if not, discard the change </a:t>
             </a:r>
           </a:p>
           <a:p>
             <a:r>
               <a:rPr lang="en-US" dirty="0"/>
-              <a:t>Goal is to make the IC go up high to a total of X bits </a:t>
+              <a:t>Goal is to construct high-IC situation </a:t>
             </a:r>
           </a:p>
           <a:p>
@@ -11183,6 +11186,1931 @@
     <p:extLst>
       <p:ext uri="{BB962C8B-B14F-4D97-AF65-F5344CB8AC3E}">
         <p14:creationId xmlns:p14="http://schemas.microsoft.com/office/powerpoint/2010/main" val="2932112272"/>
+      </p:ext>
+    </p:extLst>
+  </p:cSld>
+  <p:clrMapOvr>
+    <a:masterClrMapping/>
+  </p:clrMapOvr>
+</p:sld>
+</file>
+
+<file path=ppt/slides/slide21.xml><?xml version="1.0" encoding="utf-8"?>
+<p:sld xmlns:a="http://schemas.openxmlformats.org/drawingml/2006/main" xmlns:r="http://schemas.openxmlformats.org/officeDocument/2006/relationships" xmlns:p="http://schemas.openxmlformats.org/presentationml/2006/main">
+  <p:cSld>
+    <p:spTree>
+      <p:nvGrpSpPr>
+        <p:cNvPr id="1" name="">
+          <a:extLst>
+            <a:ext uri="{FF2B5EF4-FFF2-40B4-BE49-F238E27FC236}">
+              <a16:creationId xmlns:a16="http://schemas.microsoft.com/office/drawing/2014/main" id="{534D654E-AC08-0B7D-0ACA-9DD17346EB45}"/>
+            </a:ext>
+          </a:extLst>
+        </p:cNvPr>
+        <p:cNvGrpSpPr/>
+        <p:nvPr/>
+      </p:nvGrpSpPr>
+      <p:grpSpPr>
+        <a:xfrm>
+          <a:off x="0" y="0"/>
+          <a:ext cx="0" cy="0"/>
+          <a:chOff x="0" y="0"/>
+          <a:chExt cx="0" cy="0"/>
+        </a:xfrm>
+      </p:grpSpPr>
+      <p:sp>
+        <p:nvSpPr>
+          <p:cNvPr id="2" name="Title 1">
+            <a:extLst>
+              <a:ext uri="{FF2B5EF4-FFF2-40B4-BE49-F238E27FC236}">
+                <a16:creationId xmlns:a16="http://schemas.microsoft.com/office/drawing/2014/main" id="{B2FED843-2EA6-EBDA-5BA7-8A67A312321A}"/>
+              </a:ext>
+            </a:extLst>
+          </p:cNvPr>
+          <p:cNvSpPr>
+            <a:spLocks noGrp="1"/>
+          </p:cNvSpPr>
+          <p:nvPr>
+            <p:ph type="ctrTitle"/>
+          </p:nvPr>
+        </p:nvSpPr>
+        <p:spPr/>
+        <p:txBody>
+          <a:bodyPr/>
+          <a:lstStyle/>
+          <a:p>
+            <a:r>
+              <a:rPr lang="en-US" dirty="0" err="1"/>
+              <a:t>CollecTF</a:t>
+            </a:r>
+            <a:r>
+              <a:rPr lang="en-US" dirty="0"/>
+              <a:t> Gallery</a:t>
+            </a:r>
+          </a:p>
+        </p:txBody>
+      </p:sp>
+      <p:sp>
+        <p:nvSpPr>
+          <p:cNvPr id="3" name="Subtitle 2">
+            <a:extLst>
+              <a:ext uri="{FF2B5EF4-FFF2-40B4-BE49-F238E27FC236}">
+                <a16:creationId xmlns:a16="http://schemas.microsoft.com/office/drawing/2014/main" id="{FCE093F6-974A-AF7A-6982-521400A84638}"/>
+              </a:ext>
+            </a:extLst>
+          </p:cNvPr>
+          <p:cNvSpPr>
+            <a:spLocks noGrp="1"/>
+          </p:cNvSpPr>
+          <p:nvPr>
+            <p:ph type="subTitle" idx="1"/>
+          </p:nvPr>
+        </p:nvSpPr>
+        <p:spPr/>
+        <p:txBody>
+          <a:bodyPr/>
+          <a:lstStyle/>
+          <a:p>
+            <a:r>
+              <a:rPr lang="en-US"/>
+              <a:t>26 May </a:t>
+            </a:r>
+            <a:r>
+              <a:rPr lang="en-US" dirty="0"/>
+              <a:t>2026</a:t>
+            </a:r>
+          </a:p>
+        </p:txBody>
+      </p:sp>
+    </p:spTree>
+    <p:extLst>
+      <p:ext uri="{BB962C8B-B14F-4D97-AF65-F5344CB8AC3E}">
+        <p14:creationId xmlns:p14="http://schemas.microsoft.com/office/powerpoint/2010/main" val="931650567"/>
+      </p:ext>
+    </p:extLst>
+  </p:cSld>
+  <p:clrMapOvr>
+    <a:masterClrMapping/>
+  </p:clrMapOvr>
+</p:sld>
+</file>
+
+<file path=ppt/slides/slide22.xml><?xml version="1.0" encoding="utf-8"?>
+<p:sld xmlns:a="http://schemas.openxmlformats.org/drawingml/2006/main" xmlns:r="http://schemas.openxmlformats.org/officeDocument/2006/relationships" xmlns:p="http://schemas.openxmlformats.org/presentationml/2006/main">
+  <p:cSld>
+    <p:spTree>
+      <p:nvGrpSpPr>
+        <p:cNvPr id="1" name="">
+          <a:extLst>
+            <a:ext uri="{FF2B5EF4-FFF2-40B4-BE49-F238E27FC236}">
+              <a16:creationId xmlns:a16="http://schemas.microsoft.com/office/drawing/2014/main" id="{4CE59387-80CA-6854-350F-E03E8D1DDBB6}"/>
+            </a:ext>
+          </a:extLst>
+        </p:cNvPr>
+        <p:cNvGrpSpPr/>
+        <p:nvPr/>
+      </p:nvGrpSpPr>
+      <p:grpSpPr>
+        <a:xfrm>
+          <a:off x="0" y="0"/>
+          <a:ext cx="0" cy="0"/>
+          <a:chOff x="0" y="0"/>
+          <a:chExt cx="0" cy="0"/>
+        </a:xfrm>
+      </p:grpSpPr>
+      <p:pic>
+        <p:nvPicPr>
+          <p:cNvPr id="13" name="Picture 12">
+            <a:extLst>
+              <a:ext uri="{FF2B5EF4-FFF2-40B4-BE49-F238E27FC236}">
+                <a16:creationId xmlns:a16="http://schemas.microsoft.com/office/drawing/2014/main" id="{62180CC5-9247-7175-39A9-D2D148AF8725}"/>
+              </a:ext>
+            </a:extLst>
+          </p:cNvPr>
+          <p:cNvPicPr>
+            <a:picLocks noChangeAspect="1"/>
+          </p:cNvPicPr>
+          <p:nvPr/>
+        </p:nvPicPr>
+        <p:blipFill>
+          <a:blip r:embed="rId2"/>
+          <a:stretch>
+            <a:fillRect/>
+          </a:stretch>
+        </p:blipFill>
+        <p:spPr>
+          <a:xfrm>
+            <a:off x="0" y="2646918"/>
+            <a:ext cx="3994499" cy="3641450"/>
+          </a:xfrm>
+          <a:prstGeom prst="rect">
+            <a:avLst/>
+          </a:prstGeom>
+        </p:spPr>
+      </p:pic>
+      <p:sp>
+        <p:nvSpPr>
+          <p:cNvPr id="2" name="Title 1">
+            <a:extLst>
+              <a:ext uri="{FF2B5EF4-FFF2-40B4-BE49-F238E27FC236}">
+                <a16:creationId xmlns:a16="http://schemas.microsoft.com/office/drawing/2014/main" id="{A7239620-34A6-24BA-DE41-25BEB1358DA8}"/>
+              </a:ext>
+            </a:extLst>
+          </p:cNvPr>
+          <p:cNvSpPr>
+            <a:spLocks noGrp="1"/>
+          </p:cNvSpPr>
+          <p:nvPr>
+            <p:ph type="title"/>
+          </p:nvPr>
+        </p:nvSpPr>
+        <p:spPr>
+          <a:xfrm>
+            <a:off x="266701" y="27523"/>
+            <a:ext cx="10515600" cy="1325563"/>
+          </a:xfrm>
+        </p:spPr>
+        <p:txBody>
+          <a:bodyPr/>
+          <a:lstStyle/>
+          <a:p>
+            <a:r>
+              <a:rPr lang="en-US" dirty="0"/>
+              <a:t>One-sample case</a:t>
+            </a:r>
+          </a:p>
+        </p:txBody>
+      </p:sp>
+      <p:sp>
+        <p:nvSpPr>
+          <p:cNvPr id="5" name="TextBox 4">
+            <a:extLst>
+              <a:ext uri="{FF2B5EF4-FFF2-40B4-BE49-F238E27FC236}">
+                <a16:creationId xmlns:a16="http://schemas.microsoft.com/office/drawing/2014/main" id="{2EFEB458-427E-A1D5-A749-289988A28112}"/>
+              </a:ext>
+            </a:extLst>
+          </p:cNvPr>
+          <p:cNvSpPr txBox="1"/>
+          <p:nvPr/>
+        </p:nvSpPr>
+        <p:spPr>
+          <a:xfrm>
+            <a:off x="332186" y="1253113"/>
+            <a:ext cx="6100762" cy="954107"/>
+          </a:xfrm>
+          <a:prstGeom prst="rect">
+            <a:avLst/>
+          </a:prstGeom>
+          <a:noFill/>
+        </p:spPr>
+        <p:txBody>
+          <a:bodyPr wrap="square">
+            <a:spAutoFit/>
+          </a:bodyPr>
+          <a:lstStyle/>
+          <a:p>
+            <a:pPr algn="l" rtl="0">
+              <a:spcBef>
+                <a:spcPts val="1575"/>
+              </a:spcBef>
+              <a:spcAft>
+                <a:spcPts val="788"/>
+              </a:spcAft>
+              <a:buNone/>
+            </a:pPr>
+            <a:r>
+              <a:rPr lang="en-US" b="0" i="0" dirty="0" err="1">
+                <a:solidFill>
+                  <a:srgbClr val="2C3E50"/>
+                </a:solidFill>
+                <a:effectLst/>
+                <a:latin typeface="Lato" panose="020F0502020204030203" pitchFamily="34" charset="0"/>
+              </a:rPr>
+              <a:t>LexA</a:t>
+            </a:r>
+            <a:r>
+              <a:rPr lang="en-US" b="0" i="0" dirty="0">
+                <a:solidFill>
+                  <a:srgbClr val="2C3E50"/>
+                </a:solidFill>
+                <a:effectLst/>
+                <a:latin typeface="Lato" panose="020F0502020204030203" pitchFamily="34" charset="0"/>
+              </a:rPr>
+              <a:t> - </a:t>
+            </a:r>
+            <a:r>
+              <a:rPr lang="en-US" b="0" i="0" u="none" strike="noStrike" dirty="0">
+                <a:solidFill>
+                  <a:srgbClr val="18BC9C"/>
+                </a:solidFill>
+                <a:effectLst/>
+                <a:latin typeface="Lato" panose="020F0502020204030203" pitchFamily="34" charset="0"/>
+                <a:hlinkClick r:id="rId3"/>
+              </a:rPr>
+              <a:t>UniProtKB: Q8PN77 </a:t>
+            </a:r>
+            <a:endParaRPr lang="en-US" b="0" i="0" u="none" strike="noStrike" dirty="0">
+              <a:solidFill>
+                <a:srgbClr val="18BC9C"/>
+              </a:solidFill>
+              <a:effectLst/>
+              <a:latin typeface="Lato" panose="020F0502020204030203" pitchFamily="34" charset="0"/>
+            </a:endParaRPr>
+          </a:p>
+          <a:p>
+            <a:pPr algn="l" rtl="0">
+              <a:spcBef>
+                <a:spcPts val="1575"/>
+              </a:spcBef>
+              <a:spcAft>
+                <a:spcPts val="788"/>
+              </a:spcAft>
+              <a:buNone/>
+            </a:pPr>
+            <a:r>
+              <a:rPr lang="en-US" dirty="0">
+                <a:solidFill>
+                  <a:srgbClr val="18BC9C"/>
+                </a:solidFill>
+                <a:latin typeface="Lato" panose="020F0502020204030203" pitchFamily="34" charset="0"/>
+              </a:rPr>
+              <a:t>Both a reverse and direct</a:t>
+            </a:r>
+            <a:endParaRPr lang="en-US" b="0" i="0" dirty="0">
+              <a:solidFill>
+                <a:srgbClr val="2C3E50"/>
+              </a:solidFill>
+              <a:effectLst/>
+              <a:latin typeface="Lato" panose="020F0502020204030203" pitchFamily="34" charset="0"/>
+            </a:endParaRPr>
+          </a:p>
+        </p:txBody>
+      </p:sp>
+      <p:pic>
+        <p:nvPicPr>
+          <p:cNvPr id="6" name="Picture 5">
+            <a:extLst>
+              <a:ext uri="{FF2B5EF4-FFF2-40B4-BE49-F238E27FC236}">
+                <a16:creationId xmlns:a16="http://schemas.microsoft.com/office/drawing/2014/main" id="{F48E05D9-76D3-FFDC-5CF1-12C0CC62AC40}"/>
+              </a:ext>
+            </a:extLst>
+          </p:cNvPr>
+          <p:cNvPicPr>
+            <a:picLocks noChangeAspect="1"/>
+          </p:cNvPicPr>
+          <p:nvPr/>
+        </p:nvPicPr>
+        <p:blipFill>
+          <a:blip r:embed="rId4"/>
+          <a:stretch>
+            <a:fillRect/>
+          </a:stretch>
+        </p:blipFill>
+        <p:spPr>
+          <a:xfrm>
+            <a:off x="3527251" y="2646918"/>
+            <a:ext cx="3994499" cy="3641450"/>
+          </a:xfrm>
+          <a:prstGeom prst="rect">
+            <a:avLst/>
+          </a:prstGeom>
+        </p:spPr>
+      </p:pic>
+      <p:pic>
+        <p:nvPicPr>
+          <p:cNvPr id="7" name="Picture 6">
+            <a:extLst>
+              <a:ext uri="{FF2B5EF4-FFF2-40B4-BE49-F238E27FC236}">
+                <a16:creationId xmlns:a16="http://schemas.microsoft.com/office/drawing/2014/main" id="{05A69908-B5A2-3F64-4AF4-ABBF110DB5C1}"/>
+              </a:ext>
+            </a:extLst>
+          </p:cNvPr>
+          <p:cNvPicPr>
+            <a:picLocks noChangeAspect="1"/>
+          </p:cNvPicPr>
+          <p:nvPr/>
+        </p:nvPicPr>
+        <p:blipFill>
+          <a:blip r:embed="rId5"/>
+          <a:srcRect t="6696" r="15801" b="3456"/>
+          <a:stretch>
+            <a:fillRect/>
+          </a:stretch>
+        </p:blipFill>
+        <p:spPr>
+          <a:xfrm>
+            <a:off x="4406901" y="110797"/>
+            <a:ext cx="3476626" cy="1538824"/>
+          </a:xfrm>
+          <a:prstGeom prst="rect">
+            <a:avLst/>
+          </a:prstGeom>
+        </p:spPr>
+      </p:pic>
+      <p:pic>
+        <p:nvPicPr>
+          <p:cNvPr id="10" name="Picture 9">
+            <a:extLst>
+              <a:ext uri="{FF2B5EF4-FFF2-40B4-BE49-F238E27FC236}">
+                <a16:creationId xmlns:a16="http://schemas.microsoft.com/office/drawing/2014/main" id="{FB10E006-60F8-A3A6-C60D-53529E5793F7}"/>
+              </a:ext>
+            </a:extLst>
+          </p:cNvPr>
+          <p:cNvPicPr>
+            <a:picLocks noChangeAspect="1"/>
+          </p:cNvPicPr>
+          <p:nvPr/>
+        </p:nvPicPr>
+        <p:blipFill>
+          <a:blip r:embed="rId6"/>
+          <a:stretch>
+            <a:fillRect/>
+          </a:stretch>
+        </p:blipFill>
+        <p:spPr>
+          <a:xfrm>
+            <a:off x="7785100" y="3271719"/>
+            <a:ext cx="4406900" cy="3111500"/>
+          </a:xfrm>
+          <a:prstGeom prst="rect">
+            <a:avLst/>
+          </a:prstGeom>
+        </p:spPr>
+      </p:pic>
+      <p:pic>
+        <p:nvPicPr>
+          <p:cNvPr id="12" name="Picture 11">
+            <a:extLst>
+              <a:ext uri="{FF2B5EF4-FFF2-40B4-BE49-F238E27FC236}">
+                <a16:creationId xmlns:a16="http://schemas.microsoft.com/office/drawing/2014/main" id="{956BE1E2-CA8C-E0CC-D251-D013539796DC}"/>
+              </a:ext>
+            </a:extLst>
+          </p:cNvPr>
+          <p:cNvPicPr>
+            <a:picLocks noChangeAspect="1"/>
+          </p:cNvPicPr>
+          <p:nvPr/>
+        </p:nvPicPr>
+        <p:blipFill>
+          <a:blip r:embed="rId7"/>
+          <a:stretch>
+            <a:fillRect/>
+          </a:stretch>
+        </p:blipFill>
+        <p:spPr>
+          <a:xfrm>
+            <a:off x="7785100" y="93871"/>
+            <a:ext cx="4406900" cy="3111500"/>
+          </a:xfrm>
+          <a:prstGeom prst="rect">
+            <a:avLst/>
+          </a:prstGeom>
+        </p:spPr>
+      </p:pic>
+      <p:sp>
+        <p:nvSpPr>
+          <p:cNvPr id="21" name="Rak koppling 20">
+            <a:extLst>
+              <a:ext uri="{FF2B5EF4-FFF2-40B4-BE49-F238E27FC236}">
+                <a16:creationId xmlns:a16="http://schemas.microsoft.com/office/drawing/2014/main" id="{95D4B48C-F07A-4DE6-AE93-DAE37B8EADBE}"/>
+              </a:ext>
+            </a:extLst>
+          </p:cNvPr>
+          <p:cNvSpPr/>
+          <p:nvPr/>
+        </p:nvSpPr>
+        <p:spPr>
+          <a:xfrm rot="7897797">
+            <a:off x="3773784" y="5638680"/>
+            <a:ext cx="1463040" cy="0"/>
+          </a:xfrm>
+          <a:prstGeom prst="line">
+            <a:avLst/>
+          </a:prstGeom>
+          <a:solidFill>
+            <a:srgbClr val="FF0066">
+              <a:alpha val="5000"/>
+            </a:srgbClr>
+          </a:solidFill>
+          <a:ln w="12600">
+            <a:solidFill>
+              <a:srgbClr val="FF0066"/>
+            </a:solidFill>
+            <a:tailEnd type="arrow"/>
+          </a:ln>
+        </p:spPr>
+        <p:style>
+          <a:lnRef idx="2">
+            <a:schemeClr val="accent1"/>
+          </a:lnRef>
+          <a:fillRef idx="0">
+            <a:schemeClr val="accent1"/>
+          </a:fillRef>
+          <a:effectRef idx="1">
+            <a:schemeClr val="accent1"/>
+          </a:effectRef>
+          <a:fontRef idx="minor">
+            <a:schemeClr val="tx1"/>
+          </a:fontRef>
+        </p:style>
+        <p:txBody>
+          <a:bodyPr wrap="none" rtlCol="0" anchor="ctr" anchorCtr="1"/>
+          <a:lstStyle/>
+          <a:p>
+            <a:endParaRPr lang="ru-RU">
+              <a:solidFill>
+                <a:srgbClr val="FF0066"/>
+              </a:solidFill>
+            </a:endParaRPr>
+          </a:p>
+        </p:txBody>
+      </p:sp>
+      <p:sp>
+        <p:nvSpPr>
+          <p:cNvPr id="11" name="Rak koppling 10">
+            <a:extLst>
+              <a:ext uri="{FF2B5EF4-FFF2-40B4-BE49-F238E27FC236}">
+                <a16:creationId xmlns:a16="http://schemas.microsoft.com/office/drawing/2014/main" id="{88D7D897-61E1-4F02-8DBE-83E339C0DE8F}"/>
+              </a:ext>
+            </a:extLst>
+          </p:cNvPr>
+          <p:cNvSpPr/>
+          <p:nvPr/>
+        </p:nvSpPr>
+        <p:spPr>
+          <a:xfrm rot="2755194">
+            <a:off x="85442" y="5349060"/>
+            <a:ext cx="1280160" cy="0"/>
+          </a:xfrm>
+          <a:prstGeom prst="line">
+            <a:avLst/>
+          </a:prstGeom>
+          <a:solidFill>
+            <a:srgbClr val="FF0066">
+              <a:alpha val="5000"/>
+            </a:srgbClr>
+          </a:solidFill>
+          <a:ln w="12600">
+            <a:solidFill>
+              <a:srgbClr val="FF0066"/>
+            </a:solidFill>
+            <a:tailEnd type="arrow"/>
+          </a:ln>
+        </p:spPr>
+        <p:style>
+          <a:lnRef idx="2">
+            <a:schemeClr val="accent1"/>
+          </a:lnRef>
+          <a:fillRef idx="0">
+            <a:schemeClr val="accent1"/>
+          </a:fillRef>
+          <a:effectRef idx="1">
+            <a:schemeClr val="accent1"/>
+          </a:effectRef>
+          <a:fontRef idx="minor">
+            <a:schemeClr val="tx1"/>
+          </a:fontRef>
+        </p:style>
+        <p:txBody>
+          <a:bodyPr wrap="none" rtlCol="0" anchor="ctr" anchorCtr="1"/>
+          <a:lstStyle/>
+          <a:p>
+            <a:endParaRPr lang="ru-RU">
+              <a:solidFill>
+                <a:srgbClr val="FF0066"/>
+              </a:solidFill>
+            </a:endParaRPr>
+          </a:p>
+        </p:txBody>
+      </p:sp>
+    </p:spTree>
+    <p:extLst>
+      <p:ext uri="{BB962C8B-B14F-4D97-AF65-F5344CB8AC3E}">
+        <p14:creationId xmlns:p14="http://schemas.microsoft.com/office/powerpoint/2010/main" val="451879530"/>
+      </p:ext>
+    </p:extLst>
+  </p:cSld>
+  <p:clrMapOvr>
+    <a:masterClrMapping/>
+  </p:clrMapOvr>
+</p:sld>
+</file>
+
+<file path=ppt/slides/slide23.xml><?xml version="1.0" encoding="utf-8"?>
+<p:sld xmlns:a="http://schemas.openxmlformats.org/drawingml/2006/main" xmlns:r="http://schemas.openxmlformats.org/officeDocument/2006/relationships" xmlns:p="http://schemas.openxmlformats.org/presentationml/2006/main">
+  <p:cSld>
+    <p:spTree>
+      <p:nvGrpSpPr>
+        <p:cNvPr id="1" name="">
+          <a:extLst>
+            <a:ext uri="{FF2B5EF4-FFF2-40B4-BE49-F238E27FC236}">
+              <a16:creationId xmlns:a16="http://schemas.microsoft.com/office/drawing/2014/main" id="{D2F27AF9-C95C-5CC8-41D8-CC3E8D24664F}"/>
+            </a:ext>
+          </a:extLst>
+        </p:cNvPr>
+        <p:cNvGrpSpPr/>
+        <p:nvPr/>
+      </p:nvGrpSpPr>
+      <p:grpSpPr>
+        <a:xfrm>
+          <a:off x="0" y="0"/>
+          <a:ext cx="0" cy="0"/>
+          <a:chOff x="0" y="0"/>
+          <a:chExt cx="0" cy="0"/>
+        </a:xfrm>
+      </p:grpSpPr>
+      <p:sp>
+        <p:nvSpPr>
+          <p:cNvPr id="2" name="Title 1">
+            <a:extLst>
+              <a:ext uri="{FF2B5EF4-FFF2-40B4-BE49-F238E27FC236}">
+                <a16:creationId xmlns:a16="http://schemas.microsoft.com/office/drawing/2014/main" id="{B8600326-5432-B413-877F-4AD3CB5CBC54}"/>
+              </a:ext>
+            </a:extLst>
+          </p:cNvPr>
+          <p:cNvSpPr>
+            <a:spLocks noGrp="1"/>
+          </p:cNvSpPr>
+          <p:nvPr>
+            <p:ph type="title"/>
+          </p:nvPr>
+        </p:nvSpPr>
+        <p:spPr>
+          <a:xfrm>
+            <a:off x="266701" y="27523"/>
+            <a:ext cx="10515600" cy="1325563"/>
+          </a:xfrm>
+        </p:spPr>
+        <p:txBody>
+          <a:bodyPr/>
+          <a:lstStyle/>
+          <a:p>
+            <a:r>
+              <a:rPr lang="en-US" dirty="0"/>
+              <a:t>One-sample case – analysis (bidirectional)</a:t>
+            </a:r>
+          </a:p>
+        </p:txBody>
+      </p:sp>
+      <p:pic>
+        <p:nvPicPr>
+          <p:cNvPr id="4" name="Picture 3">
+            <a:extLst>
+              <a:ext uri="{FF2B5EF4-FFF2-40B4-BE49-F238E27FC236}">
+                <a16:creationId xmlns:a16="http://schemas.microsoft.com/office/drawing/2014/main" id="{B2BA73D8-1F3C-E12A-B21A-76E20687F499}"/>
+              </a:ext>
+            </a:extLst>
+          </p:cNvPr>
+          <p:cNvPicPr>
+            <a:picLocks noChangeAspect="1"/>
+          </p:cNvPicPr>
+          <p:nvPr/>
+        </p:nvPicPr>
+        <p:blipFill>
+          <a:blip r:embed="rId2"/>
+          <a:stretch>
+            <a:fillRect/>
+          </a:stretch>
+        </p:blipFill>
+        <p:spPr>
+          <a:xfrm>
+            <a:off x="5904714" y="1010186"/>
+            <a:ext cx="6020585" cy="4190464"/>
+          </a:xfrm>
+          <a:prstGeom prst="rect">
+            <a:avLst/>
+          </a:prstGeom>
+        </p:spPr>
+      </p:pic>
+      <p:pic>
+        <p:nvPicPr>
+          <p:cNvPr id="8" name="Picture 7">
+            <a:extLst>
+              <a:ext uri="{FF2B5EF4-FFF2-40B4-BE49-F238E27FC236}">
+                <a16:creationId xmlns:a16="http://schemas.microsoft.com/office/drawing/2014/main" id="{330B446D-1317-A744-CAAD-54BDE708EAAF}"/>
+              </a:ext>
+            </a:extLst>
+          </p:cNvPr>
+          <p:cNvPicPr>
+            <a:picLocks noChangeAspect="1"/>
+          </p:cNvPicPr>
+          <p:nvPr/>
+        </p:nvPicPr>
+        <p:blipFill>
+          <a:blip r:embed="rId3"/>
+          <a:stretch>
+            <a:fillRect/>
+          </a:stretch>
+        </p:blipFill>
+        <p:spPr>
+          <a:xfrm>
+            <a:off x="221537" y="1184543"/>
+            <a:ext cx="5519576" cy="3841750"/>
+          </a:xfrm>
+          <a:prstGeom prst="rect">
+            <a:avLst/>
+          </a:prstGeom>
+        </p:spPr>
+      </p:pic>
+      <p:graphicFrame>
+        <p:nvGraphicFramePr>
+          <p:cNvPr id="9" name="Table 8">
+            <a:extLst>
+              <a:ext uri="{FF2B5EF4-FFF2-40B4-BE49-F238E27FC236}">
+                <a16:creationId xmlns:a16="http://schemas.microsoft.com/office/drawing/2014/main" id="{8E9A36B2-CAB1-5E15-F919-ACE93171E3C3}"/>
+              </a:ext>
+            </a:extLst>
+          </p:cNvPr>
+          <p:cNvGraphicFramePr>
+            <a:graphicFrameLocks noGrp="1"/>
+          </p:cNvGraphicFramePr>
+          <p:nvPr>
+            <p:extLst>
+              <p:ext uri="{D42A27DB-BD31-4B8C-83A1-F6EECF244321}">
+                <p14:modId xmlns:p14="http://schemas.microsoft.com/office/powerpoint/2010/main" val="4107003987"/>
+              </p:ext>
+            </p:extLst>
+          </p:nvPr>
+        </p:nvGraphicFramePr>
+        <p:xfrm>
+          <a:off x="557213" y="5226734"/>
+          <a:ext cx="4471987" cy="893445"/>
+        </p:xfrm>
+        <a:graphic>
+          <a:graphicData uri="http://schemas.openxmlformats.org/drawingml/2006/table">
+            <a:tbl>
+              <a:tblPr>
+                <a:tableStyleId>{5C22544A-7EE6-4342-B048-85BDC9FD1C3A}</a:tableStyleId>
+              </a:tblPr>
+              <a:tblGrid>
+                <a:gridCol w="1038894">
+                  <a:extLst>
+                    <a:ext uri="{9D8B030D-6E8A-4147-A177-3AD203B41FA5}">
+                      <a16:colId xmlns:a16="http://schemas.microsoft.com/office/drawing/2014/main" val="1574204152"/>
+                    </a:ext>
+                  </a:extLst>
+                </a:gridCol>
+                <a:gridCol w="451769">
+                  <a:extLst>
+                    <a:ext uri="{9D8B030D-6E8A-4147-A177-3AD203B41FA5}">
+                      <a16:colId xmlns:a16="http://schemas.microsoft.com/office/drawing/2014/main" val="3974334677"/>
+                    </a:ext>
+                  </a:extLst>
+                </a:gridCol>
+                <a:gridCol w="745331">
+                  <a:extLst>
+                    <a:ext uri="{9D8B030D-6E8A-4147-A177-3AD203B41FA5}">
+                      <a16:colId xmlns:a16="http://schemas.microsoft.com/office/drawing/2014/main" val="2001218264"/>
+                    </a:ext>
+                  </a:extLst>
+                </a:gridCol>
+                <a:gridCol w="745331">
+                  <a:extLst>
+                    <a:ext uri="{9D8B030D-6E8A-4147-A177-3AD203B41FA5}">
+                      <a16:colId xmlns:a16="http://schemas.microsoft.com/office/drawing/2014/main" val="3362742547"/>
+                    </a:ext>
+                  </a:extLst>
+                </a:gridCol>
+                <a:gridCol w="745331">
+                  <a:extLst>
+                    <a:ext uri="{9D8B030D-6E8A-4147-A177-3AD203B41FA5}">
+                      <a16:colId xmlns:a16="http://schemas.microsoft.com/office/drawing/2014/main" val="1996554776"/>
+                    </a:ext>
+                  </a:extLst>
+                </a:gridCol>
+                <a:gridCol w="745331">
+                  <a:extLst>
+                    <a:ext uri="{9D8B030D-6E8A-4147-A177-3AD203B41FA5}">
+                      <a16:colId xmlns:a16="http://schemas.microsoft.com/office/drawing/2014/main" val="893165006"/>
+                    </a:ext>
+                  </a:extLst>
+                </a:gridCol>
+              </a:tblGrid>
+              <a:tr h="190500">
+                <a:tc>
+                  <a:txBody>
+                    <a:bodyPr/>
+                    <a:lstStyle/>
+                    <a:p>
+                      <a:pPr algn="ctr" fontAlgn="t">
+                        <a:buNone/>
+                      </a:pPr>
+                      <a:r>
+                        <a:rPr lang="en-US" sz="1100" u="none" strike="noStrike">
+                          <a:effectLst/>
+                        </a:rPr>
+                        <a:t>coords</a:t>
+                      </a:r>
+                      <a:endParaRPr lang="en-US" sz="1100" b="1" i="0" u="none" strike="noStrike">
+                        <a:solidFill>
+                          <a:srgbClr val="000000"/>
+                        </a:solidFill>
+                        <a:effectLst/>
+                        <a:latin typeface="Calibri" panose="020F0502020204030204" pitchFamily="34" charset="0"/>
+                      </a:endParaRPr>
+                    </a:p>
+                  </a:txBody>
+                  <a:tcPr marL="9525" marR="9525" marT="9525" marB="0"/>
+                </a:tc>
+                <a:tc>
+                  <a:txBody>
+                    <a:bodyPr/>
+                    <a:lstStyle/>
+                    <a:p>
+                      <a:pPr algn="ctr" fontAlgn="t">
+                        <a:buNone/>
+                      </a:pPr>
+                      <a:r>
+                        <a:rPr lang="en-US" sz="1100" u="none" strike="noStrike">
+                          <a:effectLst/>
+                        </a:rPr>
+                        <a:t>length</a:t>
+                      </a:r>
+                      <a:endParaRPr lang="en-US" sz="1100" b="1" i="0" u="none" strike="noStrike">
+                        <a:solidFill>
+                          <a:srgbClr val="000000"/>
+                        </a:solidFill>
+                        <a:effectLst/>
+                        <a:latin typeface="Calibri" panose="020F0502020204030204" pitchFamily="34" charset="0"/>
+                      </a:endParaRPr>
+                    </a:p>
+                  </a:txBody>
+                  <a:tcPr marL="9525" marR="9525" marT="9525" marB="0"/>
+                </a:tc>
+                <a:tc>
+                  <a:txBody>
+                    <a:bodyPr/>
+                    <a:lstStyle/>
+                    <a:p>
+                      <a:pPr algn="ctr" fontAlgn="t">
+                        <a:buNone/>
+                      </a:pPr>
+                      <a:r>
+                        <a:rPr lang="en-US" sz="1100" u="none" strike="noStrike">
+                          <a:effectLst/>
+                        </a:rPr>
+                        <a:t>score</a:t>
+                      </a:r>
+                      <a:endParaRPr lang="en-US" sz="1100" b="1" i="0" u="none" strike="noStrike">
+                        <a:solidFill>
+                          <a:srgbClr val="000000"/>
+                        </a:solidFill>
+                        <a:effectLst/>
+                        <a:latin typeface="Calibri" panose="020F0502020204030204" pitchFamily="34" charset="0"/>
+                      </a:endParaRPr>
+                    </a:p>
+                  </a:txBody>
+                  <a:tcPr marL="9525" marR="9525" marT="9525" marB="0"/>
+                </a:tc>
+                <a:tc>
+                  <a:txBody>
+                    <a:bodyPr/>
+                    <a:lstStyle/>
+                    <a:p>
+                      <a:pPr algn="ctr" fontAlgn="t">
+                        <a:buNone/>
+                      </a:pPr>
+                      <a:r>
+                        <a:rPr lang="en-US" sz="1100" u="none" strike="noStrike">
+                          <a:effectLst/>
+                        </a:rPr>
+                        <a:t>group1</a:t>
+                      </a:r>
+                      <a:endParaRPr lang="en-US" sz="1100" b="1" i="0" u="none" strike="noStrike">
+                        <a:solidFill>
+                          <a:srgbClr val="000000"/>
+                        </a:solidFill>
+                        <a:effectLst/>
+                        <a:latin typeface="Calibri" panose="020F0502020204030204" pitchFamily="34" charset="0"/>
+                      </a:endParaRPr>
+                    </a:p>
+                  </a:txBody>
+                  <a:tcPr marL="9525" marR="9525" marT="9525" marB="0"/>
+                </a:tc>
+                <a:tc>
+                  <a:txBody>
+                    <a:bodyPr/>
+                    <a:lstStyle/>
+                    <a:p>
+                      <a:pPr algn="ctr" fontAlgn="t">
+                        <a:buNone/>
+                      </a:pPr>
+                      <a:r>
+                        <a:rPr lang="en-US" sz="1100" u="none" strike="noStrike">
+                          <a:effectLst/>
+                        </a:rPr>
+                        <a:t>group2</a:t>
+                      </a:r>
+                      <a:endParaRPr lang="en-US" sz="1100" b="1" i="0" u="none" strike="noStrike">
+                        <a:solidFill>
+                          <a:srgbClr val="000000"/>
+                        </a:solidFill>
+                        <a:effectLst/>
+                        <a:latin typeface="Calibri" panose="020F0502020204030204" pitchFamily="34" charset="0"/>
+                      </a:endParaRPr>
+                    </a:p>
+                  </a:txBody>
+                  <a:tcPr marL="9525" marR="9525" marT="9525" marB="0"/>
+                </a:tc>
+                <a:tc>
+                  <a:txBody>
+                    <a:bodyPr/>
+                    <a:lstStyle/>
+                    <a:p>
+                      <a:pPr algn="ctr" fontAlgn="t">
+                        <a:buNone/>
+                      </a:pPr>
+                      <a:r>
+                        <a:rPr lang="en-US" sz="1100" u="none" strike="noStrike">
+                          <a:effectLst/>
+                        </a:rPr>
+                        <a:t>p_value</a:t>
+                      </a:r>
+                      <a:endParaRPr lang="en-US" sz="1100" b="1" i="0" u="none" strike="noStrike">
+                        <a:solidFill>
+                          <a:srgbClr val="000000"/>
+                        </a:solidFill>
+                        <a:effectLst/>
+                        <a:latin typeface="Calibri" panose="020F0502020204030204" pitchFamily="34" charset="0"/>
+                      </a:endParaRPr>
+                    </a:p>
+                  </a:txBody>
+                  <a:tcPr marL="9525" marR="9525" marT="9525" marB="0"/>
+                </a:tc>
+                <a:extLst>
+                  <a:ext uri="{0D108BD9-81ED-4DB2-BD59-A6C34878D82A}">
+                    <a16:rowId xmlns:a16="http://schemas.microsoft.com/office/drawing/2014/main" val="4184582648"/>
+                  </a:ext>
+                </a:extLst>
+              </a:tr>
+              <a:tr h="190500">
+                <a:tc>
+                  <a:txBody>
+                    <a:bodyPr/>
+                    <a:lstStyle/>
+                    <a:p>
+                      <a:pPr algn="l" fontAlgn="b">
+                        <a:buNone/>
+                      </a:pPr>
+                      <a:r>
+                        <a:rPr lang="en-US" sz="1100" u="none" strike="noStrike">
+                          <a:effectLst/>
+                        </a:rPr>
+                        <a:t>[(8, 0), (9, 1), (10, 2), (11, 3), (12, 4), (13, 5)]</a:t>
+                      </a:r>
+                      <a:endParaRPr lang="en-US" sz="1100" b="0" i="0" u="none" strike="noStrike">
+                        <a:solidFill>
+                          <a:srgbClr val="000000"/>
+                        </a:solidFill>
+                        <a:effectLst/>
+                        <a:latin typeface="Calibri" panose="020F0502020204030204" pitchFamily="34" charset="0"/>
+                      </a:endParaRPr>
+                    </a:p>
+                  </a:txBody>
+                  <a:tcPr marL="9525" marR="9525" marT="9525" marB="0" anchor="b"/>
+                </a:tc>
+                <a:tc>
+                  <a:txBody>
+                    <a:bodyPr/>
+                    <a:lstStyle/>
+                    <a:p>
+                      <a:pPr algn="r" fontAlgn="b">
+                        <a:buNone/>
+                      </a:pPr>
+                      <a:r>
+                        <a:rPr lang="en-US" sz="1100" u="none" strike="noStrike">
+                          <a:effectLst/>
+                        </a:rPr>
+                        <a:t>6</a:t>
+                      </a:r>
+                      <a:endParaRPr lang="en-US" sz="1100" b="0" i="0" u="none" strike="noStrike">
+                        <a:solidFill>
+                          <a:srgbClr val="000000"/>
+                        </a:solidFill>
+                        <a:effectLst/>
+                        <a:latin typeface="Calibri" panose="020F0502020204030204" pitchFamily="34" charset="0"/>
+                      </a:endParaRPr>
+                    </a:p>
+                  </a:txBody>
+                  <a:tcPr marL="9525" marR="9525" marT="9525" marB="0" anchor="b"/>
+                </a:tc>
+                <a:tc>
+                  <a:txBody>
+                    <a:bodyPr/>
+                    <a:lstStyle/>
+                    <a:p>
+                      <a:pPr algn="r" fontAlgn="b">
+                        <a:buNone/>
+                      </a:pPr>
+                      <a:r>
+                        <a:rPr lang="en-US" sz="1100" u="none" strike="noStrike">
+                          <a:effectLst/>
+                        </a:rPr>
+                        <a:t>12</a:t>
+                      </a:r>
+                      <a:endParaRPr lang="en-US" sz="1100" b="0" i="0" u="none" strike="noStrike">
+                        <a:solidFill>
+                          <a:srgbClr val="000000"/>
+                        </a:solidFill>
+                        <a:effectLst/>
+                        <a:latin typeface="Calibri" panose="020F0502020204030204" pitchFamily="34" charset="0"/>
+                      </a:endParaRPr>
+                    </a:p>
+                  </a:txBody>
+                  <a:tcPr marL="9525" marR="9525" marT="9525" marB="0" anchor="b"/>
+                </a:tc>
+                <a:tc>
+                  <a:txBody>
+                    <a:bodyPr/>
+                    <a:lstStyle/>
+                    <a:p>
+                      <a:pPr algn="l" fontAlgn="b">
+                        <a:buNone/>
+                      </a:pPr>
+                      <a:r>
+                        <a:rPr lang="en-US" sz="1100" u="none" strike="noStrike">
+                          <a:effectLst/>
+                        </a:rPr>
+                        <a:t>TGTACA</a:t>
+                      </a:r>
+                      <a:endParaRPr lang="en-US" sz="1100" b="0" i="0" u="none" strike="noStrike">
+                        <a:solidFill>
+                          <a:srgbClr val="000000"/>
+                        </a:solidFill>
+                        <a:effectLst/>
+                        <a:latin typeface="Calibri" panose="020F0502020204030204" pitchFamily="34" charset="0"/>
+                      </a:endParaRPr>
+                    </a:p>
+                  </a:txBody>
+                  <a:tcPr marL="9525" marR="9525" marT="9525" marB="0" anchor="b"/>
+                </a:tc>
+                <a:tc>
+                  <a:txBody>
+                    <a:bodyPr/>
+                    <a:lstStyle/>
+                    <a:p>
+                      <a:pPr algn="l" fontAlgn="b">
+                        <a:buNone/>
+                      </a:pPr>
+                      <a:r>
+                        <a:rPr lang="en-US" sz="1100" u="none" strike="noStrike">
+                          <a:effectLst/>
+                        </a:rPr>
+                        <a:t>TGTACA</a:t>
+                      </a:r>
+                      <a:endParaRPr lang="en-US" sz="1100" b="0" i="0" u="none" strike="noStrike">
+                        <a:solidFill>
+                          <a:srgbClr val="000000"/>
+                        </a:solidFill>
+                        <a:effectLst/>
+                        <a:latin typeface="Calibri" panose="020F0502020204030204" pitchFamily="34" charset="0"/>
+                      </a:endParaRPr>
+                    </a:p>
+                  </a:txBody>
+                  <a:tcPr marL="9525" marR="9525" marT="9525" marB="0" anchor="b"/>
+                </a:tc>
+                <a:tc>
+                  <a:txBody>
+                    <a:bodyPr/>
+                    <a:lstStyle/>
+                    <a:p>
+                      <a:pPr algn="r" fontAlgn="b">
+                        <a:buNone/>
+                      </a:pPr>
+                      <a:r>
+                        <a:rPr lang="en-US" sz="1100" u="none" strike="noStrike">
+                          <a:effectLst/>
+                        </a:rPr>
+                        <a:t>0.0036</a:t>
+                      </a:r>
+                      <a:endParaRPr lang="en-US" sz="1100" b="0" i="0" u="none" strike="noStrike">
+                        <a:solidFill>
+                          <a:srgbClr val="000000"/>
+                        </a:solidFill>
+                        <a:effectLst/>
+                        <a:latin typeface="Calibri" panose="020F0502020204030204" pitchFamily="34" charset="0"/>
+                      </a:endParaRPr>
+                    </a:p>
+                  </a:txBody>
+                  <a:tcPr marL="9525" marR="9525" marT="9525" marB="0" anchor="b"/>
+                </a:tc>
+                <a:extLst>
+                  <a:ext uri="{0D108BD9-81ED-4DB2-BD59-A6C34878D82A}">
+                    <a16:rowId xmlns:a16="http://schemas.microsoft.com/office/drawing/2014/main" val="1746780335"/>
+                  </a:ext>
+                </a:extLst>
+              </a:tr>
+              <a:tr h="190500">
+                <a:tc>
+                  <a:txBody>
+                    <a:bodyPr/>
+                    <a:lstStyle/>
+                    <a:p>
+                      <a:pPr algn="l" fontAlgn="b">
+                        <a:buNone/>
+                      </a:pPr>
+                      <a:r>
+                        <a:rPr lang="en-US" sz="1100" u="none" strike="noStrike">
+                          <a:effectLst/>
+                        </a:rPr>
+                        <a:t>[(6, 5), (7, 6)]</a:t>
+                      </a:r>
+                      <a:endParaRPr lang="en-US" sz="1100" b="0" i="0" u="none" strike="noStrike">
+                        <a:solidFill>
+                          <a:srgbClr val="000000"/>
+                        </a:solidFill>
+                        <a:effectLst/>
+                        <a:latin typeface="Calibri" panose="020F0502020204030204" pitchFamily="34" charset="0"/>
+                      </a:endParaRPr>
+                    </a:p>
+                  </a:txBody>
+                  <a:tcPr marL="9525" marR="9525" marT="9525" marB="0" anchor="b"/>
+                </a:tc>
+                <a:tc>
+                  <a:txBody>
+                    <a:bodyPr/>
+                    <a:lstStyle/>
+                    <a:p>
+                      <a:pPr algn="r" fontAlgn="b">
+                        <a:buNone/>
+                      </a:pPr>
+                      <a:r>
+                        <a:rPr lang="en-US" sz="1100" u="none" strike="noStrike">
+                          <a:effectLst/>
+                        </a:rPr>
+                        <a:t>2</a:t>
+                      </a:r>
+                      <a:endParaRPr lang="en-US" sz="1100" b="0" i="0" u="none" strike="noStrike">
+                        <a:solidFill>
+                          <a:srgbClr val="000000"/>
+                        </a:solidFill>
+                        <a:effectLst/>
+                        <a:latin typeface="Calibri" panose="020F0502020204030204" pitchFamily="34" charset="0"/>
+                      </a:endParaRPr>
+                    </a:p>
+                  </a:txBody>
+                  <a:tcPr marL="9525" marR="9525" marT="9525" marB="0" anchor="b"/>
+                </a:tc>
+                <a:tc>
+                  <a:txBody>
+                    <a:bodyPr/>
+                    <a:lstStyle/>
+                    <a:p>
+                      <a:pPr algn="r" fontAlgn="b">
+                        <a:buNone/>
+                      </a:pPr>
+                      <a:r>
+                        <a:rPr lang="en-US" sz="1100" u="none" strike="noStrike">
+                          <a:effectLst/>
+                        </a:rPr>
+                        <a:t>4</a:t>
+                      </a:r>
+                      <a:endParaRPr lang="en-US" sz="1100" b="0" i="0" u="none" strike="noStrike">
+                        <a:solidFill>
+                          <a:srgbClr val="000000"/>
+                        </a:solidFill>
+                        <a:effectLst/>
+                        <a:latin typeface="Calibri" panose="020F0502020204030204" pitchFamily="34" charset="0"/>
+                      </a:endParaRPr>
+                    </a:p>
+                  </a:txBody>
+                  <a:tcPr marL="9525" marR="9525" marT="9525" marB="0" anchor="b"/>
+                </a:tc>
+                <a:tc>
+                  <a:txBody>
+                    <a:bodyPr/>
+                    <a:lstStyle/>
+                    <a:p>
+                      <a:pPr algn="l" fontAlgn="b">
+                        <a:buNone/>
+                      </a:pPr>
+                      <a:r>
+                        <a:rPr lang="en-US" sz="1100" u="none" strike="noStrike">
+                          <a:effectLst/>
+                        </a:rPr>
+                        <a:t>AA</a:t>
+                      </a:r>
+                      <a:endParaRPr lang="en-US" sz="1100" b="0" i="0" u="none" strike="noStrike">
+                        <a:solidFill>
+                          <a:srgbClr val="000000"/>
+                        </a:solidFill>
+                        <a:effectLst/>
+                        <a:latin typeface="Calibri" panose="020F0502020204030204" pitchFamily="34" charset="0"/>
+                      </a:endParaRPr>
+                    </a:p>
+                  </a:txBody>
+                  <a:tcPr marL="9525" marR="9525" marT="9525" marB="0" anchor="b"/>
+                </a:tc>
+                <a:tc>
+                  <a:txBody>
+                    <a:bodyPr/>
+                    <a:lstStyle/>
+                    <a:p>
+                      <a:pPr algn="l" fontAlgn="b">
+                        <a:buNone/>
+                      </a:pPr>
+                      <a:r>
+                        <a:rPr lang="en-US" sz="1100" u="none" strike="noStrike">
+                          <a:effectLst/>
+                        </a:rPr>
+                        <a:t>AA</a:t>
+                      </a:r>
+                      <a:endParaRPr lang="en-US" sz="1100" b="0" i="0" u="none" strike="noStrike">
+                        <a:solidFill>
+                          <a:srgbClr val="000000"/>
+                        </a:solidFill>
+                        <a:effectLst/>
+                        <a:latin typeface="Calibri" panose="020F0502020204030204" pitchFamily="34" charset="0"/>
+                      </a:endParaRPr>
+                    </a:p>
+                  </a:txBody>
+                  <a:tcPr marL="9525" marR="9525" marT="9525" marB="0" anchor="b"/>
+                </a:tc>
+                <a:tc>
+                  <a:txBody>
+                    <a:bodyPr/>
+                    <a:lstStyle/>
+                    <a:p>
+                      <a:pPr algn="r" fontAlgn="b">
+                        <a:buNone/>
+                      </a:pPr>
+                      <a:r>
+                        <a:rPr lang="en-US" sz="1100" u="none" strike="noStrike" dirty="0">
+                          <a:effectLst/>
+                        </a:rPr>
+                        <a:t>1</a:t>
+                      </a:r>
+                      <a:endParaRPr lang="en-US" sz="1100" b="0" i="0" u="none" strike="noStrike" dirty="0">
+                        <a:solidFill>
+                          <a:srgbClr val="000000"/>
+                        </a:solidFill>
+                        <a:effectLst/>
+                        <a:latin typeface="Calibri" panose="020F0502020204030204" pitchFamily="34" charset="0"/>
+                      </a:endParaRPr>
+                    </a:p>
+                  </a:txBody>
+                  <a:tcPr marL="9525" marR="9525" marT="9525" marB="0" anchor="b"/>
+                </a:tc>
+                <a:extLst>
+                  <a:ext uri="{0D108BD9-81ED-4DB2-BD59-A6C34878D82A}">
+                    <a16:rowId xmlns:a16="http://schemas.microsoft.com/office/drawing/2014/main" val="2042222665"/>
+                  </a:ext>
+                </a:extLst>
+              </a:tr>
+            </a:tbl>
+          </a:graphicData>
+        </a:graphic>
+      </p:graphicFrame>
+      <p:graphicFrame>
+        <p:nvGraphicFramePr>
+          <p:cNvPr id="11" name="Table 10">
+            <a:extLst>
+              <a:ext uri="{FF2B5EF4-FFF2-40B4-BE49-F238E27FC236}">
+                <a16:creationId xmlns:a16="http://schemas.microsoft.com/office/drawing/2014/main" id="{A792DD8F-89C8-75B9-66F9-5736F04170FB}"/>
+              </a:ext>
+            </a:extLst>
+          </p:cNvPr>
+          <p:cNvGraphicFramePr>
+            <a:graphicFrameLocks noGrp="1"/>
+          </p:cNvGraphicFramePr>
+          <p:nvPr>
+            <p:extLst>
+              <p:ext uri="{D42A27DB-BD31-4B8C-83A1-F6EECF244321}">
+                <p14:modId xmlns:p14="http://schemas.microsoft.com/office/powerpoint/2010/main" val="357497975"/>
+              </p:ext>
+            </p:extLst>
+          </p:nvPr>
+        </p:nvGraphicFramePr>
+        <p:xfrm>
+          <a:off x="6272213" y="5026293"/>
+          <a:ext cx="5653086" cy="1709433"/>
+        </p:xfrm>
+        <a:graphic>
+          <a:graphicData uri="http://schemas.openxmlformats.org/drawingml/2006/table">
+            <a:tbl>
+              <a:tblPr>
+                <a:tableStyleId>{5C22544A-7EE6-4342-B048-85BDC9FD1C3A}</a:tableStyleId>
+              </a:tblPr>
+              <a:tblGrid>
+                <a:gridCol w="1140626">
+                  <a:extLst>
+                    <a:ext uri="{9D8B030D-6E8A-4147-A177-3AD203B41FA5}">
+                      <a16:colId xmlns:a16="http://schemas.microsoft.com/office/drawing/2014/main" val="1287844718"/>
+                    </a:ext>
+                  </a:extLst>
+                </a:gridCol>
+                <a:gridCol w="743736">
+                  <a:extLst>
+                    <a:ext uri="{9D8B030D-6E8A-4147-A177-3AD203B41FA5}">
+                      <a16:colId xmlns:a16="http://schemas.microsoft.com/office/drawing/2014/main" val="3359727422"/>
+                    </a:ext>
+                  </a:extLst>
+                </a:gridCol>
+                <a:gridCol w="942181">
+                  <a:extLst>
+                    <a:ext uri="{9D8B030D-6E8A-4147-A177-3AD203B41FA5}">
+                      <a16:colId xmlns:a16="http://schemas.microsoft.com/office/drawing/2014/main" val="2464027612"/>
+                    </a:ext>
+                  </a:extLst>
+                </a:gridCol>
+                <a:gridCol w="942181">
+                  <a:extLst>
+                    <a:ext uri="{9D8B030D-6E8A-4147-A177-3AD203B41FA5}">
+                      <a16:colId xmlns:a16="http://schemas.microsoft.com/office/drawing/2014/main" val="1840736092"/>
+                    </a:ext>
+                  </a:extLst>
+                </a:gridCol>
+                <a:gridCol w="942181">
+                  <a:extLst>
+                    <a:ext uri="{9D8B030D-6E8A-4147-A177-3AD203B41FA5}">
+                      <a16:colId xmlns:a16="http://schemas.microsoft.com/office/drawing/2014/main" val="2868734031"/>
+                    </a:ext>
+                  </a:extLst>
+                </a:gridCol>
+                <a:gridCol w="942181">
+                  <a:extLst>
+                    <a:ext uri="{9D8B030D-6E8A-4147-A177-3AD203B41FA5}">
+                      <a16:colId xmlns:a16="http://schemas.microsoft.com/office/drawing/2014/main" val="479424070"/>
+                    </a:ext>
+                  </a:extLst>
+                </a:gridCol>
+              </a:tblGrid>
+              <a:tr h="170852">
+                <a:tc>
+                  <a:txBody>
+                    <a:bodyPr/>
+                    <a:lstStyle/>
+                    <a:p>
+                      <a:pPr algn="ctr" fontAlgn="t">
+                        <a:buNone/>
+                      </a:pPr>
+                      <a:r>
+                        <a:rPr lang="en-US" sz="1100" u="none" strike="noStrike">
+                          <a:effectLst/>
+                        </a:rPr>
+                        <a:t>coords</a:t>
+                      </a:r>
+                      <a:endParaRPr lang="en-US" sz="1100" b="1" i="0" u="none" strike="noStrike">
+                        <a:solidFill>
+                          <a:srgbClr val="000000"/>
+                        </a:solidFill>
+                        <a:effectLst/>
+                        <a:latin typeface="Calibri" panose="020F0502020204030204" pitchFamily="34" charset="0"/>
+                      </a:endParaRPr>
+                    </a:p>
+                  </a:txBody>
+                  <a:tcPr marL="9525" marR="9525" marT="9525" marB="0"/>
+                </a:tc>
+                <a:tc>
+                  <a:txBody>
+                    <a:bodyPr/>
+                    <a:lstStyle/>
+                    <a:p>
+                      <a:pPr algn="ctr" fontAlgn="t">
+                        <a:buNone/>
+                      </a:pPr>
+                      <a:r>
+                        <a:rPr lang="en-US" sz="1100" u="none" strike="noStrike">
+                          <a:effectLst/>
+                        </a:rPr>
+                        <a:t>length</a:t>
+                      </a:r>
+                      <a:endParaRPr lang="en-US" sz="1100" b="1" i="0" u="none" strike="noStrike">
+                        <a:solidFill>
+                          <a:srgbClr val="000000"/>
+                        </a:solidFill>
+                        <a:effectLst/>
+                        <a:latin typeface="Calibri" panose="020F0502020204030204" pitchFamily="34" charset="0"/>
+                      </a:endParaRPr>
+                    </a:p>
+                  </a:txBody>
+                  <a:tcPr marL="9525" marR="9525" marT="9525" marB="0"/>
+                </a:tc>
+                <a:tc>
+                  <a:txBody>
+                    <a:bodyPr/>
+                    <a:lstStyle/>
+                    <a:p>
+                      <a:pPr algn="ctr" fontAlgn="t">
+                        <a:buNone/>
+                      </a:pPr>
+                      <a:r>
+                        <a:rPr lang="en-US" sz="1100" u="none" strike="noStrike">
+                          <a:effectLst/>
+                        </a:rPr>
+                        <a:t>score</a:t>
+                      </a:r>
+                      <a:endParaRPr lang="en-US" sz="1100" b="1" i="0" u="none" strike="noStrike">
+                        <a:solidFill>
+                          <a:srgbClr val="000000"/>
+                        </a:solidFill>
+                        <a:effectLst/>
+                        <a:latin typeface="Calibri" panose="020F0502020204030204" pitchFamily="34" charset="0"/>
+                      </a:endParaRPr>
+                    </a:p>
+                  </a:txBody>
+                  <a:tcPr marL="9525" marR="9525" marT="9525" marB="0"/>
+                </a:tc>
+                <a:tc>
+                  <a:txBody>
+                    <a:bodyPr/>
+                    <a:lstStyle/>
+                    <a:p>
+                      <a:pPr algn="ctr" fontAlgn="t">
+                        <a:buNone/>
+                      </a:pPr>
+                      <a:r>
+                        <a:rPr lang="en-US" sz="1100" u="none" strike="noStrike">
+                          <a:effectLst/>
+                        </a:rPr>
+                        <a:t>group1</a:t>
+                      </a:r>
+                      <a:endParaRPr lang="en-US" sz="1100" b="1" i="0" u="none" strike="noStrike">
+                        <a:solidFill>
+                          <a:srgbClr val="000000"/>
+                        </a:solidFill>
+                        <a:effectLst/>
+                        <a:latin typeface="Calibri" panose="020F0502020204030204" pitchFamily="34" charset="0"/>
+                      </a:endParaRPr>
+                    </a:p>
+                  </a:txBody>
+                  <a:tcPr marL="9525" marR="9525" marT="9525" marB="0"/>
+                </a:tc>
+                <a:tc>
+                  <a:txBody>
+                    <a:bodyPr/>
+                    <a:lstStyle/>
+                    <a:p>
+                      <a:pPr algn="ctr" fontAlgn="t">
+                        <a:buNone/>
+                      </a:pPr>
+                      <a:r>
+                        <a:rPr lang="en-US" sz="1100" u="none" strike="noStrike">
+                          <a:effectLst/>
+                        </a:rPr>
+                        <a:t>group2</a:t>
+                      </a:r>
+                      <a:endParaRPr lang="en-US" sz="1100" b="1" i="0" u="none" strike="noStrike">
+                        <a:solidFill>
+                          <a:srgbClr val="000000"/>
+                        </a:solidFill>
+                        <a:effectLst/>
+                        <a:latin typeface="Calibri" panose="020F0502020204030204" pitchFamily="34" charset="0"/>
+                      </a:endParaRPr>
+                    </a:p>
+                  </a:txBody>
+                  <a:tcPr marL="9525" marR="9525" marT="9525" marB="0"/>
+                </a:tc>
+                <a:tc>
+                  <a:txBody>
+                    <a:bodyPr/>
+                    <a:lstStyle/>
+                    <a:p>
+                      <a:pPr algn="ctr" fontAlgn="t">
+                        <a:buNone/>
+                      </a:pPr>
+                      <a:r>
+                        <a:rPr lang="en-US" sz="1100" u="none" strike="noStrike">
+                          <a:effectLst/>
+                        </a:rPr>
+                        <a:t>p_value</a:t>
+                      </a:r>
+                      <a:endParaRPr lang="en-US" sz="1100" b="1" i="0" u="none" strike="noStrike">
+                        <a:solidFill>
+                          <a:srgbClr val="000000"/>
+                        </a:solidFill>
+                        <a:effectLst/>
+                        <a:latin typeface="Calibri" panose="020F0502020204030204" pitchFamily="34" charset="0"/>
+                      </a:endParaRPr>
+                    </a:p>
+                  </a:txBody>
+                  <a:tcPr marL="9525" marR="9525" marT="9525" marB="0"/>
+                </a:tc>
+                <a:extLst>
+                  <a:ext uri="{0D108BD9-81ED-4DB2-BD59-A6C34878D82A}">
+                    <a16:rowId xmlns:a16="http://schemas.microsoft.com/office/drawing/2014/main" val="4047524456"/>
+                  </a:ext>
+                </a:extLst>
+              </a:tr>
+              <a:tr h="760293">
+                <a:tc>
+                  <a:txBody>
+                    <a:bodyPr/>
+                    <a:lstStyle/>
+                    <a:p>
+                      <a:pPr algn="l" fontAlgn="b">
+                        <a:buNone/>
+                      </a:pPr>
+                      <a:r>
+                        <a:rPr lang="en-US" sz="1100" u="none" strike="noStrike">
+                          <a:effectLst/>
+                        </a:rPr>
+                        <a:t>[(8, 5), (9, 4), (10, 3), (11, 2), (12, 1), (13, 0)]</a:t>
+                      </a:r>
+                      <a:endParaRPr lang="en-US" sz="1100" b="0" i="0" u="none" strike="noStrike">
+                        <a:solidFill>
+                          <a:srgbClr val="000000"/>
+                        </a:solidFill>
+                        <a:effectLst/>
+                        <a:latin typeface="Calibri" panose="020F0502020204030204" pitchFamily="34" charset="0"/>
+                      </a:endParaRPr>
+                    </a:p>
+                  </a:txBody>
+                  <a:tcPr marL="9525" marR="9525" marT="9525" marB="0" anchor="b"/>
+                </a:tc>
+                <a:tc>
+                  <a:txBody>
+                    <a:bodyPr/>
+                    <a:lstStyle/>
+                    <a:p>
+                      <a:pPr algn="r" fontAlgn="b">
+                        <a:buNone/>
+                      </a:pPr>
+                      <a:r>
+                        <a:rPr lang="en-US" sz="1100" u="none" strike="noStrike">
+                          <a:effectLst/>
+                        </a:rPr>
+                        <a:t>6</a:t>
+                      </a:r>
+                      <a:endParaRPr lang="en-US" sz="1100" b="0" i="0" u="none" strike="noStrike">
+                        <a:solidFill>
+                          <a:srgbClr val="000000"/>
+                        </a:solidFill>
+                        <a:effectLst/>
+                        <a:latin typeface="Calibri" panose="020F0502020204030204" pitchFamily="34" charset="0"/>
+                      </a:endParaRPr>
+                    </a:p>
+                  </a:txBody>
+                  <a:tcPr marL="9525" marR="9525" marT="9525" marB="0" anchor="b"/>
+                </a:tc>
+                <a:tc>
+                  <a:txBody>
+                    <a:bodyPr/>
+                    <a:lstStyle/>
+                    <a:p>
+                      <a:pPr algn="r" fontAlgn="b">
+                        <a:buNone/>
+                      </a:pPr>
+                      <a:r>
+                        <a:rPr lang="en-US" sz="1100" u="none" strike="noStrike">
+                          <a:effectLst/>
+                        </a:rPr>
+                        <a:t>12</a:t>
+                      </a:r>
+                      <a:endParaRPr lang="en-US" sz="1100" b="0" i="0" u="none" strike="noStrike">
+                        <a:solidFill>
+                          <a:srgbClr val="000000"/>
+                        </a:solidFill>
+                        <a:effectLst/>
+                        <a:latin typeface="Calibri" panose="020F0502020204030204" pitchFamily="34" charset="0"/>
+                      </a:endParaRPr>
+                    </a:p>
+                  </a:txBody>
+                  <a:tcPr marL="9525" marR="9525" marT="9525" marB="0" anchor="b"/>
+                </a:tc>
+                <a:tc>
+                  <a:txBody>
+                    <a:bodyPr/>
+                    <a:lstStyle/>
+                    <a:p>
+                      <a:pPr algn="l" fontAlgn="b">
+                        <a:buNone/>
+                      </a:pPr>
+                      <a:r>
+                        <a:rPr lang="en-US" sz="1100" u="none" strike="noStrike">
+                          <a:effectLst/>
+                        </a:rPr>
+                        <a:t>TGTACA</a:t>
+                      </a:r>
+                      <a:endParaRPr lang="en-US" sz="1100" b="0" i="0" u="none" strike="noStrike">
+                        <a:solidFill>
+                          <a:srgbClr val="000000"/>
+                        </a:solidFill>
+                        <a:effectLst/>
+                        <a:latin typeface="Calibri" panose="020F0502020204030204" pitchFamily="34" charset="0"/>
+                      </a:endParaRPr>
+                    </a:p>
+                  </a:txBody>
+                  <a:tcPr marL="9525" marR="9525" marT="9525" marB="0" anchor="b"/>
+                </a:tc>
+                <a:tc>
+                  <a:txBody>
+                    <a:bodyPr/>
+                    <a:lstStyle/>
+                    <a:p>
+                      <a:pPr algn="l" fontAlgn="b">
+                        <a:buNone/>
+                      </a:pPr>
+                      <a:r>
+                        <a:rPr lang="en-US" sz="1100" u="none" strike="noStrike">
+                          <a:effectLst/>
+                        </a:rPr>
+                        <a:t>ACATGT</a:t>
+                      </a:r>
+                      <a:endParaRPr lang="en-US" sz="1100" b="0" i="0" u="none" strike="noStrike">
+                        <a:solidFill>
+                          <a:srgbClr val="000000"/>
+                        </a:solidFill>
+                        <a:effectLst/>
+                        <a:latin typeface="Calibri" panose="020F0502020204030204" pitchFamily="34" charset="0"/>
+                      </a:endParaRPr>
+                    </a:p>
+                  </a:txBody>
+                  <a:tcPr marL="9525" marR="9525" marT="9525" marB="0" anchor="b"/>
+                </a:tc>
+                <a:tc>
+                  <a:txBody>
+                    <a:bodyPr/>
+                    <a:lstStyle/>
+                    <a:p>
+                      <a:pPr algn="r" fontAlgn="b">
+                        <a:buNone/>
+                      </a:pPr>
+                      <a:r>
+                        <a:rPr lang="en-US" sz="1100" u="none" strike="noStrike">
+                          <a:effectLst/>
+                        </a:rPr>
+                        <a:t>0.0046</a:t>
+                      </a:r>
+                      <a:endParaRPr lang="en-US" sz="1100" b="0" i="0" u="none" strike="noStrike">
+                        <a:solidFill>
+                          <a:srgbClr val="000000"/>
+                        </a:solidFill>
+                        <a:effectLst/>
+                        <a:latin typeface="Calibri" panose="020F0502020204030204" pitchFamily="34" charset="0"/>
+                      </a:endParaRPr>
+                    </a:p>
+                  </a:txBody>
+                  <a:tcPr marL="9525" marR="9525" marT="9525" marB="0" anchor="b"/>
+                </a:tc>
+                <a:extLst>
+                  <a:ext uri="{0D108BD9-81ED-4DB2-BD59-A6C34878D82A}">
+                    <a16:rowId xmlns:a16="http://schemas.microsoft.com/office/drawing/2014/main" val="1081731856"/>
+                  </a:ext>
+                </a:extLst>
+              </a:tr>
+              <a:tr h="312382">
+                <a:tc>
+                  <a:txBody>
+                    <a:bodyPr/>
+                    <a:lstStyle/>
+                    <a:p>
+                      <a:pPr algn="l" fontAlgn="b">
+                        <a:buNone/>
+                      </a:pPr>
+                      <a:r>
+                        <a:rPr lang="en-US" sz="1100" u="none" strike="noStrike">
+                          <a:effectLst/>
+                        </a:rPr>
+                        <a:t>[(3, 2), (4, 1), (5, 0)]</a:t>
+                      </a:r>
+                      <a:endParaRPr lang="en-US" sz="1100" b="0" i="0" u="none" strike="noStrike">
+                        <a:solidFill>
+                          <a:srgbClr val="000000"/>
+                        </a:solidFill>
+                        <a:effectLst/>
+                        <a:latin typeface="Calibri" panose="020F0502020204030204" pitchFamily="34" charset="0"/>
+                      </a:endParaRPr>
+                    </a:p>
+                  </a:txBody>
+                  <a:tcPr marL="9525" marR="9525" marT="9525" marB="0" anchor="b"/>
+                </a:tc>
+                <a:tc>
+                  <a:txBody>
+                    <a:bodyPr/>
+                    <a:lstStyle/>
+                    <a:p>
+                      <a:pPr algn="r" fontAlgn="b">
+                        <a:buNone/>
+                      </a:pPr>
+                      <a:r>
+                        <a:rPr lang="en-US" sz="1100" u="none" strike="noStrike">
+                          <a:effectLst/>
+                        </a:rPr>
+                        <a:t>3</a:t>
+                      </a:r>
+                      <a:endParaRPr lang="en-US" sz="1100" b="0" i="0" u="none" strike="noStrike">
+                        <a:solidFill>
+                          <a:srgbClr val="000000"/>
+                        </a:solidFill>
+                        <a:effectLst/>
+                        <a:latin typeface="Calibri" panose="020F0502020204030204" pitchFamily="34" charset="0"/>
+                      </a:endParaRPr>
+                    </a:p>
+                  </a:txBody>
+                  <a:tcPr marL="9525" marR="9525" marT="9525" marB="0" anchor="b"/>
+                </a:tc>
+                <a:tc>
+                  <a:txBody>
+                    <a:bodyPr/>
+                    <a:lstStyle/>
+                    <a:p>
+                      <a:pPr algn="r" fontAlgn="b">
+                        <a:buNone/>
+                      </a:pPr>
+                      <a:r>
+                        <a:rPr lang="en-US" sz="1100" u="none" strike="noStrike">
+                          <a:effectLst/>
+                        </a:rPr>
+                        <a:t>6</a:t>
+                      </a:r>
+                      <a:endParaRPr lang="en-US" sz="1100" b="0" i="0" u="none" strike="noStrike">
+                        <a:solidFill>
+                          <a:srgbClr val="000000"/>
+                        </a:solidFill>
+                        <a:effectLst/>
+                        <a:latin typeface="Calibri" panose="020F0502020204030204" pitchFamily="34" charset="0"/>
+                      </a:endParaRPr>
+                    </a:p>
+                  </a:txBody>
+                  <a:tcPr marL="9525" marR="9525" marT="9525" marB="0" anchor="b"/>
+                </a:tc>
+                <a:tc>
+                  <a:txBody>
+                    <a:bodyPr/>
+                    <a:lstStyle/>
+                    <a:p>
+                      <a:pPr algn="l" fontAlgn="b">
+                        <a:buNone/>
+                      </a:pPr>
+                      <a:r>
+                        <a:rPr lang="en-US" sz="1100" u="none" strike="noStrike">
+                          <a:effectLst/>
+                        </a:rPr>
+                        <a:t>ACA</a:t>
+                      </a:r>
+                      <a:endParaRPr lang="en-US" sz="1100" b="0" i="0" u="none" strike="noStrike">
+                        <a:solidFill>
+                          <a:srgbClr val="000000"/>
+                        </a:solidFill>
+                        <a:effectLst/>
+                        <a:latin typeface="Calibri" panose="020F0502020204030204" pitchFamily="34" charset="0"/>
+                      </a:endParaRPr>
+                    </a:p>
+                  </a:txBody>
+                  <a:tcPr marL="9525" marR="9525" marT="9525" marB="0" anchor="b"/>
+                </a:tc>
+                <a:tc>
+                  <a:txBody>
+                    <a:bodyPr/>
+                    <a:lstStyle/>
+                    <a:p>
+                      <a:pPr algn="l" fontAlgn="b">
+                        <a:buNone/>
+                      </a:pPr>
+                      <a:r>
+                        <a:rPr lang="en-US" sz="1100" u="none" strike="noStrike">
+                          <a:effectLst/>
+                        </a:rPr>
+                        <a:t>TGT</a:t>
+                      </a:r>
+                      <a:endParaRPr lang="en-US" sz="1100" b="0" i="0" u="none" strike="noStrike">
+                        <a:solidFill>
+                          <a:srgbClr val="000000"/>
+                        </a:solidFill>
+                        <a:effectLst/>
+                        <a:latin typeface="Calibri" panose="020F0502020204030204" pitchFamily="34" charset="0"/>
+                      </a:endParaRPr>
+                    </a:p>
+                  </a:txBody>
+                  <a:tcPr marL="9525" marR="9525" marT="9525" marB="0" anchor="b"/>
+                </a:tc>
+                <a:tc>
+                  <a:txBody>
+                    <a:bodyPr/>
+                    <a:lstStyle/>
+                    <a:p>
+                      <a:pPr algn="r" fontAlgn="b">
+                        <a:buNone/>
+                      </a:pPr>
+                      <a:r>
+                        <a:rPr lang="en-US" sz="1100" u="none" strike="noStrike">
+                          <a:effectLst/>
+                        </a:rPr>
+                        <a:t>0.6868</a:t>
+                      </a:r>
+                      <a:endParaRPr lang="en-US" sz="1100" b="0" i="0" u="none" strike="noStrike">
+                        <a:solidFill>
+                          <a:srgbClr val="000000"/>
+                        </a:solidFill>
+                        <a:effectLst/>
+                        <a:latin typeface="Calibri" panose="020F0502020204030204" pitchFamily="34" charset="0"/>
+                      </a:endParaRPr>
+                    </a:p>
+                  </a:txBody>
+                  <a:tcPr marL="9525" marR="9525" marT="9525" marB="0" anchor="b"/>
+                </a:tc>
+                <a:extLst>
+                  <a:ext uri="{0D108BD9-81ED-4DB2-BD59-A6C34878D82A}">
+                    <a16:rowId xmlns:a16="http://schemas.microsoft.com/office/drawing/2014/main" val="1881929189"/>
+                  </a:ext>
+                </a:extLst>
+              </a:tr>
+              <a:tr h="459593">
+                <a:tc>
+                  <a:txBody>
+                    <a:bodyPr/>
+                    <a:lstStyle/>
+                    <a:p>
+                      <a:pPr algn="l" fontAlgn="b">
+                        <a:buNone/>
+                      </a:pPr>
+                      <a:r>
+                        <a:rPr lang="en-US" sz="1100" u="none" strike="noStrike">
+                          <a:effectLst/>
+                        </a:rPr>
+                        <a:t>[(11, 10), (12, 9), (13, 8)]</a:t>
+                      </a:r>
+                      <a:endParaRPr lang="en-US" sz="1100" b="0" i="0" u="none" strike="noStrike">
+                        <a:solidFill>
+                          <a:srgbClr val="000000"/>
+                        </a:solidFill>
+                        <a:effectLst/>
+                        <a:latin typeface="Calibri" panose="020F0502020204030204" pitchFamily="34" charset="0"/>
+                      </a:endParaRPr>
+                    </a:p>
+                  </a:txBody>
+                  <a:tcPr marL="9525" marR="9525" marT="9525" marB="0" anchor="b"/>
+                </a:tc>
+                <a:tc>
+                  <a:txBody>
+                    <a:bodyPr/>
+                    <a:lstStyle/>
+                    <a:p>
+                      <a:pPr algn="r" fontAlgn="b">
+                        <a:buNone/>
+                      </a:pPr>
+                      <a:r>
+                        <a:rPr lang="en-US" sz="1100" u="none" strike="noStrike">
+                          <a:effectLst/>
+                        </a:rPr>
+                        <a:t>3</a:t>
+                      </a:r>
+                      <a:endParaRPr lang="en-US" sz="1100" b="0" i="0" u="none" strike="noStrike">
+                        <a:solidFill>
+                          <a:srgbClr val="000000"/>
+                        </a:solidFill>
+                        <a:effectLst/>
+                        <a:latin typeface="Calibri" panose="020F0502020204030204" pitchFamily="34" charset="0"/>
+                      </a:endParaRPr>
+                    </a:p>
+                  </a:txBody>
+                  <a:tcPr marL="9525" marR="9525" marT="9525" marB="0" anchor="b"/>
+                </a:tc>
+                <a:tc>
+                  <a:txBody>
+                    <a:bodyPr/>
+                    <a:lstStyle/>
+                    <a:p>
+                      <a:pPr algn="r" fontAlgn="b">
+                        <a:buNone/>
+                      </a:pPr>
+                      <a:r>
+                        <a:rPr lang="en-US" sz="1100" u="none" strike="noStrike">
+                          <a:effectLst/>
+                        </a:rPr>
+                        <a:t>6</a:t>
+                      </a:r>
+                      <a:endParaRPr lang="en-US" sz="1100" b="0" i="0" u="none" strike="noStrike">
+                        <a:solidFill>
+                          <a:srgbClr val="000000"/>
+                        </a:solidFill>
+                        <a:effectLst/>
+                        <a:latin typeface="Calibri" panose="020F0502020204030204" pitchFamily="34" charset="0"/>
+                      </a:endParaRPr>
+                    </a:p>
+                  </a:txBody>
+                  <a:tcPr marL="9525" marR="9525" marT="9525" marB="0" anchor="b"/>
+                </a:tc>
+                <a:tc>
+                  <a:txBody>
+                    <a:bodyPr/>
+                    <a:lstStyle/>
+                    <a:p>
+                      <a:pPr algn="l" fontAlgn="b">
+                        <a:buNone/>
+                      </a:pPr>
+                      <a:r>
+                        <a:rPr lang="en-US" sz="1100" u="none" strike="noStrike">
+                          <a:effectLst/>
+                        </a:rPr>
+                        <a:t>ACA</a:t>
+                      </a:r>
+                      <a:endParaRPr lang="en-US" sz="1100" b="0" i="0" u="none" strike="noStrike">
+                        <a:solidFill>
+                          <a:srgbClr val="000000"/>
+                        </a:solidFill>
+                        <a:effectLst/>
+                        <a:latin typeface="Calibri" panose="020F0502020204030204" pitchFamily="34" charset="0"/>
+                      </a:endParaRPr>
+                    </a:p>
+                  </a:txBody>
+                  <a:tcPr marL="9525" marR="9525" marT="9525" marB="0" anchor="b"/>
+                </a:tc>
+                <a:tc>
+                  <a:txBody>
+                    <a:bodyPr/>
+                    <a:lstStyle/>
+                    <a:p>
+                      <a:pPr algn="l" fontAlgn="b">
+                        <a:buNone/>
+                      </a:pPr>
+                      <a:r>
+                        <a:rPr lang="en-US" sz="1100" u="none" strike="noStrike">
+                          <a:effectLst/>
+                        </a:rPr>
+                        <a:t>TGT</a:t>
+                      </a:r>
+                      <a:endParaRPr lang="en-US" sz="1100" b="0" i="0" u="none" strike="noStrike">
+                        <a:solidFill>
+                          <a:srgbClr val="000000"/>
+                        </a:solidFill>
+                        <a:effectLst/>
+                        <a:latin typeface="Calibri" panose="020F0502020204030204" pitchFamily="34" charset="0"/>
+                      </a:endParaRPr>
+                    </a:p>
+                  </a:txBody>
+                  <a:tcPr marL="9525" marR="9525" marT="9525" marB="0" anchor="b"/>
+                </a:tc>
+                <a:tc>
+                  <a:txBody>
+                    <a:bodyPr/>
+                    <a:lstStyle/>
+                    <a:p>
+                      <a:pPr algn="r" fontAlgn="b">
+                        <a:buNone/>
+                      </a:pPr>
+                      <a:r>
+                        <a:rPr lang="en-US" sz="1100" u="none" strike="noStrike" dirty="0">
+                          <a:effectLst/>
+                        </a:rPr>
+                        <a:t>0.6868</a:t>
+                      </a:r>
+                      <a:endParaRPr lang="en-US" sz="1100" b="0" i="0" u="none" strike="noStrike" dirty="0">
+                        <a:solidFill>
+                          <a:srgbClr val="000000"/>
+                        </a:solidFill>
+                        <a:effectLst/>
+                        <a:latin typeface="Calibri" panose="020F0502020204030204" pitchFamily="34" charset="0"/>
+                      </a:endParaRPr>
+                    </a:p>
+                  </a:txBody>
+                  <a:tcPr marL="9525" marR="9525" marT="9525" marB="0" anchor="b"/>
+                </a:tc>
+                <a:extLst>
+                  <a:ext uri="{0D108BD9-81ED-4DB2-BD59-A6C34878D82A}">
+                    <a16:rowId xmlns:a16="http://schemas.microsoft.com/office/drawing/2014/main" val="542206097"/>
+                  </a:ext>
+                </a:extLst>
+              </a:tr>
+            </a:tbl>
+          </a:graphicData>
+        </a:graphic>
+      </p:graphicFrame>
+    </p:spTree>
+    <p:extLst>
+      <p:ext uri="{BB962C8B-B14F-4D97-AF65-F5344CB8AC3E}">
+        <p14:creationId xmlns:p14="http://schemas.microsoft.com/office/powerpoint/2010/main" val="1244999649"/>
       </p:ext>
     </p:extLst>
   </p:cSld>
@@ -11296,7 +13224,7 @@
           <p:nvPr/>
         </p:nvPicPr>
         <p:blipFill>
-          <a:blip r:embed="rId2"/>
+          <a:blip/>
           <a:stretch>
             <a:fillRect/>
           </a:stretch>
@@ -11326,7 +13254,7 @@
           <p:nvPr/>
         </p:nvPicPr>
         <p:blipFill>
-          <a:blip r:embed="rId3"/>
+          <a:blip/>
           <a:stretch>
             <a:fillRect/>
           </a:stretch>
@@ -11541,7 +13469,7 @@
           <p:nvPr/>
         </p:nvPicPr>
         <p:blipFill>
-          <a:blip r:embed="rId2"/>
+          <a:blip/>
           <a:stretch>
             <a:fillRect/>
           </a:stretch>
@@ -15217,7 +17145,7 @@
           <p:nvPr/>
         </p:nvPicPr>
         <p:blipFill>
-          <a:blip r:embed="rId2"/>
+          <a:blip/>
           <a:stretch>
             <a:fillRect/>
           </a:stretch>
@@ -15247,7 +17175,7 @@
           <p:nvPr/>
         </p:nvPicPr>
         <p:blipFill>
-          <a:blip r:embed="rId3"/>
+          <a:blip/>
           <a:srcRect l="8457" t="13806" r="4937"/>
           <a:stretch>
             <a:fillRect/>
@@ -15543,7 +17471,7 @@
           </p:nvPr>
         </p:nvPicPr>
         <p:blipFill>
-          <a:blip r:embed="rId2"/>
+          <a:blip/>
           <a:stretch>
             <a:fillRect/>
           </a:stretch>
@@ -15570,7 +17498,7 @@
           <p:nvPr/>
         </p:nvPicPr>
         <p:blipFill>
-          <a:blip r:embed="rId3"/>
+          <a:blip/>
           <a:stretch>
             <a:fillRect/>
           </a:stretch>
@@ -15600,7 +17528,7 @@
           <p:nvPr/>
         </p:nvPicPr>
         <p:blipFill>
-          <a:blip r:embed="rId4"/>
+          <a:blip/>
           <a:stretch>
             <a:fillRect/>
           </a:stretch>
@@ -15701,7 +17629,7 @@
           </p:nvPr>
         </p:nvPicPr>
         <p:blipFill>
-          <a:blip r:embed="rId2"/>
+          <a:blip/>
           <a:stretch>
             <a:fillRect/>
           </a:stretch>
@@ -19174,7 +21102,7 @@
           <p:nvPr/>
         </p:nvPicPr>
         <p:blipFill>
-          <a:blip r:embed="rId3"/>
+          <a:blip/>
           <a:stretch>
             <a:fillRect/>
           </a:stretch>
@@ -19286,7 +21214,7 @@
           </p:nvPr>
         </p:nvPicPr>
         <p:blipFill>
-          <a:blip r:embed="rId3"/>
+          <a:blip/>
           <a:stretch>
             <a:fillRect/>
           </a:stretch>
@@ -19313,7 +21241,7 @@
           <p:nvPr/>
         </p:nvPicPr>
         <p:blipFill>
-          <a:blip r:embed="rId4"/>
+          <a:blip/>
           <a:stretch>
             <a:fillRect/>
           </a:stretch>
@@ -19343,7 +21271,7 @@
           <p:nvPr/>
         </p:nvPicPr>
         <p:blipFill>
-          <a:blip r:embed="rId5"/>
+          <a:blip/>
           <a:stretch>
             <a:fillRect/>
           </a:stretch>
